--- a/docs/presentation.pptx
+++ b/docs/presentation.pptx
@@ -254,10 +254,10 @@
               <c:strCache>
                 <c:ptCount val="2"/>
                 <c:pt idx="0">
-                  <c:v>Unit — booking engine</c:v>
+                  <c:v>Booking rules</c:v>
                 </c:pt>
                 <c:pt idx="1">
-                  <c:v>Integration — API over HTTP</c:v>
+                  <c:v>Whole API</c:v>
                 </c:pt>
               </c:strCache>
             </c:strRef>
@@ -719,9 +719,9 @@
           <a:p>
             <a:r>
               <a:rPr lang="en-US" dirty="0"/>
-              <a:t>Open here. 30 seconds.
-"Mesa is a table reservation platform for independent restaurants. The problem it solves is that most independent restaurants still take bookings by phone and paper diary."
-Do not read the slide. Move to the problem quickly — the demo is what earns the marks.</a:t>
+              <a:t>ABOUT 30 SECONDS. Do not read the slide.
+Something like: "I built a table booking system for independent restaurants. I want to spend most of the time showing it working rather than talking about it, so I will do about ten minutes of context and then demo."
+Say it in your own words. If you memorise this you will sound like you are reciting.</a:t>
             </a:r>
             <a:endParaRPr lang="en-US" dirty="0"/>
           </a:p>
@@ -809,8 +809,9 @@
           <a:p>
             <a:r>
               <a:rPr lang="en-US" dirty="0"/>
-              <a:t>2 minutes.
-Be honest here — markers respond well to real debugging stories, and every one of these is true. Each shows a different skill: reasoning about time zones, spotting an honesty bug, bisecting a rendering failure, and a design principle about not letting content depend on animation.</a:t>
+              <a:t>ABOUT 90 SECONDS. Do not skip this slide.
+Volunteering your own gaps is the single easiest way to sound like you understand your own project. It also takes the sting out of the obvious questions, because you asked them first.
+Deliver it matter-of-factly, not apologetically. These are scoping decisions, not failures.</a:t>
             </a:r>
             <a:endParaRPr lang="en-US" dirty="0"/>
           </a:p>
@@ -898,10 +899,15 @@
           <a:p>
             <a:r>
               <a:rPr lang="en-US" dirty="0"/>
-              <a:t>90 seconds, then questions.
-REPLACE THE GITHUB URL on this slide once the repository is pushed.
-Each item is scoped and justified rather than a wish list — payments and notifications both attack the no-show rate the dashboard already measures, which shows the roadmap follows from the data.
-Likely questions: why SQLite, why Prisma over the "Django ORM", how the concurrency test works, why 404 instead of 403, and how the JWT is validated.</a:t>
+              <a:t>ABOUT 90 SECONDS, then questions.
+PUT YOUR REAL GITHUB LINK ON THIS SLIDE BEFORE YOU PRESENT.
+Questions you should expect:
+  - Why SQLite? (runs anywhere, no server to install, schema moves to Postgres unchanged)
+  - Why not Django? (Django is Python, the brief also says Node — they conflict)
+  - How does the concurrency test work? (two requests fired together, one 201, one 409)
+  - Why 404 and not 403? (403 confirms the record exists)
+  - What would you do next? (deploy it, and write front-end tests)
+If you do not know an answer, say so and say how you would find out. That is a better answer than guessing.</a:t>
             </a:r>
             <a:endParaRPr lang="en-US" dirty="0"/>
           </a:p>
@@ -989,9 +995,9 @@
           <a:p>
             <a:r>
               <a:rPr lang="en-US" dirty="0"/>
-              <a:t>90 seconds.
-Frame it as one problem with two faces. The restaurant loses covers and gets no-shows; the diner cannot find out what is free without ringing.
-The closing line is the product thesis — say it, then move on.</a:t>
+              <a:t>ABOUT 90 SECONDS.
+The honest version: I picked it because the availability problem looked interesting, not because I like restaurants. That is a fine thing to say — it shows you chose for the engineering.
+Reason 1 is the one to lean on. It sets up the slide about conflict detection later.</a:t>
             </a:r>
             <a:endParaRPr lang="en-US" dirty="0"/>
           </a:p>
@@ -1079,9 +1085,9 @@
           <a:p>
             <a:r>
               <a:rPr lang="en-US" dirty="0"/>
-              <a:t>90 seconds.
-The bottom card is the important one and it comes up again in the demo. Ownership-scoped authorisation is harder than a role check and it is the security property the whole system rests on.
-If asked why 404 and not 403: a 403 tells an attacker the record exists. 404 tells them nothing.</a:t>
+              <a:t>ABOUT 90 SECONDS.
+The bottom card is the most useful thing on this slide. Admitting the first version was wrong is stronger than pretending you designed it perfectly — it shows you understood WHY it was wrong.
+You will demonstrate this live later, so plant it here.</a:t>
             </a:r>
             <a:endParaRPr lang="en-US" dirty="0"/>
           </a:p>
@@ -1169,9 +1175,9 @@
           <a:p>
             <a:r>
               <a:rPr lang="en-US" dirty="0"/>
-              <a:t>2 minutes.
-Walk down the stack once. Land on the fourth layer — the pure booking engine — because that is the next slide and the intellectual core of the project.
-Mention that once built, the same Express process also serves the compiled React app, so it is one server on one port.</a:t>
+              <a:t>ABOUT 2 MINUTES.
+Go down the boxes once, then explain the right-hand card. The layering is not for its own sake — it is what made the booking rules testable.
+If asked: yes, one Express process serves both the API and the built React app. npm start does that.</a:t>
             </a:r>
             <a:endParaRPr lang="en-US" dirty="0"/>
           </a:p>
@@ -1259,9 +1265,9 @@
           <a:p>
             <a:r>
               <a:rPr lang="en-US" dirty="0"/>
-              <a:t>3 minutes. This is your strongest technical slide — do not rush it.
-The formula fits on one line but every clause is a decision. Explain half-open intervals with the 20:00 example: it is concrete and immediately makes sense to a restaurant person.
-Point 3 is the one to dwell on. It is a genuine race condition and you have a test that proves you closed it — that test comes up later.</a:t>
+              <a:t>ABOUT 3 MINUTES. This is your best slide — take your time.
+Each of these is a real mistake you fixed, framed as a question. That is much more convincing than presenting the final answer as if it were obvious.
+Question 3 sets up the concurrency test in the demo. Say "I will show you a test for this later."</a:t>
             </a:r>
             <a:endParaRPr lang="en-US" dirty="0"/>
           </a:p>
@@ -1349,9 +1355,9 @@
           <a:p>
             <a:r>
               <a:rPr lang="en-US" dirty="0"/>
-              <a:t>2 minutes.
-The right-hand card is worth saying explicitly — it shows you understand that client-side guards are convenience, not security.
-If they ask about the JWT: it is signed, not encrypted. Anyone can read the payload; nobody can alter it without the secret.</a:t>
+              <a:t>ABOUT 2 MINUTES.
+The right-hand card is worth saying out loud — a lot of student projects hide a button and call it access control.
+Likely question: "what is in the JWT?" Answer: the user id and their role, plus issued and expiry times. Nothing secret, because anyone holding it can read it.</a:t>
             </a:r>
             <a:endParaRPr lang="en-US" dirty="0"/>
           </a:p>
@@ -1439,9 +1445,10 @@
           <a:p>
             <a:r>
               <a:rPr lang="en-US" dirty="0"/>
-              <a:t>2 minutes.
-The bottom card is a deliberate challenge to the brief. Say it confidently: it is not an excuse, it is a judgement call, and it is documented in three places.
-It also shows you read the brief closely enough to spot the contradiction — that is worth more than silently ignoring it.</a:t>
+              <a:t>ABOUT 2 MINUTES.
+Be straightforward about the Django point. Do not be smug about it — just explain the reasoning and that you documented it.
+If they say you should have used Python: fair, but the same brief also says Node.js, so the two requirements conflict.
+Mentioning the week 7 lab code twice on this deck is deliberate — it shows what you learned since.</a:t>
             </a:r>
             <a:endParaRPr lang="en-US" dirty="0"/>
           </a:p>
@@ -1529,11 +1536,15 @@
           <a:p>
             <a:r>
               <a:rPr lang="en-US" dirty="0"/>
-              <a:t>12 minutes. THIS IS THE MARK. 75% is the demonstration.
-Before you start: re-seed (npm run db:seed) so the data is fresh, and have both manager logins ready in separate windows.
-Step 5 is the security payoff — do it slowly and say what is happening.
-Step 6 is the strongest single moment: two simultaneous requests for the same last table, exactly one wins. Say out loud that this is the race condition being closed, not luck.
-If the 3D plan stutters on the projector, turn on Reduce Motion in macOS Accessibility — it falls back to the flat plan automatically.</a:t>
+              <a:t>AROUND 12 MINUTES. THIS IS 75% OF THE MARK.
+BEFORE THE SESSION:
+  - npm run db:seed so the dashboard has fresh data
+  - npm start, check localhost:4000 loads
+  - Have both manager logins open in separate windows
+  - Have a terminal ready for npm test
+Step 5 is the security point from earlier — do it slowly and narrate it.
+Step 6 is the strongest moment. Say plainly: "these two requests go at the same time, and only one of them gets the table. That is the transaction working, not luck."
+If the 3D plan is slow on the projector, turn on Reduce Motion in System Settings and it falls back to a flat plan.</a:t>
             </a:r>
             <a:endParaRPr lang="en-US" dirty="0"/>
           </a:p>
@@ -1621,9 +1632,9 @@
           <a:p>
             <a:r>
               <a:rPr lang="en-US" dirty="0"/>
-              <a:t>2 minutes.
-The point is not the number, it is what the tests target. The booking engine is pure — no database, no Express, no clock reads — which is exactly why it can be tested this directly.
-The integration tests drive the real app over HTTP against its own database, so the authorisation claims are proven, not asserted.</a:t>
+              <a:t>ABOUT 2 MINUTES.
+The number is not the point — say that. The point is that the booking rules are separated out from the database and the web server, which is what makes them testable at all.
+If asked what you would add: tests for the React side. I did not write any, and I should have.</a:t>
             </a:r>
             <a:endParaRPr lang="en-US" dirty="0"/>
           </a:p>
@@ -2004,24 +2015,24 @@
         </p:nvSpPr>
         <p:spPr>
           <a:xfrm>
-            <a:off x="822960" y="1828800"/>
-            <a:ext cx="7315200" cy="1371600"/>
-          </a:xfrm>
-          <a:prstGeom prst="rect">
-            <a:avLst/>
-          </a:prstGeom>
-          <a:noFill/>
-          <a:ln/>
-        </p:spPr>
-        <p:txBody>
-          <a:bodyPr wrap="square" lIns="0" tIns="0" rIns="0" bIns="0" rtlCol="0" anchor="ctr"/>
-          <a:lstStyle/>
-          <a:p>
-            <a:pPr indent="0" marL="0">
-              <a:buNone/>
-            </a:pPr>
-            <a:r>
-              <a:rPr lang="en-US" sz="8800" b="1" dirty="0">
+            <a:off x="822960" y="1920240"/>
+            <a:ext cx="7315200" cy="1280160"/>
+          </a:xfrm>
+          <a:prstGeom prst="rect">
+            <a:avLst/>
+          </a:prstGeom>
+          <a:noFill/>
+          <a:ln/>
+        </p:spPr>
+        <p:txBody>
+          <a:bodyPr wrap="square" lIns="0" tIns="0" rIns="0" bIns="0" rtlCol="0" anchor="ctr"/>
+          <a:lstStyle/>
+          <a:p>
+            <a:pPr indent="0" marL="0">
+              <a:buNone/>
+            </a:pPr>
+            <a:r>
+              <a:rPr lang="en-US" sz="8200" b="1" dirty="0">
                 <a:solidFill>
                   <a:srgbClr val="D4A937"/>
                 </a:solidFill>
@@ -2031,7 +2042,7 @@
               </a:rPr>
               <a:t>Mesa</a:t>
             </a:r>
-            <a:endParaRPr lang="en-US" sz="8800" dirty="0"/>
+            <a:endParaRPr lang="en-US" sz="8200" dirty="0"/>
           </a:p>
         </p:txBody>
       </p:sp>
@@ -2043,86 +2054,47 @@
         </p:nvSpPr>
         <p:spPr>
           <a:xfrm>
-            <a:off x="868680" y="3154680"/>
-            <a:ext cx="8229600" cy="548640"/>
-          </a:xfrm>
-          <a:prstGeom prst="rect">
-            <a:avLst/>
-          </a:prstGeom>
-          <a:noFill/>
-          <a:ln/>
-        </p:spPr>
-        <p:txBody>
-          <a:bodyPr wrap="square" lIns="0" tIns="0" rIns="0" bIns="0" rtlCol="0" anchor="ctr"/>
-          <a:lstStyle/>
-          <a:p>
-            <a:pPr indent="0" marL="0">
-              <a:buNone/>
-            </a:pPr>
-            <a:r>
-              <a:rPr lang="en-US" sz="2600" i="1" dirty="0">
+            <a:off x="868680" y="3200400"/>
+            <a:ext cx="8229600" cy="457200"/>
+          </a:xfrm>
+          <a:prstGeom prst="rect">
+            <a:avLst/>
+          </a:prstGeom>
+          <a:noFill/>
+          <a:ln/>
+        </p:spPr>
+        <p:txBody>
+          <a:bodyPr wrap="square" lIns="0" tIns="0" rIns="0" bIns="0" rtlCol="0" anchor="ctr"/>
+          <a:lstStyle/>
+          <a:p>
+            <a:pPr indent="0" marL="0">
+              <a:buNone/>
+            </a:pPr>
+            <a:r>
+              <a:rPr lang="en-US" sz="1900" dirty="0">
                 <a:solidFill>
                   <a:srgbClr val="F5F0E6"/>
                 </a:solidFill>
-                <a:latin typeface="Cambria" pitchFamily="34" charset="0"/>
-                <a:ea typeface="Cambria" pitchFamily="34" charset="-122"/>
-                <a:cs typeface="Cambria" pitchFamily="34" charset="-120"/>
-              </a:rPr>
-              <a:t>See which tables are actually free.</a:t>
-            </a:r>
-            <a:endParaRPr lang="en-US" sz="2600" dirty="0"/>
-          </a:p>
-        </p:txBody>
-      </p:sp>
-      <p:sp>
-        <p:nvSpPr>
-          <p:cNvPr id="4" name="Text 2"/>
-          <p:cNvSpPr/>
-          <p:nvPr/>
-        </p:nvSpPr>
-        <p:spPr>
-          <a:xfrm>
-            <a:off x="868680" y="3794760"/>
-            <a:ext cx="8229600" cy="365760"/>
-          </a:xfrm>
-          <a:prstGeom prst="rect">
-            <a:avLst/>
-          </a:prstGeom>
-          <a:noFill/>
-          <a:ln/>
-        </p:spPr>
-        <p:txBody>
-          <a:bodyPr wrap="square" lIns="0" tIns="0" rIns="0" bIns="0" rtlCol="0" anchor="ctr"/>
-          <a:lstStyle/>
-          <a:p>
-            <a:pPr indent="0" marL="0">
-              <a:buNone/>
-            </a:pPr>
-            <a:r>
-              <a:rPr lang="en-US" sz="1500" dirty="0">
-                <a:solidFill>
-                  <a:srgbClr val="97B0A2"/>
-                </a:solidFill>
-                <a:latin typeface="Calibri" pitchFamily="34" charset="0"/>
-                <a:ea typeface="Calibri" pitchFamily="34" charset="-122"/>
-                <a:cs typeface="Calibri" pitchFamily="34" charset="-120"/>
-              </a:rPr>
-              <a:t>A multi-restaurant table reservation platform</a:t>
-            </a:r>
-            <a:endParaRPr lang="en-US" sz="1500" dirty="0"/>
-          </a:p>
-        </p:txBody>
-      </p:sp>
-      <p:sp>
-        <p:nvSpPr>
-          <p:cNvPr id="5" name="Shape 3"/>
-          <p:cNvSpPr/>
-          <p:nvPr/>
-        </p:nvSpPr>
-        <p:spPr>
-          <a:xfrm>
-            <a:off x="868680" y="4480560"/>
-            <a:ext cx="2926080" cy="0"/>
+                <a:latin typeface="Calibri" pitchFamily="34" charset="0"/>
+                <a:ea typeface="Calibri" pitchFamily="34" charset="-122"/>
+                <a:cs typeface="Calibri" pitchFamily="34" charset="-120"/>
+              </a:rPr>
+              <a:t>A table booking system for independent restaurants</a:t>
+            </a:r>
+            <a:endParaRPr lang="en-US" sz="1900" dirty="0"/>
+          </a:p>
+        </p:txBody>
+      </p:sp>
+      <p:sp>
+        <p:nvSpPr>
+          <p:cNvPr id="4" name="Shape 2"/>
+          <p:cNvSpPr/>
+          <p:nvPr/>
+        </p:nvSpPr>
+        <p:spPr>
+          <a:xfrm>
+            <a:off x="868680" y="4114800"/>
+            <a:ext cx="2743200" cy="0"/>
           </a:xfrm>
           <a:prstGeom prst="line">
             <a:avLst/>
@@ -2138,13 +2110,13 @@
       </p:sp>
       <p:sp>
         <p:nvSpPr>
-          <p:cNvPr id="6" name="Text 4"/>
-          <p:cNvSpPr/>
-          <p:nvPr/>
-        </p:nvSpPr>
-        <p:spPr>
-          <a:xfrm>
-            <a:off x="868680" y="4754880"/>
+          <p:cNvPr id="5" name="Text 3"/>
+          <p:cNvSpPr/>
+          <p:nvPr/>
+        </p:nvSpPr>
+        <p:spPr>
+          <a:xfrm>
+            <a:off x="868680" y="4389120"/>
             <a:ext cx="7315200" cy="1005840"/>
           </a:xfrm>
           <a:prstGeom prst="rect">
@@ -2192,7 +2164,7 @@
                 <a:ea typeface="Calibri" pitchFamily="34" charset="-122"/>
                 <a:cs typeface="Calibri" pitchFamily="34" charset="-120"/>
               </a:rPr>
-              <a:t>CMS22204 — Full Stack Application Development</a:t>
+              <a:t>CMS22204 Full Stack Application Development</a:t>
             </a:r>
             <a:endParaRPr lang="en-US" sz="1400" dirty="0"/>
           </a:p>
@@ -2220,13 +2192,13 @@
       </p:sp>
       <p:sp>
         <p:nvSpPr>
-          <p:cNvPr id="7" name="Shape 5"/>
-          <p:cNvSpPr/>
-          <p:nvPr/>
-        </p:nvSpPr>
-        <p:spPr>
-          <a:xfrm>
-            <a:off x="9509760" y="1371600"/>
+          <p:cNvPr id="6" name="Shape 4"/>
+          <p:cNvSpPr/>
+          <p:nvPr/>
+        </p:nvSpPr>
+        <p:spPr>
+          <a:xfrm>
+            <a:off x="9509760" y="1463040"/>
             <a:ext cx="777240" cy="777240"/>
           </a:xfrm>
           <a:prstGeom prst="roundRect">
@@ -2247,13 +2219,13 @@
       </p:sp>
       <p:sp>
         <p:nvSpPr>
-          <p:cNvPr id="8" name="Shape 6"/>
-          <p:cNvSpPr/>
-          <p:nvPr/>
-        </p:nvSpPr>
-        <p:spPr>
-          <a:xfrm>
-            <a:off x="10515600" y="1371600"/>
+          <p:cNvPr id="7" name="Shape 5"/>
+          <p:cNvSpPr/>
+          <p:nvPr/>
+        </p:nvSpPr>
+        <p:spPr>
+          <a:xfrm>
+            <a:off x="10515600" y="1463040"/>
             <a:ext cx="777240" cy="777240"/>
           </a:xfrm>
           <a:prstGeom prst="roundRect">
@@ -2274,13 +2246,13 @@
       </p:sp>
       <p:sp>
         <p:nvSpPr>
-          <p:cNvPr id="9" name="Shape 7"/>
-          <p:cNvSpPr/>
-          <p:nvPr/>
-        </p:nvSpPr>
-        <p:spPr>
-          <a:xfrm>
-            <a:off x="9509760" y="2377440"/>
+          <p:cNvPr id="8" name="Shape 6"/>
+          <p:cNvSpPr/>
+          <p:nvPr/>
+        </p:nvSpPr>
+        <p:spPr>
+          <a:xfrm>
+            <a:off x="9509760" y="2468880"/>
             <a:ext cx="777240" cy="777240"/>
           </a:xfrm>
           <a:prstGeom prst="roundRect">
@@ -2301,13 +2273,13 @@
       </p:sp>
       <p:sp>
         <p:nvSpPr>
-          <p:cNvPr id="10" name="Shape 8"/>
-          <p:cNvSpPr/>
-          <p:nvPr/>
-        </p:nvSpPr>
-        <p:spPr>
-          <a:xfrm>
-            <a:off x="10515600" y="2377440"/>
+          <p:cNvPr id="9" name="Shape 7"/>
+          <p:cNvSpPr/>
+          <p:nvPr/>
+        </p:nvSpPr>
+        <p:spPr>
+          <a:xfrm>
+            <a:off x="10515600" y="2468880"/>
             <a:ext cx="777240" cy="777240"/>
           </a:xfrm>
           <a:prstGeom prst="roundRect">
@@ -2328,13 +2300,13 @@
       </p:sp>
       <p:sp>
         <p:nvSpPr>
-          <p:cNvPr id="11" name="Shape 9"/>
-          <p:cNvSpPr/>
-          <p:nvPr/>
-        </p:nvSpPr>
-        <p:spPr>
-          <a:xfrm>
-            <a:off x="10012680" y="3383280"/>
+          <p:cNvPr id="10" name="Shape 8"/>
+          <p:cNvSpPr/>
+          <p:nvPr/>
+        </p:nvSpPr>
+        <p:spPr>
+          <a:xfrm>
+            <a:off x="10012680" y="3474720"/>
             <a:ext cx="777240" cy="777240"/>
           </a:xfrm>
           <a:prstGeom prst="roundRect">
@@ -2352,45 +2324,6 @@
             <a:prstDash val="solid"/>
           </a:ln>
         </p:spPr>
-      </p:sp>
-      <p:sp>
-        <p:nvSpPr>
-          <p:cNvPr id="12" name="Text 10"/>
-          <p:cNvSpPr/>
-          <p:nvPr/>
-        </p:nvSpPr>
-        <p:spPr>
-          <a:xfrm>
-            <a:off x="9144000" y="4343400"/>
-            <a:ext cx="2468880" cy="274320"/>
-          </a:xfrm>
-          <a:prstGeom prst="rect">
-            <a:avLst/>
-          </a:prstGeom>
-          <a:noFill/>
-          <a:ln/>
-        </p:spPr>
-        <p:txBody>
-          <a:bodyPr wrap="square" lIns="0" tIns="0" rIns="0" bIns="0" rtlCol="0" anchor="ctr"/>
-          <a:lstStyle/>
-          <a:p>
-            <a:pPr algn="ctr" indent="0" marL="0">
-              <a:buNone/>
-            </a:pPr>
-            <a:r>
-              <a:rPr lang="en-US" sz="1000" dirty="0">
-                <a:solidFill>
-                  <a:srgbClr val="62796E"/>
-                </a:solidFill>
-                <a:latin typeface="Calibri" pitchFamily="34" charset="0"/>
-                <a:ea typeface="Calibri" pitchFamily="34" charset="-122"/>
-                <a:cs typeface="Calibri" pitchFamily="34" charset="-120"/>
-              </a:rPr>
-              <a:t>the floor plan, live</a:t>
-            </a:r>
-            <a:endParaRPr lang="en-US" sz="1000" dirty="0"/>
-          </a:p>
-        </p:txBody>
       </p:sp>
     </p:spTree>
   </p:cSld>
@@ -2449,7 +2382,7 @@
               <a:buNone/>
             </a:pPr>
             <a:r>
-              <a:rPr lang="en-US" sz="3800" b="1" dirty="0">
+              <a:rPr lang="en-US" sz="3600" b="1" dirty="0">
                 <a:solidFill>
                   <a:srgbClr val="F5F0E6"/>
                 </a:solidFill>
@@ -2457,9 +2390,9 @@
                 <a:ea typeface="Cambria" pitchFamily="34" charset="-122"/>
                 <a:cs typeface="Cambria" pitchFamily="34" charset="-120"/>
               </a:rPr>
-              <a:t>What was actually hard</a:t>
-            </a:r>
-            <a:endParaRPr lang="en-US" sz="3800" dirty="0"/>
+              <a:t>What I did not get to</a:t>
+            </a:r>
+            <a:endParaRPr lang="en-US" sz="3600" dirty="0"/>
           </a:p>
         </p:txBody>
       </p:sp>
@@ -2471,7 +2404,7 @@
         </p:nvSpPr>
         <p:spPr>
           <a:xfrm>
-            <a:off x="640080" y="1207008"/>
+            <a:off x="640080" y="1188720"/>
             <a:ext cx="10881360" cy="365760"/>
           </a:xfrm>
           <a:prstGeom prst="rect">
@@ -2496,7 +2429,7 @@
                 <a:ea typeface="Calibri" pitchFamily="34" charset="-122"/>
                 <a:cs typeface="Calibri" pitchFamily="34" charset="-120"/>
               </a:rPr>
-              <a:t>Correctness, not features</a:t>
+              <a:t>Being straight about the gaps</a:t>
             </a:r>
             <a:endParaRPr lang="en-US" sz="1400" dirty="0"/>
           </a:p>
@@ -2511,11 +2444,11 @@
         <p:spPr>
           <a:xfrm>
             <a:off x="640080" y="1828800"/>
-            <a:ext cx="10881360" cy="960120"/>
+            <a:ext cx="10881360" cy="914400"/>
           </a:xfrm>
           <a:prstGeom prst="roundRect">
             <a:avLst>
-              <a:gd name="adj" fmla="val 8571"/>
+              <a:gd name="adj" fmla="val 9000"/>
             </a:avLst>
           </a:prstGeom>
           <a:solidFill>
@@ -2537,7 +2470,7 @@
         </p:nvSpPr>
         <p:spPr>
           <a:xfrm>
-            <a:off x="960120" y="1920240"/>
+            <a:off x="960120" y="1901952"/>
             <a:ext cx="10241280" cy="292608"/>
           </a:xfrm>
           <a:prstGeom prst="rect">
@@ -2554,17 +2487,17 @@
               <a:buNone/>
             </a:pPr>
             <a:r>
-              <a:rPr lang="en-US" sz="1500" b="1" dirty="0">
-                <a:solidFill>
-                  <a:srgbClr val="D4A937"/>
-                </a:solidFill>
-                <a:latin typeface="Calibri" pitchFamily="34" charset="0"/>
-                <a:ea typeface="Calibri" pitchFamily="34" charset="-122"/>
-                <a:cs typeface="Calibri" pitchFamily="34" charset="-120"/>
-              </a:rPr>
-              <a:t>The dashboard was a day out</a:t>
-            </a:r>
-            <a:endParaRPr lang="en-US" sz="1500" dirty="0"/>
+              <a:rPr lang="en-US" sz="1450" b="1" dirty="0">
+                <a:solidFill>
+                  <a:srgbClr val="C2683A"/>
+                </a:solidFill>
+                <a:latin typeface="Calibri" pitchFamily="34" charset="0"/>
+                <a:ea typeface="Calibri" pitchFamily="34" charset="-122"/>
+                <a:cs typeface="Calibri" pitchFamily="34" charset="-120"/>
+              </a:rPr>
+              <a:t>It is not deployed</a:t>
+            </a:r>
+            <a:endParaRPr lang="en-US" sz="1450" dirty="0"/>
           </a:p>
         </p:txBody>
       </p:sp>
@@ -2576,8 +2509,8 @@
         </p:nvSpPr>
         <p:spPr>
           <a:xfrm>
-            <a:off x="960120" y="2231136"/>
-            <a:ext cx="10241280" cy="502920"/>
+            <a:off x="960120" y="2212848"/>
+            <a:ext cx="10241280" cy="475488"/>
           </a:xfrm>
           <a:prstGeom prst="rect">
             <a:avLst/>
@@ -2601,7 +2534,7 @@
                 <a:ea typeface="Calibri" pitchFamily="34" charset="-122"/>
                 <a:cs typeface="Calibri" pitchFamily="34" charset="-120"/>
               </a:rPr>
-              <a:t>Deriving dates with toISOString converts local midnight to the previous day under British Summer Time. Every chart label was shifted. Found by noticing "today" and the last data point disagreed.</a:t>
+              <a:t>The brief lists deployment as optional and I ran out of time. Configuration is all environment variables, so it is ready to go, but "ready to deploy" is not the same as deployed.</a:t>
             </a:r>
             <a:endParaRPr lang="en-US" sz="1250" dirty="0"/>
           </a:p>
@@ -2615,12 +2548,12 @@
         </p:nvSpPr>
         <p:spPr>
           <a:xfrm>
-            <a:off x="640080" y="2907792"/>
-            <a:ext cx="10881360" cy="960120"/>
+            <a:off x="640080" y="2880360"/>
+            <a:ext cx="10881360" cy="914400"/>
           </a:xfrm>
           <a:prstGeom prst="roundRect">
             <a:avLst>
-              <a:gd name="adj" fmla="val 8571"/>
+              <a:gd name="adj" fmla="val 9000"/>
             </a:avLst>
           </a:prstGeom>
           <a:solidFill>
@@ -2642,7 +2575,7 @@
         </p:nvSpPr>
         <p:spPr>
           <a:xfrm>
-            <a:off x="960120" y="2999232"/>
+            <a:off x="960120" y="2953512"/>
             <a:ext cx="10241280" cy="292608"/>
           </a:xfrm>
           <a:prstGeom prst="rect">
@@ -2659,17 +2592,17 @@
               <a:buNone/>
             </a:pPr>
             <a:r>
-              <a:rPr lang="en-US" sz="1500" b="1" dirty="0">
-                <a:solidFill>
-                  <a:srgbClr val="D4A937"/>
-                </a:solidFill>
-                <a:latin typeface="Calibri" pitchFamily="34" charset="0"/>
-                <a:ea typeface="Calibri" pitchFamily="34" charset="-122"/>
-                <a:cs typeface="Calibri" pitchFamily="34" charset="-120"/>
-              </a:rPr>
-              <a:t>The floor plan told a lie</a:t>
-            </a:r>
-            <a:endParaRPr lang="en-US" sz="1500" dirty="0"/>
+              <a:rPr lang="en-US" sz="1450" b="1" dirty="0">
+                <a:solidFill>
+                  <a:srgbClr val="C2683A"/>
+                </a:solidFill>
+                <a:latin typeface="Calibri" pitchFamily="34" charset="0"/>
+                <a:ea typeface="Calibri" pitchFamily="34" charset="-122"/>
+                <a:cs typeface="Calibri" pitchFamily="34" charset="-120"/>
+              </a:rPr>
+              <a:t>No front-end tests</a:t>
+            </a:r>
+            <a:endParaRPr lang="en-US" sz="1450" dirty="0"/>
           </a:p>
         </p:txBody>
       </p:sp>
@@ -2681,8 +2614,8 @@
         </p:nvSpPr>
         <p:spPr>
           <a:xfrm>
-            <a:off x="960120" y="3310128"/>
-            <a:ext cx="10241280" cy="502920"/>
+            <a:off x="960120" y="3264408"/>
+            <a:ext cx="10241280" cy="475488"/>
           </a:xfrm>
           <a:prstGeom prst="rect">
             <a:avLst/>
@@ -2706,7 +2639,7 @@
                 <a:ea typeface="Calibri" pitchFamily="34" charset="-122"/>
                 <a:cs typeface="Calibri" pitchFamily="34" charset="-120"/>
               </a:rPr>
-              <a:t>The client guessed which table you would get. The server allocated a different one. Fixed by having availability return the real allocation rather than inferring it.</a:t>
+              <a:t>All 65 tests are on the back end. The React side I checked by hand, which is not good enough and is the first thing I would fix.</a:t>
             </a:r>
             <a:endParaRPr lang="en-US" sz="1250" dirty="0"/>
           </a:p>
@@ -2720,12 +2653,12 @@
         </p:nvSpPr>
         <p:spPr>
           <a:xfrm>
-            <a:off x="640080" y="3986784"/>
-            <a:ext cx="10881360" cy="960120"/>
+            <a:off x="640080" y="3931920"/>
+            <a:ext cx="10881360" cy="914400"/>
           </a:xfrm>
           <a:prstGeom prst="roundRect">
             <a:avLst>
-              <a:gd name="adj" fmla="val 8571"/>
+              <a:gd name="adj" fmla="val 9000"/>
             </a:avLst>
           </a:prstGeom>
           <a:solidFill>
@@ -2747,7 +2680,7 @@
         </p:nvSpPr>
         <p:spPr>
           <a:xfrm>
-            <a:off x="960120" y="4078224"/>
+            <a:off x="960120" y="4005072"/>
             <a:ext cx="10241280" cy="292608"/>
           </a:xfrm>
           <a:prstGeom prst="rect">
@@ -2764,17 +2697,17 @@
               <a:buNone/>
             </a:pPr>
             <a:r>
-              <a:rPr lang="en-US" sz="1500" b="1" dirty="0">
-                <a:solidFill>
-                  <a:srgbClr val="D4A937"/>
-                </a:solidFill>
-                <a:latin typeface="Calibri" pitchFamily="34" charset="0"/>
-                <a:ea typeface="Calibri" pitchFamily="34" charset="-122"/>
-                <a:cs typeface="Calibri" pitchFamily="34" charset="-120"/>
-              </a:rPr>
-              <a:t>A blank 3D scene</a:t>
-            </a:r>
-            <a:endParaRPr lang="en-US" sz="1500" dirty="0"/>
+              <a:rPr lang="en-US" sz="1450" b="1" dirty="0">
+                <a:solidFill>
+                  <a:srgbClr val="C2683A"/>
+                </a:solidFill>
+                <a:latin typeface="Calibri" pitchFamily="34" charset="0"/>
+                <a:ea typeface="Calibri" pitchFamily="34" charset="-122"/>
+                <a:cs typeface="Calibri" pitchFamily="34" charset="-120"/>
+              </a:rPr>
+              <a:t>No Docker</a:t>
+            </a:r>
+            <a:endParaRPr lang="en-US" sz="1450" dirty="0"/>
           </a:p>
         </p:txBody>
       </p:sp>
@@ -2786,8 +2719,8 @@
         </p:nvSpPr>
         <p:spPr>
           <a:xfrm>
-            <a:off x="960120" y="4389120"/>
-            <a:ext cx="10241280" cy="502920"/>
+            <a:off x="960120" y="4315968"/>
+            <a:ext cx="10241280" cy="475488"/>
           </a:xfrm>
           <a:prstGeom prst="rect">
             <a:avLst/>
@@ -2811,7 +2744,7 @@
                 <a:ea typeface="Calibri" pitchFamily="34" charset="-122"/>
                 <a:cs typeface="Calibri" pitchFamily="34" charset="-120"/>
               </a:rPr>
-              <a:t>A full-screen film-grain overlay composited the WebGL canvas to black. Found by bisecting in the browser, not by reading the code.</a:t>
+              <a:t>Also optional in the brief. Same reason.</a:t>
             </a:r>
             <a:endParaRPr lang="en-US" sz="1250" dirty="0"/>
           </a:p>
@@ -2825,12 +2758,12 @@
         </p:nvSpPr>
         <p:spPr>
           <a:xfrm>
-            <a:off x="640080" y="5065776"/>
-            <a:ext cx="10881360" cy="960120"/>
+            <a:off x="640080" y="4983480"/>
+            <a:ext cx="10881360" cy="914400"/>
           </a:xfrm>
           <a:prstGeom prst="roundRect">
             <a:avLst>
-              <a:gd name="adj" fmla="val 8571"/>
+              <a:gd name="adj" fmla="val 9000"/>
             </a:avLst>
           </a:prstGeom>
           <a:solidFill>
@@ -2852,7 +2785,7 @@
         </p:nvSpPr>
         <p:spPr>
           <a:xfrm>
-            <a:off x="960120" y="5157216"/>
+            <a:off x="960120" y="5056632"/>
             <a:ext cx="10241280" cy="292608"/>
           </a:xfrm>
           <a:prstGeom prst="rect">
@@ -2869,17 +2802,17 @@
               <a:buNone/>
             </a:pPr>
             <a:r>
-              <a:rPr lang="en-US" sz="1500" b="1" dirty="0">
-                <a:solidFill>
-                  <a:srgbClr val="D4A937"/>
-                </a:solidFill>
-                <a:latin typeface="Calibri" pitchFamily="34" charset="0"/>
-                <a:ea typeface="Calibri" pitchFamily="34" charset="-122"/>
-                <a:cs typeface="Calibri" pitchFamily="34" charset="-120"/>
-              </a:rPr>
-              <a:t>Content that depended on animation</a:t>
-            </a:r>
-            <a:endParaRPr lang="en-US" sz="1500" dirty="0"/>
+              <a:rPr lang="en-US" sz="1450" b="1" dirty="0">
+                <a:solidFill>
+                  <a:srgbClr val="C2683A"/>
+                </a:solidFill>
+                <a:latin typeface="Calibri" pitchFamily="34" charset="0"/>
+                <a:ea typeface="Calibri" pitchFamily="34" charset="-122"/>
+                <a:cs typeface="Calibri" pitchFamily="34" charset="-120"/>
+              </a:rPr>
+              <a:t>SQLite, not a real database server</a:t>
+            </a:r>
+            <a:endParaRPr lang="en-US" sz="1450" dirty="0"/>
           </a:p>
         </p:txBody>
       </p:sp>
@@ -2891,8 +2824,8 @@
         </p:nvSpPr>
         <p:spPr>
           <a:xfrm>
-            <a:off x="960120" y="5468112"/>
-            <a:ext cx="10241280" cy="502920"/>
+            <a:off x="960120" y="5367528"/>
+            <a:ext cx="10241280" cy="475488"/>
           </a:xfrm>
           <a:prstGeom prst="rect">
             <a:avLst/>
@@ -2916,9 +2849,48 @@
                 <a:ea typeface="Calibri" pitchFamily="34" charset="-122"/>
                 <a:cs typeface="Calibri" pitchFamily="34" charset="-120"/>
               </a:rPr>
-              <a:t>JS-driven fades left the page permanently invisible where the animation loop did not run. Moved to CSS — content is visible by default, motion is enhancement.</a:t>
+              <a:t>Fine for this, and it makes the project easy to run. It would not survive more than one server instance.</a:t>
             </a:r>
             <a:endParaRPr lang="en-US" sz="1250" dirty="0"/>
+          </a:p>
+        </p:txBody>
+      </p:sp>
+      <p:sp>
+        <p:nvSpPr>
+          <p:cNvPr id="16" name="Text 14"/>
+          <p:cNvSpPr/>
+          <p:nvPr/>
+        </p:nvSpPr>
+        <p:spPr>
+          <a:xfrm>
+            <a:off x="640080" y="6172200"/>
+            <a:ext cx="10881360" cy="365760"/>
+          </a:xfrm>
+          <a:prstGeom prst="rect">
+            <a:avLst/>
+          </a:prstGeom>
+          <a:noFill/>
+          <a:ln/>
+        </p:spPr>
+        <p:txBody>
+          <a:bodyPr wrap="square" lIns="0" tIns="0" rIns="0" bIns="0" rtlCol="0" anchor="ctr"/>
+          <a:lstStyle/>
+          <a:p>
+            <a:pPr indent="0" marL="0">
+              <a:buNone/>
+            </a:pPr>
+            <a:r>
+              <a:rPr lang="en-US" sz="1300" i="1" dirty="0">
+                <a:solidFill>
+                  <a:srgbClr val="F5F0E6"/>
+                </a:solidFill>
+                <a:latin typeface="Calibri" pitchFamily="34" charset="0"/>
+                <a:ea typeface="Calibri" pitchFamily="34" charset="-122"/>
+                <a:cs typeface="Calibri" pitchFamily="34" charset="-120"/>
+              </a:rPr>
+              <a:t>I would rather tell you these than have you find them.</a:t>
+            </a:r>
+            <a:endParaRPr lang="en-US" sz="1300" dirty="0"/>
           </a:p>
         </p:txBody>
       </p:sp>
@@ -2979,7 +2951,7 @@
               <a:buNone/>
             </a:pPr>
             <a:r>
-              <a:rPr lang="en-US" sz="3800" b="1" dirty="0">
+              <a:rPr lang="en-US" sz="3600" b="1" dirty="0">
                 <a:solidFill>
                   <a:srgbClr val="F5F0E6"/>
                 </a:solidFill>
@@ -2987,9 +2959,9 @@
                 <a:ea typeface="Cambria" pitchFamily="34" charset="-122"/>
                 <a:cs typeface="Cambria" pitchFamily="34" charset="-120"/>
               </a:rPr>
-              <a:t>What I would do next</a:t>
-            </a:r>
-            <a:endParaRPr lang="en-US" sz="3800" dirty="0"/>
+              <a:t>What I learned</a:t>
+            </a:r>
+            <a:endParaRPr lang="en-US" sz="3600" dirty="0"/>
           </a:p>
         </p:txBody>
       </p:sp>
@@ -3001,12 +2973,12 @@
         </p:nvSpPr>
         <p:spPr>
           <a:xfrm>
-            <a:off x="640080" y="1828800"/>
-            <a:ext cx="5303520" cy="1371600"/>
+            <a:off x="640080" y="1737360"/>
+            <a:ext cx="5303520" cy="1417320"/>
           </a:xfrm>
           <a:prstGeom prst="roundRect">
             <a:avLst>
-              <a:gd name="adj" fmla="val 6000"/>
+              <a:gd name="adj" fmla="val 5806"/>
             </a:avLst>
           </a:prstGeom>
           <a:solidFill>
@@ -3028,24 +3000,24 @@
         </p:nvSpPr>
         <p:spPr>
           <a:xfrm>
-            <a:off x="914400" y="1993392"/>
-            <a:ext cx="4754880" cy="320040"/>
-          </a:xfrm>
-          <a:prstGeom prst="rect">
-            <a:avLst/>
-          </a:prstGeom>
-          <a:noFill/>
-          <a:ln/>
-        </p:spPr>
-        <p:txBody>
-          <a:bodyPr wrap="square" lIns="0" tIns="0" rIns="0" bIns="0" rtlCol="0" anchor="ctr"/>
-          <a:lstStyle/>
-          <a:p>
-            <a:pPr indent="0" marL="0">
-              <a:buNone/>
-            </a:pPr>
-            <a:r>
-              <a:rPr lang="en-US" sz="1800" b="1" dirty="0">
+            <a:off x="914400" y="1874520"/>
+            <a:ext cx="4754880" cy="502920"/>
+          </a:xfrm>
+          <a:prstGeom prst="rect">
+            <a:avLst/>
+          </a:prstGeom>
+          <a:noFill/>
+          <a:ln/>
+        </p:spPr>
+        <p:txBody>
+          <a:bodyPr wrap="square" lIns="0" tIns="0" rIns="0" bIns="0" rtlCol="0" anchor="ctr"/>
+          <a:lstStyle/>
+          <a:p>
+            <a:pPr indent="0" marL="0">
+              <a:buNone/>
+            </a:pPr>
+            <a:r>
+              <a:rPr lang="en-US" sz="1600" b="1" dirty="0">
                 <a:solidFill>
                   <a:srgbClr val="D4A937"/>
                 </a:solidFill>
@@ -3053,9 +3025,9 @@
                 <a:ea typeface="Cambria" pitchFamily="34" charset="-122"/>
                 <a:cs typeface="Cambria" pitchFamily="34" charset="-120"/>
               </a:rPr>
-              <a:t>Deployment</a:t>
-            </a:r>
-            <a:endParaRPr lang="en-US" sz="1800" dirty="0"/>
+              <a:t>Checking a role is not checking permission</a:t>
+            </a:r>
+            <a:endParaRPr lang="en-US" sz="1600" dirty="0"/>
           </a:p>
         </p:txBody>
       </p:sp>
@@ -3067,8 +3039,8 @@
         </p:nvSpPr>
         <p:spPr>
           <a:xfrm>
-            <a:off x="914400" y="2377440"/>
-            <a:ext cx="4754880" cy="685800"/>
+            <a:off x="914400" y="2395728"/>
+            <a:ext cx="4754880" cy="640080"/>
           </a:xfrm>
           <a:prstGeom prst="rect">
             <a:avLst/>
@@ -3092,7 +3064,7 @@
                 <a:ea typeface="Calibri" pitchFamily="34" charset="-122"/>
                 <a:cs typeface="Calibri" pitchFamily="34" charset="-120"/>
               </a:rPr>
-              <a:t>PostgreSQL and a container. The schema moves unchanged; configuration is already environment-driven.</a:t>
+              <a:t>Knowing someone is a manager does not tell you which restaurant is theirs.</a:t>
             </a:r>
             <a:endParaRPr lang="en-US" sz="1250" dirty="0"/>
           </a:p>
@@ -3106,12 +3078,12 @@
         </p:nvSpPr>
         <p:spPr>
           <a:xfrm>
-            <a:off x="6217920" y="1828800"/>
-            <a:ext cx="5303520" cy="1371600"/>
+            <a:off x="6217920" y="1737360"/>
+            <a:ext cx="5303520" cy="1417320"/>
           </a:xfrm>
           <a:prstGeom prst="roundRect">
             <a:avLst>
-              <a:gd name="adj" fmla="val 6000"/>
+              <a:gd name="adj" fmla="val 5806"/>
             </a:avLst>
           </a:prstGeom>
           <a:solidFill>
@@ -3133,24 +3105,24 @@
         </p:nvSpPr>
         <p:spPr>
           <a:xfrm>
-            <a:off x="6492240" y="1993392"/>
-            <a:ext cx="4754880" cy="320040"/>
-          </a:xfrm>
-          <a:prstGeom prst="rect">
-            <a:avLst/>
-          </a:prstGeom>
-          <a:noFill/>
-          <a:ln/>
-        </p:spPr>
-        <p:txBody>
-          <a:bodyPr wrap="square" lIns="0" tIns="0" rIns="0" bIns="0" rtlCol="0" anchor="ctr"/>
-          <a:lstStyle/>
-          <a:p>
-            <a:pPr indent="0" marL="0">
-              <a:buNone/>
-            </a:pPr>
-            <a:r>
-              <a:rPr lang="en-US" sz="1800" b="1" dirty="0">
+            <a:off x="6492240" y="1874520"/>
+            <a:ext cx="4754880" cy="502920"/>
+          </a:xfrm>
+          <a:prstGeom prst="rect">
+            <a:avLst/>
+          </a:prstGeom>
+          <a:noFill/>
+          <a:ln/>
+        </p:spPr>
+        <p:txBody>
+          <a:bodyPr wrap="square" lIns="0" tIns="0" rIns="0" bIns="0" rtlCol="0" anchor="ctr"/>
+          <a:lstStyle/>
+          <a:p>
+            <a:pPr indent="0" marL="0">
+              <a:buNone/>
+            </a:pPr>
+            <a:r>
+              <a:rPr lang="en-US" sz="1600" b="1" dirty="0">
                 <a:solidFill>
                   <a:srgbClr val="D4A937"/>
                 </a:solidFill>
@@ -3158,9 +3130,9 @@
                 <a:ea typeface="Cambria" pitchFamily="34" charset="-122"/>
                 <a:cs typeface="Cambria" pitchFamily="34" charset="-120"/>
               </a:rPr>
-              <a:t>Payments and deposits</a:t>
-            </a:r>
-            <a:endParaRPr lang="en-US" sz="1800" dirty="0"/>
+              <a:t>Some bugs only exist between two requests</a:t>
+            </a:r>
+            <a:endParaRPr lang="en-US" sz="1600" dirty="0"/>
           </a:p>
         </p:txBody>
       </p:sp>
@@ -3172,8 +3144,8 @@
         </p:nvSpPr>
         <p:spPr>
           <a:xfrm>
-            <a:off x="6492240" y="2377440"/>
-            <a:ext cx="4754880" cy="685800"/>
+            <a:off x="6492240" y="2395728"/>
+            <a:ext cx="4754880" cy="640080"/>
           </a:xfrm>
           <a:prstGeom prst="rect">
             <a:avLst/>
@@ -3197,7 +3169,7 @@
                 <a:ea typeface="Calibri" pitchFamily="34" charset="-122"/>
                 <a:cs typeface="Calibri" pitchFamily="34" charset="-120"/>
               </a:rPr>
-              <a:t>The single biggest lever on no-shows, which the dashboard already measures.</a:t>
+              <a:t>The double-booking one is invisible until you deliberately go looking for it.</a:t>
             </a:r>
             <a:endParaRPr lang="en-US" sz="1250" dirty="0"/>
           </a:p>
@@ -3211,12 +3183,12 @@
         </p:nvSpPr>
         <p:spPr>
           <a:xfrm>
-            <a:off x="640080" y="3383280"/>
-            <a:ext cx="5303520" cy="1371600"/>
+            <a:off x="640080" y="3337560"/>
+            <a:ext cx="5303520" cy="1417320"/>
           </a:xfrm>
           <a:prstGeom prst="roundRect">
             <a:avLst>
-              <a:gd name="adj" fmla="val 6000"/>
+              <a:gd name="adj" fmla="val 5806"/>
             </a:avLst>
           </a:prstGeom>
           <a:solidFill>
@@ -3238,24 +3210,24 @@
         </p:nvSpPr>
         <p:spPr>
           <a:xfrm>
-            <a:off x="914400" y="3547872"/>
-            <a:ext cx="4754880" cy="320040"/>
-          </a:xfrm>
-          <a:prstGeom prst="rect">
-            <a:avLst/>
-          </a:prstGeom>
-          <a:noFill/>
-          <a:ln/>
-        </p:spPr>
-        <p:txBody>
-          <a:bodyPr wrap="square" lIns="0" tIns="0" rIns="0" bIns="0" rtlCol="0" anchor="ctr"/>
-          <a:lstStyle/>
-          <a:p>
-            <a:pPr indent="0" marL="0">
-              <a:buNone/>
-            </a:pPr>
-            <a:r>
-              <a:rPr lang="en-US" sz="1800" b="1" dirty="0">
+            <a:off x="914400" y="3474720"/>
+            <a:ext cx="4754880" cy="502920"/>
+          </a:xfrm>
+          <a:prstGeom prst="rect">
+            <a:avLst/>
+          </a:prstGeom>
+          <a:noFill/>
+          <a:ln/>
+        </p:spPr>
+        <p:txBody>
+          <a:bodyPr wrap="square" lIns="0" tIns="0" rIns="0" bIns="0" rtlCol="0" anchor="ctr"/>
+          <a:lstStyle/>
+          <a:p>
+            <a:pPr indent="0" marL="0">
+              <a:buNone/>
+            </a:pPr>
+            <a:r>
+              <a:rPr lang="en-US" sz="1600" b="1" dirty="0">
                 <a:solidFill>
                   <a:srgbClr val="D4A937"/>
                 </a:solidFill>
@@ -3263,9 +3235,9 @@
                 <a:ea typeface="Cambria" pitchFamily="34" charset="-122"/>
                 <a:cs typeface="Cambria" pitchFamily="34" charset="-120"/>
               </a:rPr>
-              <a:t>Notifications</a:t>
-            </a:r>
-            <a:endParaRPr lang="en-US" sz="1800" dirty="0"/>
+              <a:t>Keep the hard logic away from everything else</a:t>
+            </a:r>
+            <a:endParaRPr lang="en-US" sz="1600" dirty="0"/>
           </a:p>
         </p:txBody>
       </p:sp>
@@ -3277,8 +3249,8 @@
         </p:nvSpPr>
         <p:spPr>
           <a:xfrm>
-            <a:off x="914400" y="3931920"/>
-            <a:ext cx="4754880" cy="685800"/>
+            <a:off x="914400" y="3995928"/>
+            <a:ext cx="4754880" cy="640080"/>
           </a:xfrm>
           <a:prstGeom prst="rect">
             <a:avLst/>
@@ -3302,7 +3274,7 @@
                 <a:ea typeface="Calibri" pitchFamily="34" charset="-122"/>
                 <a:cs typeface="Calibri" pitchFamily="34" charset="-120"/>
               </a:rPr>
-              <a:t>Confirmation and reminder email — the other half of the no-show problem.</a:t>
+              <a:t>The booking rules touch no database and no web server, which is the only reason I could test them properly.</a:t>
             </a:r>
             <a:endParaRPr lang="en-US" sz="1250" dirty="0"/>
           </a:p>
@@ -3316,12 +3288,12 @@
         </p:nvSpPr>
         <p:spPr>
           <a:xfrm>
-            <a:off x="6217920" y="3383280"/>
-            <a:ext cx="5303520" cy="1371600"/>
+            <a:off x="6217920" y="3337560"/>
+            <a:ext cx="5303520" cy="1417320"/>
           </a:xfrm>
           <a:prstGeom prst="roundRect">
             <a:avLst>
-              <a:gd name="adj" fmla="val 6000"/>
+              <a:gd name="adj" fmla="val 5806"/>
             </a:avLst>
           </a:prstGeom>
           <a:solidFill>
@@ -3343,24 +3315,24 @@
         </p:nvSpPr>
         <p:spPr>
           <a:xfrm>
-            <a:off x="6492240" y="3547872"/>
-            <a:ext cx="4754880" cy="320040"/>
-          </a:xfrm>
-          <a:prstGeom prst="rect">
-            <a:avLst/>
-          </a:prstGeom>
-          <a:noFill/>
-          <a:ln/>
-        </p:spPr>
-        <p:txBody>
-          <a:bodyPr wrap="square" lIns="0" tIns="0" rIns="0" bIns="0" rtlCol="0" anchor="ctr"/>
-          <a:lstStyle/>
-          <a:p>
-            <a:pPr indent="0" marL="0">
-              <a:buNone/>
-            </a:pPr>
-            <a:r>
-              <a:rPr lang="en-US" sz="1800" b="1" dirty="0">
+            <a:off x="6492240" y="3474720"/>
+            <a:ext cx="4754880" cy="502920"/>
+          </a:xfrm>
+          <a:prstGeom prst="rect">
+            <a:avLst/>
+          </a:prstGeom>
+          <a:noFill/>
+          <a:ln/>
+        </p:spPr>
+        <p:txBody>
+          <a:bodyPr wrap="square" lIns="0" tIns="0" rIns="0" bIns="0" rtlCol="0" anchor="ctr"/>
+          <a:lstStyle/>
+          <a:p>
+            <a:pPr indent="0" marL="0">
+              <a:buNone/>
+            </a:pPr>
+            <a:r>
+              <a:rPr lang="en-US" sz="1600" b="1" dirty="0">
                 <a:solidFill>
                   <a:srgbClr val="D4A937"/>
                 </a:solidFill>
@@ -3368,9 +3340,9 @@
                 <a:ea typeface="Cambria" pitchFamily="34" charset="-122"/>
                 <a:cs typeface="Cambria" pitchFamily="34" charset="-120"/>
               </a:rPr>
-              <a:t>Waitlists</a:t>
-            </a:r>
-            <a:endParaRPr lang="en-US" sz="1800" dirty="0"/>
+              <a:t>Time is harder than it looks</a:t>
+            </a:r>
+            <a:endParaRPr lang="en-US" sz="1600" dirty="0"/>
           </a:p>
         </p:txBody>
       </p:sp>
@@ -3382,8 +3354,8 @@
         </p:nvSpPr>
         <p:spPr>
           <a:xfrm>
-            <a:off x="6492240" y="3931920"/>
-            <a:ext cx="4754880" cy="685800"/>
+            <a:off x="6492240" y="3995928"/>
+            <a:ext cx="4754880" cy="640080"/>
           </a:xfrm>
           <a:prstGeom prst="rect">
             <a:avLst/>
@@ -3407,7 +3379,7 @@
                 <a:ea typeface="Calibri" pitchFamily="34" charset="-122"/>
                 <a:cs typeface="Calibri" pitchFamily="34" charset="-120"/>
               </a:rPr>
-              <a:t>When a slot is full, hold the diner rather than losing them to the 409.</a:t>
+              <a:t>Time zones, half-open intervals and restaurants open past midnight all caught me out.</a:t>
             </a:r>
             <a:endParaRPr lang="en-US" sz="1250" dirty="0"/>
           </a:p>
@@ -3421,8 +3393,8 @@
         </p:nvSpPr>
         <p:spPr>
           <a:xfrm>
-            <a:off x="640080" y="5257800"/>
-            <a:ext cx="2926080" cy="0"/>
+            <a:off x="640080" y="5120640"/>
+            <a:ext cx="2743200" cy="0"/>
           </a:xfrm>
           <a:prstGeom prst="line">
             <a:avLst/>
@@ -3444,7 +3416,7 @@
         </p:nvSpPr>
         <p:spPr>
           <a:xfrm>
-            <a:off x="640080" y="5486400"/>
+            <a:off x="640080" y="5349240"/>
             <a:ext cx="10881360" cy="548640"/>
           </a:xfrm>
           <a:prstGeom prst="rect">
@@ -3461,7 +3433,7 @@
               <a:buNone/>
             </a:pPr>
             <a:r>
-              <a:rPr lang="en-US" sz="2600" dirty="0">
+              <a:rPr lang="en-US" sz="2500" dirty="0">
                 <a:solidFill>
                   <a:srgbClr val="D4A937"/>
                 </a:solidFill>
@@ -3469,9 +3441,9 @@
                 <a:ea typeface="Cambria" pitchFamily="34" charset="-122"/>
                 <a:cs typeface="Cambria" pitchFamily="34" charset="-120"/>
               </a:rPr>
-              <a:t>Thank you — questions welcome</a:t>
-            </a:r>
-            <a:endParaRPr lang="en-US" sz="2600" dirty="0"/>
+              <a:t>Thank you — happy to take questions</a:t>
+            </a:r>
+            <a:endParaRPr lang="en-US" sz="2500" dirty="0"/>
           </a:p>
         </p:txBody>
       </p:sp>
@@ -3483,7 +3455,7 @@
         </p:nvSpPr>
         <p:spPr>
           <a:xfrm>
-            <a:off x="640080" y="6080760"/>
+            <a:off x="640080" y="5943600"/>
             <a:ext cx="10881360" cy="365760"/>
           </a:xfrm>
           <a:prstGeom prst="rect">
@@ -3508,7 +3480,7 @@
                 <a:ea typeface="Courier New" pitchFamily="34" charset="-122"/>
                 <a:cs typeface="Courier New" pitchFamily="34" charset="-120"/>
               </a:rPr>
-              <a:t>github.com/&lt;your-username&gt;/mesa</a:t>
+              <a:t>Code: github.com/YOUR-USERNAME/mesa</a:t>
             </a:r>
             <a:endParaRPr lang="en-US" sz="1300" dirty="0"/>
           </a:p>
@@ -3571,7 +3543,7 @@
               <a:buNone/>
             </a:pPr>
             <a:r>
-              <a:rPr lang="en-US" sz="3800" b="1" dirty="0">
+              <a:rPr lang="en-US" sz="3600" b="1" dirty="0">
                 <a:solidFill>
                   <a:srgbClr val="F5F0E6"/>
                 </a:solidFill>
@@ -3579,9 +3551,9 @@
                 <a:ea typeface="Cambria" pitchFamily="34" charset="-122"/>
                 <a:cs typeface="Cambria" pitchFamily="34" charset="-120"/>
               </a:rPr>
-              <a:t>The problem</a:t>
-            </a:r>
-            <a:endParaRPr lang="en-US" sz="3800" dirty="0"/>
+              <a:t>Why I chose this</a:t>
+            </a:r>
+            <a:endParaRPr lang="en-US" sz="3600" dirty="0"/>
           </a:p>
         </p:txBody>
       </p:sp>
@@ -3593,7 +3565,7 @@
         </p:nvSpPr>
         <p:spPr>
           <a:xfrm>
-            <a:off x="640080" y="1207008"/>
+            <a:off x="640080" y="1188720"/>
             <a:ext cx="10881360" cy="365760"/>
           </a:xfrm>
           <a:prstGeom prst="rect">
@@ -3618,7 +3590,7 @@
                 <a:ea typeface="Calibri" pitchFamily="34" charset="-122"/>
                 <a:cs typeface="Calibri" pitchFamily="34" charset="-120"/>
               </a:rPr>
-              <a:t>Two sides of the same gap</a:t>
+              <a:t>The brief let us pick any real-world problem</a:t>
             </a:r>
             <a:endParaRPr lang="en-US" sz="1400" dirty="0"/>
           </a:p>
@@ -3633,15 +3605,15 @@
         <p:spPr>
           <a:xfrm>
             <a:off x="640080" y="1828800"/>
-            <a:ext cx="5303520" cy="3566160"/>
+            <a:ext cx="10881360" cy="1463040"/>
           </a:xfrm>
           <a:prstGeom prst="roundRect">
             <a:avLst>
-              <a:gd name="adj" fmla="val 2308"/>
+              <a:gd name="adj" fmla="val 5625"/>
             </a:avLst>
           </a:prstGeom>
           <a:solidFill>
-            <a:srgbClr val="102B23"/>
+            <a:srgbClr val="17392E"/>
           </a:solidFill>
           <a:ln w="12700">
             <a:solidFill>
@@ -3660,23 +3632,62 @@
         <p:spPr>
           <a:xfrm>
             <a:off x="960120" y="2103120"/>
-            <a:ext cx="4663440" cy="365760"/>
-          </a:xfrm>
-          <a:prstGeom prst="rect">
-            <a:avLst/>
-          </a:prstGeom>
-          <a:noFill/>
-          <a:ln/>
-        </p:spPr>
-        <p:txBody>
-          <a:bodyPr wrap="square" lIns="0" tIns="0" rIns="0" bIns="0" rtlCol="0" anchor="ctr"/>
-          <a:lstStyle/>
-          <a:p>
-            <a:pPr indent="0" marL="0">
-              <a:buNone/>
-            </a:pPr>
-            <a:r>
-              <a:rPr lang="en-US" sz="2100" b="1" dirty="0">
+            <a:ext cx="10241280" cy="1005840"/>
+          </a:xfrm>
+          <a:prstGeom prst="rect">
+            <a:avLst/>
+          </a:prstGeom>
+          <a:noFill/>
+          <a:ln/>
+        </p:spPr>
+        <p:txBody>
+          <a:bodyPr wrap="square" lIns="0" tIns="0" rIns="0" bIns="0" rtlCol="0" anchor="ctr"/>
+          <a:lstStyle/>
+          <a:p>
+            <a:pPr indent="0" marL="0">
+              <a:buNone/>
+            </a:pPr>
+            <a:r>
+              <a:rPr lang="en-US" sz="1500" dirty="0">
+                <a:solidFill>
+                  <a:srgbClr val="F5F0E6"/>
+                </a:solidFill>
+                <a:latin typeface="Calibri" pitchFamily="34" charset="0"/>
+                <a:ea typeface="Calibri" pitchFamily="34" charset="-122"/>
+                <a:cs typeface="Calibri" pitchFamily="34" charset="-120"/>
+              </a:rPr>
+              <a:t>Most independent restaurants still take bookings on the phone, into a paper diary. That causes double-bookings, parties seated at tables too small for them, and no-shows nobody wrote down. And as a customer you cannot find out what is actually free without ringing up during service.</a:t>
+            </a:r>
+            <a:endParaRPr lang="en-US" sz="1500" dirty="0"/>
+          </a:p>
+        </p:txBody>
+      </p:sp>
+      <p:sp>
+        <p:nvSpPr>
+          <p:cNvPr id="6" name="Text 4"/>
+          <p:cNvSpPr/>
+          <p:nvPr/>
+        </p:nvSpPr>
+        <p:spPr>
+          <a:xfrm>
+            <a:off x="640080" y="3611880"/>
+            <a:ext cx="10881360" cy="365760"/>
+          </a:xfrm>
+          <a:prstGeom prst="rect">
+            <a:avLst/>
+          </a:prstGeom>
+          <a:noFill/>
+          <a:ln/>
+        </p:spPr>
+        <p:txBody>
+          <a:bodyPr wrap="square" lIns="0" tIns="0" rIns="0" bIns="0" rtlCol="0" anchor="ctr"/>
+          <a:lstStyle/>
+          <a:p>
+            <a:pPr indent="0" marL="0">
+              <a:buNone/>
+            </a:pPr>
+            <a:r>
+              <a:rPr lang="en-US" sz="2000" b="1" dirty="0">
                 <a:solidFill>
                   <a:srgbClr val="D4A937"/>
                 </a:solidFill>
@@ -3684,42 +3695,97 @@
                 <a:ea typeface="Cambria" pitchFamily="34" charset="-122"/>
                 <a:cs typeface="Cambria" pitchFamily="34" charset="-120"/>
               </a:rPr>
-              <a:t>For the restaurant</a:t>
-            </a:r>
-            <a:endParaRPr lang="en-US" sz="2100" dirty="0"/>
-          </a:p>
-        </p:txBody>
-      </p:sp>
-      <p:sp>
-        <p:nvSpPr>
-          <p:cNvPr id="6" name="Text 4"/>
-          <p:cNvSpPr/>
-          <p:nvPr/>
-        </p:nvSpPr>
-        <p:spPr>
-          <a:xfrm>
-            <a:off x="960120" y="2606040"/>
-            <a:ext cx="4663440" cy="2560320"/>
-          </a:xfrm>
-          <a:prstGeom prst="rect">
-            <a:avLst/>
-          </a:prstGeom>
-          <a:noFill/>
-          <a:ln/>
-        </p:spPr>
-        <p:txBody>
-          <a:bodyPr wrap="square" lIns="0" tIns="0" rIns="0" bIns="0" rtlCol="0" anchor="ctr"/>
-          <a:lstStyle/>
-          <a:p>
-            <a:pPr marL="342900" indent="-342900">
-              <a:spcAft>
-                <a:spcPts val="1000"/>
-              </a:spcAft>
-              <a:buSzPct val="100000"/>
-              <a:buChar char="•"/>
-            </a:pPr>
-            <a:r>
-              <a:rPr lang="en-US" sz="1500" dirty="0">
+              <a:t>What made it worth building</a:t>
+            </a:r>
+            <a:endParaRPr lang="en-US" sz="2000" dirty="0"/>
+          </a:p>
+        </p:txBody>
+      </p:sp>
+      <p:sp>
+        <p:nvSpPr>
+          <p:cNvPr id="7" name="Shape 5"/>
+          <p:cNvSpPr/>
+          <p:nvPr/>
+        </p:nvSpPr>
+        <p:spPr>
+          <a:xfrm>
+            <a:off x="640080" y="4114800"/>
+            <a:ext cx="420624" cy="420624"/>
+          </a:xfrm>
+          <a:prstGeom prst="ellipse">
+            <a:avLst/>
+          </a:prstGeom>
+          <a:solidFill>
+            <a:srgbClr val="D4A937"/>
+          </a:solidFill>
+          <a:ln/>
+        </p:spPr>
+      </p:sp>
+      <p:sp>
+        <p:nvSpPr>
+          <p:cNvPr id="8" name="Text 6"/>
+          <p:cNvSpPr/>
+          <p:nvPr/>
+        </p:nvSpPr>
+        <p:spPr>
+          <a:xfrm>
+            <a:off x="640080" y="4114800"/>
+            <a:ext cx="420624" cy="420624"/>
+          </a:xfrm>
+          <a:prstGeom prst="rect">
+            <a:avLst/>
+          </a:prstGeom>
+          <a:noFill/>
+          <a:ln/>
+        </p:spPr>
+        <p:txBody>
+          <a:bodyPr wrap="square" lIns="0" tIns="0" rIns="0" bIns="0" rtlCol="0" anchor="ctr"/>
+          <a:lstStyle/>
+          <a:p>
+            <a:pPr algn="ctr" indent="0" marL="0">
+              <a:buNone/>
+            </a:pPr>
+            <a:r>
+              <a:rPr lang="en-US" sz="1400" b="1" dirty="0">
+                <a:solidFill>
+                  <a:srgbClr val="071310"/>
+                </a:solidFill>
+                <a:latin typeface="Calibri" pitchFamily="34" charset="0"/>
+                <a:ea typeface="Calibri" pitchFamily="34" charset="-122"/>
+                <a:cs typeface="Calibri" pitchFamily="34" charset="-120"/>
+              </a:rPr>
+              <a:t>1</a:t>
+            </a:r>
+            <a:endParaRPr lang="en-US" sz="1400" dirty="0"/>
+          </a:p>
+        </p:txBody>
+      </p:sp>
+      <p:sp>
+        <p:nvSpPr>
+          <p:cNvPr id="9" name="Text 7"/>
+          <p:cNvSpPr/>
+          <p:nvPr/>
+        </p:nvSpPr>
+        <p:spPr>
+          <a:xfrm>
+            <a:off x="1188720" y="4087368"/>
+            <a:ext cx="3291840" cy="365760"/>
+          </a:xfrm>
+          <a:prstGeom prst="rect">
+            <a:avLst/>
+          </a:prstGeom>
+          <a:noFill/>
+          <a:ln/>
+        </p:spPr>
+        <p:txBody>
+          <a:bodyPr wrap="square" lIns="0" tIns="0" rIns="0" bIns="0" rtlCol="0" anchor="t"/>
+          <a:lstStyle/>
+          <a:p>
+            <a:pPr indent="0" marL="0">
+              <a:buNone/>
+            </a:pPr>
+            <a:r>
+              <a:rPr lang="en-US" sz="1400" b="1" dirty="0">
                 <a:solidFill>
                   <a:srgbClr val="F5F0E6"/>
                 </a:solidFill>
@@ -3727,20 +3793,136 @@
                 <a:ea typeface="Calibri" pitchFamily="34" charset="-122"/>
                 <a:cs typeface="Calibri" pitchFamily="34" charset="-120"/>
               </a:rPr>
-              <a:t>Tables double-booked</a:t>
-            </a:r>
-            <a:endParaRPr lang="en-US" sz="1500" dirty="0"/>
-          </a:p>
-          <a:p>
-            <a:pPr marL="342900" indent="-342900">
-              <a:spcAft>
-                <a:spcPts val="1000"/>
-              </a:spcAft>
-              <a:buSzPct val="100000"/>
-              <a:buChar char="•"/>
-            </a:pPr>
-            <a:r>
-              <a:rPr lang="en-US" sz="1500" dirty="0">
+              <a:t>It has a genuinely hard bit</a:t>
+            </a:r>
+            <a:endParaRPr lang="en-US" sz="1400" dirty="0"/>
+          </a:p>
+        </p:txBody>
+      </p:sp>
+      <p:sp>
+        <p:nvSpPr>
+          <p:cNvPr id="10" name="Text 8"/>
+          <p:cNvSpPr/>
+          <p:nvPr/>
+        </p:nvSpPr>
+        <p:spPr>
+          <a:xfrm>
+            <a:off x="4572000" y="4087368"/>
+            <a:ext cx="6949440" cy="658368"/>
+          </a:xfrm>
+          <a:prstGeom prst="rect">
+            <a:avLst/>
+          </a:prstGeom>
+          <a:noFill/>
+          <a:ln/>
+        </p:spPr>
+        <p:txBody>
+          <a:bodyPr wrap="square" lIns="0" tIns="0" rIns="0" bIns="0" rtlCol="0" anchor="ctr"/>
+          <a:lstStyle/>
+          <a:p>
+            <a:pPr indent="0" marL="0">
+              <a:buNone/>
+            </a:pPr>
+            <a:r>
+              <a:rPr lang="en-US" sz="1250" dirty="0">
+                <a:solidFill>
+                  <a:srgbClr val="97B0A2"/>
+                </a:solidFill>
+                <a:latin typeface="Calibri" pitchFamily="34" charset="0"/>
+                <a:ea typeface="Calibri" pitchFamily="34" charset="-122"/>
+                <a:cs typeface="Calibri" pitchFamily="34" charset="-120"/>
+              </a:rPr>
+              <a:t>Working out whether a table is free is not a lookup. It is an overlap problem, and getting it wrong is invisible until two people turn up for the same table.</a:t>
+            </a:r>
+            <a:endParaRPr lang="en-US" sz="1250" dirty="0"/>
+          </a:p>
+        </p:txBody>
+      </p:sp>
+      <p:sp>
+        <p:nvSpPr>
+          <p:cNvPr id="11" name="Shape 9"/>
+          <p:cNvSpPr/>
+          <p:nvPr/>
+        </p:nvSpPr>
+        <p:spPr>
+          <a:xfrm>
+            <a:off x="640080" y="4892040"/>
+            <a:ext cx="420624" cy="420624"/>
+          </a:xfrm>
+          <a:prstGeom prst="ellipse">
+            <a:avLst/>
+          </a:prstGeom>
+          <a:solidFill>
+            <a:srgbClr val="D4A937"/>
+          </a:solidFill>
+          <a:ln/>
+        </p:spPr>
+      </p:sp>
+      <p:sp>
+        <p:nvSpPr>
+          <p:cNvPr id="12" name="Text 10"/>
+          <p:cNvSpPr/>
+          <p:nvPr/>
+        </p:nvSpPr>
+        <p:spPr>
+          <a:xfrm>
+            <a:off x="640080" y="4892040"/>
+            <a:ext cx="420624" cy="420624"/>
+          </a:xfrm>
+          <a:prstGeom prst="rect">
+            <a:avLst/>
+          </a:prstGeom>
+          <a:noFill/>
+          <a:ln/>
+        </p:spPr>
+        <p:txBody>
+          <a:bodyPr wrap="square" lIns="0" tIns="0" rIns="0" bIns="0" rtlCol="0" anchor="ctr"/>
+          <a:lstStyle/>
+          <a:p>
+            <a:pPr algn="ctr" indent="0" marL="0">
+              <a:buNone/>
+            </a:pPr>
+            <a:r>
+              <a:rPr lang="en-US" sz="1400" b="1" dirty="0">
+                <a:solidFill>
+                  <a:srgbClr val="071310"/>
+                </a:solidFill>
+                <a:latin typeface="Calibri" pitchFamily="34" charset="0"/>
+                <a:ea typeface="Calibri" pitchFamily="34" charset="-122"/>
+                <a:cs typeface="Calibri" pitchFamily="34" charset="-120"/>
+              </a:rPr>
+              <a:t>2</a:t>
+            </a:r>
+            <a:endParaRPr lang="en-US" sz="1400" dirty="0"/>
+          </a:p>
+        </p:txBody>
+      </p:sp>
+      <p:sp>
+        <p:nvSpPr>
+          <p:cNvPr id="13" name="Text 11"/>
+          <p:cNvSpPr/>
+          <p:nvPr/>
+        </p:nvSpPr>
+        <p:spPr>
+          <a:xfrm>
+            <a:off x="1188720" y="4864608"/>
+            <a:ext cx="3291840" cy="365760"/>
+          </a:xfrm>
+          <a:prstGeom prst="rect">
+            <a:avLst/>
+          </a:prstGeom>
+          <a:noFill/>
+          <a:ln/>
+        </p:spPr>
+        <p:txBody>
+          <a:bodyPr wrap="square" lIns="0" tIns="0" rIns="0" bIns="0" rtlCol="0" anchor="t"/>
+          <a:lstStyle/>
+          <a:p>
+            <a:pPr indent="0" marL="0">
+              <a:buNone/>
+            </a:pPr>
+            <a:r>
+              <a:rPr lang="en-US" sz="1400" b="1" dirty="0">
                 <a:solidFill>
                   <a:srgbClr val="F5F0E6"/>
                 </a:solidFill>
@@ -3748,20 +3930,136 @@
                 <a:ea typeface="Calibri" pitchFamily="34" charset="-122"/>
                 <a:cs typeface="Calibri" pitchFamily="34" charset="-120"/>
               </a:rPr>
-              <a:t>Parties seated at tables too small</a:t>
-            </a:r>
-            <a:endParaRPr lang="en-US" sz="1500" dirty="0"/>
-          </a:p>
-          <a:p>
-            <a:pPr marL="342900" indent="-342900">
-              <a:spcAft>
-                <a:spcPts val="1000"/>
-              </a:spcAft>
-              <a:buSzPct val="100000"/>
-              <a:buChar char="•"/>
-            </a:pPr>
-            <a:r>
-              <a:rPr lang="en-US" sz="1500" dirty="0">
+              <a:t>It needs all three advanced features naturally</a:t>
+            </a:r>
+            <a:endParaRPr lang="en-US" sz="1400" dirty="0"/>
+          </a:p>
+        </p:txBody>
+      </p:sp>
+      <p:sp>
+        <p:nvSpPr>
+          <p:cNvPr id="14" name="Text 12"/>
+          <p:cNvSpPr/>
+          <p:nvPr/>
+        </p:nvSpPr>
+        <p:spPr>
+          <a:xfrm>
+            <a:off x="4572000" y="4864608"/>
+            <a:ext cx="6949440" cy="658368"/>
+          </a:xfrm>
+          <a:prstGeom prst="rect">
+            <a:avLst/>
+          </a:prstGeom>
+          <a:noFill/>
+          <a:ln/>
+        </p:spPr>
+        <p:txBody>
+          <a:bodyPr wrap="square" lIns="0" tIns="0" rIns="0" bIns="0" rtlCol="0" anchor="ctr"/>
+          <a:lstStyle/>
+          <a:p>
+            <a:pPr indent="0" marL="0">
+              <a:buNone/>
+            </a:pPr>
+            <a:r>
+              <a:rPr lang="en-US" sz="1250" dirty="0">
+                <a:solidFill>
+                  <a:srgbClr val="97B0A2"/>
+                </a:solidFill>
+                <a:latin typeface="Calibri" pitchFamily="34" charset="0"/>
+                <a:ea typeface="Calibri" pitchFamily="34" charset="-122"/>
+                <a:cs typeface="Calibri" pitchFamily="34" charset="-120"/>
+              </a:rPr>
+              <a:t>Roles, search and a dashboard all fall out of the problem rather than being bolted on to satisfy the brief.</a:t>
+            </a:r>
+            <a:endParaRPr lang="en-US" sz="1250" dirty="0"/>
+          </a:p>
+        </p:txBody>
+      </p:sp>
+      <p:sp>
+        <p:nvSpPr>
+          <p:cNvPr id="15" name="Shape 13"/>
+          <p:cNvSpPr/>
+          <p:nvPr/>
+        </p:nvSpPr>
+        <p:spPr>
+          <a:xfrm>
+            <a:off x="640080" y="5669280"/>
+            <a:ext cx="420624" cy="420624"/>
+          </a:xfrm>
+          <a:prstGeom prst="ellipse">
+            <a:avLst/>
+          </a:prstGeom>
+          <a:solidFill>
+            <a:srgbClr val="D4A937"/>
+          </a:solidFill>
+          <a:ln/>
+        </p:spPr>
+      </p:sp>
+      <p:sp>
+        <p:nvSpPr>
+          <p:cNvPr id="16" name="Text 14"/>
+          <p:cNvSpPr/>
+          <p:nvPr/>
+        </p:nvSpPr>
+        <p:spPr>
+          <a:xfrm>
+            <a:off x="640080" y="5669280"/>
+            <a:ext cx="420624" cy="420624"/>
+          </a:xfrm>
+          <a:prstGeom prst="rect">
+            <a:avLst/>
+          </a:prstGeom>
+          <a:noFill/>
+          <a:ln/>
+        </p:spPr>
+        <p:txBody>
+          <a:bodyPr wrap="square" lIns="0" tIns="0" rIns="0" bIns="0" rtlCol="0" anchor="ctr"/>
+          <a:lstStyle/>
+          <a:p>
+            <a:pPr algn="ctr" indent="0" marL="0">
+              <a:buNone/>
+            </a:pPr>
+            <a:r>
+              <a:rPr lang="en-US" sz="1400" b="1" dirty="0">
+                <a:solidFill>
+                  <a:srgbClr val="071310"/>
+                </a:solidFill>
+                <a:latin typeface="Calibri" pitchFamily="34" charset="0"/>
+                <a:ea typeface="Calibri" pitchFamily="34" charset="-122"/>
+                <a:cs typeface="Calibri" pitchFamily="34" charset="-120"/>
+              </a:rPr>
+              <a:t>3</a:t>
+            </a:r>
+            <a:endParaRPr lang="en-US" sz="1400" dirty="0"/>
+          </a:p>
+        </p:txBody>
+      </p:sp>
+      <p:sp>
+        <p:nvSpPr>
+          <p:cNvPr id="17" name="Text 15"/>
+          <p:cNvSpPr/>
+          <p:nvPr/>
+        </p:nvSpPr>
+        <p:spPr>
+          <a:xfrm>
+            <a:off x="1188720" y="5641848"/>
+            <a:ext cx="3291840" cy="365760"/>
+          </a:xfrm>
+          <a:prstGeom prst="rect">
+            <a:avLst/>
+          </a:prstGeom>
+          <a:noFill/>
+          <a:ln/>
+        </p:spPr>
+        <p:txBody>
+          <a:bodyPr wrap="square" lIns="0" tIns="0" rIns="0" bIns="0" rtlCol="0" anchor="t"/>
+          <a:lstStyle/>
+          <a:p>
+            <a:pPr indent="0" marL="0">
+              <a:buNone/>
+            </a:pPr>
+            <a:r>
+              <a:rPr lang="en-US" sz="1400" b="1" dirty="0">
                 <a:solidFill>
                   <a:srgbClr val="F5F0E6"/>
                 </a:solidFill>
@@ -3769,220 +4067,48 @@
                 <a:ea typeface="Calibri" pitchFamily="34" charset="-122"/>
                 <a:cs typeface="Calibri" pitchFamily="34" charset="-120"/>
               </a:rPr>
-              <a:t>No-shows nobody recorded</a:t>
-            </a:r>
-            <a:endParaRPr lang="en-US" sz="1500" dirty="0"/>
-          </a:p>
-          <a:p>
-            <a:pPr marL="342900" indent="-342900">
-              <a:spcAft>
-                <a:spcPts val="1000"/>
-              </a:spcAft>
-              <a:buSzPct val="100000"/>
-              <a:buChar char="•"/>
-            </a:pPr>
-            <a:r>
-              <a:rPr lang="en-US" sz="1500" dirty="0">
-                <a:solidFill>
-                  <a:srgbClr val="F5F0E6"/>
-                </a:solidFill>
-                <a:latin typeface="Calibri" pitchFamily="34" charset="0"/>
-                <a:ea typeface="Calibri" pitchFamily="34" charset="-122"/>
-                <a:cs typeface="Calibri" pitchFamily="34" charset="-120"/>
-              </a:rPr>
-              <a:t>Customers must ring during service — exactly when nobody can answer</a:t>
-            </a:r>
-            <a:endParaRPr lang="en-US" sz="1500" dirty="0"/>
-          </a:p>
-        </p:txBody>
-      </p:sp>
-      <p:sp>
-        <p:nvSpPr>
-          <p:cNvPr id="7" name="Shape 5"/>
-          <p:cNvSpPr/>
-          <p:nvPr/>
-        </p:nvSpPr>
-        <p:spPr>
-          <a:xfrm>
-            <a:off x="6309360" y="1828800"/>
-            <a:ext cx="5212080" cy="3566160"/>
-          </a:xfrm>
-          <a:prstGeom prst="roundRect">
-            <a:avLst>
-              <a:gd name="adj" fmla="val 2308"/>
-            </a:avLst>
-          </a:prstGeom>
-          <a:solidFill>
-            <a:srgbClr val="102B23"/>
-          </a:solidFill>
-          <a:ln w="12700">
-            <a:solidFill>
-              <a:srgbClr val="17392E"/>
-            </a:solidFill>
-            <a:prstDash val="solid"/>
-          </a:ln>
-        </p:spPr>
-      </p:sp>
-      <p:sp>
-        <p:nvSpPr>
-          <p:cNvPr id="8" name="Text 6"/>
-          <p:cNvSpPr/>
-          <p:nvPr/>
-        </p:nvSpPr>
-        <p:spPr>
-          <a:xfrm>
-            <a:off x="6629400" y="2103120"/>
-            <a:ext cx="4572000" cy="365760"/>
-          </a:xfrm>
-          <a:prstGeom prst="rect">
-            <a:avLst/>
-          </a:prstGeom>
-          <a:noFill/>
-          <a:ln/>
-        </p:spPr>
-        <p:txBody>
-          <a:bodyPr wrap="square" lIns="0" tIns="0" rIns="0" bIns="0" rtlCol="0" anchor="ctr"/>
-          <a:lstStyle/>
-          <a:p>
-            <a:pPr indent="0" marL="0">
-              <a:buNone/>
-            </a:pPr>
-            <a:r>
-              <a:rPr lang="en-US" sz="2100" b="1" dirty="0">
-                <a:solidFill>
-                  <a:srgbClr val="C2683A"/>
-                </a:solidFill>
-                <a:latin typeface="Cambria" pitchFamily="34" charset="0"/>
-                <a:ea typeface="Cambria" pitchFamily="34" charset="-122"/>
-                <a:cs typeface="Cambria" pitchFamily="34" charset="-120"/>
-              </a:rPr>
-              <a:t>For the diner</a:t>
-            </a:r>
-            <a:endParaRPr lang="en-US" sz="2100" dirty="0"/>
-          </a:p>
-        </p:txBody>
-      </p:sp>
-      <p:sp>
-        <p:nvSpPr>
-          <p:cNvPr id="9" name="Text 7"/>
-          <p:cNvSpPr/>
-          <p:nvPr/>
-        </p:nvSpPr>
-        <p:spPr>
-          <a:xfrm>
-            <a:off x="6629400" y="2606040"/>
-            <a:ext cx="4572000" cy="2560320"/>
-          </a:xfrm>
-          <a:prstGeom prst="rect">
-            <a:avLst/>
-          </a:prstGeom>
-          <a:noFill/>
-          <a:ln/>
-        </p:spPr>
-        <p:txBody>
-          <a:bodyPr wrap="square" lIns="0" tIns="0" rIns="0" bIns="0" rtlCol="0" anchor="ctr"/>
-          <a:lstStyle/>
-          <a:p>
-            <a:pPr marL="342900" indent="-342900">
-              <a:spcAft>
-                <a:spcPts val="1000"/>
-              </a:spcAft>
-              <a:buSzPct val="100000"/>
-              <a:buChar char="•"/>
-            </a:pPr>
-            <a:r>
-              <a:rPr lang="en-US" sz="1500" dirty="0">
-                <a:solidFill>
-                  <a:srgbClr val="F5F0E6"/>
-                </a:solidFill>
-                <a:latin typeface="Calibri" pitchFamily="34" charset="0"/>
-                <a:ea typeface="Calibri" pitchFamily="34" charset="-122"/>
-                <a:cs typeface="Calibri" pitchFamily="34" charset="-120"/>
-              </a:rPr>
-              <a:t>No single place to see what is genuinely free</a:t>
-            </a:r>
-            <a:endParaRPr lang="en-US" sz="1500" dirty="0"/>
-          </a:p>
-          <a:p>
-            <a:pPr marL="342900" indent="-342900">
-              <a:spcAft>
-                <a:spcPts val="1000"/>
-              </a:spcAft>
-              <a:buSzPct val="100000"/>
-              <a:buChar char="•"/>
-            </a:pPr>
-            <a:r>
-              <a:rPr lang="en-US" sz="1500" dirty="0">
-                <a:solidFill>
-                  <a:srgbClr val="F5F0E6"/>
-                </a:solidFill>
-                <a:latin typeface="Calibri" pitchFamily="34" charset="0"/>
-                <a:ea typeface="Calibri" pitchFamily="34" charset="-122"/>
-                <a:cs typeface="Calibri" pitchFamily="34" charset="-120"/>
-              </a:rPr>
-              <a:t>Listings show a restaurant exists — not whether it can seat four at eight</a:t>
-            </a:r>
-            <a:endParaRPr lang="en-US" sz="1500" dirty="0"/>
-          </a:p>
-          <a:p>
-            <a:pPr marL="342900" indent="-342900">
-              <a:spcAft>
-                <a:spcPts val="1000"/>
-              </a:spcAft>
-              <a:buSzPct val="100000"/>
-              <a:buChar char="•"/>
-            </a:pPr>
-            <a:r>
-              <a:rPr lang="en-US" sz="1500" dirty="0">
-                <a:solidFill>
-                  <a:srgbClr val="F5F0E6"/>
-                </a:solidFill>
-                <a:latin typeface="Calibri" pitchFamily="34" charset="0"/>
-                <a:ea typeface="Calibri" pitchFamily="34" charset="-122"/>
-                <a:cs typeface="Calibri" pitchFamily="34" charset="-120"/>
-              </a:rPr>
-              <a:t>Booking means a phone call and a wait</a:t>
-            </a:r>
-            <a:endParaRPr lang="en-US" sz="1500" dirty="0"/>
-          </a:p>
-        </p:txBody>
-      </p:sp>
-      <p:sp>
-        <p:nvSpPr>
-          <p:cNvPr id="10" name="Text 8"/>
-          <p:cNvSpPr/>
-          <p:nvPr/>
-        </p:nvSpPr>
-        <p:spPr>
-          <a:xfrm>
-            <a:off x="640080" y="5669280"/>
-            <a:ext cx="10881360" cy="457200"/>
-          </a:xfrm>
-          <a:prstGeom prst="rect">
-            <a:avLst/>
-          </a:prstGeom>
-          <a:noFill/>
-          <a:ln/>
-        </p:spPr>
-        <p:txBody>
-          <a:bodyPr wrap="square" lIns="0" tIns="0" rIns="0" bIns="0" rtlCol="0" anchor="ctr"/>
-          <a:lstStyle/>
-          <a:p>
-            <a:pPr indent="0" marL="0">
-              <a:buNone/>
-            </a:pPr>
-            <a:r>
-              <a:rPr lang="en-US" sz="1900" i="1" dirty="0">
-                <a:solidFill>
-                  <a:srgbClr val="D4A937"/>
-                </a:solidFill>
-                <a:latin typeface="Cambria" pitchFamily="34" charset="0"/>
-                <a:ea typeface="Cambria" pitchFamily="34" charset="-122"/>
-                <a:cs typeface="Cambria" pitchFamily="34" charset="-120"/>
-              </a:rPr>
-              <a:t>Mesa reads the floor plan, not a waiting list.</a:t>
-            </a:r>
-            <a:endParaRPr lang="en-US" sz="1900" dirty="0"/>
+              <a:t>Multiple restaurants, not one</a:t>
+            </a:r>
+            <a:endParaRPr lang="en-US" sz="1400" dirty="0"/>
+          </a:p>
+        </p:txBody>
+      </p:sp>
+      <p:sp>
+        <p:nvSpPr>
+          <p:cNvPr id="18" name="Text 16"/>
+          <p:cNvSpPr/>
+          <p:nvPr/>
+        </p:nvSpPr>
+        <p:spPr>
+          <a:xfrm>
+            <a:off x="4572000" y="5641848"/>
+            <a:ext cx="6949440" cy="658368"/>
+          </a:xfrm>
+          <a:prstGeom prst="rect">
+            <a:avLst/>
+          </a:prstGeom>
+          <a:noFill/>
+          <a:ln/>
+        </p:spPr>
+        <p:txBody>
+          <a:bodyPr wrap="square" lIns="0" tIns="0" rIns="0" bIns="0" rtlCol="0" anchor="ctr"/>
+          <a:lstStyle/>
+          <a:p>
+            <a:pPr indent="0" marL="0">
+              <a:buNone/>
+            </a:pPr>
+            <a:r>
+              <a:rPr lang="en-US" sz="1250" dirty="0">
+                <a:solidFill>
+                  <a:srgbClr val="97B0A2"/>
+                </a:solidFill>
+                <a:latin typeface="Calibri" pitchFamily="34" charset="0"/>
+                <a:ea typeface="Calibri" pitchFamily="34" charset="-122"/>
+                <a:cs typeface="Calibri" pitchFamily="34" charset="-120"/>
+              </a:rPr>
+              <a:t>A single venue would make search trivial. Several venues also gave me a harder security problem to solve.</a:t>
+            </a:r>
+            <a:endParaRPr lang="en-US" sz="1250" dirty="0"/>
           </a:p>
         </p:txBody>
       </p:sp>
@@ -4043,7 +4169,7 @@
               <a:buNone/>
             </a:pPr>
             <a:r>
-              <a:rPr lang="en-US" sz="3800" b="1" dirty="0">
+              <a:rPr lang="en-US" sz="3600" b="1" dirty="0">
                 <a:solidFill>
                   <a:srgbClr val="F5F0E6"/>
                 </a:solidFill>
@@ -4051,9 +4177,9 @@
                 <a:ea typeface="Cambria" pitchFamily="34" charset="-122"/>
                 <a:cs typeface="Cambria" pitchFamily="34" charset="-120"/>
               </a:rPr>
-              <a:t>Two roles, one hard rule</a:t>
-            </a:r>
-            <a:endParaRPr lang="en-US" sz="3800" dirty="0"/>
+              <a:t>What it does</a:t>
+            </a:r>
+            <a:endParaRPr lang="en-US" sz="3600" dirty="0"/>
           </a:p>
         </p:txBody>
       </p:sp>
@@ -4065,7 +4191,7 @@
         </p:nvSpPr>
         <p:spPr>
           <a:xfrm>
-            <a:off x="640080" y="1207008"/>
+            <a:off x="640080" y="1188720"/>
             <a:ext cx="10881360" cy="365760"/>
           </a:xfrm>
           <a:prstGeom prst="rect">
@@ -4090,7 +4216,7 @@
                 <a:ea typeface="Calibri" pitchFamily="34" charset="-122"/>
                 <a:cs typeface="Calibri" pitchFamily="34" charset="-120"/>
               </a:rPr>
-              <a:t>Targeted user base</a:t>
+              <a:t>Two kinds of user</a:t>
             </a:r>
             <a:endParaRPr lang="en-US" sz="1400" dirty="0"/>
           </a:p>
@@ -4105,11 +4231,11 @@
         <p:spPr>
           <a:xfrm>
             <a:off x="640080" y="1828800"/>
-            <a:ext cx="5303520" cy="2286000"/>
+            <a:ext cx="5303520" cy="2194560"/>
           </a:xfrm>
           <a:prstGeom prst="roundRect">
             <a:avLst>
-              <a:gd name="adj" fmla="val 3600"/>
+              <a:gd name="adj" fmla="val 3750"/>
             </a:avLst>
           </a:prstGeom>
           <a:solidFill>
@@ -4132,33 +4258,33 @@
         <p:spPr>
           <a:xfrm>
             <a:off x="960120" y="2057400"/>
-            <a:ext cx="4663440" cy="320040"/>
-          </a:xfrm>
-          <a:prstGeom prst="rect">
-            <a:avLst/>
-          </a:prstGeom>
-          <a:noFill/>
-          <a:ln/>
-        </p:spPr>
-        <p:txBody>
-          <a:bodyPr wrap="square" lIns="0" tIns="0" rIns="0" bIns="0" rtlCol="0" anchor="ctr"/>
-          <a:lstStyle/>
-          <a:p>
-            <a:pPr indent="0" marL="0">
-              <a:buNone/>
-            </a:pPr>
-            <a:r>
-              <a:rPr lang="en-US" sz="1200" b="1" spc="200" kern="0" dirty="0">
+            <a:ext cx="4663440" cy="365760"/>
+          </a:xfrm>
+          <a:prstGeom prst="rect">
+            <a:avLst/>
+          </a:prstGeom>
+          <a:noFill/>
+          <a:ln/>
+        </p:spPr>
+        <p:txBody>
+          <a:bodyPr wrap="square" lIns="0" tIns="0" rIns="0" bIns="0" rtlCol="0" anchor="ctr"/>
+          <a:lstStyle/>
+          <a:p>
+            <a:pPr indent="0" marL="0">
+              <a:buNone/>
+            </a:pPr>
+            <a:r>
+              <a:rPr lang="en-US" sz="2000" b="1" dirty="0">
                 <a:solidFill>
                   <a:srgbClr val="D4A937"/>
                 </a:solidFill>
-                <a:latin typeface="Calibri" pitchFamily="34" charset="0"/>
-                <a:ea typeface="Calibri" pitchFamily="34" charset="-122"/>
-                <a:cs typeface="Calibri" pitchFamily="34" charset="-120"/>
-              </a:rPr>
-              <a:t>DINER</a:t>
-            </a:r>
-            <a:endParaRPr lang="en-US" sz="1200" dirty="0"/>
+                <a:latin typeface="Cambria" pitchFamily="34" charset="0"/>
+                <a:ea typeface="Cambria" pitchFamily="34" charset="-122"/>
+                <a:cs typeface="Cambria" pitchFamily="34" charset="-120"/>
+              </a:rPr>
+              <a:t>If you are booking</a:t>
+            </a:r>
+            <a:endParaRPr lang="en-US" sz="2000" dirty="0"/>
           </a:p>
         </p:txBody>
       </p:sp>
@@ -4170,24 +4296,24 @@
         </p:nvSpPr>
         <p:spPr>
           <a:xfrm>
-            <a:off x="960120" y="2468880"/>
-            <a:ext cx="4663440" cy="1371600"/>
-          </a:xfrm>
-          <a:prstGeom prst="rect">
-            <a:avLst/>
-          </a:prstGeom>
-          <a:noFill/>
-          <a:ln/>
-        </p:spPr>
-        <p:txBody>
-          <a:bodyPr wrap="square" lIns="0" tIns="0" rIns="0" bIns="0" rtlCol="0" anchor="ctr"/>
-          <a:lstStyle/>
-          <a:p>
-            <a:pPr indent="0" marL="0">
-              <a:buNone/>
-            </a:pPr>
-            <a:r>
-              <a:rPr lang="en-US" sz="1500" dirty="0">
+            <a:off x="960120" y="2514600"/>
+            <a:ext cx="4663440" cy="1280160"/>
+          </a:xfrm>
+          <a:prstGeom prst="rect">
+            <a:avLst/>
+          </a:prstGeom>
+          <a:noFill/>
+          <a:ln/>
+        </p:spPr>
+        <p:txBody>
+          <a:bodyPr wrap="square" lIns="0" tIns="0" rIns="0" bIns="0" rtlCol="0" anchor="ctr"/>
+          <a:lstStyle/>
+          <a:p>
+            <a:pPr indent="0" marL="0">
+              <a:buNone/>
+            </a:pPr>
+            <a:r>
+              <a:rPr lang="en-US" sz="1400" dirty="0">
                 <a:solidFill>
                   <a:srgbClr val="F5F0E6"/>
                 </a:solidFill>
@@ -4195,9 +4321,9 @@
                 <a:ea typeface="Calibri" pitchFamily="34" charset="-122"/>
                 <a:cs typeface="Calibri" pitchFamily="34" charset="-120"/>
               </a:rPr>
-              <a:t>Search and filter · check real availability · book · view, modify and cancel their own reservations</a:t>
-            </a:r>
-            <a:endParaRPr lang="en-US" sz="1500" dirty="0"/>
+              <a:t>Search restaurants, filter by what is genuinely free at your time and party size, book a table, then see and cancel your own bookings.</a:t>
+            </a:r>
+            <a:endParaRPr lang="en-US" sz="1400" dirty="0"/>
           </a:p>
         </p:txBody>
       </p:sp>
@@ -4210,11 +4336,11 @@
         <p:spPr>
           <a:xfrm>
             <a:off x="6309360" y="1828800"/>
-            <a:ext cx="5212080" cy="2286000"/>
+            <a:ext cx="5212080" cy="2194560"/>
           </a:xfrm>
           <a:prstGeom prst="roundRect">
             <a:avLst>
-              <a:gd name="adj" fmla="val 3600"/>
+              <a:gd name="adj" fmla="val 3750"/>
             </a:avLst>
           </a:prstGeom>
           <a:solidFill>
@@ -4237,33 +4363,33 @@
         <p:spPr>
           <a:xfrm>
             <a:off x="6629400" y="2057400"/>
-            <a:ext cx="4572000" cy="320040"/>
-          </a:xfrm>
-          <a:prstGeom prst="rect">
-            <a:avLst/>
-          </a:prstGeom>
-          <a:noFill/>
-          <a:ln/>
-        </p:spPr>
-        <p:txBody>
-          <a:bodyPr wrap="square" lIns="0" tIns="0" rIns="0" bIns="0" rtlCol="0" anchor="ctr"/>
-          <a:lstStyle/>
-          <a:p>
-            <a:pPr indent="0" marL="0">
-              <a:buNone/>
-            </a:pPr>
-            <a:r>
-              <a:rPr lang="en-US" sz="1200" b="1" spc="200" kern="0" dirty="0">
+            <a:ext cx="4572000" cy="365760"/>
+          </a:xfrm>
+          <a:prstGeom prst="rect">
+            <a:avLst/>
+          </a:prstGeom>
+          <a:noFill/>
+          <a:ln/>
+        </p:spPr>
+        <p:txBody>
+          <a:bodyPr wrap="square" lIns="0" tIns="0" rIns="0" bIns="0" rtlCol="0" anchor="ctr"/>
+          <a:lstStyle/>
+          <a:p>
+            <a:pPr indent="0" marL="0">
+              <a:buNone/>
+            </a:pPr>
+            <a:r>
+              <a:rPr lang="en-US" sz="2000" b="1" dirty="0">
                 <a:solidFill>
                   <a:srgbClr val="C2683A"/>
                 </a:solidFill>
-                <a:latin typeface="Calibri" pitchFamily="34" charset="0"/>
-                <a:ea typeface="Calibri" pitchFamily="34" charset="-122"/>
-                <a:cs typeface="Calibri" pitchFamily="34" charset="-120"/>
-              </a:rPr>
-              <a:t>MANAGER</a:t>
-            </a:r>
-            <a:endParaRPr lang="en-US" sz="1200" dirty="0"/>
+                <a:latin typeface="Cambria" pitchFamily="34" charset="0"/>
+                <a:ea typeface="Cambria" pitchFamily="34" charset="-122"/>
+                <a:cs typeface="Cambria" pitchFamily="34" charset="-120"/>
+              </a:rPr>
+              <a:t>If you run the place</a:t>
+            </a:r>
+            <a:endParaRPr lang="en-US" sz="2000" dirty="0"/>
           </a:p>
         </p:txBody>
       </p:sp>
@@ -4275,24 +4401,24 @@
         </p:nvSpPr>
         <p:spPr>
           <a:xfrm>
-            <a:off x="6629400" y="2468880"/>
-            <a:ext cx="4572000" cy="1371600"/>
-          </a:xfrm>
-          <a:prstGeom prst="rect">
-            <a:avLst/>
-          </a:prstGeom>
-          <a:noFill/>
-          <a:ln/>
-        </p:spPr>
-        <p:txBody>
-          <a:bodyPr wrap="square" lIns="0" tIns="0" rIns="0" bIns="0" rtlCol="0" anchor="ctr"/>
-          <a:lstStyle/>
-          <a:p>
-            <a:pPr indent="0" marL="0">
-              <a:buNone/>
-            </a:pPr>
-            <a:r>
-              <a:rPr lang="en-US" sz="1500" dirty="0">
+            <a:off x="6629400" y="2514600"/>
+            <a:ext cx="4572000" cy="1280160"/>
+          </a:xfrm>
+          <a:prstGeom prst="rect">
+            <a:avLst/>
+          </a:prstGeom>
+          <a:noFill/>
+          <a:ln/>
+        </p:spPr>
+        <p:txBody>
+          <a:bodyPr wrap="square" lIns="0" tIns="0" rIns="0" bIns="0" rtlCol="0" anchor="ctr"/>
+          <a:lstStyle/>
+          <a:p>
+            <a:pPr indent="0" marL="0">
+              <a:buNone/>
+            </a:pPr>
+            <a:r>
+              <a:rPr lang="en-US" sz="1400" dirty="0">
                 <a:solidFill>
                   <a:srgbClr val="F5F0E6"/>
                 </a:solidFill>
@@ -4300,9 +4426,9 @@
                 <a:ea typeface="Calibri" pitchFamily="34" charset="-122"/>
                 <a:cs typeface="Calibri" pitchFamily="34" charset="-120"/>
               </a:rPr>
-              <a:t>Everything a diner can, plus their own venue: tables, the reservation queue, service statuses and the dashboard</a:t>
-            </a:r>
-            <a:endParaRPr lang="en-US" sz="1500" dirty="0"/>
+              <a:t>See tonight's bookings, mark people seated or as no-shows, and check covers, occupancy and no-show rate on a dashboard.</a:t>
+            </a:r>
+            <a:endParaRPr lang="en-US" sz="1400" dirty="0"/>
           </a:p>
         </p:txBody>
       </p:sp>
@@ -4314,12 +4440,12 @@
         </p:nvSpPr>
         <p:spPr>
           <a:xfrm>
-            <a:off x="640080" y="4389120"/>
-            <a:ext cx="10881360" cy="1737360"/>
+            <a:off x="640080" y="4297680"/>
+            <a:ext cx="10881360" cy="1828800"/>
           </a:xfrm>
           <a:prstGeom prst="roundRect">
             <a:avLst>
-              <a:gd name="adj" fmla="val 4737"/>
+              <a:gd name="adj" fmla="val 4500"/>
             </a:avLst>
           </a:prstGeom>
           <a:solidFill>
@@ -4341,7 +4467,7 @@
         </p:nvSpPr>
         <p:spPr>
           <a:xfrm>
-            <a:off x="960120" y="4617720"/>
+            <a:off x="960120" y="4526280"/>
             <a:ext cx="10241280" cy="365760"/>
           </a:xfrm>
           <a:prstGeom prst="rect">
@@ -4358,7 +4484,7 @@
               <a:buNone/>
             </a:pPr>
             <a:r>
-              <a:rPr lang="en-US" sz="2100" b="1" dirty="0">
+              <a:rPr lang="en-US" sz="2000" b="1" dirty="0">
                 <a:solidFill>
                   <a:srgbClr val="F5D77A"/>
                 </a:solidFill>
@@ -4366,9 +4492,9 @@
                 <a:ea typeface="Cambria" pitchFamily="34" charset="-122"/>
                 <a:cs typeface="Cambria" pitchFamily="34" charset="-120"/>
               </a:rPr>
-              <a:t>Role alone is not enough</a:t>
-            </a:r>
-            <a:endParaRPr lang="en-US" sz="2100" dirty="0"/>
+              <a:t>The rule I spent the most time on</a:t>
+            </a:r>
+            <a:endParaRPr lang="en-US" sz="2000" dirty="0"/>
           </a:p>
         </p:txBody>
       </p:sp>
@@ -4380,24 +4506,24 @@
         </p:nvSpPr>
         <p:spPr>
           <a:xfrm>
-            <a:off x="960120" y="5029200"/>
-            <a:ext cx="10241280" cy="822960"/>
-          </a:xfrm>
-          <a:prstGeom prst="rect">
-            <a:avLst/>
-          </a:prstGeom>
-          <a:noFill/>
-          <a:ln/>
-        </p:spPr>
-        <p:txBody>
-          <a:bodyPr wrap="square" lIns="0" tIns="0" rIns="0" bIns="0" rtlCol="0" anchor="ctr"/>
-          <a:lstStyle/>
-          <a:p>
-            <a:pPr indent="0" marL="0">
-              <a:buNone/>
-            </a:pPr>
-            <a:r>
-              <a:rPr lang="en-US" sz="1500" dirty="0">
+            <a:off x="960120" y="4983480"/>
+            <a:ext cx="10241280" cy="914400"/>
+          </a:xfrm>
+          <a:prstGeom prst="rect">
+            <a:avLst/>
+          </a:prstGeom>
+          <a:noFill/>
+          <a:ln/>
+        </p:spPr>
+        <p:txBody>
+          <a:bodyPr wrap="square" lIns="0" tIns="0" rIns="0" bIns="0" rtlCol="0" anchor="ctr"/>
+          <a:lstStyle/>
+          <a:p>
+            <a:pPr indent="0" marL="0">
+              <a:buNone/>
+            </a:pPr>
+            <a:r>
+              <a:rPr lang="en-US" sz="1400" dirty="0">
                 <a:solidFill>
                   <a:srgbClr val="F5F0E6"/>
                 </a:solidFill>
@@ -4405,9 +4531,9 @@
                 <a:ea typeface="Calibri" pitchFamily="34" charset="-122"/>
                 <a:cs typeface="Calibri" pitchFamily="34" charset="-120"/>
               </a:rPr>
-              <a:t>A manager may act only on the venue they own. Cross-venue requests return 404, never 403 — the API must not confirm the existence of records the caller is not allowed to see.</a:t>
-            </a:r>
-            <a:endParaRPr lang="en-US" sz="1500" dirty="0"/>
+              <a:t>A manager can only touch their own restaurant. My first version just checked "are you a manager?" — which meant any manager could read every other restaurant's bookings. Checking the role is not the same as checking ownership, and that took me a while to see.</a:t>
+            </a:r>
+            <a:endParaRPr lang="en-US" sz="1400" dirty="0"/>
           </a:p>
         </p:txBody>
       </p:sp>
@@ -4468,7 +4594,7 @@
               <a:buNone/>
             </a:pPr>
             <a:r>
-              <a:rPr lang="en-US" sz="3800" b="1" dirty="0">
+              <a:rPr lang="en-US" sz="3600" b="1" dirty="0">
                 <a:solidFill>
                   <a:srgbClr val="F5F0E6"/>
                 </a:solidFill>
@@ -4476,9 +4602,9 @@
                 <a:ea typeface="Cambria" pitchFamily="34" charset="-122"/>
                 <a:cs typeface="Cambria" pitchFamily="34" charset="-120"/>
               </a:rPr>
-              <a:t>Architecture</a:t>
-            </a:r>
-            <a:endParaRPr lang="en-US" sz="3800" dirty="0"/>
+              <a:t>How it is put together</a:t>
+            </a:r>
+            <a:endParaRPr lang="en-US" sz="3600" dirty="0"/>
           </a:p>
         </p:txBody>
       </p:sp>
@@ -4490,7 +4616,7 @@
         </p:nvSpPr>
         <p:spPr>
           <a:xfrm>
-            <a:off x="640080" y="1207008"/>
+            <a:off x="640080" y="1188720"/>
             <a:ext cx="10881360" cy="365760"/>
           </a:xfrm>
           <a:prstGeom prst="rect">
@@ -4515,7 +4641,7 @@
                 <a:ea typeface="Calibri" pitchFamily="34" charset="-122"/>
                 <a:cs typeface="Calibri" pitchFamily="34" charset="-120"/>
               </a:rPr>
-              <a:t>Each layer depends only on the one beneath it</a:t>
+              <a:t>React talks to an Express API, which talks to the database through Prisma</a:t>
             </a:r>
             <a:endParaRPr lang="en-US" sz="1400" dirty="0"/>
           </a:p>
@@ -4530,11 +4656,11 @@
         <p:spPr>
           <a:xfrm>
             <a:off x="640080" y="1828800"/>
-            <a:ext cx="7680960" cy="713232"/>
+            <a:ext cx="7498080" cy="694944"/>
           </a:xfrm>
           <a:prstGeom prst="roundRect">
             <a:avLst>
-              <a:gd name="adj" fmla="val 11538"/>
+              <a:gd name="adj" fmla="val 11842"/>
             </a:avLst>
           </a:prstGeom>
           <a:solidFill>
@@ -4556,8 +4682,8 @@
         </p:nvSpPr>
         <p:spPr>
           <a:xfrm>
-            <a:off x="914400" y="1901952"/>
-            <a:ext cx="7132320" cy="292608"/>
+            <a:off x="914400" y="1892808"/>
+            <a:ext cx="6949440" cy="292608"/>
           </a:xfrm>
           <a:prstGeom prst="rect">
             <a:avLst/>
@@ -4581,7 +4707,7 @@
                 <a:ea typeface="Calibri" pitchFamily="34" charset="-122"/>
                 <a:cs typeface="Calibri" pitchFamily="34" charset="-120"/>
               </a:rPr>
-              <a:t>React SPA (Vite)</a:t>
+              <a:t>React front end</a:t>
             </a:r>
             <a:endParaRPr lang="en-US" sz="1500" dirty="0"/>
           </a:p>
@@ -4595,8 +4721,8 @@
         </p:nvSpPr>
         <p:spPr>
           <a:xfrm>
-            <a:off x="914400" y="2212848"/>
-            <a:ext cx="7132320" cy="256032"/>
+            <a:off x="914400" y="2194560"/>
+            <a:ext cx="6949440" cy="256032"/>
           </a:xfrm>
           <a:prstGeom prst="rect">
             <a:avLst/>
@@ -4620,7 +4746,7 @@
                 <a:ea typeface="Calibri" pitchFamily="34" charset="-122"/>
                 <a:cs typeface="Calibri" pitchFamily="34" charset="-120"/>
               </a:rPr>
-              <a:t>Pages · Components · Context · Router guards</a:t>
+              <a:t>Pages, components, Context for login state</a:t>
             </a:r>
             <a:endParaRPr lang="en-US" sz="1200" dirty="0"/>
           </a:p>
@@ -4634,7 +4760,7 @@
         </p:nvSpPr>
         <p:spPr>
           <a:xfrm>
-            <a:off x="4480560" y="2542032"/>
+            <a:off x="4389120" y="2523744"/>
             <a:ext cx="0" cy="128016"/>
           </a:xfrm>
           <a:prstGeom prst="line">
@@ -4658,12 +4784,12 @@
         </p:nvSpPr>
         <p:spPr>
           <a:xfrm>
-            <a:off x="640080" y="2670048"/>
-            <a:ext cx="7680960" cy="713232"/>
+            <a:off x="640080" y="2651760"/>
+            <a:ext cx="7498080" cy="694944"/>
           </a:xfrm>
           <a:prstGeom prst="roundRect">
             <a:avLst>
-              <a:gd name="adj" fmla="val 11538"/>
+              <a:gd name="adj" fmla="val 11842"/>
             </a:avLst>
           </a:prstGeom>
           <a:solidFill>
@@ -4685,8 +4811,8 @@
         </p:nvSpPr>
         <p:spPr>
           <a:xfrm>
-            <a:off x="914400" y="2743200"/>
-            <a:ext cx="7132320" cy="292608"/>
+            <a:off x="914400" y="2715768"/>
+            <a:ext cx="6949440" cy="292608"/>
           </a:xfrm>
           <a:prstGeom prst="rect">
             <a:avLst/>
@@ -4724,8 +4850,8 @@
         </p:nvSpPr>
         <p:spPr>
           <a:xfrm>
-            <a:off x="914400" y="3054096"/>
-            <a:ext cx="7132320" cy="256032"/>
+            <a:off x="914400" y="3017520"/>
+            <a:ext cx="6949440" cy="256032"/>
           </a:xfrm>
           <a:prstGeom prst="rect">
             <a:avLst/>
@@ -4749,7 +4875,7 @@
                 <a:ea typeface="Calibri" pitchFamily="34" charset="-122"/>
                 <a:cs typeface="Calibri" pitchFamily="34" charset="-120"/>
               </a:rPr>
-              <a:t>requestId → helmet → CORS → rate limit → auth</a:t>
+              <a:t>Request id, security headers, rate limits, then check the token</a:t>
             </a:r>
             <a:endParaRPr lang="en-US" sz="1200" dirty="0"/>
           </a:p>
@@ -4763,7 +4889,7 @@
         </p:nvSpPr>
         <p:spPr>
           <a:xfrm>
-            <a:off x="4480560" y="3383280"/>
+            <a:off x="4389120" y="3346704"/>
             <a:ext cx="0" cy="128016"/>
           </a:xfrm>
           <a:prstGeom prst="line">
@@ -4787,12 +4913,12 @@
         </p:nvSpPr>
         <p:spPr>
           <a:xfrm>
-            <a:off x="640080" y="3511296"/>
-            <a:ext cx="7680960" cy="713232"/>
+            <a:off x="640080" y="3474720"/>
+            <a:ext cx="7498080" cy="694944"/>
           </a:xfrm>
           <a:prstGeom prst="roundRect">
             <a:avLst>
-              <a:gd name="adj" fmla="val 11538"/>
+              <a:gd name="adj" fmla="val 11842"/>
             </a:avLst>
           </a:prstGeom>
           <a:solidFill>
@@ -4814,8 +4940,8 @@
         </p:nvSpPr>
         <p:spPr>
           <a:xfrm>
-            <a:off x="914400" y="3584448"/>
-            <a:ext cx="7132320" cy="292608"/>
+            <a:off x="914400" y="3538728"/>
+            <a:ext cx="6949440" cy="292608"/>
           </a:xfrm>
           <a:prstGeom prst="rect">
             <a:avLst/>
@@ -4853,8 +4979,8 @@
         </p:nvSpPr>
         <p:spPr>
           <a:xfrm>
-            <a:off x="914400" y="3895344"/>
-            <a:ext cx="7132320" cy="256032"/>
+            <a:off x="914400" y="3840480"/>
+            <a:ext cx="6949440" cy="256032"/>
           </a:xfrm>
           <a:prstGeom prst="rect">
             <a:avLst/>
@@ -4878,7 +5004,7 @@
                 <a:ea typeface="Calibri" pitchFamily="34" charset="-122"/>
                 <a:cs typeface="Calibri" pitchFamily="34" charset="-120"/>
               </a:rPr>
-              <a:t>auth · restaurants · reservations · stats</a:t>
+              <a:t>Where the actual logic lives</a:t>
             </a:r>
             <a:endParaRPr lang="en-US" sz="1200" dirty="0"/>
           </a:p>
@@ -4892,7 +5018,7 @@
         </p:nvSpPr>
         <p:spPr>
           <a:xfrm>
-            <a:off x="4480560" y="4224528"/>
+            <a:off x="4389120" y="4169664"/>
             <a:ext cx="0" cy="128016"/>
           </a:xfrm>
           <a:prstGeom prst="line">
@@ -4916,12 +5042,12 @@
         </p:nvSpPr>
         <p:spPr>
           <a:xfrm>
-            <a:off x="640080" y="4352544"/>
-            <a:ext cx="7680960" cy="713232"/>
+            <a:off x="640080" y="4297680"/>
+            <a:ext cx="7498080" cy="694944"/>
           </a:xfrm>
           <a:prstGeom prst="roundRect">
             <a:avLst>
-              <a:gd name="adj" fmla="val 11538"/>
+              <a:gd name="adj" fmla="val 11842"/>
             </a:avLst>
           </a:prstGeom>
           <a:solidFill>
@@ -4943,8 +5069,8 @@
         </p:nvSpPr>
         <p:spPr>
           <a:xfrm>
-            <a:off x="914400" y="4425696"/>
-            <a:ext cx="7132320" cy="292608"/>
+            <a:off x="914400" y="4361688"/>
+            <a:ext cx="6949440" cy="292608"/>
           </a:xfrm>
           <a:prstGeom prst="rect">
             <a:avLst/>
@@ -4968,7 +5094,7 @@
                 <a:ea typeface="Calibri" pitchFamily="34" charset="-122"/>
                 <a:cs typeface="Calibri" pitchFamily="34" charset="-120"/>
               </a:rPr>
-              <a:t>lib/availability.js — pure, no I/O</a:t>
+              <a:t>availability.js</a:t>
             </a:r>
             <a:endParaRPr lang="en-US" sz="1500" dirty="0"/>
           </a:p>
@@ -4982,8 +5108,8 @@
         </p:nvSpPr>
         <p:spPr>
           <a:xfrm>
-            <a:off x="914400" y="4736592"/>
-            <a:ext cx="7132320" cy="256032"/>
+            <a:off x="914400" y="4663440"/>
+            <a:ext cx="6949440" cy="256032"/>
           </a:xfrm>
           <a:prstGeom prst="rect">
             <a:avLst/>
@@ -5007,7 +5133,7 @@
                 <a:ea typeface="Calibri" pitchFamily="34" charset="-122"/>
                 <a:cs typeface="Calibri" pitchFamily="34" charset="-120"/>
               </a:rPr>
-              <a:t>The booking engine. No Prisma, no Express, no clock.</a:t>
+              <a:t>The booking rules. No database, no Express — just functions.</a:t>
             </a:r>
             <a:endParaRPr lang="en-US" sz="1200" dirty="0"/>
           </a:p>
@@ -5021,7 +5147,7 @@
         </p:nvSpPr>
         <p:spPr>
           <a:xfrm>
-            <a:off x="4480560" y="5065776"/>
+            <a:off x="4389120" y="4992624"/>
             <a:ext cx="0" cy="128016"/>
           </a:xfrm>
           <a:prstGeom prst="line">
@@ -5045,12 +5171,12 @@
         </p:nvSpPr>
         <p:spPr>
           <a:xfrm>
-            <a:off x="640080" y="5193792"/>
-            <a:ext cx="7680960" cy="713232"/>
+            <a:off x="640080" y="5120640"/>
+            <a:ext cx="7498080" cy="694944"/>
           </a:xfrm>
           <a:prstGeom prst="roundRect">
             <a:avLst>
-              <a:gd name="adj" fmla="val 11538"/>
+              <a:gd name="adj" fmla="val 11842"/>
             </a:avLst>
           </a:prstGeom>
           <a:solidFill>
@@ -5072,8 +5198,8 @@
         </p:nvSpPr>
         <p:spPr>
           <a:xfrm>
-            <a:off x="914400" y="5266944"/>
-            <a:ext cx="7132320" cy="292608"/>
+            <a:off x="914400" y="5184648"/>
+            <a:ext cx="6949440" cy="292608"/>
           </a:xfrm>
           <a:prstGeom prst="rect">
             <a:avLst/>
@@ -5097,7 +5223,7 @@
                 <a:ea typeface="Calibri" pitchFamily="34" charset="-122"/>
                 <a:cs typeface="Calibri" pitchFamily="34" charset="-120"/>
               </a:rPr>
-              <a:t>Prisma ORM → SQLite / PostgreSQL</a:t>
+              <a:t>Prisma → SQLite</a:t>
             </a:r>
             <a:endParaRPr lang="en-US" sz="1500" dirty="0"/>
           </a:p>
@@ -5111,8 +5237,8 @@
         </p:nvSpPr>
         <p:spPr>
           <a:xfrm>
-            <a:off x="914400" y="5577840"/>
-            <a:ext cx="7132320" cy="256032"/>
+            <a:off x="914400" y="5486400"/>
+            <a:ext cx="6949440" cy="256032"/>
           </a:xfrm>
           <a:prstGeom prst="rect">
             <a:avLst/>
@@ -5136,7 +5262,7 @@
                 <a:ea typeface="Calibri" pitchFamily="34" charset="-122"/>
                 <a:cs typeface="Calibri" pitchFamily="34" charset="-120"/>
               </a:rPr>
-              <a:t>Schema in version control, portable</a:t>
+              <a:t>Would be PostgreSQL if I deployed it</a:t>
             </a:r>
             <a:endParaRPr lang="en-US" sz="1200" dirty="0"/>
           </a:p>
@@ -5150,12 +5276,12 @@
         </p:nvSpPr>
         <p:spPr>
           <a:xfrm>
-            <a:off x="8686800" y="1828800"/>
-            <a:ext cx="2834640" cy="4206240"/>
+            <a:off x="8503920" y="1828800"/>
+            <a:ext cx="3017520" cy="4114800"/>
           </a:xfrm>
           <a:prstGeom prst="roundRect">
             <a:avLst>
-              <a:gd name="adj" fmla="val 2903"/>
+              <a:gd name="adj" fmla="val 2727"/>
             </a:avLst>
           </a:prstGeom>
           <a:solidFill>
@@ -5177,24 +5303,24 @@
         </p:nvSpPr>
         <p:spPr>
           <a:xfrm>
-            <a:off x="8961120" y="2057400"/>
-            <a:ext cx="2286000" cy="320040"/>
-          </a:xfrm>
-          <a:prstGeom prst="rect">
-            <a:avLst/>
-          </a:prstGeom>
-          <a:noFill/>
-          <a:ln/>
-        </p:spPr>
-        <p:txBody>
-          <a:bodyPr wrap="square" lIns="0" tIns="0" rIns="0" bIns="0" rtlCol="0" anchor="ctr"/>
-          <a:lstStyle/>
-          <a:p>
-            <a:pPr indent="0" marL="0">
-              <a:buNone/>
-            </a:pPr>
-            <a:r>
-              <a:rPr lang="en-US" sz="1800" b="1" dirty="0">
+            <a:off x="8778240" y="2057400"/>
+            <a:ext cx="2468880" cy="320040"/>
+          </a:xfrm>
+          <a:prstGeom prst="rect">
+            <a:avLst/>
+          </a:prstGeom>
+          <a:noFill/>
+          <a:ln/>
+        </p:spPr>
+        <p:txBody>
+          <a:bodyPr wrap="square" lIns="0" tIns="0" rIns="0" bIns="0" rtlCol="0" anchor="ctr"/>
+          <a:lstStyle/>
+          <a:p>
+            <a:pPr indent="0" marL="0">
+              <a:buNone/>
+            </a:pPr>
+            <a:r>
+              <a:rPr lang="en-US" sz="1700" b="1" dirty="0">
                 <a:solidFill>
                   <a:srgbClr val="D4A937"/>
                 </a:solidFill>
@@ -5202,9 +5328,9 @@
                 <a:ea typeface="Cambria" pitchFamily="34" charset="-122"/>
                 <a:cs typeface="Cambria" pitchFamily="34" charset="-120"/>
               </a:rPr>
-              <a:t>The rule</a:t>
-            </a:r>
-            <a:endParaRPr lang="en-US" sz="1800" dirty="0"/>
+              <a:t>Why in layers</a:t>
+            </a:r>
+            <a:endParaRPr lang="en-US" sz="1700" dirty="0"/>
           </a:p>
         </p:txBody>
       </p:sp>
@@ -5216,24 +5342,24 @@
         </p:nvSpPr>
         <p:spPr>
           <a:xfrm>
-            <a:off x="8961120" y="2514600"/>
-            <a:ext cx="2286000" cy="3291840"/>
-          </a:xfrm>
-          <a:prstGeom prst="rect">
-            <a:avLst/>
-          </a:prstGeom>
-          <a:noFill/>
-          <a:ln/>
-        </p:spPr>
-        <p:txBody>
-          <a:bodyPr wrap="square" lIns="0" tIns="0" rIns="0" bIns="0" rtlCol="0" anchor="ctr"/>
-          <a:lstStyle/>
-          <a:p>
-            <a:pPr indent="0" marL="0">
-              <a:buNone/>
-            </a:pPr>
-            <a:r>
-              <a:rPr lang="en-US" sz="1300" dirty="0">
+            <a:off x="8778240" y="2514600"/>
+            <a:ext cx="2468880" cy="3200400"/>
+          </a:xfrm>
+          <a:prstGeom prst="rect">
+            <a:avLst/>
+          </a:prstGeom>
+          <a:noFill/>
+          <a:ln/>
+        </p:spPr>
+        <p:txBody>
+          <a:bodyPr wrap="square" lIns="0" tIns="0" rIns="0" bIns="0" rtlCol="0" anchor="ctr"/>
+          <a:lstStyle/>
+          <a:p>
+            <a:pPr indent="0" marL="0">
+              <a:buNone/>
+            </a:pPr>
+            <a:r>
+              <a:rPr lang="en-US" sz="1250" dirty="0">
                 <a:solidFill>
                   <a:srgbClr val="F5F0E6"/>
                 </a:solidFill>
@@ -5241,22 +5367,22 @@
                 <a:ea typeface="Calibri" pitchFamily="34" charset="-122"/>
                 <a:cs typeface="Calibri" pitchFamily="34" charset="-120"/>
               </a:rPr>
-              <a:t>Routes never touch Prisma.</a:t>
-            </a:r>
-            <a:endParaRPr lang="en-US" sz="1300" dirty="0"/>
-          </a:p>
-          <a:p>
-            <a:pPr indent="0" marL="0">
-              <a:buNone/>
-            </a:pPr>
-            <a:endParaRPr lang="en-US" sz="1300" dirty="0"/>
-          </a:p>
-          <a:p>
-            <a:pPr indent="0" marL="0">
-              <a:buNone/>
-            </a:pPr>
-            <a:r>
-              <a:rPr lang="en-US" sz="1300" dirty="0">
+              <a:t>I kept the routes away from the database and the logic away from requests and responses.</a:t>
+            </a:r>
+            <a:endParaRPr lang="en-US" sz="1250" dirty="0"/>
+          </a:p>
+          <a:p>
+            <a:pPr indent="0" marL="0">
+              <a:buNone/>
+            </a:pPr>
+            <a:endParaRPr lang="en-US" sz="1250" dirty="0"/>
+          </a:p>
+          <a:p>
+            <a:pPr indent="0" marL="0">
+              <a:buNone/>
+            </a:pPr>
+            <a:r>
+              <a:rPr lang="en-US" sz="1250" dirty="0">
                 <a:solidFill>
                   <a:srgbClr val="F5F0E6"/>
                 </a:solidFill>
@@ -5264,32 +5390,9 @@
                 <a:ea typeface="Calibri" pitchFamily="34" charset="-122"/>
                 <a:cs typeface="Calibri" pitchFamily="34" charset="-120"/>
               </a:rPr>
-              <a:t>Services never touch req or res.</a:t>
-            </a:r>
-            <a:endParaRPr lang="en-US" sz="1300" dirty="0"/>
-          </a:p>
-          <a:p>
-            <a:pPr indent="0" marL="0">
-              <a:buNone/>
-            </a:pPr>
-            <a:endParaRPr lang="en-US" sz="1300" dirty="0"/>
-          </a:p>
-          <a:p>
-            <a:pPr indent="0" marL="0">
-              <a:buNone/>
-            </a:pPr>
-            <a:r>
-              <a:rPr lang="en-US" sz="1300" dirty="0">
-                <a:solidFill>
-                  <a:srgbClr val="F5F0E6"/>
-                </a:solidFill>
-                <a:latin typeface="Calibri" pitchFamily="34" charset="0"/>
-                <a:ea typeface="Calibri" pitchFamily="34" charset="-122"/>
-                <a:cs typeface="Calibri" pitchFamily="34" charset="-120"/>
-              </a:rPr>
-              <a:t>That boundary is why the services are testable and why swapping SQLite for PostgreSQL is a connection string.</a:t>
-            </a:r>
-            <a:endParaRPr lang="en-US" sz="1300" dirty="0"/>
+              <a:t>The reason is the fourth box: because the booking rules do not touch anything, I can test them directly without starting a server.</a:t>
+            </a:r>
+            <a:endParaRPr lang="en-US" sz="1250" dirty="0"/>
           </a:p>
         </p:txBody>
       </p:sp>
@@ -5350,7 +5453,7 @@
               <a:buNone/>
             </a:pPr>
             <a:r>
-              <a:rPr lang="en-US" sz="3800" b="1" dirty="0">
+              <a:rPr lang="en-US" sz="3600" b="1" dirty="0">
                 <a:solidFill>
                   <a:srgbClr val="F5F0E6"/>
                 </a:solidFill>
@@ -5358,9 +5461,9 @@
                 <a:ea typeface="Cambria" pitchFamily="34" charset="-122"/>
                 <a:cs typeface="Cambria" pitchFamily="34" charset="-120"/>
               </a:rPr>
-              <a:t>The hard part</a:t>
-            </a:r>
-            <a:endParaRPr lang="en-US" sz="3800" dirty="0"/>
+              <a:t>The bit that was actually difficult</a:t>
+            </a:r>
+            <a:endParaRPr lang="en-US" sz="3600" dirty="0"/>
           </a:p>
         </p:txBody>
       </p:sp>
@@ -5372,7 +5475,7 @@
         </p:nvSpPr>
         <p:spPr>
           <a:xfrm>
-            <a:off x="640080" y="1207008"/>
+            <a:off x="640080" y="1188720"/>
             <a:ext cx="10881360" cy="365760"/>
           </a:xfrm>
           <a:prstGeom prst="rect">
@@ -5397,7 +5500,7 @@
                 <a:ea typeface="Calibri" pitchFamily="34" charset="-122"/>
                 <a:cs typeface="Calibri" pitchFamily="34" charset="-120"/>
               </a:rPr>
-              <a:t>Conflict detection, and why it is not obvious</a:t>
+              <a:t>Deciding whether a table is free</a:t>
             </a:r>
             <a:endParaRPr lang="en-US" sz="1400" dirty="0"/>
           </a:p>
@@ -5411,12 +5514,12 @@
         </p:nvSpPr>
         <p:spPr>
           <a:xfrm>
-            <a:off x="640080" y="1828800"/>
-            <a:ext cx="10881360" cy="1234440"/>
+            <a:off x="640080" y="1783080"/>
+            <a:ext cx="10881360" cy="1097280"/>
           </a:xfrm>
           <a:prstGeom prst="roundRect">
             <a:avLst>
-              <a:gd name="adj" fmla="val 6667"/>
+              <a:gd name="adj" fmla="val 7500"/>
             </a:avLst>
           </a:prstGeom>
           <a:solidFill>
@@ -5438,24 +5541,24 @@
         </p:nvSpPr>
         <p:spPr>
           <a:xfrm>
-            <a:off x="960120" y="2148840"/>
-            <a:ext cx="10241280" cy="548640"/>
-          </a:xfrm>
-          <a:prstGeom prst="rect">
-            <a:avLst/>
-          </a:prstGeom>
-          <a:noFill/>
-          <a:ln/>
-        </p:spPr>
-        <p:txBody>
-          <a:bodyPr wrap="square" lIns="0" tIns="0" rIns="0" bIns="0" rtlCol="0" anchor="ctr"/>
-          <a:lstStyle/>
-          <a:p>
-            <a:pPr indent="0" marL="0">
-              <a:buNone/>
-            </a:pPr>
-            <a:r>
-              <a:rPr lang="en-US" sz="2000" b="1" dirty="0">
+            <a:off x="960120" y="2057400"/>
+            <a:ext cx="10241280" cy="502920"/>
+          </a:xfrm>
+          <a:prstGeom prst="rect">
+            <a:avLst/>
+          </a:prstGeom>
+          <a:noFill/>
+          <a:ln/>
+        </p:spPr>
+        <p:txBody>
+          <a:bodyPr wrap="square" lIns="0" tIns="0" rIns="0" bIns="0" rtlCol="0" anchor="ctr"/>
+          <a:lstStyle/>
+          <a:p>
+            <a:pPr indent="0" marL="0">
+              <a:buNone/>
+            </a:pPr>
+            <a:r>
+              <a:rPr lang="en-US" sz="2100" b="1" dirty="0">
                 <a:solidFill>
                   <a:srgbClr val="F5D77A"/>
                 </a:solidFill>
@@ -5463,22 +5566,61 @@
                 <a:ea typeface="Courier New" pitchFamily="34" charset="-122"/>
                 <a:cs typeface="Courier New" pitchFamily="34" charset="-120"/>
               </a:rPr>
-              <a:t>overlaps(a, b)  =  a.startsAt &lt; b.endsAt  &amp;&amp;  a.endsAt &gt; b.startsAt</a:t>
-            </a:r>
-            <a:endParaRPr lang="en-US" sz="2000" dirty="0"/>
-          </a:p>
-        </p:txBody>
-      </p:sp>
-      <p:sp>
-        <p:nvSpPr>
-          <p:cNvPr id="6" name="Shape 4"/>
-          <p:cNvSpPr/>
-          <p:nvPr/>
-        </p:nvSpPr>
-        <p:spPr>
-          <a:xfrm>
-            <a:off x="640080" y="3383280"/>
-            <a:ext cx="411480" cy="411480"/>
+              <a:t>a.startsAt &lt; b.endsAt  &amp;&amp;  a.endsAt &gt; b.startsAt</a:t>
+            </a:r>
+            <a:endParaRPr lang="en-US" sz="2100" dirty="0"/>
+          </a:p>
+        </p:txBody>
+      </p:sp>
+      <p:sp>
+        <p:nvSpPr>
+          <p:cNvPr id="6" name="Text 4"/>
+          <p:cNvSpPr/>
+          <p:nvPr/>
+        </p:nvSpPr>
+        <p:spPr>
+          <a:xfrm>
+            <a:off x="640080" y="3063240"/>
+            <a:ext cx="10881360" cy="320040"/>
+          </a:xfrm>
+          <a:prstGeom prst="rect">
+            <a:avLst/>
+          </a:prstGeom>
+          <a:noFill/>
+          <a:ln/>
+        </p:spPr>
+        <p:txBody>
+          <a:bodyPr wrap="square" lIns="0" tIns="0" rIns="0" bIns="0" rtlCol="0" anchor="ctr"/>
+          <a:lstStyle/>
+          <a:p>
+            <a:pPr indent="0" marL="0">
+              <a:buNone/>
+            </a:pPr>
+            <a:r>
+              <a:rPr lang="en-US" sz="1400" i="1" dirty="0">
+                <a:solidFill>
+                  <a:srgbClr val="97B0A2"/>
+                </a:solidFill>
+                <a:latin typeface="Calibri" pitchFamily="34" charset="0"/>
+                <a:ea typeface="Calibri" pitchFamily="34" charset="-122"/>
+                <a:cs typeface="Calibri" pitchFamily="34" charset="-120"/>
+              </a:rPr>
+              <a:t>One line, but I got each part of it wrong at least once:</a:t>
+            </a:r>
+            <a:endParaRPr lang="en-US" sz="1400" dirty="0"/>
+          </a:p>
+        </p:txBody>
+      </p:sp>
+      <p:sp>
+        <p:nvSpPr>
+          <p:cNvPr id="7" name="Shape 5"/>
+          <p:cNvSpPr/>
+          <p:nvPr/>
+        </p:nvSpPr>
+        <p:spPr>
+          <a:xfrm>
+            <a:off x="640080" y="3520440"/>
+            <a:ext cx="420624" cy="420624"/>
           </a:xfrm>
           <a:prstGeom prst="ellipse">
             <a:avLst/>
@@ -5491,14 +5633,14 @@
       </p:sp>
       <p:sp>
         <p:nvSpPr>
-          <p:cNvPr id="7" name="Text 5"/>
-          <p:cNvSpPr/>
-          <p:nvPr/>
-        </p:nvSpPr>
-        <p:spPr>
-          <a:xfrm>
-            <a:off x="640080" y="3383280"/>
-            <a:ext cx="411480" cy="411480"/>
+          <p:cNvPr id="8" name="Text 6"/>
+          <p:cNvSpPr/>
+          <p:nvPr/>
+        </p:nvSpPr>
+        <p:spPr>
+          <a:xfrm>
+            <a:off x="640080" y="3520440"/>
+            <a:ext cx="420624" cy="420624"/>
           </a:xfrm>
           <a:prstGeom prst="rect">
             <a:avLst/>
@@ -5514,15 +5656,54 @@
               <a:buNone/>
             </a:pPr>
             <a:r>
+              <a:rPr lang="en-US" sz="1400" b="1" dirty="0">
+                <a:solidFill>
+                  <a:srgbClr val="071310"/>
+                </a:solidFill>
+                <a:latin typeface="Calibri" pitchFamily="34" charset="0"/>
+                <a:ea typeface="Calibri" pitchFamily="34" charset="-122"/>
+                <a:cs typeface="Calibri" pitchFamily="34" charset="-120"/>
+              </a:rPr>
+              <a:t>1</a:t>
+            </a:r>
+            <a:endParaRPr lang="en-US" sz="1400" dirty="0"/>
+          </a:p>
+        </p:txBody>
+      </p:sp>
+      <p:sp>
+        <p:nvSpPr>
+          <p:cNvPr id="9" name="Text 7"/>
+          <p:cNvSpPr/>
+          <p:nvPr/>
+        </p:nvSpPr>
+        <p:spPr>
+          <a:xfrm>
+            <a:off x="1188720" y="3483864"/>
+            <a:ext cx="10241280" cy="310896"/>
+          </a:xfrm>
+          <a:prstGeom prst="rect">
+            <a:avLst/>
+          </a:prstGeom>
+          <a:noFill/>
+          <a:ln/>
+        </p:spPr>
+        <p:txBody>
+          <a:bodyPr wrap="square" lIns="0" tIns="0" rIns="0" bIns="0" rtlCol="0" anchor="ctr"/>
+          <a:lstStyle/>
+          <a:p>
+            <a:pPr indent="0" marL="0">
+              <a:buNone/>
+            </a:pPr>
+            <a:r>
               <a:rPr lang="en-US" sz="1500" b="1" dirty="0">
                 <a:solidFill>
-                  <a:srgbClr val="071310"/>
-                </a:solidFill>
-                <a:latin typeface="Calibri" pitchFamily="34" charset="0"/>
-                <a:ea typeface="Calibri" pitchFamily="34" charset="-122"/>
-                <a:cs typeface="Calibri" pitchFamily="34" charset="-120"/>
-              </a:rPr>
-              <a:t>1</a:t>
+                  <a:srgbClr val="F5F0E6"/>
+                </a:solidFill>
+                <a:latin typeface="Calibri" pitchFamily="34" charset="0"/>
+                <a:ea typeface="Calibri" pitchFamily="34" charset="-122"/>
+                <a:cs typeface="Calibri" pitchFamily="34" charset="-120"/>
+              </a:rPr>
+              <a:t>Should 20:00 to 20:00 count as a clash?</a:t>
             </a:r>
             <a:endParaRPr lang="en-US" sz="1500" dirty="0"/>
           </a:p>
@@ -5530,52 +5711,13 @@
       </p:sp>
       <p:sp>
         <p:nvSpPr>
-          <p:cNvPr id="8" name="Text 6"/>
-          <p:cNvSpPr/>
-          <p:nvPr/>
-        </p:nvSpPr>
-        <p:spPr>
-          <a:xfrm>
-            <a:off x="1234440" y="3346704"/>
-            <a:ext cx="10241280" cy="320040"/>
-          </a:xfrm>
-          <a:prstGeom prst="rect">
-            <a:avLst/>
-          </a:prstGeom>
-          <a:noFill/>
-          <a:ln/>
-        </p:spPr>
-        <p:txBody>
-          <a:bodyPr wrap="square" lIns="0" tIns="0" rIns="0" bIns="0" rtlCol="0" anchor="ctr"/>
-          <a:lstStyle/>
-          <a:p>
-            <a:pPr indent="0" marL="0">
-              <a:buNone/>
-            </a:pPr>
-            <a:r>
-              <a:rPr lang="en-US" sz="1600" b="1" dirty="0">
-                <a:solidFill>
-                  <a:srgbClr val="F5F0E6"/>
-                </a:solidFill>
-                <a:latin typeface="Calibri" pitchFamily="34" charset="0"/>
-                <a:ea typeface="Calibri" pitchFamily="34" charset="-122"/>
-                <a:cs typeface="Calibri" pitchFamily="34" charset="-120"/>
-              </a:rPr>
-              <a:t>Half-open intervals</a:t>
-            </a:r>
-            <a:endParaRPr lang="en-US" sz="1600" dirty="0"/>
-          </a:p>
-        </p:txBody>
-      </p:sp>
-      <p:sp>
-        <p:nvSpPr>
-          <p:cNvPr id="9" name="Text 7"/>
-          <p:cNvSpPr/>
-          <p:nvPr/>
-        </p:nvSpPr>
-        <p:spPr>
-          <a:xfrm>
-            <a:off x="1234440" y="3657600"/>
+          <p:cNvPr id="10" name="Text 8"/>
+          <p:cNvSpPr/>
+          <p:nvPr/>
+        </p:nvSpPr>
+        <p:spPr>
+          <a:xfrm>
+            <a:off x="1188720" y="3794760"/>
             <a:ext cx="10058400" cy="548640"/>
           </a:xfrm>
           <a:prstGeom prst="rect">
@@ -5592,7 +5734,7 @@
               <a:buNone/>
             </a:pPr>
             <a:r>
-              <a:rPr lang="en-US" sz="1300" dirty="0">
+              <a:rPr lang="en-US" sz="1250" dirty="0">
                 <a:solidFill>
                   <a:srgbClr val="97B0A2"/>
                 </a:solidFill>
@@ -5600,22 +5742,22 @@
                 <a:ea typeface="Calibri" pitchFamily="34" charset="-122"/>
                 <a:cs typeface="Calibri" pitchFamily="34" charset="-120"/>
               </a:rPr>
-              <a:t>A table freed at 20:00 can be rebooked at 20:00 exactly. Closed intervals would refuse a booking a restaurant would happily take.</a:t>
-            </a:r>
-            <a:endParaRPr lang="en-US" sz="1300" dirty="0"/>
-          </a:p>
-        </p:txBody>
-      </p:sp>
-      <p:sp>
-        <p:nvSpPr>
-          <p:cNvPr id="10" name="Shape 8"/>
-          <p:cNvSpPr/>
-          <p:nvPr/>
-        </p:nvSpPr>
-        <p:spPr>
-          <a:xfrm>
-            <a:off x="640080" y="4434840"/>
-            <a:ext cx="411480" cy="411480"/>
+              <a:t>No. If a table is free at 20:00 the restaurant will seat you at 20:00. I used &lt; and &gt; rather than &lt;= and &gt;=, which sounds trivial and is not.</a:t>
+            </a:r>
+            <a:endParaRPr lang="en-US" sz="1250" dirty="0"/>
+          </a:p>
+        </p:txBody>
+      </p:sp>
+      <p:sp>
+        <p:nvSpPr>
+          <p:cNvPr id="11" name="Shape 9"/>
+          <p:cNvSpPr/>
+          <p:nvPr/>
+        </p:nvSpPr>
+        <p:spPr>
+          <a:xfrm>
+            <a:off x="640080" y="4480560"/>
+            <a:ext cx="420624" cy="420624"/>
           </a:xfrm>
           <a:prstGeom prst="ellipse">
             <a:avLst/>
@@ -5628,14 +5770,14 @@
       </p:sp>
       <p:sp>
         <p:nvSpPr>
-          <p:cNvPr id="11" name="Text 9"/>
-          <p:cNvSpPr/>
-          <p:nvPr/>
-        </p:nvSpPr>
-        <p:spPr>
-          <a:xfrm>
-            <a:off x="640080" y="4434840"/>
-            <a:ext cx="411480" cy="411480"/>
+          <p:cNvPr id="12" name="Text 10"/>
+          <p:cNvSpPr/>
+          <p:nvPr/>
+        </p:nvSpPr>
+        <p:spPr>
+          <a:xfrm>
+            <a:off x="640080" y="4480560"/>
+            <a:ext cx="420624" cy="420624"/>
           </a:xfrm>
           <a:prstGeom prst="rect">
             <a:avLst/>
@@ -5651,15 +5793,54 @@
               <a:buNone/>
             </a:pPr>
             <a:r>
+              <a:rPr lang="en-US" sz="1400" b="1" dirty="0">
+                <a:solidFill>
+                  <a:srgbClr val="071310"/>
+                </a:solidFill>
+                <a:latin typeface="Calibri" pitchFamily="34" charset="0"/>
+                <a:ea typeface="Calibri" pitchFamily="34" charset="-122"/>
+                <a:cs typeface="Calibri" pitchFamily="34" charset="-120"/>
+              </a:rPr>
+              <a:t>2</a:t>
+            </a:r>
+            <a:endParaRPr lang="en-US" sz="1400" dirty="0"/>
+          </a:p>
+        </p:txBody>
+      </p:sp>
+      <p:sp>
+        <p:nvSpPr>
+          <p:cNvPr id="13" name="Text 11"/>
+          <p:cNvSpPr/>
+          <p:nvPr/>
+        </p:nvSpPr>
+        <p:spPr>
+          <a:xfrm>
+            <a:off x="1188720" y="4443984"/>
+            <a:ext cx="10241280" cy="310896"/>
+          </a:xfrm>
+          <a:prstGeom prst="rect">
+            <a:avLst/>
+          </a:prstGeom>
+          <a:noFill/>
+          <a:ln/>
+        </p:spPr>
+        <p:txBody>
+          <a:bodyPr wrap="square" lIns="0" tIns="0" rIns="0" bIns="0" rtlCol="0" anchor="ctr"/>
+          <a:lstStyle/>
+          <a:p>
+            <a:pPr indent="0" marL="0">
+              <a:buNone/>
+            </a:pPr>
+            <a:r>
               <a:rPr lang="en-US" sz="1500" b="1" dirty="0">
                 <a:solidFill>
-                  <a:srgbClr val="071310"/>
-                </a:solidFill>
-                <a:latin typeface="Calibri" pitchFamily="34" charset="0"/>
-                <a:ea typeface="Calibri" pitchFamily="34" charset="-122"/>
-                <a:cs typeface="Calibri" pitchFamily="34" charset="-120"/>
-              </a:rPr>
-              <a:t>2</a:t>
+                  <a:srgbClr val="F5F0E6"/>
+                </a:solidFill>
+                <a:latin typeface="Calibri" pitchFamily="34" charset="0"/>
+                <a:ea typeface="Calibri" pitchFamily="34" charset="-122"/>
+                <a:cs typeface="Calibri" pitchFamily="34" charset="-120"/>
+              </a:rPr>
+              <a:t>Which table should a couple get?</a:t>
             </a:r>
             <a:endParaRPr lang="en-US" sz="1500" dirty="0"/>
           </a:p>
@@ -5667,52 +5848,13 @@
       </p:sp>
       <p:sp>
         <p:nvSpPr>
-          <p:cNvPr id="12" name="Text 10"/>
-          <p:cNvSpPr/>
-          <p:nvPr/>
-        </p:nvSpPr>
-        <p:spPr>
-          <a:xfrm>
-            <a:off x="1234440" y="4398264"/>
-            <a:ext cx="10241280" cy="320040"/>
-          </a:xfrm>
-          <a:prstGeom prst="rect">
-            <a:avLst/>
-          </a:prstGeom>
-          <a:noFill/>
-          <a:ln/>
-        </p:spPr>
-        <p:txBody>
-          <a:bodyPr wrap="square" lIns="0" tIns="0" rIns="0" bIns="0" rtlCol="0" anchor="ctr"/>
-          <a:lstStyle/>
-          <a:p>
-            <a:pPr indent="0" marL="0">
-              <a:buNone/>
-            </a:pPr>
-            <a:r>
-              <a:rPr lang="en-US" sz="1600" b="1" dirty="0">
-                <a:solidFill>
-                  <a:srgbClr val="F5F0E6"/>
-                </a:solidFill>
-                <a:latin typeface="Calibri" pitchFamily="34" charset="0"/>
-                <a:ea typeface="Calibri" pitchFamily="34" charset="-122"/>
-                <a:cs typeface="Calibri" pitchFamily="34" charset="-120"/>
-              </a:rPr>
-              <a:t>Smallest sufficient table</a:t>
-            </a:r>
-            <a:endParaRPr lang="en-US" sz="1600" dirty="0"/>
-          </a:p>
-        </p:txBody>
-      </p:sp>
-      <p:sp>
-        <p:nvSpPr>
-          <p:cNvPr id="13" name="Text 11"/>
-          <p:cNvSpPr/>
-          <p:nvPr/>
-        </p:nvSpPr>
-        <p:spPr>
-          <a:xfrm>
-            <a:off x="1234440" y="4709160"/>
+          <p:cNvPr id="14" name="Text 12"/>
+          <p:cNvSpPr/>
+          <p:nvPr/>
+        </p:nvSpPr>
+        <p:spPr>
+          <a:xfrm>
+            <a:off x="1188720" y="4754880"/>
             <a:ext cx="10058400" cy="548640"/>
           </a:xfrm>
           <a:prstGeom prst="rect">
@@ -5729,7 +5871,7 @@
               <a:buNone/>
             </a:pPr>
             <a:r>
-              <a:rPr lang="en-US" sz="1300" dirty="0">
+              <a:rPr lang="en-US" sz="1250" dirty="0">
                 <a:solidFill>
                   <a:srgbClr val="97B0A2"/>
                 </a:solidFill>
@@ -5737,22 +5879,22 @@
                 <a:ea typeface="Calibri" pitchFamily="34" charset="-122"/>
                 <a:cs typeface="Calibri" pitchFamily="34" charset="-120"/>
               </a:rPr>
-              <a:t>A party of two gets the two-top, not the six. Otherwise the scarcest resource in the room is burned first.</a:t>
-            </a:r>
-            <a:endParaRPr lang="en-US" sz="1300" dirty="0"/>
-          </a:p>
-        </p:txBody>
-      </p:sp>
-      <p:sp>
-        <p:nvSpPr>
-          <p:cNvPr id="14" name="Shape 12"/>
-          <p:cNvSpPr/>
-          <p:nvPr/>
-        </p:nvSpPr>
-        <p:spPr>
-          <a:xfrm>
-            <a:off x="640080" y="5486400"/>
-            <a:ext cx="411480" cy="411480"/>
+              <a:t>The smallest one that fits. My first version gave them whatever was free first, which meant a six-top could get used up by two people.</a:t>
+            </a:r>
+            <a:endParaRPr lang="en-US" sz="1250" dirty="0"/>
+          </a:p>
+        </p:txBody>
+      </p:sp>
+      <p:sp>
+        <p:nvSpPr>
+          <p:cNvPr id="15" name="Shape 13"/>
+          <p:cNvSpPr/>
+          <p:nvPr/>
+        </p:nvSpPr>
+        <p:spPr>
+          <a:xfrm>
+            <a:off x="640080" y="5440680"/>
+            <a:ext cx="420624" cy="420624"/>
           </a:xfrm>
           <a:prstGeom prst="ellipse">
             <a:avLst/>
@@ -5765,14 +5907,14 @@
       </p:sp>
       <p:sp>
         <p:nvSpPr>
-          <p:cNvPr id="15" name="Text 13"/>
-          <p:cNvSpPr/>
-          <p:nvPr/>
-        </p:nvSpPr>
-        <p:spPr>
-          <a:xfrm>
-            <a:off x="640080" y="5486400"/>
-            <a:ext cx="411480" cy="411480"/>
+          <p:cNvPr id="16" name="Text 14"/>
+          <p:cNvSpPr/>
+          <p:nvPr/>
+        </p:nvSpPr>
+        <p:spPr>
+          <a:xfrm>
+            <a:off x="640080" y="5440680"/>
+            <a:ext cx="420624" cy="420624"/>
           </a:xfrm>
           <a:prstGeom prst="rect">
             <a:avLst/>
@@ -5788,15 +5930,54 @@
               <a:buNone/>
             </a:pPr>
             <a:r>
+              <a:rPr lang="en-US" sz="1400" b="1" dirty="0">
+                <a:solidFill>
+                  <a:srgbClr val="071310"/>
+                </a:solidFill>
+                <a:latin typeface="Calibri" pitchFamily="34" charset="0"/>
+                <a:ea typeface="Calibri" pitchFamily="34" charset="-122"/>
+                <a:cs typeface="Calibri" pitchFamily="34" charset="-120"/>
+              </a:rPr>
+              <a:t>3</a:t>
+            </a:r>
+            <a:endParaRPr lang="en-US" sz="1400" dirty="0"/>
+          </a:p>
+        </p:txBody>
+      </p:sp>
+      <p:sp>
+        <p:nvSpPr>
+          <p:cNvPr id="17" name="Text 15"/>
+          <p:cNvSpPr/>
+          <p:nvPr/>
+        </p:nvSpPr>
+        <p:spPr>
+          <a:xfrm>
+            <a:off x="1188720" y="5404104"/>
+            <a:ext cx="10241280" cy="310896"/>
+          </a:xfrm>
+          <a:prstGeom prst="rect">
+            <a:avLst/>
+          </a:prstGeom>
+          <a:noFill/>
+          <a:ln/>
+        </p:spPr>
+        <p:txBody>
+          <a:bodyPr wrap="square" lIns="0" tIns="0" rIns="0" bIns="0" rtlCol="0" anchor="ctr"/>
+          <a:lstStyle/>
+          <a:p>
+            <a:pPr indent="0" marL="0">
+              <a:buNone/>
+            </a:pPr>
+            <a:r>
               <a:rPr lang="en-US" sz="1500" b="1" dirty="0">
                 <a:solidFill>
-                  <a:srgbClr val="071310"/>
-                </a:solidFill>
-                <a:latin typeface="Calibri" pitchFamily="34" charset="0"/>
-                <a:ea typeface="Calibri" pitchFamily="34" charset="-122"/>
-                <a:cs typeface="Calibri" pitchFamily="34" charset="-120"/>
-              </a:rPr>
-              <a:t>3</a:t>
+                  <a:srgbClr val="F5F0E6"/>
+                </a:solidFill>
+                <a:latin typeface="Calibri" pitchFamily="34" charset="0"/>
+                <a:ea typeface="Calibri" pitchFamily="34" charset="-122"/>
+                <a:cs typeface="Calibri" pitchFamily="34" charset="-120"/>
+              </a:rPr>
+              <a:t>What if two people book at the same moment?</a:t>
             </a:r>
             <a:endParaRPr lang="en-US" sz="1500" dirty="0"/>
           </a:p>
@@ -5804,52 +5985,13 @@
       </p:sp>
       <p:sp>
         <p:nvSpPr>
-          <p:cNvPr id="16" name="Text 14"/>
-          <p:cNvSpPr/>
-          <p:nvPr/>
-        </p:nvSpPr>
-        <p:spPr>
-          <a:xfrm>
-            <a:off x="1234440" y="5449824"/>
-            <a:ext cx="10241280" cy="320040"/>
-          </a:xfrm>
-          <a:prstGeom prst="rect">
-            <a:avLst/>
-          </a:prstGeom>
-          <a:noFill/>
-          <a:ln/>
-        </p:spPr>
-        <p:txBody>
-          <a:bodyPr wrap="square" lIns="0" tIns="0" rIns="0" bIns="0" rtlCol="0" anchor="ctr"/>
-          <a:lstStyle/>
-          <a:p>
-            <a:pPr indent="0" marL="0">
-              <a:buNone/>
-            </a:pPr>
-            <a:r>
-              <a:rPr lang="en-US" sz="1600" b="1" dirty="0">
-                <a:solidFill>
-                  <a:srgbClr val="F5F0E6"/>
-                </a:solidFill>
-                <a:latin typeface="Calibri" pitchFamily="34" charset="0"/>
-                <a:ea typeface="Calibri" pitchFamily="34" charset="-122"/>
-                <a:cs typeface="Calibri" pitchFamily="34" charset="-120"/>
-              </a:rPr>
-              <a:t>Re-check inside the transaction</a:t>
-            </a:r>
-            <a:endParaRPr lang="en-US" sz="1600" dirty="0"/>
-          </a:p>
-        </p:txBody>
-      </p:sp>
-      <p:sp>
-        <p:nvSpPr>
-          <p:cNvPr id="17" name="Text 15"/>
-          <p:cNvSpPr/>
-          <p:nvPr/>
-        </p:nvSpPr>
-        <p:spPr>
-          <a:xfrm>
-            <a:off x="1234440" y="5760720"/>
+          <p:cNvPr id="18" name="Text 16"/>
+          <p:cNvSpPr/>
+          <p:nvPr/>
+        </p:nvSpPr>
+        <p:spPr>
+          <a:xfrm>
+            <a:off x="1188720" y="5715000"/>
             <a:ext cx="10058400" cy="548640"/>
           </a:xfrm>
           <a:prstGeom prst="rect">
@@ -5866,7 +6008,7 @@
               <a:buNone/>
             </a:pPr>
             <a:r>
-              <a:rPr lang="en-US" sz="1300" dirty="0">
+              <a:rPr lang="en-US" sz="1250" dirty="0">
                 <a:solidFill>
                   <a:srgbClr val="97B0A2"/>
                 </a:solidFill>
@@ -5874,9 +6016,9 @@
                 <a:ea typeface="Calibri" pitchFamily="34" charset="-122"/>
                 <a:cs typeface="Calibri" pitchFamily="34" charset="-120"/>
               </a:rPr>
-              <a:t>Checking then inserting leaves a window where two diners both see the last table free. The re-check closes it.</a:t>
-            </a:r>
-            <a:endParaRPr lang="en-US" sz="1300" dirty="0"/>
+              <a:t>Checking and then inserting leaves a gap where both see the table free. I had to re-check inside a database transaction.</a:t>
+            </a:r>
+            <a:endParaRPr lang="en-US" sz="1250" dirty="0"/>
           </a:p>
         </p:txBody>
       </p:sp>
@@ -5937,7 +6079,7 @@
               <a:buNone/>
             </a:pPr>
             <a:r>
-              <a:rPr lang="en-US" sz="3800" b="1" dirty="0">
+              <a:rPr lang="en-US" sz="3600" b="1" dirty="0">
                 <a:solidFill>
                   <a:srgbClr val="F5F0E6"/>
                 </a:solidFill>
@@ -5945,9 +6087,9 @@
                 <a:ea typeface="Cambria" pitchFamily="34" charset="-122"/>
                 <a:cs typeface="Cambria" pitchFamily="34" charset="-120"/>
               </a:rPr>
-              <a:t>Security</a:t>
-            </a:r>
-            <a:endParaRPr lang="en-US" sz="3800" dirty="0"/>
+              <a:t>Keeping it secure</a:t>
+            </a:r>
+            <a:endParaRPr lang="en-US" sz="3600" dirty="0"/>
           </a:p>
         </p:txBody>
       </p:sp>
@@ -5959,7 +6101,7 @@
         </p:nvSpPr>
         <p:spPr>
           <a:xfrm>
-            <a:off x="640080" y="1207008"/>
+            <a:off x="640080" y="1188720"/>
             <a:ext cx="10881360" cy="365760"/>
           </a:xfrm>
           <a:prstGeom prst="rect">
@@ -5984,7 +6126,7 @@
                 <a:ea typeface="Calibri" pitchFamily="34" charset="-122"/>
                 <a:cs typeface="Calibri" pitchFamily="34" charset="-120"/>
               </a:rPr>
-              <a:t>What protects the data, and what only looks like it does</a:t>
+              <a:t>What I did, and what I learned doing it</a:t>
             </a:r>
             <a:endParaRPr lang="en-US" sz="1400" dirty="0"/>
           </a:p>
@@ -5999,11 +6141,11 @@
         <p:spPr>
           <a:xfrm>
             <a:off x="640080" y="1828800"/>
-            <a:ext cx="8138160" cy="731520"/>
+            <a:ext cx="8046720" cy="713232"/>
           </a:xfrm>
           <a:prstGeom prst="roundRect">
             <a:avLst>
-              <a:gd name="adj" fmla="val 11250"/>
+              <a:gd name="adj" fmla="val 11538"/>
             </a:avLst>
           </a:prstGeom>
           <a:solidFill>
@@ -6025,24 +6167,24 @@
         </p:nvSpPr>
         <p:spPr>
           <a:xfrm>
-            <a:off x="914400" y="1920240"/>
-            <a:ext cx="2103120" cy="274320"/>
-          </a:xfrm>
-          <a:prstGeom prst="rect">
-            <a:avLst/>
-          </a:prstGeom>
-          <a:noFill/>
-          <a:ln/>
-        </p:spPr>
-        <p:txBody>
-          <a:bodyPr wrap="square" lIns="0" tIns="0" rIns="0" bIns="0" rtlCol="0" anchor="ctr"/>
-          <a:lstStyle/>
-          <a:p>
-            <a:pPr indent="0" marL="0">
-              <a:buNone/>
-            </a:pPr>
-            <a:r>
-              <a:rPr lang="en-US" sz="1400" b="1" dirty="0">
+            <a:off x="914400" y="1901952"/>
+            <a:ext cx="2194560" cy="274320"/>
+          </a:xfrm>
+          <a:prstGeom prst="rect">
+            <a:avLst/>
+          </a:prstGeom>
+          <a:noFill/>
+          <a:ln/>
+        </p:spPr>
+        <p:txBody>
+          <a:bodyPr wrap="square" lIns="0" tIns="0" rIns="0" bIns="0" rtlCol="0" anchor="ctr"/>
+          <a:lstStyle/>
+          <a:p>
+            <a:pPr indent="0" marL="0">
+              <a:buNone/>
+            </a:pPr>
+            <a:r>
+              <a:rPr lang="en-US" sz="1350" b="1" dirty="0">
                 <a:solidFill>
                   <a:srgbClr val="D4A937"/>
                 </a:solidFill>
@@ -6052,7 +6194,7 @@
               </a:rPr>
               <a:t>Passwords</a:t>
             </a:r>
-            <a:endParaRPr lang="en-US" sz="1400" dirty="0"/>
+            <a:endParaRPr lang="en-US" sz="1350" dirty="0"/>
           </a:p>
         </p:txBody>
       </p:sp>
@@ -6064,24 +6206,24 @@
         </p:nvSpPr>
         <p:spPr>
           <a:xfrm>
-            <a:off x="3108960" y="1883664"/>
-            <a:ext cx="5486400" cy="621792"/>
-          </a:xfrm>
-          <a:prstGeom prst="rect">
-            <a:avLst/>
-          </a:prstGeom>
-          <a:noFill/>
-          <a:ln/>
-        </p:spPr>
-        <p:txBody>
-          <a:bodyPr wrap="square" lIns="0" tIns="0" rIns="0" bIns="0" rtlCol="0" anchor="ctr"/>
-          <a:lstStyle/>
-          <a:p>
-            <a:pPr indent="0" marL="0">
-              <a:buNone/>
-            </a:pPr>
-            <a:r>
-              <a:rPr lang="en-US" sz="1200" dirty="0">
+            <a:off x="3200400" y="1874520"/>
+            <a:ext cx="5303520" cy="621792"/>
+          </a:xfrm>
+          <a:prstGeom prst="rect">
+            <a:avLst/>
+          </a:prstGeom>
+          <a:noFill/>
+          <a:ln/>
+        </p:spPr>
+        <p:txBody>
+          <a:bodyPr wrap="square" lIns="0" tIns="0" rIns="0" bIns="0" rtlCol="0" anchor="ctr"/>
+          <a:lstStyle/>
+          <a:p>
+            <a:pPr indent="0" marL="0">
+              <a:buNone/>
+            </a:pPr>
+            <a:r>
+              <a:rPr lang="en-US" sz="1150" dirty="0">
                 <a:solidFill>
                   <a:srgbClr val="F5F0E6"/>
                 </a:solidFill>
@@ -6089,9 +6231,9 @@
                 <a:ea typeface="Calibri" pitchFamily="34" charset="-122"/>
                 <a:cs typeface="Calibri" pitchFamily="34" charset="-120"/>
               </a:rPr>
-              <a:t>bcrypt hashed. Plaintext never reaches the database.</a:t>
-            </a:r>
-            <a:endParaRPr lang="en-US" sz="1200" dirty="0"/>
+              <a:t>Hashed with bcrypt. The lab code we did in week 7 stored them as plain text, which I did not want to copy.</a:t>
+            </a:r>
+            <a:endParaRPr lang="en-US" sz="1150" dirty="0"/>
           </a:p>
         </p:txBody>
       </p:sp>
@@ -6103,12 +6245,12 @@
         </p:nvSpPr>
         <p:spPr>
           <a:xfrm>
-            <a:off x="640080" y="2670048"/>
-            <a:ext cx="8138160" cy="731520"/>
+            <a:off x="640080" y="2651760"/>
+            <a:ext cx="8046720" cy="713232"/>
           </a:xfrm>
           <a:prstGeom prst="roundRect">
             <a:avLst>
-              <a:gd name="adj" fmla="val 11250"/>
+              <a:gd name="adj" fmla="val 11538"/>
             </a:avLst>
           </a:prstGeom>
           <a:solidFill>
@@ -6130,24 +6272,24 @@
         </p:nvSpPr>
         <p:spPr>
           <a:xfrm>
-            <a:off x="914400" y="2761488"/>
-            <a:ext cx="2103120" cy="274320"/>
-          </a:xfrm>
-          <a:prstGeom prst="rect">
-            <a:avLst/>
-          </a:prstGeom>
-          <a:noFill/>
-          <a:ln/>
-        </p:spPr>
-        <p:txBody>
-          <a:bodyPr wrap="square" lIns="0" tIns="0" rIns="0" bIns="0" rtlCol="0" anchor="ctr"/>
-          <a:lstStyle/>
-          <a:p>
-            <a:pPr indent="0" marL="0">
-              <a:buNone/>
-            </a:pPr>
-            <a:r>
-              <a:rPr lang="en-US" sz="1400" b="1" dirty="0">
+            <a:off x="914400" y="2724912"/>
+            <a:ext cx="2194560" cy="274320"/>
+          </a:xfrm>
+          <a:prstGeom prst="rect">
+            <a:avLst/>
+          </a:prstGeom>
+          <a:noFill/>
+          <a:ln/>
+        </p:spPr>
+        <p:txBody>
+          <a:bodyPr wrap="square" lIns="0" tIns="0" rIns="0" bIns="0" rtlCol="0" anchor="ctr"/>
+          <a:lstStyle/>
+          <a:p>
+            <a:pPr indent="0" marL="0">
+              <a:buNone/>
+            </a:pPr>
+            <a:r>
+              <a:rPr lang="en-US" sz="1350" b="1" dirty="0">
                 <a:solidFill>
                   <a:srgbClr val="D4A937"/>
                 </a:solidFill>
@@ -6155,9 +6297,9 @@
                 <a:ea typeface="Calibri" pitchFamily="34" charset="-122"/>
                 <a:cs typeface="Calibri" pitchFamily="34" charset="-120"/>
               </a:rPr>
-              <a:t>Tokens</a:t>
-            </a:r>
-            <a:endParaRPr lang="en-US" sz="1400" dirty="0"/>
+              <a:t>Logging in</a:t>
+            </a:r>
+            <a:endParaRPr lang="en-US" sz="1350" dirty="0"/>
           </a:p>
         </p:txBody>
       </p:sp>
@@ -6169,24 +6311,24 @@
         </p:nvSpPr>
         <p:spPr>
           <a:xfrm>
-            <a:off x="3108960" y="2724912"/>
-            <a:ext cx="5486400" cy="621792"/>
-          </a:xfrm>
-          <a:prstGeom prst="rect">
-            <a:avLst/>
-          </a:prstGeom>
-          <a:noFill/>
-          <a:ln/>
-        </p:spPr>
-        <p:txBody>
-          <a:bodyPr wrap="square" lIns="0" tIns="0" rIns="0" bIns="0" rtlCol="0" anchor="ctr"/>
-          <a:lstStyle/>
-          <a:p>
-            <a:pPr indent="0" marL="0">
-              <a:buNone/>
-            </a:pPr>
-            <a:r>
-              <a:rPr lang="en-US" sz="1200" dirty="0">
+            <a:off x="3200400" y="2697480"/>
+            <a:ext cx="5303520" cy="621792"/>
+          </a:xfrm>
+          <a:prstGeom prst="rect">
+            <a:avLst/>
+          </a:prstGeom>
+          <a:noFill/>
+          <a:ln/>
+        </p:spPr>
+        <p:txBody>
+          <a:bodyPr wrap="square" lIns="0" tIns="0" rIns="0" bIns="0" rtlCol="0" anchor="ctr"/>
+          <a:lstStyle/>
+          <a:p>
+            <a:pPr indent="0" marL="0">
+              <a:buNone/>
+            </a:pPr>
+            <a:r>
+              <a:rPr lang="en-US" sz="1150" dirty="0">
                 <a:solidFill>
                   <a:srgbClr val="F5F0E6"/>
                 </a:solidFill>
@@ -6194,9 +6336,9 @@
                 <a:ea typeface="Calibri" pitchFamily="34" charset="-122"/>
                 <a:cs typeface="Calibri" pitchFamily="34" charset="-120"/>
               </a:rPr>
-              <a:t>JWT carries only user id and role. The user is re-loaded from the database each request, so a deleted account cannot keep acting on a valid token.</a:t>
-            </a:r>
-            <a:endParaRPr lang="en-US" sz="1200" dirty="0"/>
+              <a:t>You get a JWT. It is signed, not encrypted — anyone can read what is in it, but they cannot change it without my secret key.</a:t>
+            </a:r>
+            <a:endParaRPr lang="en-US" sz="1150" dirty="0"/>
           </a:p>
         </p:txBody>
       </p:sp>
@@ -6208,12 +6350,12 @@
         </p:nvSpPr>
         <p:spPr>
           <a:xfrm>
-            <a:off x="640080" y="3511296"/>
-            <a:ext cx="8138160" cy="731520"/>
+            <a:off x="640080" y="3474720"/>
+            <a:ext cx="8046720" cy="713232"/>
           </a:xfrm>
           <a:prstGeom prst="roundRect">
             <a:avLst>
-              <a:gd name="adj" fmla="val 11250"/>
+              <a:gd name="adj" fmla="val 11538"/>
             </a:avLst>
           </a:prstGeom>
           <a:solidFill>
@@ -6235,24 +6377,24 @@
         </p:nvSpPr>
         <p:spPr>
           <a:xfrm>
-            <a:off x="914400" y="3602736"/>
-            <a:ext cx="2103120" cy="274320"/>
-          </a:xfrm>
-          <a:prstGeom prst="rect">
-            <a:avLst/>
-          </a:prstGeom>
-          <a:noFill/>
-          <a:ln/>
-        </p:spPr>
-        <p:txBody>
-          <a:bodyPr wrap="square" lIns="0" tIns="0" rIns="0" bIns="0" rtlCol="0" anchor="ctr"/>
-          <a:lstStyle/>
-          <a:p>
-            <a:pPr indent="0" marL="0">
-              <a:buNone/>
-            </a:pPr>
-            <a:r>
-              <a:rPr lang="en-US" sz="1400" b="1" dirty="0">
+            <a:off x="914400" y="3547872"/>
+            <a:ext cx="2194560" cy="274320"/>
+          </a:xfrm>
+          <a:prstGeom prst="rect">
+            <a:avLst/>
+          </a:prstGeom>
+          <a:noFill/>
+          <a:ln/>
+        </p:spPr>
+        <p:txBody>
+          <a:bodyPr wrap="square" lIns="0" tIns="0" rIns="0" bIns="0" rtlCol="0" anchor="ctr"/>
+          <a:lstStyle/>
+          <a:p>
+            <a:pPr indent="0" marL="0">
+              <a:buNone/>
+            </a:pPr>
+            <a:r>
+              <a:rPr lang="en-US" sz="1350" b="1" dirty="0">
                 <a:solidFill>
                   <a:srgbClr val="D4A937"/>
                 </a:solidFill>
@@ -6260,9 +6402,9 @@
                 <a:ea typeface="Calibri" pitchFamily="34" charset="-122"/>
                 <a:cs typeface="Calibri" pitchFamily="34" charset="-120"/>
               </a:rPr>
-              <a:t>No account enumeration</a:t>
-            </a:r>
-            <a:endParaRPr lang="en-US" sz="1400" dirty="0"/>
+              <a:t>Checking the token</a:t>
+            </a:r>
+            <a:endParaRPr lang="en-US" sz="1350" dirty="0"/>
           </a:p>
         </p:txBody>
       </p:sp>
@@ -6274,24 +6416,24 @@
         </p:nvSpPr>
         <p:spPr>
           <a:xfrm>
-            <a:off x="3108960" y="3566160"/>
-            <a:ext cx="5486400" cy="621792"/>
-          </a:xfrm>
-          <a:prstGeom prst="rect">
-            <a:avLst/>
-          </a:prstGeom>
-          <a:noFill/>
-          <a:ln/>
-        </p:spPr>
-        <p:txBody>
-          <a:bodyPr wrap="square" lIns="0" tIns="0" rIns="0" bIns="0" rtlCol="0" anchor="ctr"/>
-          <a:lstStyle/>
-          <a:p>
-            <a:pPr indent="0" marL="0">
-              <a:buNone/>
-            </a:pPr>
-            <a:r>
-              <a:rPr lang="en-US" sz="1200" dirty="0">
+            <a:off x="3200400" y="3520440"/>
+            <a:ext cx="5303520" cy="621792"/>
+          </a:xfrm>
+          <a:prstGeom prst="rect">
+            <a:avLst/>
+          </a:prstGeom>
+          <a:noFill/>
+          <a:ln/>
+        </p:spPr>
+        <p:txBody>
+          <a:bodyPr wrap="square" lIns="0" tIns="0" rIns="0" bIns="0" rtlCol="0" anchor="ctr"/>
+          <a:lstStyle/>
+          <a:p>
+            <a:pPr indent="0" marL="0">
+              <a:buNone/>
+            </a:pPr>
+            <a:r>
+              <a:rPr lang="en-US" sz="1150" dirty="0">
                 <a:solidFill>
                   <a:srgbClr val="F5F0E6"/>
                 </a:solidFill>
@@ -6299,9 +6441,9 @@
                 <a:ea typeface="Calibri" pitchFamily="34" charset="-122"/>
                 <a:cs typeface="Calibri" pitchFamily="34" charset="-120"/>
               </a:rPr>
-              <a:t>A wrong password and an unknown email return byte-for-byte identical errors, compared against a dummy hash so even the timing matches.</a:t>
-            </a:r>
-            <a:endParaRPr lang="en-US" sz="1200" dirty="0"/>
+              <a:t>I look the user up in the database every request rather than trusting what the token says. A token lasts 7 days; an account might not.</a:t>
+            </a:r>
+            <a:endParaRPr lang="en-US" sz="1150" dirty="0"/>
           </a:p>
         </p:txBody>
       </p:sp>
@@ -6313,12 +6455,12 @@
         </p:nvSpPr>
         <p:spPr>
           <a:xfrm>
-            <a:off x="640080" y="4352544"/>
-            <a:ext cx="8138160" cy="731520"/>
+            <a:off x="640080" y="4297680"/>
+            <a:ext cx="8046720" cy="713232"/>
           </a:xfrm>
           <a:prstGeom prst="roundRect">
             <a:avLst>
-              <a:gd name="adj" fmla="val 11250"/>
+              <a:gd name="adj" fmla="val 11538"/>
             </a:avLst>
           </a:prstGeom>
           <a:solidFill>
@@ -6340,24 +6482,24 @@
         </p:nvSpPr>
         <p:spPr>
           <a:xfrm>
-            <a:off x="914400" y="4443984"/>
-            <a:ext cx="2103120" cy="274320"/>
-          </a:xfrm>
-          <a:prstGeom prst="rect">
-            <a:avLst/>
-          </a:prstGeom>
-          <a:noFill/>
-          <a:ln/>
-        </p:spPr>
-        <p:txBody>
-          <a:bodyPr wrap="square" lIns="0" tIns="0" rIns="0" bIns="0" rtlCol="0" anchor="ctr"/>
-          <a:lstStyle/>
-          <a:p>
-            <a:pPr indent="0" marL="0">
-              <a:buNone/>
-            </a:pPr>
-            <a:r>
-              <a:rPr lang="en-US" sz="1400" b="1" dirty="0">
+            <a:off x="914400" y="4370832"/>
+            <a:ext cx="2194560" cy="274320"/>
+          </a:xfrm>
+          <a:prstGeom prst="rect">
+            <a:avLst/>
+          </a:prstGeom>
+          <a:noFill/>
+          <a:ln/>
+        </p:spPr>
+        <p:txBody>
+          <a:bodyPr wrap="square" lIns="0" tIns="0" rIns="0" bIns="0" rtlCol="0" anchor="ctr"/>
+          <a:lstStyle/>
+          <a:p>
+            <a:pPr indent="0" marL="0">
+              <a:buNone/>
+            </a:pPr>
+            <a:r>
+              <a:rPr lang="en-US" sz="1350" b="1" dirty="0">
                 <a:solidFill>
                   <a:srgbClr val="D4A937"/>
                 </a:solidFill>
@@ -6365,9 +6507,9 @@
                 <a:ea typeface="Calibri" pitchFamily="34" charset="-122"/>
                 <a:cs typeface="Calibri" pitchFamily="34" charset="-120"/>
               </a:rPr>
-              <a:t>Authentication vs authorisation</a:t>
-            </a:r>
-            <a:endParaRPr lang="en-US" sz="1400" dirty="0"/>
+              <a:t>Wrong password vs unknown email</a:t>
+            </a:r>
+            <a:endParaRPr lang="en-US" sz="1350" dirty="0"/>
           </a:p>
         </p:txBody>
       </p:sp>
@@ -6379,24 +6521,24 @@
         </p:nvSpPr>
         <p:spPr>
           <a:xfrm>
-            <a:off x="3108960" y="4407408"/>
-            <a:ext cx="5486400" cy="621792"/>
-          </a:xfrm>
-          <a:prstGeom prst="rect">
-            <a:avLst/>
-          </a:prstGeom>
-          <a:noFill/>
-          <a:ln/>
-        </p:spPr>
-        <p:txBody>
-          <a:bodyPr wrap="square" lIns="0" tIns="0" rIns="0" bIns="0" rtlCol="0" anchor="ctr"/>
-          <a:lstStyle/>
-          <a:p>
-            <a:pPr indent="0" marL="0">
-              <a:buNone/>
-            </a:pPr>
-            <a:r>
-              <a:rPr lang="en-US" sz="1200" dirty="0">
+            <a:off x="3200400" y="4343400"/>
+            <a:ext cx="5303520" cy="621792"/>
+          </a:xfrm>
+          <a:prstGeom prst="rect">
+            <a:avLst/>
+          </a:prstGeom>
+          <a:noFill/>
+          <a:ln/>
+        </p:spPr>
+        <p:txBody>
+          <a:bodyPr wrap="square" lIns="0" tIns="0" rIns="0" bIns="0" rtlCol="0" anchor="ctr"/>
+          <a:lstStyle/>
+          <a:p>
+            <a:pPr indent="0" marL="0">
+              <a:buNone/>
+            </a:pPr>
+            <a:r>
+              <a:rPr lang="en-US" sz="1150" dirty="0">
                 <a:solidFill>
                   <a:srgbClr val="F5F0E6"/>
                 </a:solidFill>
@@ -6404,9 +6546,9 @@
                 <a:ea typeface="Calibri" pitchFamily="34" charset="-122"/>
                 <a:cs typeface="Calibri" pitchFamily="34" charset="-120"/>
               </a:rPr>
-              <a:t>Separate middleware. authenticate answers who are you (401); authorize answers may you (403).</a:t>
-            </a:r>
-            <a:endParaRPr lang="en-US" sz="1200" dirty="0"/>
+              <a:t>Both give exactly the same error. Otherwise you could use the login form to find out which emails are registered.</a:t>
+            </a:r>
+            <a:endParaRPr lang="en-US" sz="1150" dirty="0"/>
           </a:p>
         </p:txBody>
       </p:sp>
@@ -6418,12 +6560,12 @@
         </p:nvSpPr>
         <p:spPr>
           <a:xfrm>
-            <a:off x="640080" y="5193792"/>
-            <a:ext cx="8138160" cy="731520"/>
+            <a:off x="640080" y="5120640"/>
+            <a:ext cx="8046720" cy="713232"/>
           </a:xfrm>
           <a:prstGeom prst="roundRect">
             <a:avLst>
-              <a:gd name="adj" fmla="val 11250"/>
+              <a:gd name="adj" fmla="val 11538"/>
             </a:avLst>
           </a:prstGeom>
           <a:solidFill>
@@ -6445,24 +6587,24 @@
         </p:nvSpPr>
         <p:spPr>
           <a:xfrm>
-            <a:off x="914400" y="5285232"/>
-            <a:ext cx="2103120" cy="274320"/>
-          </a:xfrm>
-          <a:prstGeom prst="rect">
-            <a:avLst/>
-          </a:prstGeom>
-          <a:noFill/>
-          <a:ln/>
-        </p:spPr>
-        <p:txBody>
-          <a:bodyPr wrap="square" lIns="0" tIns="0" rIns="0" bIns="0" rtlCol="0" anchor="ctr"/>
-          <a:lstStyle/>
-          <a:p>
-            <a:pPr indent="0" marL="0">
-              <a:buNone/>
-            </a:pPr>
-            <a:r>
-              <a:rPr lang="en-US" sz="1400" b="1" dirty="0">
+            <a:off x="914400" y="5193792"/>
+            <a:ext cx="2194560" cy="274320"/>
+          </a:xfrm>
+          <a:prstGeom prst="rect">
+            <a:avLst/>
+          </a:prstGeom>
+          <a:noFill/>
+          <a:ln/>
+        </p:spPr>
+        <p:txBody>
+          <a:bodyPr wrap="square" lIns="0" tIns="0" rIns="0" bIns="0" rtlCol="0" anchor="ctr"/>
+          <a:lstStyle/>
+          <a:p>
+            <a:pPr indent="0" marL="0">
+              <a:buNone/>
+            </a:pPr>
+            <a:r>
+              <a:rPr lang="en-US" sz="1350" b="1" dirty="0">
                 <a:solidFill>
                   <a:srgbClr val="D4A937"/>
                 </a:solidFill>
@@ -6470,9 +6612,9 @@
                 <a:ea typeface="Calibri" pitchFamily="34" charset="-122"/>
                 <a:cs typeface="Calibri" pitchFamily="34" charset="-120"/>
               </a:rPr>
-              <a:t>Ownership</a:t>
-            </a:r>
-            <a:endParaRPr lang="en-US" sz="1400" dirty="0"/>
+              <a:t>Other restaurants</a:t>
+            </a:r>
+            <a:endParaRPr lang="en-US" sz="1350" dirty="0"/>
           </a:p>
         </p:txBody>
       </p:sp>
@@ -6484,24 +6626,24 @@
         </p:nvSpPr>
         <p:spPr>
           <a:xfrm>
-            <a:off x="3108960" y="5248656"/>
-            <a:ext cx="5486400" cy="621792"/>
-          </a:xfrm>
-          <a:prstGeom prst="rect">
-            <a:avLst/>
-          </a:prstGeom>
-          <a:noFill/>
-          <a:ln/>
-        </p:spPr>
-        <p:txBody>
-          <a:bodyPr wrap="square" lIns="0" tIns="0" rIns="0" bIns="0" rtlCol="0" anchor="ctr"/>
-          <a:lstStyle/>
-          <a:p>
-            <a:pPr indent="0" marL="0">
-              <a:buNone/>
-            </a:pPr>
-            <a:r>
-              <a:rPr lang="en-US" sz="1200" dirty="0">
+            <a:off x="3200400" y="5166360"/>
+            <a:ext cx="5303520" cy="621792"/>
+          </a:xfrm>
+          <a:prstGeom prst="rect">
+            <a:avLst/>
+          </a:prstGeom>
+          <a:noFill/>
+          <a:ln/>
+        </p:spPr>
+        <p:txBody>
+          <a:bodyPr wrap="square" lIns="0" tIns="0" rIns="0" bIns="0" rtlCol="0" anchor="ctr"/>
+          <a:lstStyle/>
+          <a:p>
+            <a:pPr indent="0" marL="0">
+              <a:buNone/>
+            </a:pPr>
+            <a:r>
+              <a:rPr lang="en-US" sz="1150" dirty="0">
                 <a:solidFill>
                   <a:srgbClr val="F5F0E6"/>
                 </a:solidFill>
@@ -6509,9 +6651,9 @@
                 <a:ea typeface="Calibri" pitchFamily="34" charset="-122"/>
                 <a:cs typeface="Calibri" pitchFamily="34" charset="-120"/>
               </a:rPr>
-              <a:t>Manager handlers additionally assert restaurant.managerId === req.user.id. Cross-venue access returns 404.</a:t>
-            </a:r>
-            <a:endParaRPr lang="en-US" sz="1200" dirty="0"/>
+              <a:t>You get a 404, not a 403. A 403 would tell you the booking exists, which is already more than you should know.</a:t>
+            </a:r>
+            <a:endParaRPr lang="en-US" sz="1150" dirty="0"/>
           </a:p>
         </p:txBody>
       </p:sp>
@@ -6523,12 +6665,12 @@
         </p:nvSpPr>
         <p:spPr>
           <a:xfrm>
-            <a:off x="9052560" y="1828800"/>
-            <a:ext cx="2468880" cy="4206240"/>
+            <a:off x="8961120" y="1828800"/>
+            <a:ext cx="2560320" cy="4023360"/>
           </a:xfrm>
           <a:prstGeom prst="roundRect">
             <a:avLst>
-              <a:gd name="adj" fmla="val 3333"/>
+              <a:gd name="adj" fmla="val 3214"/>
             </a:avLst>
           </a:prstGeom>
           <a:solidFill>
@@ -6550,24 +6692,24 @@
         </p:nvSpPr>
         <p:spPr>
           <a:xfrm>
-            <a:off x="9281160" y="2103120"/>
-            <a:ext cx="2011680" cy="640080"/>
-          </a:xfrm>
-          <a:prstGeom prst="rect">
-            <a:avLst/>
-          </a:prstGeom>
-          <a:noFill/>
-          <a:ln/>
-        </p:spPr>
-        <p:txBody>
-          <a:bodyPr wrap="square" lIns="0" tIns="0" rIns="0" bIns="0" rtlCol="0" anchor="ctr"/>
-          <a:lstStyle/>
-          <a:p>
-            <a:pPr indent="0" marL="0">
-              <a:buNone/>
-            </a:pPr>
-            <a:r>
-              <a:rPr lang="en-US" sz="1700" b="1" dirty="0">
+            <a:off x="9189720" y="2103120"/>
+            <a:ext cx="2103120" cy="731520"/>
+          </a:xfrm>
+          <a:prstGeom prst="rect">
+            <a:avLst/>
+          </a:prstGeom>
+          <a:noFill/>
+          <a:ln/>
+        </p:spPr>
+        <p:txBody>
+          <a:bodyPr wrap="square" lIns="0" tIns="0" rIns="0" bIns="0" rtlCol="0" anchor="ctr"/>
+          <a:lstStyle/>
+          <a:p>
+            <a:pPr indent="0" marL="0">
+              <a:buNone/>
+            </a:pPr>
+            <a:r>
+              <a:rPr lang="en-US" sz="1600" b="1" dirty="0">
                 <a:solidFill>
                   <a:srgbClr val="A3364F"/>
                 </a:solidFill>
@@ -6575,9 +6717,9 @@
                 <a:ea typeface="Cambria" pitchFamily="34" charset="-122"/>
                 <a:cs typeface="Cambria" pitchFamily="34" charset="-120"/>
               </a:rPr>
-              <a:t>The client is not a guard</a:t>
-            </a:r>
-            <a:endParaRPr lang="en-US" sz="1700" dirty="0"/>
+              <a:t>One thing I got wrong first</a:t>
+            </a:r>
+            <a:endParaRPr lang="en-US" sz="1600" dirty="0"/>
           </a:p>
         </p:txBody>
       </p:sp>
@@ -6589,8 +6731,8 @@
         </p:nvSpPr>
         <p:spPr>
           <a:xfrm>
-            <a:off x="9281160" y="2834640"/>
-            <a:ext cx="2011680" cy="1828800"/>
+            <a:off x="9189720" y="2926080"/>
+            <a:ext cx="2103120" cy="2377440"/>
           </a:xfrm>
           <a:prstGeom prst="rect">
             <a:avLst/>
@@ -6614,7 +6756,7 @@
                 <a:ea typeface="Calibri" pitchFamily="34" charset="-122"/>
                 <a:cs typeface="Calibri" pitchFamily="34" charset="-120"/>
               </a:rPr>
-              <a:t>React route guards exist for usability only. The server is the authority and the only thing actually protecting the data.</a:t>
+              <a:t>I originally relied on hiding pages in React. But anyone can call the API directly with curl — the front end is not a security boundary. All the real checks are on the server.</a:t>
             </a:r>
             <a:endParaRPr lang="en-US" sz="1200" dirty="0"/>
           </a:p>
@@ -6677,7 +6819,7 @@
               <a:buNone/>
             </a:pPr>
             <a:r>
-              <a:rPr lang="en-US" sz="3800" b="1" dirty="0">
+              <a:rPr lang="en-US" sz="3600" b="1" dirty="0">
                 <a:solidFill>
                   <a:srgbClr val="F5F0E6"/>
                 </a:solidFill>
@@ -6685,9 +6827,9 @@
                 <a:ea typeface="Cambria" pitchFamily="34" charset="-122"/>
                 <a:cs typeface="Cambria" pitchFamily="34" charset="-120"/>
               </a:rPr>
-              <a:t>Stack, and why</a:t>
-            </a:r>
-            <a:endParaRPr lang="en-US" sz="3800" dirty="0"/>
+              <a:t>Choices I had to make</a:t>
+            </a:r>
+            <a:endParaRPr lang="en-US" sz="3600" dirty="0"/>
           </a:p>
         </p:txBody>
       </p:sp>
@@ -6699,7 +6841,7 @@
         </p:nvSpPr>
         <p:spPr>
           <a:xfrm>
-            <a:off x="640080" y="1207008"/>
+            <a:off x="640080" y="1188720"/>
             <a:ext cx="10881360" cy="365760"/>
           </a:xfrm>
           <a:prstGeom prst="rect">
@@ -6724,7 +6866,7 @@
                 <a:ea typeface="Calibri" pitchFamily="34" charset="-122"/>
                 <a:cs typeface="Calibri" pitchFamily="34" charset="-120"/>
               </a:rPr>
-              <a:t>Every choice defensible</a:t>
+              <a:t>And the one place I disagreed with the brief</a:t>
             </a:r>
             <a:endParaRPr lang="en-US" sz="1400" dirty="0"/>
           </a:p>
@@ -6739,23 +6881,23 @@
         <p:spPr>
           <a:xfrm>
             <a:off x="640080" y="1828800"/>
-            <a:ext cx="3200400" cy="640080"/>
-          </a:xfrm>
-          <a:prstGeom prst="rect">
-            <a:avLst/>
-          </a:prstGeom>
-          <a:noFill/>
-          <a:ln/>
-        </p:spPr>
-        <p:txBody>
-          <a:bodyPr wrap="square" lIns="0" tIns="0" rIns="0" bIns="0" rtlCol="0" anchor="ctr"/>
-          <a:lstStyle/>
-          <a:p>
-            <a:pPr indent="0" marL="0">
-              <a:buNone/>
-            </a:pPr>
-            <a:r>
-              <a:rPr lang="en-US" sz="1500" b="1" dirty="0">
+            <a:ext cx="3566160" cy="731520"/>
+          </a:xfrm>
+          <a:prstGeom prst="rect">
+            <a:avLst/>
+          </a:prstGeom>
+          <a:noFill/>
+          <a:ln/>
+        </p:spPr>
+        <p:txBody>
+          <a:bodyPr wrap="square" lIns="0" tIns="0" rIns="0" bIns="0" rtlCol="0" anchor="ctr"/>
+          <a:lstStyle/>
+          <a:p>
+            <a:pPr indent="0" marL="0">
+              <a:buNone/>
+            </a:pPr>
+            <a:r>
+              <a:rPr lang="en-US" sz="1450" b="1" dirty="0">
                 <a:solidFill>
                   <a:srgbClr val="D4A937"/>
                 </a:solidFill>
@@ -6763,9 +6905,9 @@
                 <a:ea typeface="Calibri" pitchFamily="34" charset="-122"/>
                 <a:cs typeface="Calibri" pitchFamily="34" charset="-120"/>
               </a:rPr>
-              <a:t>React 19 + Vite</a:t>
-            </a:r>
-            <a:endParaRPr lang="en-US" sz="1500" dirty="0"/>
+              <a:t>SQLite, not MySQL or Postgres</a:t>
+            </a:r>
+            <a:endParaRPr lang="en-US" sz="1450" dirty="0"/>
           </a:p>
         </p:txBody>
       </p:sp>
@@ -6777,24 +6919,24 @@
         </p:nvSpPr>
         <p:spPr>
           <a:xfrm>
-            <a:off x="4023360" y="1828800"/>
-            <a:ext cx="7498080" cy="640080"/>
-          </a:xfrm>
-          <a:prstGeom prst="rect">
-            <a:avLst/>
-          </a:prstGeom>
-          <a:noFill/>
-          <a:ln/>
-        </p:spPr>
-        <p:txBody>
-          <a:bodyPr wrap="square" lIns="0" tIns="0" rIns="0" bIns="0" rtlCol="0" anchor="ctr"/>
-          <a:lstStyle/>
-          <a:p>
-            <a:pPr indent="0" marL="0">
-              <a:buNone/>
-            </a:pPr>
-            <a:r>
-              <a:rPr lang="en-US" sz="1300" dirty="0">
+            <a:off x="4389120" y="1828800"/>
+            <a:ext cx="7132320" cy="731520"/>
+          </a:xfrm>
+          <a:prstGeom prst="rect">
+            <a:avLst/>
+          </a:prstGeom>
+          <a:noFill/>
+          <a:ln/>
+        </p:spPr>
+        <p:txBody>
+          <a:bodyPr wrap="square" lIns="0" tIns="0" rIns="0" bIns="0" rtlCol="0" anchor="ctr"/>
+          <a:lstStyle/>
+          <a:p>
+            <a:pPr indent="0" marL="0">
+              <a:buNone/>
+            </a:pPr>
+            <a:r>
+              <a:rPr lang="en-US" sz="1250" dirty="0">
                 <a:solidFill>
                   <a:srgbClr val="F5F0E6"/>
                 </a:solidFill>
@@ -6802,9 +6944,9 @@
                 <a:ea typeface="Calibri" pitchFamily="34" charset="-122"/>
                 <a:cs typeface="Calibri" pitchFamily="34" charset="-120"/>
               </a:rPr>
-              <a:t>Unit requirement. Vite over CRA — CRA is deprecated and slower.</a:t>
-            </a:r>
-            <a:endParaRPr lang="en-US" sz="1300" dirty="0"/>
+              <a:t>It is a file, so this runs on any machine with no database server to install. The schema moves to PostgreSQL unchanged if it were deployed.</a:t>
+            </a:r>
+            <a:endParaRPr lang="en-US" sz="1250" dirty="0"/>
           </a:p>
         </p:txBody>
       </p:sp>
@@ -6816,24 +6958,24 @@
         </p:nvSpPr>
         <p:spPr>
           <a:xfrm>
-            <a:off x="640080" y="2578608"/>
-            <a:ext cx="3200400" cy="640080"/>
-          </a:xfrm>
-          <a:prstGeom prst="rect">
-            <a:avLst/>
-          </a:prstGeom>
-          <a:noFill/>
-          <a:ln/>
-        </p:spPr>
-        <p:txBody>
-          <a:bodyPr wrap="square" lIns="0" tIns="0" rIns="0" bIns="0" rtlCol="0" anchor="ctr"/>
-          <a:lstStyle/>
-          <a:p>
-            <a:pPr indent="0" marL="0">
-              <a:buNone/>
-            </a:pPr>
-            <a:r>
-              <a:rPr lang="en-US" sz="1500" b="1" dirty="0">
+            <a:off x="640080" y="2670048"/>
+            <a:ext cx="3566160" cy="731520"/>
+          </a:xfrm>
+          <a:prstGeom prst="rect">
+            <a:avLst/>
+          </a:prstGeom>
+          <a:noFill/>
+          <a:ln/>
+        </p:spPr>
+        <p:txBody>
+          <a:bodyPr wrap="square" lIns="0" tIns="0" rIns="0" bIns="0" rtlCol="0" anchor="ctr"/>
+          <a:lstStyle/>
+          <a:p>
+            <a:pPr indent="0" marL="0">
+              <a:buNone/>
+            </a:pPr>
+            <a:r>
+              <a:rPr lang="en-US" sz="1450" b="1" dirty="0">
                 <a:solidFill>
                   <a:srgbClr val="D4A937"/>
                 </a:solidFill>
@@ -6841,9 +6983,9 @@
                 <a:ea typeface="Calibri" pitchFamily="34" charset="-122"/>
                 <a:cs typeface="Calibri" pitchFamily="34" charset="-120"/>
               </a:rPr>
-              <a:t>Context + hooks</a:t>
-            </a:r>
-            <a:endParaRPr lang="en-US" sz="1500" dirty="0"/>
+              <a:t>Prisma, not raw SQL</a:t>
+            </a:r>
+            <a:endParaRPr lang="en-US" sz="1450" dirty="0"/>
           </a:p>
         </p:txBody>
       </p:sp>
@@ -6855,24 +6997,24 @@
         </p:nvSpPr>
         <p:spPr>
           <a:xfrm>
-            <a:off x="4023360" y="2578608"/>
-            <a:ext cx="7498080" cy="640080"/>
-          </a:xfrm>
-          <a:prstGeom prst="rect">
-            <a:avLst/>
-          </a:prstGeom>
-          <a:noFill/>
-          <a:ln/>
-        </p:spPr>
-        <p:txBody>
-          <a:bodyPr wrap="square" lIns="0" tIns="0" rIns="0" bIns="0" rtlCol="0" anchor="ctr"/>
-          <a:lstStyle/>
-          <a:p>
-            <a:pPr indent="0" marL="0">
-              <a:buNone/>
-            </a:pPr>
-            <a:r>
-              <a:rPr lang="en-US" sz="1300" dirty="0">
+            <a:off x="4389120" y="2670048"/>
+            <a:ext cx="7132320" cy="731520"/>
+          </a:xfrm>
+          <a:prstGeom prst="rect">
+            <a:avLst/>
+          </a:prstGeom>
+          <a:noFill/>
+          <a:ln/>
+        </p:spPr>
+        <p:txBody>
+          <a:bodyPr wrap="square" lIns="0" tIns="0" rIns="0" bIns="0" rtlCol="0" anchor="ctr"/>
+          <a:lstStyle/>
+          <a:p>
+            <a:pPr indent="0" marL="0">
+              <a:buNone/>
+            </a:pPr>
+            <a:r>
+              <a:rPr lang="en-US" sz="1250" dirty="0">
                 <a:solidFill>
                   <a:srgbClr val="F5F0E6"/>
                 </a:solidFill>
@@ -6880,9 +7022,9 @@
                 <a:ea typeface="Calibri" pitchFamily="34" charset="-122"/>
                 <a:cs typeface="Calibri" pitchFamily="34" charset="-120"/>
               </a:rPr>
-              <a:t>Auth and toasts are the only genuinely global state. Redux would be ceremony for two values.</a:t>
-            </a:r>
-            <a:endParaRPr lang="en-US" sz="1300" dirty="0"/>
+              <a:t>The lab code built SQL by joining strings together. Prisma gave me a schema file in version control and stopped me writing that.</a:t>
+            </a:r>
+            <a:endParaRPr lang="en-US" sz="1250" dirty="0"/>
           </a:p>
         </p:txBody>
       </p:sp>
@@ -6894,24 +7036,24 @@
         </p:nvSpPr>
         <p:spPr>
           <a:xfrm>
-            <a:off x="640080" y="3328416"/>
-            <a:ext cx="3200400" cy="640080"/>
-          </a:xfrm>
-          <a:prstGeom prst="rect">
-            <a:avLst/>
-          </a:prstGeom>
-          <a:noFill/>
-          <a:ln/>
-        </p:spPr>
-        <p:txBody>
-          <a:bodyPr wrap="square" lIns="0" tIns="0" rIns="0" bIns="0" rtlCol="0" anchor="ctr"/>
-          <a:lstStyle/>
-          <a:p>
-            <a:pPr indent="0" marL="0">
-              <a:buNone/>
-            </a:pPr>
-            <a:r>
-              <a:rPr lang="en-US" sz="1500" b="1" dirty="0">
+            <a:off x="640080" y="3511296"/>
+            <a:ext cx="3566160" cy="731520"/>
+          </a:xfrm>
+          <a:prstGeom prst="rect">
+            <a:avLst/>
+          </a:prstGeom>
+          <a:noFill/>
+          <a:ln/>
+        </p:spPr>
+        <p:txBody>
+          <a:bodyPr wrap="square" lIns="0" tIns="0" rIns="0" bIns="0" rtlCol="0" anchor="ctr"/>
+          <a:lstStyle/>
+          <a:p>
+            <a:pPr indent="0" marL="0">
+              <a:buNone/>
+            </a:pPr>
+            <a:r>
+              <a:rPr lang="en-US" sz="1450" b="1" dirty="0">
                 <a:solidFill>
                   <a:srgbClr val="D4A937"/>
                 </a:solidFill>
@@ -6919,9 +7061,9 @@
                 <a:ea typeface="Calibri" pitchFamily="34" charset="-122"/>
                 <a:cs typeface="Calibri" pitchFamily="34" charset="-120"/>
               </a:rPr>
-              <a:t>Node.js + Express 5</a:t>
-            </a:r>
-            <a:endParaRPr lang="en-US" sz="1500" dirty="0"/>
+              <a:t>Context, not Redux</a:t>
+            </a:r>
+            <a:endParaRPr lang="en-US" sz="1450" dirty="0"/>
           </a:p>
         </p:txBody>
       </p:sp>
@@ -6933,24 +7075,24 @@
         </p:nvSpPr>
         <p:spPr>
           <a:xfrm>
-            <a:off x="4023360" y="3328416"/>
-            <a:ext cx="7498080" cy="640080"/>
-          </a:xfrm>
-          <a:prstGeom prst="rect">
-            <a:avLst/>
-          </a:prstGeom>
-          <a:noFill/>
-          <a:ln/>
-        </p:spPr>
-        <p:txBody>
-          <a:bodyPr wrap="square" lIns="0" tIns="0" rIns="0" bIns="0" rtlCol="0" anchor="ctr"/>
-          <a:lstStyle/>
-          <a:p>
-            <a:pPr indent="0" marL="0">
-              <a:buNone/>
-            </a:pPr>
-            <a:r>
-              <a:rPr lang="en-US" sz="1300" dirty="0">
+            <a:off x="4389120" y="3511296"/>
+            <a:ext cx="7132320" cy="731520"/>
+          </a:xfrm>
+          <a:prstGeom prst="rect">
+            <a:avLst/>
+          </a:prstGeom>
+          <a:noFill/>
+          <a:ln/>
+        </p:spPr>
+        <p:txBody>
+          <a:bodyPr wrap="square" lIns="0" tIns="0" rIns="0" bIns="0" rtlCol="0" anchor="ctr"/>
+          <a:lstStyle/>
+          <a:p>
+            <a:pPr indent="0" marL="0">
+              <a:buNone/>
+            </a:pPr>
+            <a:r>
+              <a:rPr lang="en-US" sz="1250" dirty="0">
                 <a:solidFill>
                   <a:srgbClr val="F5F0E6"/>
                 </a:solidFill>
@@ -6958,9 +7100,9 @@
                 <a:ea typeface="Calibri" pitchFamily="34" charset="-122"/>
                 <a:cs typeface="Calibri" pitchFamily="34" charset="-120"/>
               </a:rPr>
-              <a:t>Unit requirement. Serves both the API and the built React app from one process.</a:t>
-            </a:r>
-            <a:endParaRPr lang="en-US" sz="1300" dirty="0"/>
+              <a:t>The only things that are truly global are who is logged in and the toast messages. Redux for two values felt like overkill.</a:t>
+            </a:r>
+            <a:endParaRPr lang="en-US" sz="1250" dirty="0"/>
           </a:p>
         </p:txBody>
       </p:sp>
@@ -6972,24 +7114,24 @@
         </p:nvSpPr>
         <p:spPr>
           <a:xfrm>
-            <a:off x="640080" y="4078224"/>
-            <a:ext cx="3200400" cy="640080"/>
-          </a:xfrm>
-          <a:prstGeom prst="rect">
-            <a:avLst/>
-          </a:prstGeom>
-          <a:noFill/>
-          <a:ln/>
-        </p:spPr>
-        <p:txBody>
-          <a:bodyPr wrap="square" lIns="0" tIns="0" rIns="0" bIns="0" rtlCol="0" anchor="ctr"/>
-          <a:lstStyle/>
-          <a:p>
-            <a:pPr indent="0" marL="0">
-              <a:buNone/>
-            </a:pPr>
-            <a:r>
-              <a:rPr lang="en-US" sz="1500" b="1" dirty="0">
+            <a:off x="640080" y="4352544"/>
+            <a:ext cx="3566160" cy="731520"/>
+          </a:xfrm>
+          <a:prstGeom prst="rect">
+            <a:avLst/>
+          </a:prstGeom>
+          <a:noFill/>
+          <a:ln/>
+        </p:spPr>
+        <p:txBody>
+          <a:bodyPr wrap="square" lIns="0" tIns="0" rIns="0" bIns="0" rtlCol="0" anchor="ctr"/>
+          <a:lstStyle/>
+          <a:p>
+            <a:pPr indent="0" marL="0">
+              <a:buNone/>
+            </a:pPr>
+            <a:r>
+              <a:rPr lang="en-US" sz="1450" b="1" dirty="0">
                 <a:solidFill>
                   <a:srgbClr val="D4A937"/>
                 </a:solidFill>
@@ -6997,9 +7139,9 @@
                 <a:ea typeface="Calibri" pitchFamily="34" charset="-122"/>
                 <a:cs typeface="Calibri" pitchFamily="34" charset="-120"/>
               </a:rPr>
-              <a:t>Prisma ORM</a:t>
-            </a:r>
-            <a:endParaRPr lang="en-US" sz="1500" dirty="0"/>
+              <a:t>Vite, not Create React App</a:t>
+            </a:r>
+            <a:endParaRPr lang="en-US" sz="1450" dirty="0"/>
           </a:p>
         </p:txBody>
       </p:sp>
@@ -7011,24 +7153,24 @@
         </p:nvSpPr>
         <p:spPr>
           <a:xfrm>
-            <a:off x="4023360" y="4078224"/>
-            <a:ext cx="7498080" cy="640080"/>
-          </a:xfrm>
-          <a:prstGeom prst="rect">
-            <a:avLst/>
-          </a:prstGeom>
-          <a:noFill/>
-          <a:ln/>
-        </p:spPr>
-        <p:txBody>
-          <a:bodyPr wrap="square" lIns="0" tIns="0" rIns="0" bIns="0" rtlCol="0" anchor="ctr"/>
-          <a:lstStyle/>
-          <a:p>
-            <a:pPr indent="0" marL="0">
-              <a:buNone/>
-            </a:pPr>
-            <a:r>
-              <a:rPr lang="en-US" sz="1300" dirty="0">
+            <a:off x="4389120" y="4352544"/>
+            <a:ext cx="7132320" cy="731520"/>
+          </a:xfrm>
+          <a:prstGeom prst="rect">
+            <a:avLst/>
+          </a:prstGeom>
+          <a:noFill/>
+          <a:ln/>
+        </p:spPr>
+        <p:txBody>
+          <a:bodyPr wrap="square" lIns="0" tIns="0" rIns="0" bIns="0" rtlCol="0" anchor="ctr"/>
+          <a:lstStyle/>
+          <a:p>
+            <a:pPr indent="0" marL="0">
+              <a:buNone/>
+            </a:pPr>
+            <a:r>
+              <a:rPr lang="en-US" sz="1250" dirty="0">
                 <a:solidFill>
                   <a:srgbClr val="F5F0E6"/>
                 </a:solidFill>
@@ -7036,104 +7178,26 @@
                 <a:ea typeface="Calibri" pitchFamily="34" charset="-122"/>
                 <a:cs typeface="Calibri" pitchFamily="34" charset="-120"/>
               </a:rPr>
-              <a:t>Typed client, migrations in version control, portable across SQLite and PostgreSQL.</a:t>
-            </a:r>
-            <a:endParaRPr lang="en-US" sz="1300" dirty="0"/>
-          </a:p>
-        </p:txBody>
-      </p:sp>
-      <p:sp>
-        <p:nvSpPr>
-          <p:cNvPr id="12" name="Text 10"/>
-          <p:cNvSpPr/>
-          <p:nvPr/>
-        </p:nvSpPr>
-        <p:spPr>
-          <a:xfrm>
-            <a:off x="640080" y="4828032"/>
-            <a:ext cx="3200400" cy="640080"/>
-          </a:xfrm>
-          <a:prstGeom prst="rect">
-            <a:avLst/>
-          </a:prstGeom>
-          <a:noFill/>
-          <a:ln/>
-        </p:spPr>
-        <p:txBody>
-          <a:bodyPr wrap="square" lIns="0" tIns="0" rIns="0" bIns="0" rtlCol="0" anchor="ctr"/>
-          <a:lstStyle/>
-          <a:p>
-            <a:pPr indent="0" marL="0">
-              <a:buNone/>
-            </a:pPr>
-            <a:r>
-              <a:rPr lang="en-US" sz="1500" b="1" dirty="0">
-                <a:solidFill>
-                  <a:srgbClr val="D4A937"/>
-                </a:solidFill>
-                <a:latin typeface="Calibri" pitchFamily="34" charset="0"/>
-                <a:ea typeface="Calibri" pitchFamily="34" charset="-122"/>
-                <a:cs typeface="Calibri" pitchFamily="34" charset="-120"/>
-              </a:rPr>
-              <a:t>SQLite → PostgreSQL</a:t>
-            </a:r>
-            <a:endParaRPr lang="en-US" sz="1500" dirty="0"/>
-          </a:p>
-        </p:txBody>
-      </p:sp>
-      <p:sp>
-        <p:nvSpPr>
-          <p:cNvPr id="13" name="Text 11"/>
-          <p:cNvSpPr/>
-          <p:nvPr/>
-        </p:nvSpPr>
-        <p:spPr>
-          <a:xfrm>
-            <a:off x="4023360" y="4828032"/>
-            <a:ext cx="7498080" cy="640080"/>
-          </a:xfrm>
-          <a:prstGeom prst="rect">
-            <a:avLst/>
-          </a:prstGeom>
-          <a:noFill/>
-          <a:ln/>
-        </p:spPr>
-        <p:txBody>
-          <a:bodyPr wrap="square" lIns="0" tIns="0" rIns="0" bIns="0" rtlCol="0" anchor="ctr"/>
-          <a:lstStyle/>
-          <a:p>
-            <a:pPr indent="0" marL="0">
-              <a:buNone/>
-            </a:pPr>
-            <a:r>
-              <a:rPr lang="en-US" sz="1300" dirty="0">
-                <a:solidFill>
-                  <a:srgbClr val="F5F0E6"/>
-                </a:solidFill>
-                <a:latin typeface="Calibri" pitchFamily="34" charset="0"/>
-                <a:ea typeface="Calibri" pitchFamily="34" charset="-122"/>
-                <a:cs typeface="Calibri" pitchFamily="34" charset="-120"/>
-              </a:rPr>
-              <a:t>Availability is a join across restaurant, table and reservation. A document store would push those joins into application code.</a:t>
-            </a:r>
-            <a:endParaRPr lang="en-US" sz="1300" dirty="0"/>
-          </a:p>
-        </p:txBody>
-      </p:sp>
-      <p:sp>
-        <p:nvSpPr>
-          <p:cNvPr id="14" name="Shape 12"/>
-          <p:cNvSpPr/>
-          <p:nvPr/>
-        </p:nvSpPr>
-        <p:spPr>
-          <a:xfrm>
-            <a:off x="640080" y="5577840"/>
-            <a:ext cx="10881360" cy="914400"/>
+              <a:t>CRA is deprecated now and noticeably slower to start.</a:t>
+            </a:r>
+            <a:endParaRPr lang="en-US" sz="1250" dirty="0"/>
+          </a:p>
+        </p:txBody>
+      </p:sp>
+      <p:sp>
+        <p:nvSpPr>
+          <p:cNvPr id="12" name="Shape 10"/>
+          <p:cNvSpPr/>
+          <p:nvPr/>
+        </p:nvSpPr>
+        <p:spPr>
+          <a:xfrm>
+            <a:off x="640080" y="5394960"/>
+            <a:ext cx="10881360" cy="1143000"/>
           </a:xfrm>
           <a:prstGeom prst="roundRect">
             <a:avLst>
-              <a:gd name="adj" fmla="val 9000"/>
+              <a:gd name="adj" fmla="val 7200"/>
             </a:avLst>
           </a:prstGeom>
           <a:solidFill>
@@ -7149,30 +7213,69 @@
       </p:sp>
       <p:sp>
         <p:nvSpPr>
-          <p:cNvPr id="15" name="Text 13"/>
-          <p:cNvSpPr/>
-          <p:nvPr/>
-        </p:nvSpPr>
-        <p:spPr>
-          <a:xfrm>
-            <a:off x="914400" y="5715000"/>
-            <a:ext cx="10332720" cy="685800"/>
-          </a:xfrm>
-          <a:prstGeom prst="rect">
-            <a:avLst/>
-          </a:prstGeom>
-          <a:noFill/>
-          <a:ln/>
-        </p:spPr>
-        <p:txBody>
-          <a:bodyPr wrap="square" lIns="0" tIns="0" rIns="0" bIns="0" rtlCol="0" anchor="ctr"/>
-          <a:lstStyle/>
-          <a:p>
-            <a:pPr indent="0" marL="0">
-              <a:buNone/>
-            </a:pPr>
-            <a:r>
-              <a:rPr lang="en-US" sz="1250" i="1" dirty="0">
+          <p:cNvPr id="13" name="Text 11"/>
+          <p:cNvSpPr/>
+          <p:nvPr/>
+        </p:nvSpPr>
+        <p:spPr>
+          <a:xfrm>
+            <a:off x="960120" y="5532120"/>
+            <a:ext cx="10241280" cy="320040"/>
+          </a:xfrm>
+          <a:prstGeom prst="rect">
+            <a:avLst/>
+          </a:prstGeom>
+          <a:noFill/>
+          <a:ln/>
+        </p:spPr>
+        <p:txBody>
+          <a:bodyPr wrap="square" lIns="0" tIns="0" rIns="0" bIns="0" rtlCol="0" anchor="ctr"/>
+          <a:lstStyle/>
+          <a:p>
+            <a:pPr indent="0" marL="0">
+              <a:buNone/>
+            </a:pPr>
+            <a:r>
+              <a:rPr lang="en-US" sz="1400" b="1" dirty="0">
+                <a:solidFill>
+                  <a:srgbClr val="F5D77A"/>
+                </a:solidFill>
+                <a:latin typeface="Calibri" pitchFamily="34" charset="0"/>
+                <a:ea typeface="Calibri" pitchFamily="34" charset="-122"/>
+                <a:cs typeface="Calibri" pitchFamily="34" charset="-120"/>
+              </a:rPr>
+              <a:t>The brief asks for a Django ORM</a:t>
+            </a:r>
+            <a:endParaRPr lang="en-US" sz="1400" dirty="0"/>
+          </a:p>
+        </p:txBody>
+      </p:sp>
+      <p:sp>
+        <p:nvSpPr>
+          <p:cNvPr id="14" name="Text 12"/>
+          <p:cNvSpPr/>
+          <p:nvPr/>
+        </p:nvSpPr>
+        <p:spPr>
+          <a:xfrm>
+            <a:off x="960120" y="5897880"/>
+            <a:ext cx="10241280" cy="548640"/>
+          </a:xfrm>
+          <a:prstGeom prst="rect">
+            <a:avLst/>
+          </a:prstGeom>
+          <a:noFill/>
+          <a:ln/>
+        </p:spPr>
+        <p:txBody>
+          <a:bodyPr wrap="square" lIns="0" tIns="0" rIns="0" bIns="0" rtlCol="0" anchor="ctr"/>
+          <a:lstStyle/>
+          <a:p>
+            <a:pPr indent="0" marL="0">
+              <a:buNone/>
+            </a:pPr>
+            <a:r>
+              <a:rPr lang="en-US" sz="1250" dirty="0">
                 <a:solidFill>
                   <a:srgbClr val="F5F0E6"/>
                 </a:solidFill>
@@ -7180,7 +7283,7 @@
                 <a:ea typeface="Calibri" pitchFamily="34" charset="-122"/>
                 <a:cs typeface="Calibri" pitchFamily="34" charset="-120"/>
               </a:rPr>
-              <a:t>The brief asks for a "Django ORM" on a Node back end. Django's ORM is a Python component and cannot run on Node — so I read the requirement by intent (persistence through an ORM, not hand-written SQL) and used Prisma. The deviation is documented in the report, the spec and the README.</a:t>
+              <a:t>Django is Python, so it cannot run on a Node back end. I took the requirement to mean "use an ORM rather than writing SQL by hand" and used Prisma. I have written this down in the report rather than quietly ignoring it.</a:t>
             </a:r>
             <a:endParaRPr lang="en-US" sz="1250" dirty="0"/>
           </a:p>
@@ -7226,7 +7329,7 @@
         </p:nvSpPr>
         <p:spPr>
           <a:xfrm>
-            <a:off x="640080" y="640080"/>
+            <a:off x="640080" y="731520"/>
             <a:ext cx="10881360" cy="822960"/>
           </a:xfrm>
           <a:prstGeom prst="rect">
@@ -7243,7 +7346,7 @@
               <a:buNone/>
             </a:pPr>
             <a:r>
-              <a:rPr lang="en-US" sz="4200" b="1" dirty="0">
+              <a:rPr lang="en-US" sz="4000" b="1" dirty="0">
                 <a:solidFill>
                   <a:srgbClr val="D4A937"/>
                 </a:solidFill>
@@ -7251,9 +7354,9 @@
                 <a:ea typeface="Cambria" pitchFamily="34" charset="-122"/>
                 <a:cs typeface="Cambria" pitchFamily="34" charset="-120"/>
               </a:rPr>
-              <a:t>Live demonstration</a:t>
-            </a:r>
-            <a:endParaRPr lang="en-US" sz="4200" dirty="0"/>
+              <a:t>Let me show you it working</a:t>
+            </a:r>
+            <a:endParaRPr lang="en-US" sz="4000" dirty="0"/>
           </a:p>
         </p:txBody>
       </p:sp>
@@ -7265,7 +7368,7 @@
         </p:nvSpPr>
         <p:spPr>
           <a:xfrm>
-            <a:off x="640080" y="1463040"/>
+            <a:off x="640080" y="1554480"/>
             <a:ext cx="10881360" cy="365760"/>
           </a:xfrm>
           <a:prstGeom prst="rect">
@@ -7290,7 +7393,7 @@
                 <a:ea typeface="Courier New" pitchFamily="34" charset="-122"/>
                 <a:cs typeface="Courier New" pitchFamily="34" charset="-120"/>
               </a:rPr>
-              <a:t>npm start  —  one server, one port, localhost:4000</a:t>
+              <a:t>localhost:4000</a:t>
             </a:r>
             <a:endParaRPr lang="en-US" sz="1500" dirty="0"/>
           </a:p>
@@ -7304,7 +7407,7 @@
         </p:nvSpPr>
         <p:spPr>
           <a:xfrm>
-            <a:off x="640080" y="2148840"/>
+            <a:off x="640080" y="2240280"/>
             <a:ext cx="420624" cy="420624"/>
           </a:xfrm>
           <a:prstGeom prst="ellipse">
@@ -7324,7 +7427,7 @@
         </p:nvSpPr>
         <p:spPr>
           <a:xfrm>
-            <a:off x="640080" y="2148840"/>
+            <a:off x="640080" y="2240280"/>
             <a:ext cx="420624" cy="420624"/>
           </a:xfrm>
           <a:prstGeom prst="rect">
@@ -7341,7 +7444,7 @@
               <a:buNone/>
             </a:pPr>
             <a:r>
-              <a:rPr lang="en-US" sz="1500" b="1" dirty="0">
+              <a:rPr lang="en-US" sz="1400" b="1" dirty="0">
                 <a:solidFill>
                   <a:srgbClr val="071310"/>
                 </a:solidFill>
@@ -7351,58 +7454,58 @@
               </a:rPr>
               <a:t>1</a:t>
             </a:r>
+            <a:endParaRPr lang="en-US" sz="1400" dirty="0"/>
+          </a:p>
+        </p:txBody>
+      </p:sp>
+      <p:sp>
+        <p:nvSpPr>
+          <p:cNvPr id="6" name="Text 4"/>
+          <p:cNvSpPr/>
+          <p:nvPr/>
+        </p:nvSpPr>
+        <p:spPr>
+          <a:xfrm>
+            <a:off x="1188720" y="2221992"/>
+            <a:ext cx="10241280" cy="457200"/>
+          </a:xfrm>
+          <a:prstGeom prst="rect">
+            <a:avLst/>
+          </a:prstGeom>
+          <a:noFill/>
+          <a:ln/>
+        </p:spPr>
+        <p:txBody>
+          <a:bodyPr wrap="square" lIns="0" tIns="0" rIns="0" bIns="0" rtlCol="0" anchor="ctr"/>
+          <a:lstStyle/>
+          <a:p>
+            <a:pPr indent="0" marL="0">
+              <a:buNone/>
+            </a:pPr>
+            <a:r>
+              <a:rPr lang="en-US" sz="1500" dirty="0">
+                <a:solidFill>
+                  <a:srgbClr val="F5F0E6"/>
+                </a:solidFill>
+                <a:latin typeface="Calibri" pitchFamily="34" charset="0"/>
+                <a:ea typeface="Calibri" pitchFamily="34" charset="-122"/>
+                <a:cs typeface="Calibri" pitchFamily="34" charset="-120"/>
+              </a:rPr>
+              <a:t>Search for a table — only places that can actually seat us come back</a:t>
+            </a:r>
             <a:endParaRPr lang="en-US" sz="1500" dirty="0"/>
           </a:p>
         </p:txBody>
       </p:sp>
       <p:sp>
         <p:nvSpPr>
-          <p:cNvPr id="6" name="Text 4"/>
-          <p:cNvSpPr/>
-          <p:nvPr/>
-        </p:nvSpPr>
-        <p:spPr>
-          <a:xfrm>
-            <a:off x="1234440" y="2130552"/>
-            <a:ext cx="10241280" cy="457200"/>
-          </a:xfrm>
-          <a:prstGeom prst="rect">
-            <a:avLst/>
-          </a:prstGeom>
-          <a:noFill/>
-          <a:ln/>
-        </p:spPr>
-        <p:txBody>
-          <a:bodyPr wrap="square" lIns="0" tIns="0" rIns="0" bIns="0" rtlCol="0" anchor="ctr"/>
-          <a:lstStyle/>
-          <a:p>
-            <a:pPr indent="0" marL="0">
-              <a:buNone/>
-            </a:pPr>
-            <a:r>
-              <a:rPr lang="en-US" sz="1500" dirty="0">
-                <a:solidFill>
-                  <a:srgbClr val="F5F0E6"/>
-                </a:solidFill>
-                <a:latin typeface="Calibri" pitchFamily="34" charset="0"/>
-                <a:ea typeface="Calibri" pitchFamily="34" charset="-122"/>
-                <a:cs typeface="Calibri" pitchFamily="34" charset="-120"/>
-              </a:rPr>
-              <a:t>Search with a date, time and party size — only genuinely bookable venues come back</a:t>
-            </a:r>
-            <a:endParaRPr lang="en-US" sz="1500" dirty="0"/>
-          </a:p>
-        </p:txBody>
-      </p:sp>
-      <p:sp>
-        <p:nvSpPr>
           <p:cNvPr id="7" name="Shape 5"/>
           <p:cNvSpPr/>
           <p:nvPr/>
         </p:nvSpPr>
         <p:spPr>
           <a:xfrm>
-            <a:off x="640080" y="2807208"/>
+            <a:off x="640080" y="2898648"/>
             <a:ext cx="420624" cy="420624"/>
           </a:xfrm>
           <a:prstGeom prst="ellipse">
@@ -7422,7 +7525,7 @@
         </p:nvSpPr>
         <p:spPr>
           <a:xfrm>
-            <a:off x="640080" y="2807208"/>
+            <a:off x="640080" y="2898648"/>
             <a:ext cx="420624" cy="420624"/>
           </a:xfrm>
           <a:prstGeom prst="rect">
@@ -7439,7 +7542,7 @@
               <a:buNone/>
             </a:pPr>
             <a:r>
-              <a:rPr lang="en-US" sz="1500" b="1" dirty="0">
+              <a:rPr lang="en-US" sz="1400" b="1" dirty="0">
                 <a:solidFill>
                   <a:srgbClr val="071310"/>
                 </a:solidFill>
@@ -7449,58 +7552,58 @@
               </a:rPr>
               <a:t>2</a:t>
             </a:r>
+            <a:endParaRPr lang="en-US" sz="1400" dirty="0"/>
+          </a:p>
+        </p:txBody>
+      </p:sp>
+      <p:sp>
+        <p:nvSpPr>
+          <p:cNvPr id="9" name="Text 7"/>
+          <p:cNvSpPr/>
+          <p:nvPr/>
+        </p:nvSpPr>
+        <p:spPr>
+          <a:xfrm>
+            <a:off x="1188720" y="2880360"/>
+            <a:ext cx="10241280" cy="457200"/>
+          </a:xfrm>
+          <a:prstGeom prst="rect">
+            <a:avLst/>
+          </a:prstGeom>
+          <a:noFill/>
+          <a:ln/>
+        </p:spPr>
+        <p:txBody>
+          <a:bodyPr wrap="square" lIns="0" tIns="0" rIns="0" bIns="0" rtlCol="0" anchor="ctr"/>
+          <a:lstStyle/>
+          <a:p>
+            <a:pPr indent="0" marL="0">
+              <a:buNone/>
+            </a:pPr>
+            <a:r>
+              <a:rPr lang="en-US" sz="1500" dirty="0">
+                <a:solidFill>
+                  <a:srgbClr val="F5F0E6"/>
+                </a:solidFill>
+                <a:latin typeface="Calibri" pitchFamily="34" charset="0"/>
+                <a:ea typeface="Calibri" pitchFamily="34" charset="-122"/>
+                <a:cs typeface="Calibri" pitchFamily="34" charset="-120"/>
+              </a:rPr>
+              <a:t>Pick a restaurant and a time — the plan shows which tables are free</a:t>
+            </a:r>
             <a:endParaRPr lang="en-US" sz="1500" dirty="0"/>
           </a:p>
         </p:txBody>
       </p:sp>
       <p:sp>
         <p:nvSpPr>
-          <p:cNvPr id="9" name="Text 7"/>
-          <p:cNvSpPr/>
-          <p:nvPr/>
-        </p:nvSpPr>
-        <p:spPr>
-          <a:xfrm>
-            <a:off x="1234440" y="2788920"/>
-            <a:ext cx="10241280" cy="457200"/>
-          </a:xfrm>
-          <a:prstGeom prst="rect">
-            <a:avLst/>
-          </a:prstGeom>
-          <a:noFill/>
-          <a:ln/>
-        </p:spPr>
-        <p:txBody>
-          <a:bodyPr wrap="square" lIns="0" tIns="0" rIns="0" bIns="0" rtlCol="0" anchor="ctr"/>
-          <a:lstStyle/>
-          <a:p>
-            <a:pPr indent="0" marL="0">
-              <a:buNone/>
-            </a:pPr>
-            <a:r>
-              <a:rPr lang="en-US" sz="1500" dirty="0">
-                <a:solidFill>
-                  <a:srgbClr val="F5F0E6"/>
-                </a:solidFill>
-                <a:latin typeface="Calibri" pitchFamily="34" charset="0"/>
-                <a:ea typeface="Calibri" pitchFamily="34" charset="-122"/>
-                <a:cs typeface="Calibri" pitchFamily="34" charset="-120"/>
-              </a:rPr>
-              <a:t>Open a restaurant, pick a sitting — the 3D floor plan repaints and names the table you will get</a:t>
-            </a:r>
-            <a:endParaRPr lang="en-US" sz="1500" dirty="0"/>
-          </a:p>
-        </p:txBody>
-      </p:sp>
-      <p:sp>
-        <p:nvSpPr>
           <p:cNvPr id="10" name="Shape 8"/>
           <p:cNvSpPr/>
           <p:nvPr/>
         </p:nvSpPr>
         <p:spPr>
           <a:xfrm>
-            <a:off x="640080" y="3465576"/>
+            <a:off x="640080" y="3557016"/>
             <a:ext cx="420624" cy="420624"/>
           </a:xfrm>
           <a:prstGeom prst="ellipse">
@@ -7520,7 +7623,7 @@
         </p:nvSpPr>
         <p:spPr>
           <a:xfrm>
-            <a:off x="640080" y="3465576"/>
+            <a:off x="640080" y="3557016"/>
             <a:ext cx="420624" cy="420624"/>
           </a:xfrm>
           <a:prstGeom prst="rect">
@@ -7537,7 +7640,7 @@
               <a:buNone/>
             </a:pPr>
             <a:r>
-              <a:rPr lang="en-US" sz="1500" b="1" dirty="0">
+              <a:rPr lang="en-US" sz="1400" b="1" dirty="0">
                 <a:solidFill>
                   <a:srgbClr val="071310"/>
                 </a:solidFill>
@@ -7547,58 +7650,58 @@
               </a:rPr>
               <a:t>3</a:t>
             </a:r>
+            <a:endParaRPr lang="en-US" sz="1400" dirty="0"/>
+          </a:p>
+        </p:txBody>
+      </p:sp>
+      <p:sp>
+        <p:nvSpPr>
+          <p:cNvPr id="12" name="Text 10"/>
+          <p:cNvSpPr/>
+          <p:nvPr/>
+        </p:nvSpPr>
+        <p:spPr>
+          <a:xfrm>
+            <a:off x="1188720" y="3538728"/>
+            <a:ext cx="10241280" cy="457200"/>
+          </a:xfrm>
+          <a:prstGeom prst="rect">
+            <a:avLst/>
+          </a:prstGeom>
+          <a:noFill/>
+          <a:ln/>
+        </p:spPr>
+        <p:txBody>
+          <a:bodyPr wrap="square" lIns="0" tIns="0" rIns="0" bIns="0" rtlCol="0" anchor="ctr"/>
+          <a:lstStyle/>
+          <a:p>
+            <a:pPr indent="0" marL="0">
+              <a:buNone/>
+            </a:pPr>
+            <a:r>
+              <a:rPr lang="en-US" sz="1500" dirty="0">
+                <a:solidFill>
+                  <a:srgbClr val="F5F0E6"/>
+                </a:solidFill>
+                <a:latin typeface="Calibri" pitchFamily="34" charset="0"/>
+                <a:ea typeface="Calibri" pitchFamily="34" charset="-122"/>
+                <a:cs typeface="Calibri" pitchFamily="34" charset="-120"/>
+              </a:rPr>
+              <a:t>Book it — and it tells me which table I am getting before I confirm</a:t>
+            </a:r>
             <a:endParaRPr lang="en-US" sz="1500" dirty="0"/>
           </a:p>
         </p:txBody>
       </p:sp>
       <p:sp>
         <p:nvSpPr>
-          <p:cNvPr id="12" name="Text 10"/>
-          <p:cNvSpPr/>
-          <p:nvPr/>
-        </p:nvSpPr>
-        <p:spPr>
-          <a:xfrm>
-            <a:off x="1234440" y="3447288"/>
-            <a:ext cx="10241280" cy="457200"/>
-          </a:xfrm>
-          <a:prstGeom prst="rect">
-            <a:avLst/>
-          </a:prstGeom>
-          <a:noFill/>
-          <a:ln/>
-        </p:spPr>
-        <p:txBody>
-          <a:bodyPr wrap="square" lIns="0" tIns="0" rIns="0" bIns="0" rtlCol="0" anchor="ctr"/>
-          <a:lstStyle/>
-          <a:p>
-            <a:pPr indent="0" marL="0">
-              <a:buNone/>
-            </a:pPr>
-            <a:r>
-              <a:rPr lang="en-US" sz="1500" dirty="0">
-                <a:solidFill>
-                  <a:srgbClr val="F5F0E6"/>
-                </a:solidFill>
-                <a:latin typeface="Calibri" pitchFamily="34" charset="0"/>
-                <a:ea typeface="Calibri" pitchFamily="34" charset="-122"/>
-                <a:cs typeface="Calibri" pitchFamily="34" charset="-120"/>
-              </a:rPr>
-              <a:t>Book it — confirmed at exactly that table</a:t>
-            </a:r>
-            <a:endParaRPr lang="en-US" sz="1500" dirty="0"/>
-          </a:p>
-        </p:txBody>
-      </p:sp>
-      <p:sp>
-        <p:nvSpPr>
           <p:cNvPr id="13" name="Shape 11"/>
           <p:cNvSpPr/>
           <p:nvPr/>
         </p:nvSpPr>
         <p:spPr>
           <a:xfrm>
-            <a:off x="640080" y="4123944"/>
+            <a:off x="640080" y="4215384"/>
             <a:ext cx="420624" cy="420624"/>
           </a:xfrm>
           <a:prstGeom prst="ellipse">
@@ -7618,7 +7721,7 @@
         </p:nvSpPr>
         <p:spPr>
           <a:xfrm>
-            <a:off x="640080" y="4123944"/>
+            <a:off x="640080" y="4215384"/>
             <a:ext cx="420624" cy="420624"/>
           </a:xfrm>
           <a:prstGeom prst="rect">
@@ -7635,7 +7738,7 @@
               <a:buNone/>
             </a:pPr>
             <a:r>
-              <a:rPr lang="en-US" sz="1500" b="1" dirty="0">
+              <a:rPr lang="en-US" sz="1400" b="1" dirty="0">
                 <a:solidFill>
                   <a:srgbClr val="071310"/>
                 </a:solidFill>
@@ -7645,58 +7748,58 @@
               </a:rPr>
               <a:t>4</a:t>
             </a:r>
+            <a:endParaRPr lang="en-US" sz="1400" dirty="0"/>
+          </a:p>
+        </p:txBody>
+      </p:sp>
+      <p:sp>
+        <p:nvSpPr>
+          <p:cNvPr id="15" name="Text 13"/>
+          <p:cNvSpPr/>
+          <p:nvPr/>
+        </p:nvSpPr>
+        <p:spPr>
+          <a:xfrm>
+            <a:off x="1188720" y="4197096"/>
+            <a:ext cx="10241280" cy="457200"/>
+          </a:xfrm>
+          <a:prstGeom prst="rect">
+            <a:avLst/>
+          </a:prstGeom>
+          <a:noFill/>
+          <a:ln/>
+        </p:spPr>
+        <p:txBody>
+          <a:bodyPr wrap="square" lIns="0" tIns="0" rIns="0" bIns="0" rtlCol="0" anchor="ctr"/>
+          <a:lstStyle/>
+          <a:p>
+            <a:pPr indent="0" marL="0">
+              <a:buNone/>
+            </a:pPr>
+            <a:r>
+              <a:rPr lang="en-US" sz="1500" dirty="0">
+                <a:solidFill>
+                  <a:srgbClr val="F5F0E6"/>
+                </a:solidFill>
+                <a:latin typeface="Calibri" pitchFamily="34" charset="0"/>
+                <a:ea typeface="Calibri" pitchFamily="34" charset="-122"/>
+                <a:cs typeface="Calibri" pitchFamily="34" charset="-120"/>
+              </a:rPr>
+              <a:t>Try to book the same one again — refused, with other times offered</a:t>
+            </a:r>
             <a:endParaRPr lang="en-US" sz="1500" dirty="0"/>
           </a:p>
         </p:txBody>
       </p:sp>
       <p:sp>
         <p:nvSpPr>
-          <p:cNvPr id="15" name="Text 13"/>
-          <p:cNvSpPr/>
-          <p:nvPr/>
-        </p:nvSpPr>
-        <p:spPr>
-          <a:xfrm>
-            <a:off x="1234440" y="4105656"/>
-            <a:ext cx="10241280" cy="457200"/>
-          </a:xfrm>
-          <a:prstGeom prst="rect">
-            <a:avLst/>
-          </a:prstGeom>
-          <a:noFill/>
-          <a:ln/>
-        </p:spPr>
-        <p:txBody>
-          <a:bodyPr wrap="square" lIns="0" tIns="0" rIns="0" bIns="0" rtlCol="0" anchor="ctr"/>
-          <a:lstStyle/>
-          <a:p>
-            <a:pPr indent="0" marL="0">
-              <a:buNone/>
-            </a:pPr>
-            <a:r>
-              <a:rPr lang="en-US" sz="1500" dirty="0">
-                <a:solidFill>
-                  <a:srgbClr val="F5F0E6"/>
-                </a:solidFill>
-                <a:latin typeface="Calibri" pitchFamily="34" charset="0"/>
-                <a:ea typeface="Calibri" pitchFamily="34" charset="-122"/>
-                <a:cs typeface="Calibri" pitchFamily="34" charset="-120"/>
-              </a:rPr>
-              <a:t>Try the same slot again — 409, with the nearest free times offered</a:t>
-            </a:r>
-            <a:endParaRPr lang="en-US" sz="1500" dirty="0"/>
-          </a:p>
-        </p:txBody>
-      </p:sp>
-      <p:sp>
-        <p:nvSpPr>
           <p:cNvPr id="16" name="Shape 14"/>
           <p:cNvSpPr/>
           <p:nvPr/>
         </p:nvSpPr>
         <p:spPr>
           <a:xfrm>
-            <a:off x="640080" y="4782312"/>
+            <a:off x="640080" y="4873752"/>
             <a:ext cx="420624" cy="420624"/>
           </a:xfrm>
           <a:prstGeom prst="ellipse">
@@ -7716,7 +7819,7 @@
         </p:nvSpPr>
         <p:spPr>
           <a:xfrm>
-            <a:off x="640080" y="4782312"/>
+            <a:off x="640080" y="4873752"/>
             <a:ext cx="420624" cy="420624"/>
           </a:xfrm>
           <a:prstGeom prst="rect">
@@ -7733,7 +7836,7 @@
               <a:buNone/>
             </a:pPr>
             <a:r>
-              <a:rPr lang="en-US" sz="1500" b="1" dirty="0">
+              <a:rPr lang="en-US" sz="1400" b="1" dirty="0">
                 <a:solidFill>
                   <a:srgbClr val="071310"/>
                 </a:solidFill>
@@ -7743,58 +7846,58 @@
               </a:rPr>
               <a:t>5</a:t>
             </a:r>
+            <a:endParaRPr lang="en-US" sz="1400" dirty="0"/>
+          </a:p>
+        </p:txBody>
+      </p:sp>
+      <p:sp>
+        <p:nvSpPr>
+          <p:cNvPr id="18" name="Text 16"/>
+          <p:cNvSpPr/>
+          <p:nvPr/>
+        </p:nvSpPr>
+        <p:spPr>
+          <a:xfrm>
+            <a:off x="1188720" y="4855464"/>
+            <a:ext cx="10241280" cy="457200"/>
+          </a:xfrm>
+          <a:prstGeom prst="rect">
+            <a:avLst/>
+          </a:prstGeom>
+          <a:noFill/>
+          <a:ln/>
+        </p:spPr>
+        <p:txBody>
+          <a:bodyPr wrap="square" lIns="0" tIns="0" rIns="0" bIns="0" rtlCol="0" anchor="ctr"/>
+          <a:lstStyle/>
+          <a:p>
+            <a:pPr indent="0" marL="0">
+              <a:buNone/>
+            </a:pPr>
+            <a:r>
+              <a:rPr lang="en-US" sz="1500" dirty="0">
+                <a:solidFill>
+                  <a:srgbClr val="F5F0E6"/>
+                </a:solidFill>
+                <a:latin typeface="Calibri" pitchFamily="34" charset="0"/>
+                <a:ea typeface="Calibri" pitchFamily="34" charset="-122"/>
+                <a:cs typeface="Calibri" pitchFamily="34" charset="-120"/>
+              </a:rPr>
+              <a:t>Log in as a different restaurant's manager — they cannot see this booking</a:t>
+            </a:r>
             <a:endParaRPr lang="en-US" sz="1500" dirty="0"/>
           </a:p>
         </p:txBody>
       </p:sp>
       <p:sp>
         <p:nvSpPr>
-          <p:cNvPr id="18" name="Text 16"/>
-          <p:cNvSpPr/>
-          <p:nvPr/>
-        </p:nvSpPr>
-        <p:spPr>
-          <a:xfrm>
-            <a:off x="1234440" y="4764024"/>
-            <a:ext cx="10241280" cy="457200"/>
-          </a:xfrm>
-          <a:prstGeom prst="rect">
-            <a:avLst/>
-          </a:prstGeom>
-          <a:noFill/>
-          <a:ln/>
-        </p:spPr>
-        <p:txBody>
-          <a:bodyPr wrap="square" lIns="0" tIns="0" rIns="0" bIns="0" rtlCol="0" anchor="ctr"/>
-          <a:lstStyle/>
-          <a:p>
-            <a:pPr indent="0" marL="0">
-              <a:buNone/>
-            </a:pPr>
-            <a:r>
-              <a:rPr lang="en-US" sz="1500" dirty="0">
-                <a:solidFill>
-                  <a:srgbClr val="F5F0E6"/>
-                </a:solidFill>
-                <a:latin typeface="Calibri" pitchFamily="34" charset="0"/>
-                <a:ea typeface="Calibri" pitchFamily="34" charset="-122"/>
-                <a:cs typeface="Calibri" pitchFamily="34" charset="-120"/>
-              </a:rPr>
-              <a:t>Sign in as a second manager — 404 on the other venue, not 403</a:t>
-            </a:r>
-            <a:endParaRPr lang="en-US" sz="1500" dirty="0"/>
-          </a:p>
-        </p:txBody>
-      </p:sp>
-      <p:sp>
-        <p:nvSpPr>
           <p:cNvPr id="19" name="Shape 17"/>
           <p:cNvSpPr/>
           <p:nvPr/>
         </p:nvSpPr>
         <p:spPr>
           <a:xfrm>
-            <a:off x="640080" y="5440680"/>
+            <a:off x="640080" y="5532120"/>
             <a:ext cx="420624" cy="420624"/>
           </a:xfrm>
           <a:prstGeom prst="ellipse">
@@ -7814,7 +7917,7 @@
         </p:nvSpPr>
         <p:spPr>
           <a:xfrm>
-            <a:off x="640080" y="5440680"/>
+            <a:off x="640080" y="5532120"/>
             <a:ext cx="420624" cy="420624"/>
           </a:xfrm>
           <a:prstGeom prst="rect">
@@ -7831,7 +7934,7 @@
               <a:buNone/>
             </a:pPr>
             <a:r>
-              <a:rPr lang="en-US" sz="1500" b="1" dirty="0">
+              <a:rPr lang="en-US" sz="1400" b="1" dirty="0">
                 <a:solidFill>
                   <a:srgbClr val="071310"/>
                 </a:solidFill>
@@ -7841,58 +7944,58 @@
               </a:rPr>
               <a:t>6</a:t>
             </a:r>
+            <a:endParaRPr lang="en-US" sz="1400" dirty="0"/>
+          </a:p>
+        </p:txBody>
+      </p:sp>
+      <p:sp>
+        <p:nvSpPr>
+          <p:cNvPr id="21" name="Text 19"/>
+          <p:cNvSpPr/>
+          <p:nvPr/>
+        </p:nvSpPr>
+        <p:spPr>
+          <a:xfrm>
+            <a:off x="1188720" y="5513832"/>
+            <a:ext cx="10241280" cy="457200"/>
+          </a:xfrm>
+          <a:prstGeom prst="rect">
+            <a:avLst/>
+          </a:prstGeom>
+          <a:noFill/>
+          <a:ln/>
+        </p:spPr>
+        <p:txBody>
+          <a:bodyPr wrap="square" lIns="0" tIns="0" rIns="0" bIns="0" rtlCol="0" anchor="ctr"/>
+          <a:lstStyle/>
+          <a:p>
+            <a:pPr indent="0" marL="0">
+              <a:buNone/>
+            </a:pPr>
+            <a:r>
+              <a:rPr lang="en-US" sz="1500" dirty="0">
+                <a:solidFill>
+                  <a:srgbClr val="F5F0E6"/>
+                </a:solidFill>
+                <a:latin typeface="Calibri" pitchFamily="34" charset="0"/>
+                <a:ea typeface="Calibri" pitchFamily="34" charset="-122"/>
+                <a:cs typeface="Calibri" pitchFamily="34" charset="-120"/>
+              </a:rPr>
+              <a:t>Run the tests — including two people booking the last table at once</a:t>
+            </a:r>
             <a:endParaRPr lang="en-US" sz="1500" dirty="0"/>
           </a:p>
         </p:txBody>
       </p:sp>
       <p:sp>
         <p:nvSpPr>
-          <p:cNvPr id="21" name="Text 19"/>
-          <p:cNvSpPr/>
-          <p:nvPr/>
-        </p:nvSpPr>
-        <p:spPr>
-          <a:xfrm>
-            <a:off x="1234440" y="5422392"/>
-            <a:ext cx="10241280" cy="457200"/>
-          </a:xfrm>
-          <a:prstGeom prst="rect">
-            <a:avLst/>
-          </a:prstGeom>
-          <a:noFill/>
-          <a:ln/>
-        </p:spPr>
-        <p:txBody>
-          <a:bodyPr wrap="square" lIns="0" tIns="0" rIns="0" bIns="0" rtlCol="0" anchor="ctr"/>
-          <a:lstStyle/>
-          <a:p>
-            <a:pPr indent="0" marL="0">
-              <a:buNone/>
-            </a:pPr>
-            <a:r>
-              <a:rPr lang="en-US" sz="1500" dirty="0">
-                <a:solidFill>
-                  <a:srgbClr val="F5F0E6"/>
-                </a:solidFill>
-                <a:latin typeface="Calibri" pitchFamily="34" charset="0"/>
-                <a:ea typeface="Calibri" pitchFamily="34" charset="-122"/>
-                <a:cs typeface="Calibri" pitchFamily="34" charset="-120"/>
-              </a:rPr>
-              <a:t>npm test — 65 tests, including two concurrent bookings for the last table</a:t>
-            </a:r>
-            <a:endParaRPr lang="en-US" sz="1500" dirty="0"/>
-          </a:p>
-        </p:txBody>
-      </p:sp>
-      <p:sp>
-        <p:nvSpPr>
           <p:cNvPr id="22" name="Text 20"/>
           <p:cNvSpPr/>
           <p:nvPr/>
         </p:nvSpPr>
         <p:spPr>
           <a:xfrm>
-            <a:off x="640080" y="6217920"/>
+            <a:off x="640080" y="6309360"/>
             <a:ext cx="10881360" cy="365760"/>
           </a:xfrm>
           <a:prstGeom prst="rect">
@@ -7917,7 +8020,7 @@
                 <a:ea typeface="Calibri" pitchFamily="34" charset="-122"/>
                 <a:cs typeface="Calibri" pitchFamily="34" charset="-120"/>
               </a:rPr>
-              <a:t>Roughly 12 minutes — the largest single block of the session.</a:t>
+              <a:t>This is most of my time — around twelve minutes.</a:t>
             </a:r>
             <a:endParaRPr lang="en-US" sz="1300" dirty="0"/>
           </a:p>
@@ -7980,7 +8083,7 @@
               <a:buNone/>
             </a:pPr>
             <a:r>
-              <a:rPr lang="en-US" sz="3800" b="1" dirty="0">
+              <a:rPr lang="en-US" sz="3600" b="1" dirty="0">
                 <a:solidFill>
                   <a:srgbClr val="F5F0E6"/>
                 </a:solidFill>
@@ -7990,7 +8093,7 @@
               </a:rPr>
               <a:t>Testing</a:t>
             </a:r>
-            <a:endParaRPr lang="en-US" sz="3800" dirty="0"/>
+            <a:endParaRPr lang="en-US" sz="3600" dirty="0"/>
           </a:p>
         </p:txBody>
       </p:sp>
@@ -8002,7 +8105,7 @@
         </p:nvSpPr>
         <p:spPr>
           <a:xfrm>
-            <a:off x="640080" y="1207008"/>
+            <a:off x="640080" y="1188720"/>
             <a:ext cx="10881360" cy="365760"/>
           </a:xfrm>
           <a:prstGeom prst="rect">
@@ -8027,7 +8130,7 @@
                 <a:ea typeface="Calibri" pitchFamily="34" charset="-122"/>
                 <a:cs typeface="Calibri" pitchFamily="34" charset="-120"/>
               </a:rPr>
-              <a:t>65 tests — the ones that would be invisible in a demo but wrong in production</a:t>
+              <a:t>I focused on the things that would look fine in a demo but be wrong in real life</a:t>
             </a:r>
             <a:endParaRPr lang="en-US" sz="1400" dirty="0"/>
           </a:p>
@@ -8041,7 +8144,7 @@
         </p:nvGraphicFramePr>
         <p:xfrm>
           <a:off x="640080" y="1920240"/>
-          <a:ext cx="4206240" cy="3840480"/>
+          <a:ext cx="4023360" cy="3657600"/>
         </p:xfrm>
         <a:graphic xmlns:a="http://schemas.openxmlformats.org/drawingml/2006/main">
           <a:graphicData uri="http://schemas.openxmlformats.org/drawingml/2006/chart">
@@ -8057,12 +8160,12 @@
         </p:nvSpPr>
         <p:spPr>
           <a:xfrm>
-            <a:off x="5212080" y="1920240"/>
-            <a:ext cx="6309360" cy="566928"/>
+            <a:off x="5029200" y="1920240"/>
+            <a:ext cx="6492240" cy="548640"/>
           </a:xfrm>
           <a:prstGeom prst="roundRect">
             <a:avLst>
-              <a:gd name="adj" fmla="val 14516"/>
+              <a:gd name="adj" fmla="val 15000"/>
             </a:avLst>
           </a:prstGeom>
           <a:solidFill>
@@ -8084,24 +8187,24 @@
         </p:nvSpPr>
         <p:spPr>
           <a:xfrm>
-            <a:off x="5440680" y="1965960"/>
-            <a:ext cx="1828800" cy="475488"/>
-          </a:xfrm>
-          <a:prstGeom prst="rect">
-            <a:avLst/>
-          </a:prstGeom>
-          <a:noFill/>
-          <a:ln/>
-        </p:spPr>
-        <p:txBody>
-          <a:bodyPr wrap="square" lIns="0" tIns="0" rIns="0" bIns="0" rtlCol="0" anchor="ctr"/>
-          <a:lstStyle/>
-          <a:p>
-            <a:pPr indent="0" marL="0">
-              <a:buNone/>
-            </a:pPr>
-            <a:r>
-              <a:rPr lang="en-US" sz="1300" b="1" dirty="0">
+            <a:off x="5257800" y="1956816"/>
+            <a:ext cx="2377440" cy="475488"/>
+          </a:xfrm>
+          <a:prstGeom prst="rect">
+            <a:avLst/>
+          </a:prstGeom>
+          <a:noFill/>
+          <a:ln/>
+        </p:spPr>
+        <p:txBody>
+          <a:bodyPr wrap="square" lIns="0" tIns="0" rIns="0" bIns="0" rtlCol="0" anchor="ctr"/>
+          <a:lstStyle/>
+          <a:p>
+            <a:pPr indent="0" marL="0">
+              <a:buNone/>
+            </a:pPr>
+            <a:r>
+              <a:rPr lang="en-US" sz="1250" b="1" dirty="0">
                 <a:solidFill>
                   <a:srgbClr val="D4A937"/>
                 </a:solidFill>
@@ -8109,9 +8212,9 @@
                 <a:ea typeface="Calibri" pitchFamily="34" charset="-122"/>
                 <a:cs typeface="Calibri" pitchFamily="34" charset="-120"/>
               </a:rPr>
-              <a:t>Boundary times</a:t>
-            </a:r>
-            <a:endParaRPr lang="en-US" sz="1300" dirty="0"/>
+              <a:t>Back-to-back bookings</a:t>
+            </a:r>
+            <a:endParaRPr lang="en-US" sz="1250" dirty="0"/>
           </a:p>
         </p:txBody>
       </p:sp>
@@ -8123,24 +8226,24 @@
         </p:nvSpPr>
         <p:spPr>
           <a:xfrm>
-            <a:off x="7315200" y="1965960"/>
-            <a:ext cx="4023360" cy="475488"/>
-          </a:xfrm>
-          <a:prstGeom prst="rect">
-            <a:avLst/>
-          </a:prstGeom>
-          <a:noFill/>
-          <a:ln/>
-        </p:spPr>
-        <p:txBody>
-          <a:bodyPr wrap="square" lIns="0" tIns="0" rIns="0" bIns="0" rtlCol="0" anchor="ctr"/>
-          <a:lstStyle/>
-          <a:p>
-            <a:pPr indent="0" marL="0">
-              <a:buNone/>
-            </a:pPr>
-            <a:r>
-              <a:rPr lang="en-US" sz="1200" dirty="0">
+            <a:off x="7726680" y="1956816"/>
+            <a:ext cx="3566160" cy="475488"/>
+          </a:xfrm>
+          <a:prstGeom prst="rect">
+            <a:avLst/>
+          </a:prstGeom>
+          <a:noFill/>
+          <a:ln/>
+        </p:spPr>
+        <p:txBody>
+          <a:bodyPr wrap="square" lIns="0" tIns="0" rIns="0" bIns="0" rtlCol="0" anchor="ctr"/>
+          <a:lstStyle/>
+          <a:p>
+            <a:pPr indent="0" marL="0">
+              <a:buNone/>
+            </a:pPr>
+            <a:r>
+              <a:rPr lang="en-US" sz="1150" dirty="0">
                 <a:solidFill>
                   <a:srgbClr val="F5F0E6"/>
                 </a:solidFill>
@@ -8148,9 +8251,9 @@
                 <a:ea typeface="Calibri" pitchFamily="34" charset="-122"/>
                 <a:cs typeface="Calibri" pitchFamily="34" charset="-120"/>
               </a:rPr>
-              <a:t>Back-to-back bookings at the exact same instant</a:t>
-            </a:r>
-            <a:endParaRPr lang="en-US" sz="1200" dirty="0"/>
+              <a:t>One ends at 20:00, the next starts at 20:00</a:t>
+            </a:r>
+            <a:endParaRPr lang="en-US" sz="1150" dirty="0"/>
           </a:p>
         </p:txBody>
       </p:sp>
@@ -8162,12 +8265,12 @@
         </p:nvSpPr>
         <p:spPr>
           <a:xfrm>
-            <a:off x="5212080" y="2578608"/>
-            <a:ext cx="6309360" cy="566928"/>
+            <a:off x="5029200" y="2560320"/>
+            <a:ext cx="6492240" cy="548640"/>
           </a:xfrm>
           <a:prstGeom prst="roundRect">
             <a:avLst>
-              <a:gd name="adj" fmla="val 14516"/>
+              <a:gd name="adj" fmla="val 15000"/>
             </a:avLst>
           </a:prstGeom>
           <a:solidFill>
@@ -8189,24 +8292,24 @@
         </p:nvSpPr>
         <p:spPr>
           <a:xfrm>
-            <a:off x="5440680" y="2624328"/>
-            <a:ext cx="1828800" cy="475488"/>
-          </a:xfrm>
-          <a:prstGeom prst="rect">
-            <a:avLst/>
-          </a:prstGeom>
-          <a:noFill/>
-          <a:ln/>
-        </p:spPr>
-        <p:txBody>
-          <a:bodyPr wrap="square" lIns="0" tIns="0" rIns="0" bIns="0" rtlCol="0" anchor="ctr"/>
-          <a:lstStyle/>
-          <a:p>
-            <a:pPr indent="0" marL="0">
-              <a:buNone/>
-            </a:pPr>
-            <a:r>
-              <a:rPr lang="en-US" sz="1300" b="1" dirty="0">
+            <a:off x="5257800" y="2596896"/>
+            <a:ext cx="2377440" cy="475488"/>
+          </a:xfrm>
+          <a:prstGeom prst="rect">
+            <a:avLst/>
+          </a:prstGeom>
+          <a:noFill/>
+          <a:ln/>
+        </p:spPr>
+        <p:txBody>
+          <a:bodyPr wrap="square" lIns="0" tIns="0" rIns="0" bIns="0" rtlCol="0" anchor="ctr"/>
+          <a:lstStyle/>
+          <a:p>
+            <a:pPr indent="0" marL="0">
+              <a:buNone/>
+            </a:pPr>
+            <a:r>
+              <a:rPr lang="en-US" sz="1250" b="1" dirty="0">
                 <a:solidFill>
                   <a:srgbClr val="D4A937"/>
                 </a:solidFill>
@@ -8214,9 +8317,9 @@
                 <a:ea typeface="Calibri" pitchFamily="34" charset="-122"/>
                 <a:cs typeface="Calibri" pitchFamily="34" charset="-120"/>
               </a:rPr>
-              <a:t>Released tables</a:t>
-            </a:r>
-            <a:endParaRPr lang="en-US" sz="1300" dirty="0"/>
+              <a:t>Cancelling</a:t>
+            </a:r>
+            <a:endParaRPr lang="en-US" sz="1250" dirty="0"/>
           </a:p>
         </p:txBody>
       </p:sp>
@@ -8228,24 +8331,24 @@
         </p:nvSpPr>
         <p:spPr>
           <a:xfrm>
-            <a:off x="7315200" y="2624328"/>
-            <a:ext cx="4023360" cy="475488"/>
-          </a:xfrm>
-          <a:prstGeom prst="rect">
-            <a:avLst/>
-          </a:prstGeom>
-          <a:noFill/>
-          <a:ln/>
-        </p:spPr>
-        <p:txBody>
-          <a:bodyPr wrap="square" lIns="0" tIns="0" rIns="0" bIns="0" rtlCol="0" anchor="ctr"/>
-          <a:lstStyle/>
-          <a:p>
-            <a:pPr indent="0" marL="0">
-              <a:buNone/>
-            </a:pPr>
-            <a:r>
-              <a:rPr lang="en-US" sz="1200" dirty="0">
+            <a:off x="7726680" y="2596896"/>
+            <a:ext cx="3566160" cy="475488"/>
+          </a:xfrm>
+          <a:prstGeom prst="rect">
+            <a:avLst/>
+          </a:prstGeom>
+          <a:noFill/>
+          <a:ln/>
+        </p:spPr>
+        <p:txBody>
+          <a:bodyPr wrap="square" lIns="0" tIns="0" rIns="0" bIns="0" rtlCol="0" anchor="ctr"/>
+          <a:lstStyle/>
+          <a:p>
+            <a:pPr indent="0" marL="0">
+              <a:buNone/>
+            </a:pPr>
+            <a:r>
+              <a:rPr lang="en-US" sz="1150" dirty="0">
                 <a:solidFill>
                   <a:srgbClr val="F5F0E6"/>
                 </a:solidFill>
@@ -8253,9 +8356,9 @@
                 <a:ea typeface="Calibri" pitchFamily="34" charset="-122"/>
                 <a:cs typeface="Calibri" pitchFamily="34" charset="-120"/>
               </a:rPr>
-              <a:t>A cancelled booking frees its table for the next caller</a:t>
-            </a:r>
-            <a:endParaRPr lang="en-US" sz="1200" dirty="0"/>
+              <a:t>Does the table actually become free again?</a:t>
+            </a:r>
+            <a:endParaRPr lang="en-US" sz="1150" dirty="0"/>
           </a:p>
         </p:txBody>
       </p:sp>
@@ -8267,12 +8370,12 @@
         </p:nvSpPr>
         <p:spPr>
           <a:xfrm>
-            <a:off x="5212080" y="3236976"/>
-            <a:ext cx="6309360" cy="566928"/>
+            <a:off x="5029200" y="3200400"/>
+            <a:ext cx="6492240" cy="548640"/>
           </a:xfrm>
           <a:prstGeom prst="roundRect">
             <a:avLst>
-              <a:gd name="adj" fmla="val 14516"/>
+              <a:gd name="adj" fmla="val 15000"/>
             </a:avLst>
           </a:prstGeom>
           <a:solidFill>
@@ -8294,24 +8397,24 @@
         </p:nvSpPr>
         <p:spPr>
           <a:xfrm>
-            <a:off x="5440680" y="3282696"/>
-            <a:ext cx="1828800" cy="475488"/>
-          </a:xfrm>
-          <a:prstGeom prst="rect">
-            <a:avLst/>
-          </a:prstGeom>
-          <a:noFill/>
-          <a:ln/>
-        </p:spPr>
-        <p:txBody>
-          <a:bodyPr wrap="square" lIns="0" tIns="0" rIns="0" bIns="0" rtlCol="0" anchor="ctr"/>
-          <a:lstStyle/>
-          <a:p>
-            <a:pPr indent="0" marL="0">
-              <a:buNone/>
-            </a:pPr>
-            <a:r>
-              <a:rPr lang="en-US" sz="1300" b="1" dirty="0">
+            <a:off x="5257800" y="3236976"/>
+            <a:ext cx="2377440" cy="475488"/>
+          </a:xfrm>
+          <a:prstGeom prst="rect">
+            <a:avLst/>
+          </a:prstGeom>
+          <a:noFill/>
+          <a:ln/>
+        </p:spPr>
+        <p:txBody>
+          <a:bodyPr wrap="square" lIns="0" tIns="0" rIns="0" bIns="0" rtlCol="0" anchor="ctr"/>
+          <a:lstStyle/>
+          <a:p>
+            <a:pPr indent="0" marL="0">
+              <a:buNone/>
+            </a:pPr>
+            <a:r>
+              <a:rPr lang="en-US" sz="1250" b="1" dirty="0">
                 <a:solidFill>
                   <a:srgbClr val="D4A937"/>
                 </a:solidFill>
@@ -8319,9 +8422,9 @@
                 <a:ea typeface="Calibri" pitchFamily="34" charset="-122"/>
                 <a:cs typeface="Calibri" pitchFamily="34" charset="-120"/>
               </a:rPr>
-              <a:t>Past midnight</a:t>
-            </a:r>
-            <a:endParaRPr lang="en-US" sz="1300" dirty="0"/>
+              <a:t>Restaurants open past midnight</a:t>
+            </a:r>
+            <a:endParaRPr lang="en-US" sz="1250" dirty="0"/>
           </a:p>
         </p:txBody>
       </p:sp>
@@ -8333,24 +8436,24 @@
         </p:nvSpPr>
         <p:spPr>
           <a:xfrm>
-            <a:off x="7315200" y="3282696"/>
-            <a:ext cx="4023360" cy="475488"/>
-          </a:xfrm>
-          <a:prstGeom prst="rect">
-            <a:avLst/>
-          </a:prstGeom>
-          <a:noFill/>
-          <a:ln/>
-        </p:spPr>
-        <p:txBody>
-          <a:bodyPr wrap="square" lIns="0" tIns="0" rIns="0" bIns="0" rtlCol="0" anchor="ctr"/>
-          <a:lstStyle/>
-          <a:p>
-            <a:pPr indent="0" marL="0">
-              <a:buNone/>
-            </a:pPr>
-            <a:r>
-              <a:rPr lang="en-US" sz="1200" dirty="0">
+            <a:off x="7726680" y="3236976"/>
+            <a:ext cx="3566160" cy="475488"/>
+          </a:xfrm>
+          <a:prstGeom prst="rect">
+            <a:avLst/>
+          </a:prstGeom>
+          <a:noFill/>
+          <a:ln/>
+        </p:spPr>
+        <p:txBody>
+          <a:bodyPr wrap="square" lIns="0" tIns="0" rIns="0" bIns="0" rtlCol="0" anchor="ctr"/>
+          <a:lstStyle/>
+          <a:p>
+            <a:pPr indent="0" marL="0">
+              <a:buNone/>
+            </a:pPr>
+            <a:r>
+              <a:rPr lang="en-US" sz="1150" dirty="0">
                 <a:solidFill>
                   <a:srgbClr val="F5F0E6"/>
                 </a:solidFill>
@@ -8358,9 +8461,9 @@
                 <a:ea typeface="Calibri" pitchFamily="34" charset="-122"/>
                 <a:cs typeface="Calibri" pitchFamily="34" charset="-120"/>
               </a:rPr>
-              <a:t>Service running 18:00–01:00 defeats naive comparison</a:t>
-            </a:r>
-            <a:endParaRPr lang="en-US" sz="1200" dirty="0"/>
+              <a:t>18:00 to 01:00 breaks a naive comparison</a:t>
+            </a:r>
+            <a:endParaRPr lang="en-US" sz="1150" dirty="0"/>
           </a:p>
         </p:txBody>
       </p:sp>
@@ -8372,12 +8475,12 @@
         </p:nvSpPr>
         <p:spPr>
           <a:xfrm>
-            <a:off x="5212080" y="3895344"/>
-            <a:ext cx="6309360" cy="566928"/>
+            <a:off x="5029200" y="3840480"/>
+            <a:ext cx="6492240" cy="548640"/>
           </a:xfrm>
           <a:prstGeom prst="roundRect">
             <a:avLst>
-              <a:gd name="adj" fmla="val 14516"/>
+              <a:gd name="adj" fmla="val 15000"/>
             </a:avLst>
           </a:prstGeom>
           <a:solidFill>
@@ -8399,24 +8502,24 @@
         </p:nvSpPr>
         <p:spPr>
           <a:xfrm>
-            <a:off x="5440680" y="3941064"/>
-            <a:ext cx="1828800" cy="475488"/>
-          </a:xfrm>
-          <a:prstGeom prst="rect">
-            <a:avLst/>
-          </a:prstGeom>
-          <a:noFill/>
-          <a:ln/>
-        </p:spPr>
-        <p:txBody>
-          <a:bodyPr wrap="square" lIns="0" tIns="0" rIns="0" bIns="0" rtlCol="0" anchor="ctr"/>
-          <a:lstStyle/>
-          <a:p>
-            <a:pPr indent="0" marL="0">
-              <a:buNone/>
-            </a:pPr>
-            <a:r>
-              <a:rPr lang="en-US" sz="1300" b="1" dirty="0">
+            <a:off x="5257800" y="3877056"/>
+            <a:ext cx="2377440" cy="475488"/>
+          </a:xfrm>
+          <a:prstGeom prst="rect">
+            <a:avLst/>
+          </a:prstGeom>
+          <a:noFill/>
+          <a:ln/>
+        </p:spPr>
+        <p:txBody>
+          <a:bodyPr wrap="square" lIns="0" tIns="0" rIns="0" bIns="0" rtlCol="0" anchor="ctr"/>
+          <a:lstStyle/>
+          <a:p>
+            <a:pPr indent="0" marL="0">
+              <a:buNone/>
+            </a:pPr>
+            <a:r>
+              <a:rPr lang="en-US" sz="1250" b="1" dirty="0">
                 <a:solidFill>
                   <a:srgbClr val="D4A937"/>
                 </a:solidFill>
@@ -8424,9 +8527,9 @@
                 <a:ea typeface="Calibri" pitchFamily="34" charset="-122"/>
                 <a:cs typeface="Calibri" pitchFamily="34" charset="-120"/>
               </a:rPr>
-              <a:t>Concurrency</a:t>
-            </a:r>
-            <a:endParaRPr lang="en-US" sz="1300" dirty="0"/>
+              <a:t>Two bookings at once</a:t>
+            </a:r>
+            <a:endParaRPr lang="en-US" sz="1250" dirty="0"/>
           </a:p>
         </p:txBody>
       </p:sp>
@@ -8438,24 +8541,24 @@
         </p:nvSpPr>
         <p:spPr>
           <a:xfrm>
-            <a:off x="7315200" y="3941064"/>
-            <a:ext cx="4023360" cy="475488"/>
-          </a:xfrm>
-          <a:prstGeom prst="rect">
-            <a:avLst/>
-          </a:prstGeom>
-          <a:noFill/>
-          <a:ln/>
-        </p:spPr>
-        <p:txBody>
-          <a:bodyPr wrap="square" lIns="0" tIns="0" rIns="0" bIns="0" rtlCol="0" anchor="ctr"/>
-          <a:lstStyle/>
-          <a:p>
-            <a:pPr indent="0" marL="0">
-              <a:buNone/>
-            </a:pPr>
-            <a:r>
-              <a:rPr lang="en-US" sz="1200" dirty="0">
+            <a:off x="7726680" y="3877056"/>
+            <a:ext cx="3566160" cy="475488"/>
+          </a:xfrm>
+          <a:prstGeom prst="rect">
+            <a:avLst/>
+          </a:prstGeom>
+          <a:noFill/>
+          <a:ln/>
+        </p:spPr>
+        <p:txBody>
+          <a:bodyPr wrap="square" lIns="0" tIns="0" rIns="0" bIns="0" rtlCol="0" anchor="ctr"/>
+          <a:lstStyle/>
+          <a:p>
+            <a:pPr indent="0" marL="0">
+              <a:buNone/>
+            </a:pPr>
+            <a:r>
+              <a:rPr lang="en-US" sz="1150" dirty="0">
                 <a:solidFill>
                   <a:srgbClr val="F5F0E6"/>
                 </a:solidFill>
@@ -8463,9 +8566,9 @@
                 <a:ea typeface="Calibri" pitchFamily="34" charset="-122"/>
                 <a:cs typeface="Calibri" pitchFamily="34" charset="-120"/>
               </a:rPr>
-              <a:t>Two simultaneous requests for the last table — one wins</a:t>
-            </a:r>
-            <a:endParaRPr lang="en-US" sz="1200" dirty="0"/>
+              <a:t>Only one can win — this is the important one</a:t>
+            </a:r>
+            <a:endParaRPr lang="en-US" sz="1150" dirty="0"/>
           </a:p>
         </p:txBody>
       </p:sp>
@@ -8477,12 +8580,12 @@
         </p:nvSpPr>
         <p:spPr>
           <a:xfrm>
-            <a:off x="5212080" y="4553712"/>
-            <a:ext cx="6309360" cy="566928"/>
+            <a:off x="5029200" y="4480560"/>
+            <a:ext cx="6492240" cy="548640"/>
           </a:xfrm>
           <a:prstGeom prst="roundRect">
             <a:avLst>
-              <a:gd name="adj" fmla="val 14516"/>
+              <a:gd name="adj" fmla="val 15000"/>
             </a:avLst>
           </a:prstGeom>
           <a:solidFill>
@@ -8504,24 +8607,24 @@
         </p:nvSpPr>
         <p:spPr>
           <a:xfrm>
-            <a:off x="5440680" y="4599432"/>
-            <a:ext cx="1828800" cy="475488"/>
-          </a:xfrm>
-          <a:prstGeom prst="rect">
-            <a:avLst/>
-          </a:prstGeom>
-          <a:noFill/>
-          <a:ln/>
-        </p:spPr>
-        <p:txBody>
-          <a:bodyPr wrap="square" lIns="0" tIns="0" rIns="0" bIns="0" rtlCol="0" anchor="ctr"/>
-          <a:lstStyle/>
-          <a:p>
-            <a:pPr indent="0" marL="0">
-              <a:buNone/>
-            </a:pPr>
-            <a:r>
-              <a:rPr lang="en-US" sz="1300" b="1" dirty="0">
+            <a:off x="5257800" y="4517136"/>
+            <a:ext cx="2377440" cy="475488"/>
+          </a:xfrm>
+          <a:prstGeom prst="rect">
+            <a:avLst/>
+          </a:prstGeom>
+          <a:noFill/>
+          <a:ln/>
+        </p:spPr>
+        <p:txBody>
+          <a:bodyPr wrap="square" lIns="0" tIns="0" rIns="0" bIns="0" rtlCol="0" anchor="ctr"/>
+          <a:lstStyle/>
+          <a:p>
+            <a:pPr indent="0" marL="0">
+              <a:buNone/>
+            </a:pPr>
+            <a:r>
+              <a:rPr lang="en-US" sz="1250" b="1" dirty="0">
                 <a:solidFill>
                   <a:srgbClr val="D4A937"/>
                 </a:solidFill>
@@ -8529,9 +8632,9 @@
                 <a:ea typeface="Calibri" pitchFamily="34" charset="-122"/>
                 <a:cs typeface="Calibri" pitchFamily="34" charset="-120"/>
               </a:rPr>
-              <a:t>Authorisation</a:t>
-            </a:r>
-            <a:endParaRPr lang="en-US" sz="1300" dirty="0"/>
+              <a:t>Another manager</a:t>
+            </a:r>
+            <a:endParaRPr lang="en-US" sz="1250" dirty="0"/>
           </a:p>
         </p:txBody>
       </p:sp>
@@ -8543,24 +8646,24 @@
         </p:nvSpPr>
         <p:spPr>
           <a:xfrm>
-            <a:off x="7315200" y="4599432"/>
-            <a:ext cx="4023360" cy="475488"/>
-          </a:xfrm>
-          <a:prstGeom prst="rect">
-            <a:avLst/>
-          </a:prstGeom>
-          <a:noFill/>
-          <a:ln/>
-        </p:spPr>
-        <p:txBody>
-          <a:bodyPr wrap="square" lIns="0" tIns="0" rIns="0" bIns="0" rtlCol="0" anchor="ctr"/>
-          <a:lstStyle/>
-          <a:p>
-            <a:pPr indent="0" marL="0">
-              <a:buNone/>
-            </a:pPr>
-            <a:r>
-              <a:rPr lang="en-US" sz="1200" dirty="0">
+            <a:off x="7726680" y="4517136"/>
+            <a:ext cx="3566160" cy="475488"/>
+          </a:xfrm>
+          <a:prstGeom prst="rect">
+            <a:avLst/>
+          </a:prstGeom>
+          <a:noFill/>
+          <a:ln/>
+        </p:spPr>
+        <p:txBody>
+          <a:bodyPr wrap="square" lIns="0" tIns="0" rIns="0" bIns="0" rtlCol="0" anchor="ctr"/>
+          <a:lstStyle/>
+          <a:p>
+            <a:pPr indent="0" marL="0">
+              <a:buNone/>
+            </a:pPr>
+            <a:r>
+              <a:rPr lang="en-US" sz="1150" dirty="0">
                 <a:solidFill>
                   <a:srgbClr val="F5F0E6"/>
                 </a:solidFill>
@@ -8568,9 +8671,9 @@
                 <a:ea typeface="Calibri" pitchFamily="34" charset="-122"/>
                 <a:cs typeface="Calibri" pitchFamily="34" charset="-120"/>
               </a:rPr>
-              <a:t>A second manager gets 404, and the record is unchanged</a:t>
-            </a:r>
-            <a:endParaRPr lang="en-US" sz="1200" dirty="0"/>
+              <a:t>Gets a 404, and the booking really is unchanged</a:t>
+            </a:r>
+            <a:endParaRPr lang="en-US" sz="1150" dirty="0"/>
           </a:p>
         </p:txBody>
       </p:sp>
@@ -8582,12 +8685,12 @@
         </p:nvSpPr>
         <p:spPr>
           <a:xfrm>
-            <a:off x="5212080" y="5212080"/>
-            <a:ext cx="6309360" cy="566928"/>
+            <a:off x="5029200" y="5120640"/>
+            <a:ext cx="6492240" cy="548640"/>
           </a:xfrm>
           <a:prstGeom prst="roundRect">
             <a:avLst>
-              <a:gd name="adj" fmla="val 14516"/>
+              <a:gd name="adj" fmla="val 15000"/>
             </a:avLst>
           </a:prstGeom>
           <a:solidFill>
@@ -8609,24 +8712,24 @@
         </p:nvSpPr>
         <p:spPr>
           <a:xfrm>
-            <a:off x="5440680" y="5257800"/>
-            <a:ext cx="1828800" cy="475488"/>
-          </a:xfrm>
-          <a:prstGeom prst="rect">
-            <a:avLst/>
-          </a:prstGeom>
-          <a:noFill/>
-          <a:ln/>
-        </p:spPr>
-        <p:txBody>
-          <a:bodyPr wrap="square" lIns="0" tIns="0" rIns="0" bIns="0" rtlCol="0" anchor="ctr"/>
-          <a:lstStyle/>
-          <a:p>
-            <a:pPr indent="0" marL="0">
-              <a:buNone/>
-            </a:pPr>
-            <a:r>
-              <a:rPr lang="en-US" sz="1300" b="1" dirty="0">
+            <a:off x="5257800" y="5157216"/>
+            <a:ext cx="2377440" cy="475488"/>
+          </a:xfrm>
+          <a:prstGeom prst="rect">
+            <a:avLst/>
+          </a:prstGeom>
+          <a:noFill/>
+          <a:ln/>
+        </p:spPr>
+        <p:txBody>
+          <a:bodyPr wrap="square" lIns="0" tIns="0" rIns="0" bIns="0" rtlCol="0" anchor="ctr"/>
+          <a:lstStyle/>
+          <a:p>
+            <a:pPr indent="0" marL="0">
+              <a:buNone/>
+            </a:pPr>
+            <a:r>
+              <a:rPr lang="en-US" sz="1250" b="1" dirty="0">
                 <a:solidFill>
                   <a:srgbClr val="D4A937"/>
                 </a:solidFill>
@@ -8634,48 +8737,87 @@
                 <a:ea typeface="Calibri" pitchFamily="34" charset="-122"/>
                 <a:cs typeface="Calibri" pitchFamily="34" charset="-120"/>
               </a:rPr>
-              <a:t>Enumeration</a:t>
+              <a:t>The login form</a:t>
+            </a:r>
+            <a:endParaRPr lang="en-US" sz="1250" dirty="0"/>
+          </a:p>
+        </p:txBody>
+      </p:sp>
+      <p:sp>
+        <p:nvSpPr>
+          <p:cNvPr id="22" name="Text 19"/>
+          <p:cNvSpPr/>
+          <p:nvPr/>
+        </p:nvSpPr>
+        <p:spPr>
+          <a:xfrm>
+            <a:off x="7726680" y="5157216"/>
+            <a:ext cx="3566160" cy="475488"/>
+          </a:xfrm>
+          <a:prstGeom prst="rect">
+            <a:avLst/>
+          </a:prstGeom>
+          <a:noFill/>
+          <a:ln/>
+        </p:spPr>
+        <p:txBody>
+          <a:bodyPr wrap="square" lIns="0" tIns="0" rIns="0" bIns="0" rtlCol="0" anchor="ctr"/>
+          <a:lstStyle/>
+          <a:p>
+            <a:pPr indent="0" marL="0">
+              <a:buNone/>
+            </a:pPr>
+            <a:r>
+              <a:rPr lang="en-US" sz="1150" dirty="0">
+                <a:solidFill>
+                  <a:srgbClr val="F5F0E6"/>
+                </a:solidFill>
+                <a:latin typeface="Calibri" pitchFamily="34" charset="0"/>
+                <a:ea typeface="Calibri" pitchFamily="34" charset="-122"/>
+                <a:cs typeface="Calibri" pitchFamily="34" charset="-120"/>
+              </a:rPr>
+              <a:t>Wrong password and unknown email look identical</a:t>
+            </a:r>
+            <a:endParaRPr lang="en-US" sz="1150" dirty="0"/>
+          </a:p>
+        </p:txBody>
+      </p:sp>
+      <p:sp>
+        <p:nvSpPr>
+          <p:cNvPr id="23" name="Text 20"/>
+          <p:cNvSpPr/>
+          <p:nvPr/>
+        </p:nvSpPr>
+        <p:spPr>
+          <a:xfrm>
+            <a:off x="640080" y="5943600"/>
+            <a:ext cx="10881360" cy="365760"/>
+          </a:xfrm>
+          <a:prstGeom prst="rect">
+            <a:avLst/>
+          </a:prstGeom>
+          <a:noFill/>
+          <a:ln/>
+        </p:spPr>
+        <p:txBody>
+          <a:bodyPr wrap="square" lIns="0" tIns="0" rIns="0" bIns="0" rtlCol="0" anchor="ctr"/>
+          <a:lstStyle/>
+          <a:p>
+            <a:pPr indent="0" marL="0">
+              <a:buNone/>
+            </a:pPr>
+            <a:r>
+              <a:rPr lang="en-US" sz="1300" i="1" dirty="0">
+                <a:solidFill>
+                  <a:srgbClr val="97B0A2"/>
+                </a:solidFill>
+                <a:latin typeface="Calibri" pitchFamily="34" charset="0"/>
+                <a:ea typeface="Calibri" pitchFamily="34" charset="-122"/>
+                <a:cs typeface="Calibri" pitchFamily="34" charset="-120"/>
+              </a:rPr>
+              <a:t>65 tests. They run in about a second, so I ran them constantly.</a:t>
             </a:r>
             <a:endParaRPr lang="en-US" sz="1300" dirty="0"/>
-          </a:p>
-        </p:txBody>
-      </p:sp>
-      <p:sp>
-        <p:nvSpPr>
-          <p:cNvPr id="22" name="Text 19"/>
-          <p:cNvSpPr/>
-          <p:nvPr/>
-        </p:nvSpPr>
-        <p:spPr>
-          <a:xfrm>
-            <a:off x="7315200" y="5257800"/>
-            <a:ext cx="4023360" cy="475488"/>
-          </a:xfrm>
-          <a:prstGeom prst="rect">
-            <a:avLst/>
-          </a:prstGeom>
-          <a:noFill/>
-          <a:ln/>
-        </p:spPr>
-        <p:txBody>
-          <a:bodyPr wrap="square" lIns="0" tIns="0" rIns="0" bIns="0" rtlCol="0" anchor="ctr"/>
-          <a:lstStyle/>
-          <a:p>
-            <a:pPr indent="0" marL="0">
-              <a:buNone/>
-            </a:pPr>
-            <a:r>
-              <a:rPr lang="en-US" sz="1200" dirty="0">
-                <a:solidFill>
-                  <a:srgbClr val="F5F0E6"/>
-                </a:solidFill>
-                <a:latin typeface="Calibri" pitchFamily="34" charset="0"/>
-                <a:ea typeface="Calibri" pitchFamily="34" charset="-122"/>
-                <a:cs typeface="Calibri" pitchFamily="34" charset="-120"/>
-              </a:rPr>
-              <a:t>Wrong password and unknown email are identical</a:t>
-            </a:r>
-            <a:endParaRPr lang="en-US" sz="1200" dirty="0"/>
           </a:p>
         </p:txBody>
       </p:sp>

--- a/docs/presentation.pptx
+++ b/docs/presentation.pptx
@@ -16,9 +16,10 @@
     <p:sldId id="264" r:id="rId10"/>
     <p:sldId id="265" r:id="rId11"/>
     <p:sldId id="266" r:id="rId12"/>
+    <p:sldId id="267" r:id="rId13"/>
   </p:sldIdLst>
   <p:notesMasterIdLst>
-    <p:notesMasterId r:id="rId13"/>
+    <p:notesMasterId r:id="rId14"/>
   </p:notesMasterIdLst>
   <p:sldSz cx="12192000" cy="6858000"/>
   <p:notesSz cx="6858000" cy="12192000"/>
@@ -809,9 +810,9 @@
           <a:p>
             <a:r>
               <a:rPr lang="en-US" dirty="0"/>
-              <a:t>ABOUT 90 SECONDS. Do not skip this slide.
-Volunteering your own gaps is the single easiest way to sound like you understand your own project. It also takes the sting out of the obvious questions, because you asked them first.
-Deliver it matter-of-factly, not apologetically. These are scoping decisions, not failures.</a:t>
+              <a:t>ABOUT 2 MINUTES.
+The number is not the point — say that. The point is that the booking rules are separated out from the database and the web server, which is what makes them testable at all.
+If asked what you would add: tests for the React side. I did not write any, and I should have.</a:t>
             </a:r>
             <a:endParaRPr lang="en-US" dirty="0"/>
           </a:p>
@@ -899,6 +900,96 @@
           <a:p>
             <a:r>
               <a:rPr lang="en-US" dirty="0"/>
+              <a:t>ABOUT 90 SECONDS. Do not skip this slide.
+Volunteering your own gaps is the single easiest way to sound like you understand your own project. It also takes the sting out of the obvious questions, because you asked them first.
+Deliver it matter-of-factly, not apologetically. These are scoping decisions, not failures.</a:t>
+            </a:r>
+            <a:endParaRPr lang="en-US" dirty="0"/>
+          </a:p>
+        </p:txBody>
+      </p:sp>
+      <p:sp>
+        <p:nvSpPr>
+          <p:cNvPr id="4" name="Slide Number Placeholder 3"/>
+          <p:cNvSpPr>
+            <a:spLocks noGrp="1"/>
+          </p:cNvSpPr>
+          <p:nvPr>
+            <p:ph type="sldNum" sz="quarter" idx="10"/>
+          </p:nvPr>
+        </p:nvSpPr>
+        <p:spPr/>
+        <p:txBody>
+          <a:bodyPr/>
+          <a:lstStyle/>
+          <a:p>
+            <a:fld id="{F7021451-1387-4CA6-816F-3879F97B5CBC}" type="slidenum">
+              <a:rPr lang="en-US"/>
+              <a:t>11</a:t>
+            </a:fld>
+            <a:endParaRPr lang="en-US"/>
+          </a:p>
+        </p:txBody>
+      </p:sp>
+    </p:spTree>
+    <p:extLst>
+      <p:ext uri="{BB962C8B-B14F-4D97-AF65-F5344CB8AC3E}">
+        <p14:creationId xmlns:p14="http://schemas.microsoft.com/office/powerpoint/2010/main" val="1024086991"/>
+      </p:ext>
+    </p:extLst>
+  </p:cSld>
+  <p:clrMapOvr>
+    <a:masterClrMapping/>
+  </p:clrMapOvr>
+</p:notes>
+</file>
+
+<file path=ppt/notesSlides/notesSlide12.xml><?xml version="1.0" encoding="utf-8"?>
+<p:notes xmlns:a="http://schemas.openxmlformats.org/drawingml/2006/main" xmlns:r="http://schemas.openxmlformats.org/officeDocument/2006/relationships" xmlns:p="http://schemas.openxmlformats.org/presentationml/2006/main">
+  <p:cSld>
+    <p:spTree>
+      <p:nvGrpSpPr>
+        <p:cNvPr id="1" name=""/>
+        <p:cNvGrpSpPr/>
+        <p:nvPr/>
+      </p:nvGrpSpPr>
+      <p:grpSpPr>
+        <a:xfrm>
+          <a:off x="0" y="0"/>
+          <a:ext cx="0" cy="0"/>
+          <a:chOff x="0" y="0"/>
+          <a:chExt cx="0" cy="0"/>
+        </a:xfrm>
+      </p:grpSpPr>
+      <p:sp>
+        <p:nvSpPr>
+          <p:cNvPr id="2" name="Slide Image Placeholder 1"/>
+          <p:cNvSpPr>
+            <a:spLocks noGrp="1" noRot="1" noChangeAspect="1"/>
+          </p:cNvSpPr>
+          <p:nvPr>
+            <p:ph type="sldImg"/>
+          </p:nvPr>
+        </p:nvSpPr>
+        <p:spPr/>
+      </p:sp>
+      <p:sp>
+        <p:nvSpPr>
+          <p:cNvPr id="3" name="Notes Placeholder 2"/>
+          <p:cNvSpPr>
+            <a:spLocks noGrp="1"/>
+          </p:cNvSpPr>
+          <p:nvPr>
+            <p:ph type="body" idx="1"/>
+          </p:nvPr>
+        </p:nvSpPr>
+        <p:spPr/>
+        <p:txBody>
+          <a:bodyPr/>
+          <a:lstStyle/>
+          <a:p>
+            <a:r>
+              <a:rPr lang="en-US" dirty="0"/>
               <a:t>ABOUT 90 SECONDS, then questions.
 PUT YOUR REAL GITHUB LINK ON THIS SLIDE BEFORE YOU PRESENT.
 Questions you should expect:
@@ -930,7 +1021,7 @@
           <a:p>
             <a:fld id="{F7021451-1387-4CA6-816F-3879F97B5CBC}" type="slidenum">
               <a:rPr lang="en-US"/>
-              <a:t>11</a:t>
+              <a:t>12</a:t>
             </a:fld>
             <a:endParaRPr lang="en-US"/>
           </a:p>
@@ -1085,9 +1176,10 @@
           <a:p>
             <a:r>
               <a:rPr lang="en-US" dirty="0"/>
-              <a:t>ABOUT 90 SECONDS.
-The bottom card is the most useful thing on this slide. Admitting the first version was wrong is stronger than pretending you designed it perfectly — it shows you understood WHY it was wrong.
-You will demonstrate this live later, so plant it here.</a:t>
+              <a:t>ABOUT 90 SECONDS. This is the slide that answers "what is it?"
+Assume the person opposite has never seen the app. Walk the four boxes left to right as a story: "I say Friday at half seven for four people, it checks every table in every restaurant, and it only shows me the places that can actually seat four."
+The bottom card is the one-sentence pitch. If you only get one idea across in the whole talk, make it this one: other sites tell you a place exists, this one tells you whether you can sit down.
+The Spanish detail is a small thing but it shows the name was a choice, not a placeholder.</a:t>
             </a:r>
             <a:endParaRPr lang="en-US" dirty="0"/>
           </a:p>
@@ -1175,9 +1267,9 @@
           <a:p>
             <a:r>
               <a:rPr lang="en-US" dirty="0"/>
-              <a:t>ABOUT 2 MINUTES.
-Go down the boxes once, then explain the right-hand card. The layering is not for its own sake — it is what made the booking rules testable.
-If asked: yes, one Express process serves both the API and the built React app. npm start does that.</a:t>
+              <a:t>ABOUT 90 SECONDS.
+The bottom card is the most useful thing on this slide. Admitting the first version was wrong is stronger than pretending you designed it perfectly — it shows you understood WHY it was wrong.
+You will demonstrate this live later, so plant it here.</a:t>
             </a:r>
             <a:endParaRPr lang="en-US" dirty="0"/>
           </a:p>
@@ -1265,9 +1357,9 @@
           <a:p>
             <a:r>
               <a:rPr lang="en-US" dirty="0"/>
-              <a:t>ABOUT 3 MINUTES. This is your best slide — take your time.
-Each of these is a real mistake you fixed, framed as a question. That is much more convincing than presenting the final answer as if it were obvious.
-Question 3 sets up the concurrency test in the demo. Say "I will show you a test for this later."</a:t>
+              <a:t>ABOUT 2 MINUTES.
+Go down the boxes once, then explain the right-hand card. The layering is not for its own sake — it is what made the booking rules testable.
+If asked: yes, one Express process serves both the API and the built React app. npm start does that.</a:t>
             </a:r>
             <a:endParaRPr lang="en-US" dirty="0"/>
           </a:p>
@@ -1355,9 +1447,9 @@
           <a:p>
             <a:r>
               <a:rPr lang="en-US" dirty="0"/>
-              <a:t>ABOUT 2 MINUTES.
-The right-hand card is worth saying out loud — a lot of student projects hide a button and call it access control.
-Likely question: "what is in the JWT?" Answer: the user id and their role, plus issued and expiry times. Nothing secret, because anyone holding it can read it.</a:t>
+              <a:t>ABOUT 3 MINUTES. This is your best slide — take your time.
+Each of these is a real mistake you fixed, framed as a question. That is much more convincing than presenting the final answer as if it were obvious.
+Question 3 sets up the concurrency test in the demo. Say "I will show you a test for this later."</a:t>
             </a:r>
             <a:endParaRPr lang="en-US" dirty="0"/>
           </a:p>
@@ -1446,9 +1538,8 @@
             <a:r>
               <a:rPr lang="en-US" dirty="0"/>
               <a:t>ABOUT 2 MINUTES.
-Be straightforward about the Django point. Do not be smug about it — just explain the reasoning and that you documented it.
-If they say you should have used Python: fair, but the same brief also says Node.js, so the two requirements conflict.
-Mentioning the week 7 lab code twice on this deck is deliberate — it shows what you learned since.</a:t>
+The right-hand card is worth saying out loud — a lot of student projects hide a button and call it access control.
+Likely question: "what is in the JWT?" Answer: the user id and their role, plus issued and expiry times. Nothing secret, because anyone holding it can read it.</a:t>
             </a:r>
             <a:endParaRPr lang="en-US" dirty="0"/>
           </a:p>
@@ -1536,15 +1627,10 @@
           <a:p>
             <a:r>
               <a:rPr lang="en-US" dirty="0"/>
-              <a:t>AROUND 12 MINUTES. THIS IS 75% OF THE MARK.
-BEFORE THE SESSION:
-  - npm run db:seed so the dashboard has fresh data
-  - npm start, check localhost:4000 loads
-  - Have both manager logins open in separate windows
-  - Have a terminal ready for npm test
-Step 5 is the security point from earlier — do it slowly and narrate it.
-Step 6 is the strongest moment. Say plainly: "these two requests go at the same time, and only one of them gets the table. That is the transaction working, not luck."
-If the 3D plan is slow on the projector, turn on Reduce Motion in System Settings and it falls back to a flat plan.</a:t>
+              <a:t>ABOUT 2 MINUTES.
+Be straightforward about the Django point. Do not be smug about it — just explain the reasoning and that you documented it.
+If they say you should have used Python: fair, but the same brief also says Node.js, so the two requirements conflict.
+Mentioning the week 7 lab code twice on this deck is deliberate — it shows what you learned since.</a:t>
             </a:r>
             <a:endParaRPr lang="en-US" dirty="0"/>
           </a:p>
@@ -1632,9 +1718,15 @@
           <a:p>
             <a:r>
               <a:rPr lang="en-US" dirty="0"/>
-              <a:t>ABOUT 2 MINUTES.
-The number is not the point — say that. The point is that the booking rules are separated out from the database and the web server, which is what makes them testable at all.
-If asked what you would add: tests for the React side. I did not write any, and I should have.</a:t>
+              <a:t>AROUND 12 MINUTES. THIS IS 75% OF THE MARK.
+BEFORE THE SESSION:
+  - npm run db:seed so the dashboard has fresh data
+  - npm start, check localhost:4000 loads
+  - Have both manager logins open in separate windows
+  - Have a terminal ready for npm test
+Step 5 is the security point from earlier — do it slowly and narrate it.
+Step 6 is the strongest moment. Say plainly: "these two requests go at the same time, and only one of them gets the table. That is the transaction working, not luck."
+If the 3D plan is slow on the projector, turn on Reduce Motion in System Settings and it falls back to a flat plan.</a:t>
             </a:r>
             <a:endParaRPr lang="en-US" dirty="0"/>
           </a:p>
@@ -2390,7 +2482,7 @@
                 <a:ea typeface="Cambria" pitchFamily="34" charset="-122"/>
                 <a:cs typeface="Cambria" pitchFamily="34" charset="-120"/>
               </a:rPr>
-              <a:t>What I did not get to</a:t>
+              <a:t>Testing</a:t>
             </a:r>
             <a:endParaRPr lang="en-US" sz="3600" dirty="0"/>
           </a:p>
@@ -2429,26 +2521,42 @@
                 <a:ea typeface="Calibri" pitchFamily="34" charset="-122"/>
                 <a:cs typeface="Calibri" pitchFamily="34" charset="-120"/>
               </a:rPr>
-              <a:t>Being straight about the gaps</a:t>
+              <a:t>I focused on the things that would look fine in a demo but be wrong in real life</a:t>
             </a:r>
             <a:endParaRPr lang="en-US" sz="1400" dirty="0"/>
           </a:p>
         </p:txBody>
       </p:sp>
-      <p:sp>
-        <p:nvSpPr>
-          <p:cNvPr id="4" name="Shape 2"/>
-          <p:cNvSpPr/>
-          <p:nvPr/>
-        </p:nvSpPr>
-        <p:spPr>
-          <a:xfrm>
-            <a:off x="640080" y="1828800"/>
-            <a:ext cx="10881360" cy="914400"/>
+      <p:graphicFrame>
+        <p:nvGraphicFramePr>
+          <p:cNvPr id="4" name="Chart 0" descr=""/>
+          <p:cNvGraphicFramePr/>
+          <p:nvPr/>
+        </p:nvGraphicFramePr>
+        <p:xfrm>
+          <a:off x="640080" y="1920240"/>
+          <a:ext cx="4023360" cy="3657600"/>
+        </p:xfrm>
+        <a:graphic xmlns:a="http://schemas.openxmlformats.org/drawingml/2006/main">
+          <a:graphicData uri="http://schemas.openxmlformats.org/drawingml/2006/chart">
+            <c:chart xmlns:c="http://schemas.openxmlformats.org/drawingml/2006/chart" r:id="rId1"/>
+          </a:graphicData>
+        </a:graphic>
+      </p:graphicFrame>
+      <p:sp>
+        <p:nvSpPr>
+          <p:cNvPr id="5" name="Shape 2"/>
+          <p:cNvSpPr/>
+          <p:nvPr/>
+        </p:nvSpPr>
+        <p:spPr>
+          <a:xfrm>
+            <a:off x="5029200" y="1920240"/>
+            <a:ext cx="6492240" cy="548640"/>
           </a:xfrm>
           <a:prstGeom prst="roundRect">
             <a:avLst>
-              <a:gd name="adj" fmla="val 9000"/>
+              <a:gd name="adj" fmla="val 15000"/>
             </a:avLst>
           </a:prstGeom>
           <a:solidFill>
@@ -2464,77 +2572,38 @@
       </p:sp>
       <p:sp>
         <p:nvSpPr>
-          <p:cNvPr id="5" name="Text 3"/>
-          <p:cNvSpPr/>
-          <p:nvPr/>
-        </p:nvSpPr>
-        <p:spPr>
-          <a:xfrm>
-            <a:off x="960120" y="1901952"/>
-            <a:ext cx="10241280" cy="292608"/>
-          </a:xfrm>
-          <a:prstGeom prst="rect">
-            <a:avLst/>
-          </a:prstGeom>
-          <a:noFill/>
-          <a:ln/>
-        </p:spPr>
-        <p:txBody>
-          <a:bodyPr wrap="square" lIns="0" tIns="0" rIns="0" bIns="0" rtlCol="0" anchor="ctr"/>
-          <a:lstStyle/>
-          <a:p>
-            <a:pPr indent="0" marL="0">
-              <a:buNone/>
-            </a:pPr>
-            <a:r>
-              <a:rPr lang="en-US" sz="1450" b="1" dirty="0">
-                <a:solidFill>
-                  <a:srgbClr val="C2683A"/>
-                </a:solidFill>
-                <a:latin typeface="Calibri" pitchFamily="34" charset="0"/>
-                <a:ea typeface="Calibri" pitchFamily="34" charset="-122"/>
-                <a:cs typeface="Calibri" pitchFamily="34" charset="-120"/>
-              </a:rPr>
-              <a:t>It is not deployed</a:t>
-            </a:r>
-            <a:endParaRPr lang="en-US" sz="1450" dirty="0"/>
-          </a:p>
-        </p:txBody>
-      </p:sp>
-      <p:sp>
-        <p:nvSpPr>
-          <p:cNvPr id="6" name="Text 4"/>
-          <p:cNvSpPr/>
-          <p:nvPr/>
-        </p:nvSpPr>
-        <p:spPr>
-          <a:xfrm>
-            <a:off x="960120" y="2212848"/>
-            <a:ext cx="10241280" cy="475488"/>
-          </a:xfrm>
-          <a:prstGeom prst="rect">
-            <a:avLst/>
-          </a:prstGeom>
-          <a:noFill/>
-          <a:ln/>
-        </p:spPr>
-        <p:txBody>
-          <a:bodyPr wrap="square" lIns="0" tIns="0" rIns="0" bIns="0" rtlCol="0" anchor="ctr"/>
-          <a:lstStyle/>
-          <a:p>
-            <a:pPr indent="0" marL="0">
-              <a:buNone/>
-            </a:pPr>
-            <a:r>
-              <a:rPr lang="en-US" sz="1250" dirty="0">
-                <a:solidFill>
-                  <a:srgbClr val="97B0A2"/>
-                </a:solidFill>
-                <a:latin typeface="Calibri" pitchFamily="34" charset="0"/>
-                <a:ea typeface="Calibri" pitchFamily="34" charset="-122"/>
-                <a:cs typeface="Calibri" pitchFamily="34" charset="-120"/>
-              </a:rPr>
-              <a:t>The brief lists deployment as optional and I ran out of time. Configuration is all environment variables, so it is ready to go, but "ready to deploy" is not the same as deployed.</a:t>
+          <p:cNvPr id="6" name="Text 3"/>
+          <p:cNvSpPr/>
+          <p:nvPr/>
+        </p:nvSpPr>
+        <p:spPr>
+          <a:xfrm>
+            <a:off x="5257800" y="1956816"/>
+            <a:ext cx="2377440" cy="475488"/>
+          </a:xfrm>
+          <a:prstGeom prst="rect">
+            <a:avLst/>
+          </a:prstGeom>
+          <a:noFill/>
+          <a:ln/>
+        </p:spPr>
+        <p:txBody>
+          <a:bodyPr wrap="square" lIns="0" tIns="0" rIns="0" bIns="0" rtlCol="0" anchor="ctr"/>
+          <a:lstStyle/>
+          <a:p>
+            <a:pPr indent="0" marL="0">
+              <a:buNone/>
+            </a:pPr>
+            <a:r>
+              <a:rPr lang="en-US" sz="1250" b="1" dirty="0">
+                <a:solidFill>
+                  <a:srgbClr val="D4A937"/>
+                </a:solidFill>
+                <a:latin typeface="Calibri" pitchFamily="34" charset="0"/>
+                <a:ea typeface="Calibri" pitchFamily="34" charset="-122"/>
+                <a:cs typeface="Calibri" pitchFamily="34" charset="-120"/>
+              </a:rPr>
+              <a:t>Back-to-back bookings</a:t>
             </a:r>
             <a:endParaRPr lang="en-US" sz="1250" dirty="0"/>
           </a:p>
@@ -2542,18 +2611,57 @@
       </p:sp>
       <p:sp>
         <p:nvSpPr>
-          <p:cNvPr id="7" name="Shape 5"/>
-          <p:cNvSpPr/>
-          <p:nvPr/>
-        </p:nvSpPr>
-        <p:spPr>
-          <a:xfrm>
-            <a:off x="640080" y="2880360"/>
-            <a:ext cx="10881360" cy="914400"/>
+          <p:cNvPr id="7" name="Text 4"/>
+          <p:cNvSpPr/>
+          <p:nvPr/>
+        </p:nvSpPr>
+        <p:spPr>
+          <a:xfrm>
+            <a:off x="7726680" y="1956816"/>
+            <a:ext cx="3566160" cy="475488"/>
+          </a:xfrm>
+          <a:prstGeom prst="rect">
+            <a:avLst/>
+          </a:prstGeom>
+          <a:noFill/>
+          <a:ln/>
+        </p:spPr>
+        <p:txBody>
+          <a:bodyPr wrap="square" lIns="0" tIns="0" rIns="0" bIns="0" rtlCol="0" anchor="ctr"/>
+          <a:lstStyle/>
+          <a:p>
+            <a:pPr indent="0" marL="0">
+              <a:buNone/>
+            </a:pPr>
+            <a:r>
+              <a:rPr lang="en-US" sz="1150" dirty="0">
+                <a:solidFill>
+                  <a:srgbClr val="F5F0E6"/>
+                </a:solidFill>
+                <a:latin typeface="Calibri" pitchFamily="34" charset="0"/>
+                <a:ea typeface="Calibri" pitchFamily="34" charset="-122"/>
+                <a:cs typeface="Calibri" pitchFamily="34" charset="-120"/>
+              </a:rPr>
+              <a:t>One ends at 20:00, the next starts at 20:00</a:t>
+            </a:r>
+            <a:endParaRPr lang="en-US" sz="1150" dirty="0"/>
+          </a:p>
+        </p:txBody>
+      </p:sp>
+      <p:sp>
+        <p:nvSpPr>
+          <p:cNvPr id="8" name="Shape 5"/>
+          <p:cNvSpPr/>
+          <p:nvPr/>
+        </p:nvSpPr>
+        <p:spPr>
+          <a:xfrm>
+            <a:off x="5029200" y="2560320"/>
+            <a:ext cx="6492240" cy="548640"/>
           </a:xfrm>
           <a:prstGeom prst="roundRect">
             <a:avLst>
-              <a:gd name="adj" fmla="val 9000"/>
+              <a:gd name="adj" fmla="val 15000"/>
             </a:avLst>
           </a:prstGeom>
           <a:solidFill>
@@ -2569,77 +2677,38 @@
       </p:sp>
       <p:sp>
         <p:nvSpPr>
-          <p:cNvPr id="8" name="Text 6"/>
-          <p:cNvSpPr/>
-          <p:nvPr/>
-        </p:nvSpPr>
-        <p:spPr>
-          <a:xfrm>
-            <a:off x="960120" y="2953512"/>
-            <a:ext cx="10241280" cy="292608"/>
-          </a:xfrm>
-          <a:prstGeom prst="rect">
-            <a:avLst/>
-          </a:prstGeom>
-          <a:noFill/>
-          <a:ln/>
-        </p:spPr>
-        <p:txBody>
-          <a:bodyPr wrap="square" lIns="0" tIns="0" rIns="0" bIns="0" rtlCol="0" anchor="ctr"/>
-          <a:lstStyle/>
-          <a:p>
-            <a:pPr indent="0" marL="0">
-              <a:buNone/>
-            </a:pPr>
-            <a:r>
-              <a:rPr lang="en-US" sz="1450" b="1" dirty="0">
-                <a:solidFill>
-                  <a:srgbClr val="C2683A"/>
-                </a:solidFill>
-                <a:latin typeface="Calibri" pitchFamily="34" charset="0"/>
-                <a:ea typeface="Calibri" pitchFamily="34" charset="-122"/>
-                <a:cs typeface="Calibri" pitchFamily="34" charset="-120"/>
-              </a:rPr>
-              <a:t>No front-end tests</a:t>
-            </a:r>
-            <a:endParaRPr lang="en-US" sz="1450" dirty="0"/>
-          </a:p>
-        </p:txBody>
-      </p:sp>
-      <p:sp>
-        <p:nvSpPr>
-          <p:cNvPr id="9" name="Text 7"/>
-          <p:cNvSpPr/>
-          <p:nvPr/>
-        </p:nvSpPr>
-        <p:spPr>
-          <a:xfrm>
-            <a:off x="960120" y="3264408"/>
-            <a:ext cx="10241280" cy="475488"/>
-          </a:xfrm>
-          <a:prstGeom prst="rect">
-            <a:avLst/>
-          </a:prstGeom>
-          <a:noFill/>
-          <a:ln/>
-        </p:spPr>
-        <p:txBody>
-          <a:bodyPr wrap="square" lIns="0" tIns="0" rIns="0" bIns="0" rtlCol="0" anchor="ctr"/>
-          <a:lstStyle/>
-          <a:p>
-            <a:pPr indent="0" marL="0">
-              <a:buNone/>
-            </a:pPr>
-            <a:r>
-              <a:rPr lang="en-US" sz="1250" dirty="0">
-                <a:solidFill>
-                  <a:srgbClr val="97B0A2"/>
-                </a:solidFill>
-                <a:latin typeface="Calibri" pitchFamily="34" charset="0"/>
-                <a:ea typeface="Calibri" pitchFamily="34" charset="-122"/>
-                <a:cs typeface="Calibri" pitchFamily="34" charset="-120"/>
-              </a:rPr>
-              <a:t>All 65 tests are on the back end. The React side I checked by hand, which is not good enough and is the first thing I would fix.</a:t>
+          <p:cNvPr id="9" name="Text 6"/>
+          <p:cNvSpPr/>
+          <p:nvPr/>
+        </p:nvSpPr>
+        <p:spPr>
+          <a:xfrm>
+            <a:off x="5257800" y="2596896"/>
+            <a:ext cx="2377440" cy="475488"/>
+          </a:xfrm>
+          <a:prstGeom prst="rect">
+            <a:avLst/>
+          </a:prstGeom>
+          <a:noFill/>
+          <a:ln/>
+        </p:spPr>
+        <p:txBody>
+          <a:bodyPr wrap="square" lIns="0" tIns="0" rIns="0" bIns="0" rtlCol="0" anchor="ctr"/>
+          <a:lstStyle/>
+          <a:p>
+            <a:pPr indent="0" marL="0">
+              <a:buNone/>
+            </a:pPr>
+            <a:r>
+              <a:rPr lang="en-US" sz="1250" b="1" dirty="0">
+                <a:solidFill>
+                  <a:srgbClr val="D4A937"/>
+                </a:solidFill>
+                <a:latin typeface="Calibri" pitchFamily="34" charset="0"/>
+                <a:ea typeface="Calibri" pitchFamily="34" charset="-122"/>
+                <a:cs typeface="Calibri" pitchFamily="34" charset="-120"/>
+              </a:rPr>
+              <a:t>Cancelling</a:t>
             </a:r>
             <a:endParaRPr lang="en-US" sz="1250" dirty="0"/>
           </a:p>
@@ -2647,18 +2716,57 @@
       </p:sp>
       <p:sp>
         <p:nvSpPr>
-          <p:cNvPr id="10" name="Shape 8"/>
-          <p:cNvSpPr/>
-          <p:nvPr/>
-        </p:nvSpPr>
-        <p:spPr>
-          <a:xfrm>
-            <a:off x="640080" y="3931920"/>
-            <a:ext cx="10881360" cy="914400"/>
+          <p:cNvPr id="10" name="Text 7"/>
+          <p:cNvSpPr/>
+          <p:nvPr/>
+        </p:nvSpPr>
+        <p:spPr>
+          <a:xfrm>
+            <a:off x="7726680" y="2596896"/>
+            <a:ext cx="3566160" cy="475488"/>
+          </a:xfrm>
+          <a:prstGeom prst="rect">
+            <a:avLst/>
+          </a:prstGeom>
+          <a:noFill/>
+          <a:ln/>
+        </p:spPr>
+        <p:txBody>
+          <a:bodyPr wrap="square" lIns="0" tIns="0" rIns="0" bIns="0" rtlCol="0" anchor="ctr"/>
+          <a:lstStyle/>
+          <a:p>
+            <a:pPr indent="0" marL="0">
+              <a:buNone/>
+            </a:pPr>
+            <a:r>
+              <a:rPr lang="en-US" sz="1150" dirty="0">
+                <a:solidFill>
+                  <a:srgbClr val="F5F0E6"/>
+                </a:solidFill>
+                <a:latin typeface="Calibri" pitchFamily="34" charset="0"/>
+                <a:ea typeface="Calibri" pitchFamily="34" charset="-122"/>
+                <a:cs typeface="Calibri" pitchFamily="34" charset="-120"/>
+              </a:rPr>
+              <a:t>Does the table actually become free again?</a:t>
+            </a:r>
+            <a:endParaRPr lang="en-US" sz="1150" dirty="0"/>
+          </a:p>
+        </p:txBody>
+      </p:sp>
+      <p:sp>
+        <p:nvSpPr>
+          <p:cNvPr id="11" name="Shape 8"/>
+          <p:cNvSpPr/>
+          <p:nvPr/>
+        </p:nvSpPr>
+        <p:spPr>
+          <a:xfrm>
+            <a:off x="5029200" y="3200400"/>
+            <a:ext cx="6492240" cy="548640"/>
           </a:xfrm>
           <a:prstGeom prst="roundRect">
             <a:avLst>
-              <a:gd name="adj" fmla="val 9000"/>
+              <a:gd name="adj" fmla="val 15000"/>
             </a:avLst>
           </a:prstGeom>
           <a:solidFill>
@@ -2674,77 +2782,38 @@
       </p:sp>
       <p:sp>
         <p:nvSpPr>
-          <p:cNvPr id="11" name="Text 9"/>
-          <p:cNvSpPr/>
-          <p:nvPr/>
-        </p:nvSpPr>
-        <p:spPr>
-          <a:xfrm>
-            <a:off x="960120" y="4005072"/>
-            <a:ext cx="10241280" cy="292608"/>
-          </a:xfrm>
-          <a:prstGeom prst="rect">
-            <a:avLst/>
-          </a:prstGeom>
-          <a:noFill/>
-          <a:ln/>
-        </p:spPr>
-        <p:txBody>
-          <a:bodyPr wrap="square" lIns="0" tIns="0" rIns="0" bIns="0" rtlCol="0" anchor="ctr"/>
-          <a:lstStyle/>
-          <a:p>
-            <a:pPr indent="0" marL="0">
-              <a:buNone/>
-            </a:pPr>
-            <a:r>
-              <a:rPr lang="en-US" sz="1450" b="1" dirty="0">
-                <a:solidFill>
-                  <a:srgbClr val="C2683A"/>
-                </a:solidFill>
-                <a:latin typeface="Calibri" pitchFamily="34" charset="0"/>
-                <a:ea typeface="Calibri" pitchFamily="34" charset="-122"/>
-                <a:cs typeface="Calibri" pitchFamily="34" charset="-120"/>
-              </a:rPr>
-              <a:t>No Docker</a:t>
-            </a:r>
-            <a:endParaRPr lang="en-US" sz="1450" dirty="0"/>
-          </a:p>
-        </p:txBody>
-      </p:sp>
-      <p:sp>
-        <p:nvSpPr>
-          <p:cNvPr id="12" name="Text 10"/>
-          <p:cNvSpPr/>
-          <p:nvPr/>
-        </p:nvSpPr>
-        <p:spPr>
-          <a:xfrm>
-            <a:off x="960120" y="4315968"/>
-            <a:ext cx="10241280" cy="475488"/>
-          </a:xfrm>
-          <a:prstGeom prst="rect">
-            <a:avLst/>
-          </a:prstGeom>
-          <a:noFill/>
-          <a:ln/>
-        </p:spPr>
-        <p:txBody>
-          <a:bodyPr wrap="square" lIns="0" tIns="0" rIns="0" bIns="0" rtlCol="0" anchor="ctr"/>
-          <a:lstStyle/>
-          <a:p>
-            <a:pPr indent="0" marL="0">
-              <a:buNone/>
-            </a:pPr>
-            <a:r>
-              <a:rPr lang="en-US" sz="1250" dirty="0">
-                <a:solidFill>
-                  <a:srgbClr val="97B0A2"/>
-                </a:solidFill>
-                <a:latin typeface="Calibri" pitchFamily="34" charset="0"/>
-                <a:ea typeface="Calibri" pitchFamily="34" charset="-122"/>
-                <a:cs typeface="Calibri" pitchFamily="34" charset="-120"/>
-              </a:rPr>
-              <a:t>Also optional in the brief. Same reason.</a:t>
+          <p:cNvPr id="12" name="Text 9"/>
+          <p:cNvSpPr/>
+          <p:nvPr/>
+        </p:nvSpPr>
+        <p:spPr>
+          <a:xfrm>
+            <a:off x="5257800" y="3236976"/>
+            <a:ext cx="2377440" cy="475488"/>
+          </a:xfrm>
+          <a:prstGeom prst="rect">
+            <a:avLst/>
+          </a:prstGeom>
+          <a:noFill/>
+          <a:ln/>
+        </p:spPr>
+        <p:txBody>
+          <a:bodyPr wrap="square" lIns="0" tIns="0" rIns="0" bIns="0" rtlCol="0" anchor="ctr"/>
+          <a:lstStyle/>
+          <a:p>
+            <a:pPr indent="0" marL="0">
+              <a:buNone/>
+            </a:pPr>
+            <a:r>
+              <a:rPr lang="en-US" sz="1250" b="1" dirty="0">
+                <a:solidFill>
+                  <a:srgbClr val="D4A937"/>
+                </a:solidFill>
+                <a:latin typeface="Calibri" pitchFamily="34" charset="0"/>
+                <a:ea typeface="Calibri" pitchFamily="34" charset="-122"/>
+                <a:cs typeface="Calibri" pitchFamily="34" charset="-120"/>
+              </a:rPr>
+              <a:t>Restaurants open past midnight</a:t>
             </a:r>
             <a:endParaRPr lang="en-US" sz="1250" dirty="0"/>
           </a:p>
@@ -2752,18 +2821,57 @@
       </p:sp>
       <p:sp>
         <p:nvSpPr>
-          <p:cNvPr id="13" name="Shape 11"/>
-          <p:cNvSpPr/>
-          <p:nvPr/>
-        </p:nvSpPr>
-        <p:spPr>
-          <a:xfrm>
-            <a:off x="640080" y="4983480"/>
-            <a:ext cx="10881360" cy="914400"/>
+          <p:cNvPr id="13" name="Text 10"/>
+          <p:cNvSpPr/>
+          <p:nvPr/>
+        </p:nvSpPr>
+        <p:spPr>
+          <a:xfrm>
+            <a:off x="7726680" y="3236976"/>
+            <a:ext cx="3566160" cy="475488"/>
+          </a:xfrm>
+          <a:prstGeom prst="rect">
+            <a:avLst/>
+          </a:prstGeom>
+          <a:noFill/>
+          <a:ln/>
+        </p:spPr>
+        <p:txBody>
+          <a:bodyPr wrap="square" lIns="0" tIns="0" rIns="0" bIns="0" rtlCol="0" anchor="ctr"/>
+          <a:lstStyle/>
+          <a:p>
+            <a:pPr indent="0" marL="0">
+              <a:buNone/>
+            </a:pPr>
+            <a:r>
+              <a:rPr lang="en-US" sz="1150" dirty="0">
+                <a:solidFill>
+                  <a:srgbClr val="F5F0E6"/>
+                </a:solidFill>
+                <a:latin typeface="Calibri" pitchFamily="34" charset="0"/>
+                <a:ea typeface="Calibri" pitchFamily="34" charset="-122"/>
+                <a:cs typeface="Calibri" pitchFamily="34" charset="-120"/>
+              </a:rPr>
+              <a:t>18:00 to 01:00 breaks a naive comparison</a:t>
+            </a:r>
+            <a:endParaRPr lang="en-US" sz="1150" dirty="0"/>
+          </a:p>
+        </p:txBody>
+      </p:sp>
+      <p:sp>
+        <p:nvSpPr>
+          <p:cNvPr id="14" name="Shape 11"/>
+          <p:cNvSpPr/>
+          <p:nvPr/>
+        </p:nvSpPr>
+        <p:spPr>
+          <a:xfrm>
+            <a:off x="5029200" y="3840480"/>
+            <a:ext cx="6492240" cy="548640"/>
           </a:xfrm>
           <a:prstGeom prst="roundRect">
             <a:avLst>
-              <a:gd name="adj" fmla="val 9000"/>
+              <a:gd name="adj" fmla="val 15000"/>
             </a:avLst>
           </a:prstGeom>
           <a:solidFill>
@@ -2779,69 +2887,318 @@
       </p:sp>
       <p:sp>
         <p:nvSpPr>
-          <p:cNvPr id="14" name="Text 12"/>
-          <p:cNvSpPr/>
-          <p:nvPr/>
-        </p:nvSpPr>
-        <p:spPr>
-          <a:xfrm>
-            <a:off x="960120" y="5056632"/>
-            <a:ext cx="10241280" cy="292608"/>
-          </a:xfrm>
-          <a:prstGeom prst="rect">
-            <a:avLst/>
-          </a:prstGeom>
-          <a:noFill/>
-          <a:ln/>
-        </p:spPr>
-        <p:txBody>
-          <a:bodyPr wrap="square" lIns="0" tIns="0" rIns="0" bIns="0" rtlCol="0" anchor="ctr"/>
-          <a:lstStyle/>
-          <a:p>
-            <a:pPr indent="0" marL="0">
-              <a:buNone/>
-            </a:pPr>
-            <a:r>
-              <a:rPr lang="en-US" sz="1450" b="1" dirty="0">
-                <a:solidFill>
-                  <a:srgbClr val="C2683A"/>
-                </a:solidFill>
-                <a:latin typeface="Calibri" pitchFamily="34" charset="0"/>
-                <a:ea typeface="Calibri" pitchFamily="34" charset="-122"/>
-                <a:cs typeface="Calibri" pitchFamily="34" charset="-120"/>
-              </a:rPr>
-              <a:t>SQLite, not a real database server</a:t>
-            </a:r>
-            <a:endParaRPr lang="en-US" sz="1450" dirty="0"/>
-          </a:p>
-        </p:txBody>
-      </p:sp>
-      <p:sp>
-        <p:nvSpPr>
-          <p:cNvPr id="15" name="Text 13"/>
-          <p:cNvSpPr/>
-          <p:nvPr/>
-        </p:nvSpPr>
-        <p:spPr>
-          <a:xfrm>
-            <a:off x="960120" y="5367528"/>
-            <a:ext cx="10241280" cy="475488"/>
-          </a:xfrm>
-          <a:prstGeom prst="rect">
-            <a:avLst/>
-          </a:prstGeom>
-          <a:noFill/>
-          <a:ln/>
-        </p:spPr>
-        <p:txBody>
-          <a:bodyPr wrap="square" lIns="0" tIns="0" rIns="0" bIns="0" rtlCol="0" anchor="ctr"/>
-          <a:lstStyle/>
-          <a:p>
-            <a:pPr indent="0" marL="0">
-              <a:buNone/>
-            </a:pPr>
-            <a:r>
-              <a:rPr lang="en-US" sz="1250" dirty="0">
+          <p:cNvPr id="15" name="Text 12"/>
+          <p:cNvSpPr/>
+          <p:nvPr/>
+        </p:nvSpPr>
+        <p:spPr>
+          <a:xfrm>
+            <a:off x="5257800" y="3877056"/>
+            <a:ext cx="2377440" cy="475488"/>
+          </a:xfrm>
+          <a:prstGeom prst="rect">
+            <a:avLst/>
+          </a:prstGeom>
+          <a:noFill/>
+          <a:ln/>
+        </p:spPr>
+        <p:txBody>
+          <a:bodyPr wrap="square" lIns="0" tIns="0" rIns="0" bIns="0" rtlCol="0" anchor="ctr"/>
+          <a:lstStyle/>
+          <a:p>
+            <a:pPr indent="0" marL="0">
+              <a:buNone/>
+            </a:pPr>
+            <a:r>
+              <a:rPr lang="en-US" sz="1250" b="1" dirty="0">
+                <a:solidFill>
+                  <a:srgbClr val="D4A937"/>
+                </a:solidFill>
+                <a:latin typeface="Calibri" pitchFamily="34" charset="0"/>
+                <a:ea typeface="Calibri" pitchFamily="34" charset="-122"/>
+                <a:cs typeface="Calibri" pitchFamily="34" charset="-120"/>
+              </a:rPr>
+              <a:t>Two bookings at once</a:t>
+            </a:r>
+            <a:endParaRPr lang="en-US" sz="1250" dirty="0"/>
+          </a:p>
+        </p:txBody>
+      </p:sp>
+      <p:sp>
+        <p:nvSpPr>
+          <p:cNvPr id="16" name="Text 13"/>
+          <p:cNvSpPr/>
+          <p:nvPr/>
+        </p:nvSpPr>
+        <p:spPr>
+          <a:xfrm>
+            <a:off x="7726680" y="3877056"/>
+            <a:ext cx="3566160" cy="475488"/>
+          </a:xfrm>
+          <a:prstGeom prst="rect">
+            <a:avLst/>
+          </a:prstGeom>
+          <a:noFill/>
+          <a:ln/>
+        </p:spPr>
+        <p:txBody>
+          <a:bodyPr wrap="square" lIns="0" tIns="0" rIns="0" bIns="0" rtlCol="0" anchor="ctr"/>
+          <a:lstStyle/>
+          <a:p>
+            <a:pPr indent="0" marL="0">
+              <a:buNone/>
+            </a:pPr>
+            <a:r>
+              <a:rPr lang="en-US" sz="1150" dirty="0">
+                <a:solidFill>
+                  <a:srgbClr val="F5F0E6"/>
+                </a:solidFill>
+                <a:latin typeface="Calibri" pitchFamily="34" charset="0"/>
+                <a:ea typeface="Calibri" pitchFamily="34" charset="-122"/>
+                <a:cs typeface="Calibri" pitchFamily="34" charset="-120"/>
+              </a:rPr>
+              <a:t>Only one can win — this is the important one</a:t>
+            </a:r>
+            <a:endParaRPr lang="en-US" sz="1150" dirty="0"/>
+          </a:p>
+        </p:txBody>
+      </p:sp>
+      <p:sp>
+        <p:nvSpPr>
+          <p:cNvPr id="17" name="Shape 14"/>
+          <p:cNvSpPr/>
+          <p:nvPr/>
+        </p:nvSpPr>
+        <p:spPr>
+          <a:xfrm>
+            <a:off x="5029200" y="4480560"/>
+            <a:ext cx="6492240" cy="548640"/>
+          </a:xfrm>
+          <a:prstGeom prst="roundRect">
+            <a:avLst>
+              <a:gd name="adj" fmla="val 15000"/>
+            </a:avLst>
+          </a:prstGeom>
+          <a:solidFill>
+            <a:srgbClr val="102B23"/>
+          </a:solidFill>
+          <a:ln w="12700">
+            <a:solidFill>
+              <a:srgbClr val="17392E"/>
+            </a:solidFill>
+            <a:prstDash val="solid"/>
+          </a:ln>
+        </p:spPr>
+      </p:sp>
+      <p:sp>
+        <p:nvSpPr>
+          <p:cNvPr id="18" name="Text 15"/>
+          <p:cNvSpPr/>
+          <p:nvPr/>
+        </p:nvSpPr>
+        <p:spPr>
+          <a:xfrm>
+            <a:off x="5257800" y="4517136"/>
+            <a:ext cx="2377440" cy="475488"/>
+          </a:xfrm>
+          <a:prstGeom prst="rect">
+            <a:avLst/>
+          </a:prstGeom>
+          <a:noFill/>
+          <a:ln/>
+        </p:spPr>
+        <p:txBody>
+          <a:bodyPr wrap="square" lIns="0" tIns="0" rIns="0" bIns="0" rtlCol="0" anchor="ctr"/>
+          <a:lstStyle/>
+          <a:p>
+            <a:pPr indent="0" marL="0">
+              <a:buNone/>
+            </a:pPr>
+            <a:r>
+              <a:rPr lang="en-US" sz="1250" b="1" dirty="0">
+                <a:solidFill>
+                  <a:srgbClr val="D4A937"/>
+                </a:solidFill>
+                <a:latin typeface="Calibri" pitchFamily="34" charset="0"/>
+                <a:ea typeface="Calibri" pitchFamily="34" charset="-122"/>
+                <a:cs typeface="Calibri" pitchFamily="34" charset="-120"/>
+              </a:rPr>
+              <a:t>Another manager</a:t>
+            </a:r>
+            <a:endParaRPr lang="en-US" sz="1250" dirty="0"/>
+          </a:p>
+        </p:txBody>
+      </p:sp>
+      <p:sp>
+        <p:nvSpPr>
+          <p:cNvPr id="19" name="Text 16"/>
+          <p:cNvSpPr/>
+          <p:nvPr/>
+        </p:nvSpPr>
+        <p:spPr>
+          <a:xfrm>
+            <a:off x="7726680" y="4517136"/>
+            <a:ext cx="3566160" cy="475488"/>
+          </a:xfrm>
+          <a:prstGeom prst="rect">
+            <a:avLst/>
+          </a:prstGeom>
+          <a:noFill/>
+          <a:ln/>
+        </p:spPr>
+        <p:txBody>
+          <a:bodyPr wrap="square" lIns="0" tIns="0" rIns="0" bIns="0" rtlCol="0" anchor="ctr"/>
+          <a:lstStyle/>
+          <a:p>
+            <a:pPr indent="0" marL="0">
+              <a:buNone/>
+            </a:pPr>
+            <a:r>
+              <a:rPr lang="en-US" sz="1150" dirty="0">
+                <a:solidFill>
+                  <a:srgbClr val="F5F0E6"/>
+                </a:solidFill>
+                <a:latin typeface="Calibri" pitchFamily="34" charset="0"/>
+                <a:ea typeface="Calibri" pitchFamily="34" charset="-122"/>
+                <a:cs typeface="Calibri" pitchFamily="34" charset="-120"/>
+              </a:rPr>
+              <a:t>Gets a 404, and the booking really is unchanged</a:t>
+            </a:r>
+            <a:endParaRPr lang="en-US" sz="1150" dirty="0"/>
+          </a:p>
+        </p:txBody>
+      </p:sp>
+      <p:sp>
+        <p:nvSpPr>
+          <p:cNvPr id="20" name="Shape 17"/>
+          <p:cNvSpPr/>
+          <p:nvPr/>
+        </p:nvSpPr>
+        <p:spPr>
+          <a:xfrm>
+            <a:off x="5029200" y="5120640"/>
+            <a:ext cx="6492240" cy="548640"/>
+          </a:xfrm>
+          <a:prstGeom prst="roundRect">
+            <a:avLst>
+              <a:gd name="adj" fmla="val 15000"/>
+            </a:avLst>
+          </a:prstGeom>
+          <a:solidFill>
+            <a:srgbClr val="102B23"/>
+          </a:solidFill>
+          <a:ln w="12700">
+            <a:solidFill>
+              <a:srgbClr val="17392E"/>
+            </a:solidFill>
+            <a:prstDash val="solid"/>
+          </a:ln>
+        </p:spPr>
+      </p:sp>
+      <p:sp>
+        <p:nvSpPr>
+          <p:cNvPr id="21" name="Text 18"/>
+          <p:cNvSpPr/>
+          <p:nvPr/>
+        </p:nvSpPr>
+        <p:spPr>
+          <a:xfrm>
+            <a:off x="5257800" y="5157216"/>
+            <a:ext cx="2377440" cy="475488"/>
+          </a:xfrm>
+          <a:prstGeom prst="rect">
+            <a:avLst/>
+          </a:prstGeom>
+          <a:noFill/>
+          <a:ln/>
+        </p:spPr>
+        <p:txBody>
+          <a:bodyPr wrap="square" lIns="0" tIns="0" rIns="0" bIns="0" rtlCol="0" anchor="ctr"/>
+          <a:lstStyle/>
+          <a:p>
+            <a:pPr indent="0" marL="0">
+              <a:buNone/>
+            </a:pPr>
+            <a:r>
+              <a:rPr lang="en-US" sz="1250" b="1" dirty="0">
+                <a:solidFill>
+                  <a:srgbClr val="D4A937"/>
+                </a:solidFill>
+                <a:latin typeface="Calibri" pitchFamily="34" charset="0"/>
+                <a:ea typeface="Calibri" pitchFamily="34" charset="-122"/>
+                <a:cs typeface="Calibri" pitchFamily="34" charset="-120"/>
+              </a:rPr>
+              <a:t>The login form</a:t>
+            </a:r>
+            <a:endParaRPr lang="en-US" sz="1250" dirty="0"/>
+          </a:p>
+        </p:txBody>
+      </p:sp>
+      <p:sp>
+        <p:nvSpPr>
+          <p:cNvPr id="22" name="Text 19"/>
+          <p:cNvSpPr/>
+          <p:nvPr/>
+        </p:nvSpPr>
+        <p:spPr>
+          <a:xfrm>
+            <a:off x="7726680" y="5157216"/>
+            <a:ext cx="3566160" cy="475488"/>
+          </a:xfrm>
+          <a:prstGeom prst="rect">
+            <a:avLst/>
+          </a:prstGeom>
+          <a:noFill/>
+          <a:ln/>
+        </p:spPr>
+        <p:txBody>
+          <a:bodyPr wrap="square" lIns="0" tIns="0" rIns="0" bIns="0" rtlCol="0" anchor="ctr"/>
+          <a:lstStyle/>
+          <a:p>
+            <a:pPr indent="0" marL="0">
+              <a:buNone/>
+            </a:pPr>
+            <a:r>
+              <a:rPr lang="en-US" sz="1150" dirty="0">
+                <a:solidFill>
+                  <a:srgbClr val="F5F0E6"/>
+                </a:solidFill>
+                <a:latin typeface="Calibri" pitchFamily="34" charset="0"/>
+                <a:ea typeface="Calibri" pitchFamily="34" charset="-122"/>
+                <a:cs typeface="Calibri" pitchFamily="34" charset="-120"/>
+              </a:rPr>
+              <a:t>Wrong password and unknown email look identical</a:t>
+            </a:r>
+            <a:endParaRPr lang="en-US" sz="1150" dirty="0"/>
+          </a:p>
+        </p:txBody>
+      </p:sp>
+      <p:sp>
+        <p:nvSpPr>
+          <p:cNvPr id="23" name="Text 20"/>
+          <p:cNvSpPr/>
+          <p:nvPr/>
+        </p:nvSpPr>
+        <p:spPr>
+          <a:xfrm>
+            <a:off x="640080" y="5943600"/>
+            <a:ext cx="10881360" cy="365760"/>
+          </a:xfrm>
+          <a:prstGeom prst="rect">
+            <a:avLst/>
+          </a:prstGeom>
+          <a:noFill/>
+          <a:ln/>
+        </p:spPr>
+        <p:txBody>
+          <a:bodyPr wrap="square" lIns="0" tIns="0" rIns="0" bIns="0" rtlCol="0" anchor="ctr"/>
+          <a:lstStyle/>
+          <a:p>
+            <a:pPr indent="0" marL="0">
+              <a:buNone/>
+            </a:pPr>
+            <a:r>
+              <a:rPr lang="en-US" sz="1300" i="1" dirty="0">
                 <a:solidFill>
                   <a:srgbClr val="97B0A2"/>
                 </a:solidFill>
@@ -2849,46 +3206,7 @@
                 <a:ea typeface="Calibri" pitchFamily="34" charset="-122"/>
                 <a:cs typeface="Calibri" pitchFamily="34" charset="-120"/>
               </a:rPr>
-              <a:t>Fine for this, and it makes the project easy to run. It would not survive more than one server instance.</a:t>
-            </a:r>
-            <a:endParaRPr lang="en-US" sz="1250" dirty="0"/>
-          </a:p>
-        </p:txBody>
-      </p:sp>
-      <p:sp>
-        <p:nvSpPr>
-          <p:cNvPr id="16" name="Text 14"/>
-          <p:cNvSpPr/>
-          <p:nvPr/>
-        </p:nvSpPr>
-        <p:spPr>
-          <a:xfrm>
-            <a:off x="640080" y="6172200"/>
-            <a:ext cx="10881360" cy="365760"/>
-          </a:xfrm>
-          <a:prstGeom prst="rect">
-            <a:avLst/>
-          </a:prstGeom>
-          <a:noFill/>
-          <a:ln/>
-        </p:spPr>
-        <p:txBody>
-          <a:bodyPr wrap="square" lIns="0" tIns="0" rIns="0" bIns="0" rtlCol="0" anchor="ctr"/>
-          <a:lstStyle/>
-          <a:p>
-            <a:pPr indent="0" marL="0">
-              <a:buNone/>
-            </a:pPr>
-            <a:r>
-              <a:rPr lang="en-US" sz="1300" i="1" dirty="0">
-                <a:solidFill>
-                  <a:srgbClr val="F5F0E6"/>
-                </a:solidFill>
-                <a:latin typeface="Calibri" pitchFamily="34" charset="0"/>
-                <a:ea typeface="Calibri" pitchFamily="34" charset="-122"/>
-                <a:cs typeface="Calibri" pitchFamily="34" charset="-120"/>
-              </a:rPr>
-              <a:t>I would rather tell you these than have you find them.</a:t>
+              <a:t>65 tests. They run in about a second, so I ran them constantly.</a:t>
             </a:r>
             <a:endParaRPr lang="en-US" sz="1300" dirty="0"/>
           </a:p>
@@ -2905,6 +3223,575 @@
 <file path=ppt/slides/slide11.xml><?xml version="1.0" encoding="utf-8"?>
 <p:sld xmlns:a="http://schemas.openxmlformats.org/drawingml/2006/main" xmlns:r="http://schemas.openxmlformats.org/officeDocument/2006/relationships" xmlns:p="http://schemas.openxmlformats.org/presentationml/2006/main">
   <p:cSld name="Slide 11">
+    <p:bg>
+      <p:bgPr>
+        <a:solidFill>
+          <a:srgbClr val="071310"/>
+        </a:solidFill>
+      </p:bgPr>
+    </p:bg>
+    <p:spTree>
+      <p:nvGrpSpPr>
+        <p:cNvPr id="1" name=""/>
+        <p:cNvGrpSpPr/>
+        <p:nvPr/>
+      </p:nvGrpSpPr>
+      <p:grpSpPr>
+        <a:xfrm>
+          <a:off x="0" y="0"/>
+          <a:ext cx="0" cy="0"/>
+          <a:chOff x="0" y="0"/>
+          <a:chExt cx="0" cy="0"/>
+        </a:xfrm>
+      </p:grpSpPr>
+      <p:sp>
+        <p:nvSpPr>
+          <p:cNvPr id="2" name="Text 0"/>
+          <p:cNvSpPr/>
+          <p:nvPr/>
+        </p:nvSpPr>
+        <p:spPr>
+          <a:xfrm>
+            <a:off x="640080" y="457200"/>
+            <a:ext cx="10881360" cy="731520"/>
+          </a:xfrm>
+          <a:prstGeom prst="rect">
+            <a:avLst/>
+          </a:prstGeom>
+          <a:noFill/>
+          <a:ln/>
+        </p:spPr>
+        <p:txBody>
+          <a:bodyPr wrap="square" lIns="0" tIns="0" rIns="0" bIns="0" rtlCol="0" anchor="ctr"/>
+          <a:lstStyle/>
+          <a:p>
+            <a:pPr indent="0" marL="0">
+              <a:buNone/>
+            </a:pPr>
+            <a:r>
+              <a:rPr lang="en-US" sz="3600" b="1" dirty="0">
+                <a:solidFill>
+                  <a:srgbClr val="F5F0E6"/>
+                </a:solidFill>
+                <a:latin typeface="Cambria" pitchFamily="34" charset="0"/>
+                <a:ea typeface="Cambria" pitchFamily="34" charset="-122"/>
+                <a:cs typeface="Cambria" pitchFamily="34" charset="-120"/>
+              </a:rPr>
+              <a:t>What I did not get to</a:t>
+            </a:r>
+            <a:endParaRPr lang="en-US" sz="3600" dirty="0"/>
+          </a:p>
+        </p:txBody>
+      </p:sp>
+      <p:sp>
+        <p:nvSpPr>
+          <p:cNvPr id="3" name="Text 1"/>
+          <p:cNvSpPr/>
+          <p:nvPr/>
+        </p:nvSpPr>
+        <p:spPr>
+          <a:xfrm>
+            <a:off x="640080" y="1188720"/>
+            <a:ext cx="10881360" cy="365760"/>
+          </a:xfrm>
+          <a:prstGeom prst="rect">
+            <a:avLst/>
+          </a:prstGeom>
+          <a:noFill/>
+          <a:ln/>
+        </p:spPr>
+        <p:txBody>
+          <a:bodyPr wrap="square" lIns="0" tIns="0" rIns="0" bIns="0" rtlCol="0" anchor="ctr"/>
+          <a:lstStyle/>
+          <a:p>
+            <a:pPr indent="0" marL="0">
+              <a:buNone/>
+            </a:pPr>
+            <a:r>
+              <a:rPr lang="en-US" sz="1400" dirty="0">
+                <a:solidFill>
+                  <a:srgbClr val="97B0A2"/>
+                </a:solidFill>
+                <a:latin typeface="Calibri" pitchFamily="34" charset="0"/>
+                <a:ea typeface="Calibri" pitchFamily="34" charset="-122"/>
+                <a:cs typeface="Calibri" pitchFamily="34" charset="-120"/>
+              </a:rPr>
+              <a:t>Being straight about the gaps</a:t>
+            </a:r>
+            <a:endParaRPr lang="en-US" sz="1400" dirty="0"/>
+          </a:p>
+        </p:txBody>
+      </p:sp>
+      <p:sp>
+        <p:nvSpPr>
+          <p:cNvPr id="4" name="Shape 2"/>
+          <p:cNvSpPr/>
+          <p:nvPr/>
+        </p:nvSpPr>
+        <p:spPr>
+          <a:xfrm>
+            <a:off x="640080" y="1828800"/>
+            <a:ext cx="10881360" cy="914400"/>
+          </a:xfrm>
+          <a:prstGeom prst="roundRect">
+            <a:avLst>
+              <a:gd name="adj" fmla="val 9000"/>
+            </a:avLst>
+          </a:prstGeom>
+          <a:solidFill>
+            <a:srgbClr val="102B23"/>
+          </a:solidFill>
+          <a:ln w="12700">
+            <a:solidFill>
+              <a:srgbClr val="17392E"/>
+            </a:solidFill>
+            <a:prstDash val="solid"/>
+          </a:ln>
+        </p:spPr>
+      </p:sp>
+      <p:sp>
+        <p:nvSpPr>
+          <p:cNvPr id="5" name="Text 3"/>
+          <p:cNvSpPr/>
+          <p:nvPr/>
+        </p:nvSpPr>
+        <p:spPr>
+          <a:xfrm>
+            <a:off x="960120" y="1901952"/>
+            <a:ext cx="10241280" cy="292608"/>
+          </a:xfrm>
+          <a:prstGeom prst="rect">
+            <a:avLst/>
+          </a:prstGeom>
+          <a:noFill/>
+          <a:ln/>
+        </p:spPr>
+        <p:txBody>
+          <a:bodyPr wrap="square" lIns="0" tIns="0" rIns="0" bIns="0" rtlCol="0" anchor="ctr"/>
+          <a:lstStyle/>
+          <a:p>
+            <a:pPr indent="0" marL="0">
+              <a:buNone/>
+            </a:pPr>
+            <a:r>
+              <a:rPr lang="en-US" sz="1450" b="1" dirty="0">
+                <a:solidFill>
+                  <a:srgbClr val="C2683A"/>
+                </a:solidFill>
+                <a:latin typeface="Calibri" pitchFamily="34" charset="0"/>
+                <a:ea typeface="Calibri" pitchFamily="34" charset="-122"/>
+                <a:cs typeface="Calibri" pitchFamily="34" charset="-120"/>
+              </a:rPr>
+              <a:t>It is not deployed</a:t>
+            </a:r>
+            <a:endParaRPr lang="en-US" sz="1450" dirty="0"/>
+          </a:p>
+        </p:txBody>
+      </p:sp>
+      <p:sp>
+        <p:nvSpPr>
+          <p:cNvPr id="6" name="Text 4"/>
+          <p:cNvSpPr/>
+          <p:nvPr/>
+        </p:nvSpPr>
+        <p:spPr>
+          <a:xfrm>
+            <a:off x="960120" y="2212848"/>
+            <a:ext cx="10241280" cy="475488"/>
+          </a:xfrm>
+          <a:prstGeom prst="rect">
+            <a:avLst/>
+          </a:prstGeom>
+          <a:noFill/>
+          <a:ln/>
+        </p:spPr>
+        <p:txBody>
+          <a:bodyPr wrap="square" lIns="0" tIns="0" rIns="0" bIns="0" rtlCol="0" anchor="ctr"/>
+          <a:lstStyle/>
+          <a:p>
+            <a:pPr indent="0" marL="0">
+              <a:buNone/>
+            </a:pPr>
+            <a:r>
+              <a:rPr lang="en-US" sz="1250" dirty="0">
+                <a:solidFill>
+                  <a:srgbClr val="97B0A2"/>
+                </a:solidFill>
+                <a:latin typeface="Calibri" pitchFamily="34" charset="0"/>
+                <a:ea typeface="Calibri" pitchFamily="34" charset="-122"/>
+                <a:cs typeface="Calibri" pitchFamily="34" charset="-120"/>
+              </a:rPr>
+              <a:t>The brief lists deployment as optional and I ran out of time. Configuration is all environment variables, so it is ready to go, but "ready to deploy" is not the same as deployed.</a:t>
+            </a:r>
+            <a:endParaRPr lang="en-US" sz="1250" dirty="0"/>
+          </a:p>
+        </p:txBody>
+      </p:sp>
+      <p:sp>
+        <p:nvSpPr>
+          <p:cNvPr id="7" name="Shape 5"/>
+          <p:cNvSpPr/>
+          <p:nvPr/>
+        </p:nvSpPr>
+        <p:spPr>
+          <a:xfrm>
+            <a:off x="640080" y="2880360"/>
+            <a:ext cx="10881360" cy="914400"/>
+          </a:xfrm>
+          <a:prstGeom prst="roundRect">
+            <a:avLst>
+              <a:gd name="adj" fmla="val 9000"/>
+            </a:avLst>
+          </a:prstGeom>
+          <a:solidFill>
+            <a:srgbClr val="102B23"/>
+          </a:solidFill>
+          <a:ln w="12700">
+            <a:solidFill>
+              <a:srgbClr val="17392E"/>
+            </a:solidFill>
+            <a:prstDash val="solid"/>
+          </a:ln>
+        </p:spPr>
+      </p:sp>
+      <p:sp>
+        <p:nvSpPr>
+          <p:cNvPr id="8" name="Text 6"/>
+          <p:cNvSpPr/>
+          <p:nvPr/>
+        </p:nvSpPr>
+        <p:spPr>
+          <a:xfrm>
+            <a:off x="960120" y="2953512"/>
+            <a:ext cx="10241280" cy="292608"/>
+          </a:xfrm>
+          <a:prstGeom prst="rect">
+            <a:avLst/>
+          </a:prstGeom>
+          <a:noFill/>
+          <a:ln/>
+        </p:spPr>
+        <p:txBody>
+          <a:bodyPr wrap="square" lIns="0" tIns="0" rIns="0" bIns="0" rtlCol="0" anchor="ctr"/>
+          <a:lstStyle/>
+          <a:p>
+            <a:pPr indent="0" marL="0">
+              <a:buNone/>
+            </a:pPr>
+            <a:r>
+              <a:rPr lang="en-US" sz="1450" b="1" dirty="0">
+                <a:solidFill>
+                  <a:srgbClr val="C2683A"/>
+                </a:solidFill>
+                <a:latin typeface="Calibri" pitchFamily="34" charset="0"/>
+                <a:ea typeface="Calibri" pitchFamily="34" charset="-122"/>
+                <a:cs typeface="Calibri" pitchFamily="34" charset="-120"/>
+              </a:rPr>
+              <a:t>No front-end tests</a:t>
+            </a:r>
+            <a:endParaRPr lang="en-US" sz="1450" dirty="0"/>
+          </a:p>
+        </p:txBody>
+      </p:sp>
+      <p:sp>
+        <p:nvSpPr>
+          <p:cNvPr id="9" name="Text 7"/>
+          <p:cNvSpPr/>
+          <p:nvPr/>
+        </p:nvSpPr>
+        <p:spPr>
+          <a:xfrm>
+            <a:off x="960120" y="3264408"/>
+            <a:ext cx="10241280" cy="475488"/>
+          </a:xfrm>
+          <a:prstGeom prst="rect">
+            <a:avLst/>
+          </a:prstGeom>
+          <a:noFill/>
+          <a:ln/>
+        </p:spPr>
+        <p:txBody>
+          <a:bodyPr wrap="square" lIns="0" tIns="0" rIns="0" bIns="0" rtlCol="0" anchor="ctr"/>
+          <a:lstStyle/>
+          <a:p>
+            <a:pPr indent="0" marL="0">
+              <a:buNone/>
+            </a:pPr>
+            <a:r>
+              <a:rPr lang="en-US" sz="1250" dirty="0">
+                <a:solidFill>
+                  <a:srgbClr val="97B0A2"/>
+                </a:solidFill>
+                <a:latin typeface="Calibri" pitchFamily="34" charset="0"/>
+                <a:ea typeface="Calibri" pitchFamily="34" charset="-122"/>
+                <a:cs typeface="Calibri" pitchFamily="34" charset="-120"/>
+              </a:rPr>
+              <a:t>All 65 tests are on the back end. The React side I checked by hand, which is not good enough and is the first thing I would fix.</a:t>
+            </a:r>
+            <a:endParaRPr lang="en-US" sz="1250" dirty="0"/>
+          </a:p>
+        </p:txBody>
+      </p:sp>
+      <p:sp>
+        <p:nvSpPr>
+          <p:cNvPr id="10" name="Shape 8"/>
+          <p:cNvSpPr/>
+          <p:nvPr/>
+        </p:nvSpPr>
+        <p:spPr>
+          <a:xfrm>
+            <a:off x="640080" y="3931920"/>
+            <a:ext cx="10881360" cy="914400"/>
+          </a:xfrm>
+          <a:prstGeom prst="roundRect">
+            <a:avLst>
+              <a:gd name="adj" fmla="val 9000"/>
+            </a:avLst>
+          </a:prstGeom>
+          <a:solidFill>
+            <a:srgbClr val="102B23"/>
+          </a:solidFill>
+          <a:ln w="12700">
+            <a:solidFill>
+              <a:srgbClr val="17392E"/>
+            </a:solidFill>
+            <a:prstDash val="solid"/>
+          </a:ln>
+        </p:spPr>
+      </p:sp>
+      <p:sp>
+        <p:nvSpPr>
+          <p:cNvPr id="11" name="Text 9"/>
+          <p:cNvSpPr/>
+          <p:nvPr/>
+        </p:nvSpPr>
+        <p:spPr>
+          <a:xfrm>
+            <a:off x="960120" y="4005072"/>
+            <a:ext cx="10241280" cy="292608"/>
+          </a:xfrm>
+          <a:prstGeom prst="rect">
+            <a:avLst/>
+          </a:prstGeom>
+          <a:noFill/>
+          <a:ln/>
+        </p:spPr>
+        <p:txBody>
+          <a:bodyPr wrap="square" lIns="0" tIns="0" rIns="0" bIns="0" rtlCol="0" anchor="ctr"/>
+          <a:lstStyle/>
+          <a:p>
+            <a:pPr indent="0" marL="0">
+              <a:buNone/>
+            </a:pPr>
+            <a:r>
+              <a:rPr lang="en-US" sz="1450" b="1" dirty="0">
+                <a:solidFill>
+                  <a:srgbClr val="C2683A"/>
+                </a:solidFill>
+                <a:latin typeface="Calibri" pitchFamily="34" charset="0"/>
+                <a:ea typeface="Calibri" pitchFamily="34" charset="-122"/>
+                <a:cs typeface="Calibri" pitchFamily="34" charset="-120"/>
+              </a:rPr>
+              <a:t>No Docker</a:t>
+            </a:r>
+            <a:endParaRPr lang="en-US" sz="1450" dirty="0"/>
+          </a:p>
+        </p:txBody>
+      </p:sp>
+      <p:sp>
+        <p:nvSpPr>
+          <p:cNvPr id="12" name="Text 10"/>
+          <p:cNvSpPr/>
+          <p:nvPr/>
+        </p:nvSpPr>
+        <p:spPr>
+          <a:xfrm>
+            <a:off x="960120" y="4315968"/>
+            <a:ext cx="10241280" cy="475488"/>
+          </a:xfrm>
+          <a:prstGeom prst="rect">
+            <a:avLst/>
+          </a:prstGeom>
+          <a:noFill/>
+          <a:ln/>
+        </p:spPr>
+        <p:txBody>
+          <a:bodyPr wrap="square" lIns="0" tIns="0" rIns="0" bIns="0" rtlCol="0" anchor="ctr"/>
+          <a:lstStyle/>
+          <a:p>
+            <a:pPr indent="0" marL="0">
+              <a:buNone/>
+            </a:pPr>
+            <a:r>
+              <a:rPr lang="en-US" sz="1250" dirty="0">
+                <a:solidFill>
+                  <a:srgbClr val="97B0A2"/>
+                </a:solidFill>
+                <a:latin typeface="Calibri" pitchFamily="34" charset="0"/>
+                <a:ea typeface="Calibri" pitchFamily="34" charset="-122"/>
+                <a:cs typeface="Calibri" pitchFamily="34" charset="-120"/>
+              </a:rPr>
+              <a:t>Also optional in the brief. Same reason.</a:t>
+            </a:r>
+            <a:endParaRPr lang="en-US" sz="1250" dirty="0"/>
+          </a:p>
+        </p:txBody>
+      </p:sp>
+      <p:sp>
+        <p:nvSpPr>
+          <p:cNvPr id="13" name="Shape 11"/>
+          <p:cNvSpPr/>
+          <p:nvPr/>
+        </p:nvSpPr>
+        <p:spPr>
+          <a:xfrm>
+            <a:off x="640080" y="4983480"/>
+            <a:ext cx="10881360" cy="914400"/>
+          </a:xfrm>
+          <a:prstGeom prst="roundRect">
+            <a:avLst>
+              <a:gd name="adj" fmla="val 9000"/>
+            </a:avLst>
+          </a:prstGeom>
+          <a:solidFill>
+            <a:srgbClr val="102B23"/>
+          </a:solidFill>
+          <a:ln w="12700">
+            <a:solidFill>
+              <a:srgbClr val="17392E"/>
+            </a:solidFill>
+            <a:prstDash val="solid"/>
+          </a:ln>
+        </p:spPr>
+      </p:sp>
+      <p:sp>
+        <p:nvSpPr>
+          <p:cNvPr id="14" name="Text 12"/>
+          <p:cNvSpPr/>
+          <p:nvPr/>
+        </p:nvSpPr>
+        <p:spPr>
+          <a:xfrm>
+            <a:off x="960120" y="5056632"/>
+            <a:ext cx="10241280" cy="292608"/>
+          </a:xfrm>
+          <a:prstGeom prst="rect">
+            <a:avLst/>
+          </a:prstGeom>
+          <a:noFill/>
+          <a:ln/>
+        </p:spPr>
+        <p:txBody>
+          <a:bodyPr wrap="square" lIns="0" tIns="0" rIns="0" bIns="0" rtlCol="0" anchor="ctr"/>
+          <a:lstStyle/>
+          <a:p>
+            <a:pPr indent="0" marL="0">
+              <a:buNone/>
+            </a:pPr>
+            <a:r>
+              <a:rPr lang="en-US" sz="1450" b="1" dirty="0">
+                <a:solidFill>
+                  <a:srgbClr val="C2683A"/>
+                </a:solidFill>
+                <a:latin typeface="Calibri" pitchFamily="34" charset="0"/>
+                <a:ea typeface="Calibri" pitchFamily="34" charset="-122"/>
+                <a:cs typeface="Calibri" pitchFamily="34" charset="-120"/>
+              </a:rPr>
+              <a:t>SQLite, not a real database server</a:t>
+            </a:r>
+            <a:endParaRPr lang="en-US" sz="1450" dirty="0"/>
+          </a:p>
+        </p:txBody>
+      </p:sp>
+      <p:sp>
+        <p:nvSpPr>
+          <p:cNvPr id="15" name="Text 13"/>
+          <p:cNvSpPr/>
+          <p:nvPr/>
+        </p:nvSpPr>
+        <p:spPr>
+          <a:xfrm>
+            <a:off x="960120" y="5367528"/>
+            <a:ext cx="10241280" cy="475488"/>
+          </a:xfrm>
+          <a:prstGeom prst="rect">
+            <a:avLst/>
+          </a:prstGeom>
+          <a:noFill/>
+          <a:ln/>
+        </p:spPr>
+        <p:txBody>
+          <a:bodyPr wrap="square" lIns="0" tIns="0" rIns="0" bIns="0" rtlCol="0" anchor="ctr"/>
+          <a:lstStyle/>
+          <a:p>
+            <a:pPr indent="0" marL="0">
+              <a:buNone/>
+            </a:pPr>
+            <a:r>
+              <a:rPr lang="en-US" sz="1250" dirty="0">
+                <a:solidFill>
+                  <a:srgbClr val="97B0A2"/>
+                </a:solidFill>
+                <a:latin typeface="Calibri" pitchFamily="34" charset="0"/>
+                <a:ea typeface="Calibri" pitchFamily="34" charset="-122"/>
+                <a:cs typeface="Calibri" pitchFamily="34" charset="-120"/>
+              </a:rPr>
+              <a:t>Fine for this, and it makes the project easy to run. It would not survive more than one server instance.</a:t>
+            </a:r>
+            <a:endParaRPr lang="en-US" sz="1250" dirty="0"/>
+          </a:p>
+        </p:txBody>
+      </p:sp>
+      <p:sp>
+        <p:nvSpPr>
+          <p:cNvPr id="16" name="Text 14"/>
+          <p:cNvSpPr/>
+          <p:nvPr/>
+        </p:nvSpPr>
+        <p:spPr>
+          <a:xfrm>
+            <a:off x="640080" y="6172200"/>
+            <a:ext cx="10881360" cy="365760"/>
+          </a:xfrm>
+          <a:prstGeom prst="rect">
+            <a:avLst/>
+          </a:prstGeom>
+          <a:noFill/>
+          <a:ln/>
+        </p:spPr>
+        <p:txBody>
+          <a:bodyPr wrap="square" lIns="0" tIns="0" rIns="0" bIns="0" rtlCol="0" anchor="ctr"/>
+          <a:lstStyle/>
+          <a:p>
+            <a:pPr indent="0" marL="0">
+              <a:buNone/>
+            </a:pPr>
+            <a:r>
+              <a:rPr lang="en-US" sz="1300" i="1" dirty="0">
+                <a:solidFill>
+                  <a:srgbClr val="F5F0E6"/>
+                </a:solidFill>
+                <a:latin typeface="Calibri" pitchFamily="34" charset="0"/>
+                <a:ea typeface="Calibri" pitchFamily="34" charset="-122"/>
+                <a:cs typeface="Calibri" pitchFamily="34" charset="-120"/>
+              </a:rPr>
+              <a:t>I would rather tell you these than have you find them.</a:t>
+            </a:r>
+            <a:endParaRPr lang="en-US" sz="1300" dirty="0"/>
+          </a:p>
+        </p:txBody>
+      </p:sp>
+    </p:spTree>
+  </p:cSld>
+  <p:clrMapOvr>
+    <a:masterClrMapping/>
+  </p:clrMapOvr>
+</p:sld>
+</file>
+
+<file path=ppt/slides/slide12.xml><?xml version="1.0" encoding="utf-8"?>
+<p:sld xmlns:a="http://schemas.openxmlformats.org/drawingml/2006/main" xmlns:r="http://schemas.openxmlformats.org/officeDocument/2006/relationships" xmlns:p="http://schemas.openxmlformats.org/presentationml/2006/main">
+  <p:cSld name="Slide 12">
     <p:bg>
       <p:bgPr>
         <a:solidFill>
@@ -4177,7 +5064,7 @@
                 <a:ea typeface="Cambria" pitchFamily="34" charset="-122"/>
                 <a:cs typeface="Cambria" pitchFamily="34" charset="-120"/>
               </a:rPr>
-              <a:t>What it does</a:t>
+              <a:t>So what is Mesa?</a:t>
             </a:r>
             <a:endParaRPr lang="en-US" sz="3600" dirty="0"/>
           </a:p>
@@ -4216,7 +5103,7 @@
                 <a:ea typeface="Calibri" pitchFamily="34" charset="-122"/>
                 <a:cs typeface="Calibri" pitchFamily="34" charset="-120"/>
               </a:rPr>
-              <a:t>Two kinds of user</a:t>
+              <a:t>The short version</a:t>
             </a:r>
             <a:endParaRPr lang="en-US" sz="1400" dirty="0"/>
           </a:p>
@@ -4230,12 +5117,117 @@
         </p:nvSpPr>
         <p:spPr>
           <a:xfrm>
-            <a:off x="640080" y="1828800"/>
-            <a:ext cx="5303520" cy="2194560"/>
+            <a:off x="640080" y="1783080"/>
+            <a:ext cx="10881360" cy="1188720"/>
           </a:xfrm>
           <a:prstGeom prst="roundRect">
             <a:avLst>
-              <a:gd name="adj" fmla="val 3750"/>
+              <a:gd name="adj" fmla="val 6923"/>
+            </a:avLst>
+          </a:prstGeom>
+          <a:solidFill>
+            <a:srgbClr val="17392E"/>
+          </a:solidFill>
+          <a:ln w="12700">
+            <a:solidFill>
+              <a:srgbClr val="17392E"/>
+            </a:solidFill>
+            <a:prstDash val="solid"/>
+          </a:ln>
+        </p:spPr>
+      </p:sp>
+      <p:sp>
+        <p:nvSpPr>
+          <p:cNvPr id="5" name="Text 3"/>
+          <p:cNvSpPr/>
+          <p:nvPr/>
+        </p:nvSpPr>
+        <p:spPr>
+          <a:xfrm>
+            <a:off x="960120" y="2011680"/>
+            <a:ext cx="10241280" cy="777240"/>
+          </a:xfrm>
+          <a:prstGeom prst="rect">
+            <a:avLst/>
+          </a:prstGeom>
+          <a:noFill/>
+          <a:ln/>
+        </p:spPr>
+        <p:txBody>
+          <a:bodyPr wrap="square" lIns="0" tIns="0" rIns="0" bIns="0" rtlCol="0" anchor="ctr"/>
+          <a:lstStyle/>
+          <a:p>
+            <a:pPr indent="0" marL="0">
+              <a:buNone/>
+            </a:pPr>
+            <a:r>
+              <a:rPr lang="en-US" sz="1600" dirty="0">
+                <a:solidFill>
+                  <a:srgbClr val="F5F0E6"/>
+                </a:solidFill>
+                <a:latin typeface="Calibri" pitchFamily="34" charset="0"/>
+                <a:ea typeface="Calibri" pitchFamily="34" charset="-122"/>
+                <a:cs typeface="Calibri" pitchFamily="34" charset="-120"/>
+              </a:rPr>
+              <a:t>A website where you pick a date, a time and how many people, and it shows you which restaurants can genuinely seat you — then books the table. "Mesa" is Spanish for table.</a:t>
+            </a:r>
+            <a:endParaRPr lang="en-US" sz="1600" dirty="0"/>
+          </a:p>
+        </p:txBody>
+      </p:sp>
+      <p:sp>
+        <p:nvSpPr>
+          <p:cNvPr id="6" name="Text 4"/>
+          <p:cNvSpPr/>
+          <p:nvPr/>
+        </p:nvSpPr>
+        <p:spPr>
+          <a:xfrm>
+            <a:off x="640080" y="3154680"/>
+            <a:ext cx="10881360" cy="365760"/>
+          </a:xfrm>
+          <a:prstGeom prst="rect">
+            <a:avLst/>
+          </a:prstGeom>
+          <a:noFill/>
+          <a:ln/>
+        </p:spPr>
+        <p:txBody>
+          <a:bodyPr wrap="square" lIns="0" tIns="0" rIns="0" bIns="0" rtlCol="0" anchor="ctr"/>
+          <a:lstStyle/>
+          <a:p>
+            <a:pPr indent="0" marL="0">
+              <a:buNone/>
+            </a:pPr>
+            <a:r>
+              <a:rPr lang="en-US" sz="2000" b="1" dirty="0">
+                <a:solidFill>
+                  <a:srgbClr val="D4A937"/>
+                </a:solidFill>
+                <a:latin typeface="Cambria" pitchFamily="34" charset="0"/>
+                <a:ea typeface="Cambria" pitchFamily="34" charset="-122"/>
+                <a:cs typeface="Cambria" pitchFamily="34" charset="-120"/>
+              </a:rPr>
+              <a:t>What actually happens when you use it</a:t>
+            </a:r>
+            <a:endParaRPr lang="en-US" sz="2000" dirty="0"/>
+          </a:p>
+        </p:txBody>
+      </p:sp>
+      <p:sp>
+        <p:nvSpPr>
+          <p:cNvPr id="7" name="Shape 5"/>
+          <p:cNvSpPr/>
+          <p:nvPr/>
+        </p:nvSpPr>
+        <p:spPr>
+          <a:xfrm>
+            <a:off x="640080" y="3657600"/>
+            <a:ext cx="2606040" cy="1600200"/>
+          </a:xfrm>
+          <a:prstGeom prst="roundRect">
+            <a:avLst>
+              <a:gd name="adj" fmla="val 5143"/>
             </a:avLst>
           </a:prstGeom>
           <a:solidFill>
@@ -4251,69 +5243,89 @@
       </p:sp>
       <p:sp>
         <p:nvSpPr>
-          <p:cNvPr id="5" name="Text 3"/>
-          <p:cNvSpPr/>
-          <p:nvPr/>
-        </p:nvSpPr>
-        <p:spPr>
-          <a:xfrm>
-            <a:off x="960120" y="2057400"/>
-            <a:ext cx="4663440" cy="365760"/>
-          </a:xfrm>
-          <a:prstGeom prst="rect">
-            <a:avLst/>
-          </a:prstGeom>
-          <a:noFill/>
-          <a:ln/>
-        </p:spPr>
-        <p:txBody>
-          <a:bodyPr wrap="square" lIns="0" tIns="0" rIns="0" bIns="0" rtlCol="0" anchor="ctr"/>
-          <a:lstStyle/>
-          <a:p>
-            <a:pPr indent="0" marL="0">
-              <a:buNone/>
-            </a:pPr>
-            <a:r>
-              <a:rPr lang="en-US" sz="2000" b="1" dirty="0">
-                <a:solidFill>
-                  <a:srgbClr val="D4A937"/>
-                </a:solidFill>
-                <a:latin typeface="Cambria" pitchFamily="34" charset="0"/>
-                <a:ea typeface="Cambria" pitchFamily="34" charset="-122"/>
-                <a:cs typeface="Cambria" pitchFamily="34" charset="-120"/>
-              </a:rPr>
-              <a:t>If you are booking</a:t>
-            </a:r>
-            <a:endParaRPr lang="en-US" sz="2000" dirty="0"/>
-          </a:p>
-        </p:txBody>
-      </p:sp>
-      <p:sp>
-        <p:nvSpPr>
-          <p:cNvPr id="6" name="Text 4"/>
-          <p:cNvSpPr/>
-          <p:nvPr/>
-        </p:nvSpPr>
-        <p:spPr>
-          <a:xfrm>
-            <a:off x="960120" y="2514600"/>
-            <a:ext cx="4663440" cy="1280160"/>
-          </a:xfrm>
-          <a:prstGeom prst="rect">
-            <a:avLst/>
-          </a:prstGeom>
-          <a:noFill/>
-          <a:ln/>
-        </p:spPr>
-        <p:txBody>
-          <a:bodyPr wrap="square" lIns="0" tIns="0" rIns="0" bIns="0" rtlCol="0" anchor="ctr"/>
-          <a:lstStyle/>
-          <a:p>
-            <a:pPr indent="0" marL="0">
-              <a:buNone/>
-            </a:pPr>
-            <a:r>
-              <a:rPr lang="en-US" sz="1400" dirty="0">
+          <p:cNvPr id="8" name="Shape 6"/>
+          <p:cNvSpPr/>
+          <p:nvPr/>
+        </p:nvSpPr>
+        <p:spPr>
+          <a:xfrm>
+            <a:off x="868680" y="3840480"/>
+            <a:ext cx="384048" cy="384048"/>
+          </a:xfrm>
+          <a:prstGeom prst="ellipse">
+            <a:avLst/>
+          </a:prstGeom>
+          <a:solidFill>
+            <a:srgbClr val="D4A937"/>
+          </a:solidFill>
+          <a:ln/>
+        </p:spPr>
+      </p:sp>
+      <p:sp>
+        <p:nvSpPr>
+          <p:cNvPr id="9" name="Text 7"/>
+          <p:cNvSpPr/>
+          <p:nvPr/>
+        </p:nvSpPr>
+        <p:spPr>
+          <a:xfrm>
+            <a:off x="868680" y="3840480"/>
+            <a:ext cx="384048" cy="384048"/>
+          </a:xfrm>
+          <a:prstGeom prst="rect">
+            <a:avLst/>
+          </a:prstGeom>
+          <a:noFill/>
+          <a:ln/>
+        </p:spPr>
+        <p:txBody>
+          <a:bodyPr wrap="square" lIns="0" tIns="0" rIns="0" bIns="0" rtlCol="0" anchor="ctr"/>
+          <a:lstStyle/>
+          <a:p>
+            <a:pPr algn="ctr" indent="0" marL="0">
+              <a:buNone/>
+            </a:pPr>
+            <a:r>
+              <a:rPr lang="en-US" sz="1400" b="1" dirty="0">
+                <a:solidFill>
+                  <a:srgbClr val="071310"/>
+                </a:solidFill>
+                <a:latin typeface="Calibri" pitchFamily="34" charset="0"/>
+                <a:ea typeface="Calibri" pitchFamily="34" charset="-122"/>
+                <a:cs typeface="Calibri" pitchFamily="34" charset="-120"/>
+              </a:rPr>
+              <a:t>1</a:t>
+            </a:r>
+            <a:endParaRPr lang="en-US" sz="1400" dirty="0"/>
+          </a:p>
+        </p:txBody>
+      </p:sp>
+      <p:sp>
+        <p:nvSpPr>
+          <p:cNvPr id="10" name="Text 8"/>
+          <p:cNvSpPr/>
+          <p:nvPr/>
+        </p:nvSpPr>
+        <p:spPr>
+          <a:xfrm>
+            <a:off x="868680" y="4343400"/>
+            <a:ext cx="2148840" cy="320040"/>
+          </a:xfrm>
+          <a:prstGeom prst="rect">
+            <a:avLst/>
+          </a:prstGeom>
+          <a:noFill/>
+          <a:ln/>
+        </p:spPr>
+        <p:txBody>
+          <a:bodyPr wrap="square" lIns="0" tIns="0" rIns="0" bIns="0" rtlCol="0" anchor="ctr"/>
+          <a:lstStyle/>
+          <a:p>
+            <a:pPr indent="0" marL="0">
+              <a:buNone/>
+            </a:pPr>
+            <a:r>
+              <a:rPr lang="en-US" sz="1350" b="1" dirty="0">
                 <a:solidFill>
                   <a:srgbClr val="F5F0E6"/>
                 </a:solidFill>
@@ -4321,26 +5333,65 @@
                 <a:ea typeface="Calibri" pitchFamily="34" charset="-122"/>
                 <a:cs typeface="Calibri" pitchFamily="34" charset="-120"/>
               </a:rPr>
-              <a:t>Search restaurants, filter by what is genuinely free at your time and party size, book a table, then see and cancel your own bookings.</a:t>
-            </a:r>
-            <a:endParaRPr lang="en-US" sz="1400" dirty="0"/>
-          </a:p>
-        </p:txBody>
-      </p:sp>
-      <p:sp>
-        <p:nvSpPr>
-          <p:cNvPr id="7" name="Shape 5"/>
-          <p:cNvSpPr/>
-          <p:nvPr/>
-        </p:nvSpPr>
-        <p:spPr>
-          <a:xfrm>
-            <a:off x="6309360" y="1828800"/>
-            <a:ext cx="5212080" cy="2194560"/>
+              <a:t>You say what you want</a:t>
+            </a:r>
+            <a:endParaRPr lang="en-US" sz="1350" dirty="0"/>
+          </a:p>
+        </p:txBody>
+      </p:sp>
+      <p:sp>
+        <p:nvSpPr>
+          <p:cNvPr id="11" name="Text 9"/>
+          <p:cNvSpPr/>
+          <p:nvPr/>
+        </p:nvSpPr>
+        <p:spPr>
+          <a:xfrm>
+            <a:off x="868680" y="4681728"/>
+            <a:ext cx="2148840" cy="502920"/>
+          </a:xfrm>
+          <a:prstGeom prst="rect">
+            <a:avLst/>
+          </a:prstGeom>
+          <a:noFill/>
+          <a:ln/>
+        </p:spPr>
+        <p:txBody>
+          <a:bodyPr wrap="square" lIns="0" tIns="0" rIns="0" bIns="0" rtlCol="0" anchor="ctr"/>
+          <a:lstStyle/>
+          <a:p>
+            <a:pPr indent="0" marL="0">
+              <a:buNone/>
+            </a:pPr>
+            <a:r>
+              <a:rPr lang="en-US" sz="1150" dirty="0">
+                <a:solidFill>
+                  <a:srgbClr val="97B0A2"/>
+                </a:solidFill>
+                <a:latin typeface="Calibri" pitchFamily="34" charset="0"/>
+                <a:ea typeface="Calibri" pitchFamily="34" charset="-122"/>
+                <a:cs typeface="Calibri" pitchFamily="34" charset="-120"/>
+              </a:rPr>
+              <a:t>Friday, 7:30pm, four people</a:t>
+            </a:r>
+            <a:endParaRPr lang="en-US" sz="1150" dirty="0"/>
+          </a:p>
+        </p:txBody>
+      </p:sp>
+      <p:sp>
+        <p:nvSpPr>
+          <p:cNvPr id="12" name="Shape 10"/>
+          <p:cNvSpPr/>
+          <p:nvPr/>
+        </p:nvSpPr>
+        <p:spPr>
+          <a:xfrm>
+            <a:off x="3429000" y="3657600"/>
+            <a:ext cx="2606040" cy="1600200"/>
           </a:xfrm>
           <a:prstGeom prst="roundRect">
             <a:avLst>
-              <a:gd name="adj" fmla="val 3750"/>
+              <a:gd name="adj" fmla="val 5143"/>
             </a:avLst>
           </a:prstGeom>
           <a:solidFill>
@@ -4356,69 +5407,89 @@
       </p:sp>
       <p:sp>
         <p:nvSpPr>
-          <p:cNvPr id="8" name="Text 6"/>
-          <p:cNvSpPr/>
-          <p:nvPr/>
-        </p:nvSpPr>
-        <p:spPr>
-          <a:xfrm>
-            <a:off x="6629400" y="2057400"/>
-            <a:ext cx="4572000" cy="365760"/>
-          </a:xfrm>
-          <a:prstGeom prst="rect">
-            <a:avLst/>
-          </a:prstGeom>
-          <a:noFill/>
-          <a:ln/>
-        </p:spPr>
-        <p:txBody>
-          <a:bodyPr wrap="square" lIns="0" tIns="0" rIns="0" bIns="0" rtlCol="0" anchor="ctr"/>
-          <a:lstStyle/>
-          <a:p>
-            <a:pPr indent="0" marL="0">
-              <a:buNone/>
-            </a:pPr>
-            <a:r>
-              <a:rPr lang="en-US" sz="2000" b="1" dirty="0">
-                <a:solidFill>
-                  <a:srgbClr val="C2683A"/>
-                </a:solidFill>
-                <a:latin typeface="Cambria" pitchFamily="34" charset="0"/>
-                <a:ea typeface="Cambria" pitchFamily="34" charset="-122"/>
-                <a:cs typeface="Cambria" pitchFamily="34" charset="-120"/>
-              </a:rPr>
-              <a:t>If you run the place</a:t>
-            </a:r>
-            <a:endParaRPr lang="en-US" sz="2000" dirty="0"/>
-          </a:p>
-        </p:txBody>
-      </p:sp>
-      <p:sp>
-        <p:nvSpPr>
-          <p:cNvPr id="9" name="Text 7"/>
-          <p:cNvSpPr/>
-          <p:nvPr/>
-        </p:nvSpPr>
-        <p:spPr>
-          <a:xfrm>
-            <a:off x="6629400" y="2514600"/>
-            <a:ext cx="4572000" cy="1280160"/>
-          </a:xfrm>
-          <a:prstGeom prst="rect">
-            <a:avLst/>
-          </a:prstGeom>
-          <a:noFill/>
-          <a:ln/>
-        </p:spPr>
-        <p:txBody>
-          <a:bodyPr wrap="square" lIns="0" tIns="0" rIns="0" bIns="0" rtlCol="0" anchor="ctr"/>
-          <a:lstStyle/>
-          <a:p>
-            <a:pPr indent="0" marL="0">
-              <a:buNone/>
-            </a:pPr>
-            <a:r>
-              <a:rPr lang="en-US" sz="1400" dirty="0">
+          <p:cNvPr id="13" name="Shape 11"/>
+          <p:cNvSpPr/>
+          <p:nvPr/>
+        </p:nvSpPr>
+        <p:spPr>
+          <a:xfrm>
+            <a:off x="3657600" y="3840480"/>
+            <a:ext cx="384048" cy="384048"/>
+          </a:xfrm>
+          <a:prstGeom prst="ellipse">
+            <a:avLst/>
+          </a:prstGeom>
+          <a:solidFill>
+            <a:srgbClr val="D4A937"/>
+          </a:solidFill>
+          <a:ln/>
+        </p:spPr>
+      </p:sp>
+      <p:sp>
+        <p:nvSpPr>
+          <p:cNvPr id="14" name="Text 12"/>
+          <p:cNvSpPr/>
+          <p:nvPr/>
+        </p:nvSpPr>
+        <p:spPr>
+          <a:xfrm>
+            <a:off x="3657600" y="3840480"/>
+            <a:ext cx="384048" cy="384048"/>
+          </a:xfrm>
+          <a:prstGeom prst="rect">
+            <a:avLst/>
+          </a:prstGeom>
+          <a:noFill/>
+          <a:ln/>
+        </p:spPr>
+        <p:txBody>
+          <a:bodyPr wrap="square" lIns="0" tIns="0" rIns="0" bIns="0" rtlCol="0" anchor="ctr"/>
+          <a:lstStyle/>
+          <a:p>
+            <a:pPr algn="ctr" indent="0" marL="0">
+              <a:buNone/>
+            </a:pPr>
+            <a:r>
+              <a:rPr lang="en-US" sz="1400" b="1" dirty="0">
+                <a:solidFill>
+                  <a:srgbClr val="071310"/>
+                </a:solidFill>
+                <a:latin typeface="Calibri" pitchFamily="34" charset="0"/>
+                <a:ea typeface="Calibri" pitchFamily="34" charset="-122"/>
+                <a:cs typeface="Calibri" pitchFamily="34" charset="-120"/>
+              </a:rPr>
+              <a:t>2</a:t>
+            </a:r>
+            <a:endParaRPr lang="en-US" sz="1400" dirty="0"/>
+          </a:p>
+        </p:txBody>
+      </p:sp>
+      <p:sp>
+        <p:nvSpPr>
+          <p:cNvPr id="15" name="Text 13"/>
+          <p:cNvSpPr/>
+          <p:nvPr/>
+        </p:nvSpPr>
+        <p:spPr>
+          <a:xfrm>
+            <a:off x="3657600" y="4343400"/>
+            <a:ext cx="2148840" cy="320040"/>
+          </a:xfrm>
+          <a:prstGeom prst="rect">
+            <a:avLst/>
+          </a:prstGeom>
+          <a:noFill/>
+          <a:ln/>
+        </p:spPr>
+        <p:txBody>
+          <a:bodyPr wrap="square" lIns="0" tIns="0" rIns="0" bIns="0" rtlCol="0" anchor="ctr"/>
+          <a:lstStyle/>
+          <a:p>
+            <a:pPr indent="0" marL="0">
+              <a:buNone/>
+            </a:pPr>
+            <a:r>
+              <a:rPr lang="en-US" sz="1350" b="1" dirty="0">
                 <a:solidFill>
                   <a:srgbClr val="F5F0E6"/>
                 </a:solidFill>
@@ -4426,30 +5497,69 @@
                 <a:ea typeface="Calibri" pitchFamily="34" charset="-122"/>
                 <a:cs typeface="Calibri" pitchFamily="34" charset="-120"/>
               </a:rPr>
-              <a:t>See tonight's bookings, mark people seated or as no-shows, and check covers, occupancy and no-show rate on a dashboard.</a:t>
-            </a:r>
-            <a:endParaRPr lang="en-US" sz="1400" dirty="0"/>
-          </a:p>
-        </p:txBody>
-      </p:sp>
-      <p:sp>
-        <p:nvSpPr>
-          <p:cNvPr id="10" name="Shape 8"/>
-          <p:cNvSpPr/>
-          <p:nvPr/>
-        </p:nvSpPr>
-        <p:spPr>
-          <a:xfrm>
-            <a:off x="640080" y="4297680"/>
-            <a:ext cx="10881360" cy="1828800"/>
+              <a:t>It checks every table</a:t>
+            </a:r>
+            <a:endParaRPr lang="en-US" sz="1350" dirty="0"/>
+          </a:p>
+        </p:txBody>
+      </p:sp>
+      <p:sp>
+        <p:nvSpPr>
+          <p:cNvPr id="16" name="Text 14"/>
+          <p:cNvSpPr/>
+          <p:nvPr/>
+        </p:nvSpPr>
+        <p:spPr>
+          <a:xfrm>
+            <a:off x="3657600" y="4681728"/>
+            <a:ext cx="2148840" cy="502920"/>
+          </a:xfrm>
+          <a:prstGeom prst="rect">
+            <a:avLst/>
+          </a:prstGeom>
+          <a:noFill/>
+          <a:ln/>
+        </p:spPr>
+        <p:txBody>
+          <a:bodyPr wrap="square" lIns="0" tIns="0" rIns="0" bIns="0" rtlCol="0" anchor="ctr"/>
+          <a:lstStyle/>
+          <a:p>
+            <a:pPr indent="0" marL="0">
+              <a:buNone/>
+            </a:pPr>
+            <a:r>
+              <a:rPr lang="en-US" sz="1150" dirty="0">
+                <a:solidFill>
+                  <a:srgbClr val="97B0A2"/>
+                </a:solidFill>
+                <a:latin typeface="Calibri" pitchFamily="34" charset="0"/>
+                <a:ea typeface="Calibri" pitchFamily="34" charset="-122"/>
+                <a:cs typeface="Calibri" pitchFamily="34" charset="-120"/>
+              </a:rPr>
+              <a:t>Across all six restaurants, not just whether they are open</a:t>
+            </a:r>
+            <a:endParaRPr lang="en-US" sz="1150" dirty="0"/>
+          </a:p>
+        </p:txBody>
+      </p:sp>
+      <p:sp>
+        <p:nvSpPr>
+          <p:cNvPr id="17" name="Shape 15"/>
+          <p:cNvSpPr/>
+          <p:nvPr/>
+        </p:nvSpPr>
+        <p:spPr>
+          <a:xfrm>
+            <a:off x="6217920" y="3657600"/>
+            <a:ext cx="2606040" cy="1600200"/>
           </a:xfrm>
           <a:prstGeom prst="roundRect">
             <a:avLst>
-              <a:gd name="adj" fmla="val 4500"/>
+              <a:gd name="adj" fmla="val 5143"/>
             </a:avLst>
           </a:prstGeom>
           <a:solidFill>
-            <a:srgbClr val="17392E"/>
+            <a:srgbClr val="102B23"/>
           </a:solidFill>
           <a:ln w="12700">
             <a:solidFill>
@@ -4461,69 +5571,89 @@
       </p:sp>
       <p:sp>
         <p:nvSpPr>
-          <p:cNvPr id="11" name="Text 9"/>
-          <p:cNvSpPr/>
-          <p:nvPr/>
-        </p:nvSpPr>
-        <p:spPr>
-          <a:xfrm>
-            <a:off x="960120" y="4526280"/>
-            <a:ext cx="10241280" cy="365760"/>
-          </a:xfrm>
-          <a:prstGeom prst="rect">
-            <a:avLst/>
-          </a:prstGeom>
-          <a:noFill/>
-          <a:ln/>
-        </p:spPr>
-        <p:txBody>
-          <a:bodyPr wrap="square" lIns="0" tIns="0" rIns="0" bIns="0" rtlCol="0" anchor="ctr"/>
-          <a:lstStyle/>
-          <a:p>
-            <a:pPr indent="0" marL="0">
-              <a:buNone/>
-            </a:pPr>
-            <a:r>
-              <a:rPr lang="en-US" sz="2000" b="1" dirty="0">
-                <a:solidFill>
-                  <a:srgbClr val="F5D77A"/>
-                </a:solidFill>
-                <a:latin typeface="Cambria" pitchFamily="34" charset="0"/>
-                <a:ea typeface="Cambria" pitchFamily="34" charset="-122"/>
-                <a:cs typeface="Cambria" pitchFamily="34" charset="-120"/>
-              </a:rPr>
-              <a:t>The rule I spent the most time on</a:t>
-            </a:r>
-            <a:endParaRPr lang="en-US" sz="2000" dirty="0"/>
-          </a:p>
-        </p:txBody>
-      </p:sp>
-      <p:sp>
-        <p:nvSpPr>
-          <p:cNvPr id="12" name="Text 10"/>
-          <p:cNvSpPr/>
-          <p:nvPr/>
-        </p:nvSpPr>
-        <p:spPr>
-          <a:xfrm>
-            <a:off x="960120" y="4983480"/>
-            <a:ext cx="10241280" cy="914400"/>
-          </a:xfrm>
-          <a:prstGeom prst="rect">
-            <a:avLst/>
-          </a:prstGeom>
-          <a:noFill/>
-          <a:ln/>
-        </p:spPr>
-        <p:txBody>
-          <a:bodyPr wrap="square" lIns="0" tIns="0" rIns="0" bIns="0" rtlCol="0" anchor="ctr"/>
-          <a:lstStyle/>
-          <a:p>
-            <a:pPr indent="0" marL="0">
-              <a:buNone/>
-            </a:pPr>
-            <a:r>
-              <a:rPr lang="en-US" sz="1400" dirty="0">
+          <p:cNvPr id="18" name="Shape 16"/>
+          <p:cNvSpPr/>
+          <p:nvPr/>
+        </p:nvSpPr>
+        <p:spPr>
+          <a:xfrm>
+            <a:off x="6446520" y="3840480"/>
+            <a:ext cx="384048" cy="384048"/>
+          </a:xfrm>
+          <a:prstGeom prst="ellipse">
+            <a:avLst/>
+          </a:prstGeom>
+          <a:solidFill>
+            <a:srgbClr val="D4A937"/>
+          </a:solidFill>
+          <a:ln/>
+        </p:spPr>
+      </p:sp>
+      <p:sp>
+        <p:nvSpPr>
+          <p:cNvPr id="19" name="Text 17"/>
+          <p:cNvSpPr/>
+          <p:nvPr/>
+        </p:nvSpPr>
+        <p:spPr>
+          <a:xfrm>
+            <a:off x="6446520" y="3840480"/>
+            <a:ext cx="384048" cy="384048"/>
+          </a:xfrm>
+          <a:prstGeom prst="rect">
+            <a:avLst/>
+          </a:prstGeom>
+          <a:noFill/>
+          <a:ln/>
+        </p:spPr>
+        <p:txBody>
+          <a:bodyPr wrap="square" lIns="0" tIns="0" rIns="0" bIns="0" rtlCol="0" anchor="ctr"/>
+          <a:lstStyle/>
+          <a:p>
+            <a:pPr algn="ctr" indent="0" marL="0">
+              <a:buNone/>
+            </a:pPr>
+            <a:r>
+              <a:rPr lang="en-US" sz="1400" b="1" dirty="0">
+                <a:solidFill>
+                  <a:srgbClr val="071310"/>
+                </a:solidFill>
+                <a:latin typeface="Calibri" pitchFamily="34" charset="0"/>
+                <a:ea typeface="Calibri" pitchFamily="34" charset="-122"/>
+                <a:cs typeface="Calibri" pitchFamily="34" charset="-120"/>
+              </a:rPr>
+              <a:t>3</a:t>
+            </a:r>
+            <a:endParaRPr lang="en-US" sz="1400" dirty="0"/>
+          </a:p>
+        </p:txBody>
+      </p:sp>
+      <p:sp>
+        <p:nvSpPr>
+          <p:cNvPr id="20" name="Text 18"/>
+          <p:cNvSpPr/>
+          <p:nvPr/>
+        </p:nvSpPr>
+        <p:spPr>
+          <a:xfrm>
+            <a:off x="6446520" y="4343400"/>
+            <a:ext cx="2148840" cy="320040"/>
+          </a:xfrm>
+          <a:prstGeom prst="rect">
+            <a:avLst/>
+          </a:prstGeom>
+          <a:noFill/>
+          <a:ln/>
+        </p:spPr>
+        <p:txBody>
+          <a:bodyPr wrap="square" lIns="0" tIns="0" rIns="0" bIns="0" rtlCol="0" anchor="ctr"/>
+          <a:lstStyle/>
+          <a:p>
+            <a:pPr indent="0" marL="0">
+              <a:buNone/>
+            </a:pPr>
+            <a:r>
+              <a:rPr lang="en-US" sz="1350" b="1" dirty="0">
                 <a:solidFill>
                   <a:srgbClr val="F5F0E6"/>
                 </a:solidFill>
@@ -4531,9 +5661,317 @@
                 <a:ea typeface="Calibri" pitchFamily="34" charset="-122"/>
                 <a:cs typeface="Calibri" pitchFamily="34" charset="-120"/>
               </a:rPr>
-              <a:t>A manager can only touch their own restaurant. My first version just checked "are you a manager?" — which meant any manager could read every other restaurant's bookings. Checking the role is not the same as checking ownership, and that took me a while to see.</a:t>
+              <a:t>You see only what fits</a:t>
+            </a:r>
+            <a:endParaRPr lang="en-US" sz="1350" dirty="0"/>
+          </a:p>
+        </p:txBody>
+      </p:sp>
+      <p:sp>
+        <p:nvSpPr>
+          <p:cNvPr id="21" name="Text 19"/>
+          <p:cNvSpPr/>
+          <p:nvPr/>
+        </p:nvSpPr>
+        <p:spPr>
+          <a:xfrm>
+            <a:off x="6446520" y="4681728"/>
+            <a:ext cx="2148840" cy="502920"/>
+          </a:xfrm>
+          <a:prstGeom prst="rect">
+            <a:avLst/>
+          </a:prstGeom>
+          <a:noFill/>
+          <a:ln/>
+        </p:spPr>
+        <p:txBody>
+          <a:bodyPr wrap="square" lIns="0" tIns="0" rIns="0" bIns="0" rtlCol="0" anchor="ctr"/>
+          <a:lstStyle/>
+          <a:p>
+            <a:pPr indent="0" marL="0">
+              <a:buNone/>
+            </a:pPr>
+            <a:r>
+              <a:rPr lang="en-US" sz="1150" dirty="0">
+                <a:solidFill>
+                  <a:srgbClr val="97B0A2"/>
+                </a:solidFill>
+                <a:latin typeface="Calibri" pitchFamily="34" charset="0"/>
+                <a:ea typeface="Calibri" pitchFamily="34" charset="-122"/>
+                <a:cs typeface="Calibri" pitchFamily="34" charset="-120"/>
+              </a:rPr>
+              <a:t>Places with no table for four simply do not appear</a:t>
+            </a:r>
+            <a:endParaRPr lang="en-US" sz="1150" dirty="0"/>
+          </a:p>
+        </p:txBody>
+      </p:sp>
+      <p:sp>
+        <p:nvSpPr>
+          <p:cNvPr id="22" name="Shape 20"/>
+          <p:cNvSpPr/>
+          <p:nvPr/>
+        </p:nvSpPr>
+        <p:spPr>
+          <a:xfrm>
+            <a:off x="9006840" y="3657600"/>
+            <a:ext cx="2606040" cy="1600200"/>
+          </a:xfrm>
+          <a:prstGeom prst="roundRect">
+            <a:avLst>
+              <a:gd name="adj" fmla="val 5143"/>
+            </a:avLst>
+          </a:prstGeom>
+          <a:solidFill>
+            <a:srgbClr val="102B23"/>
+          </a:solidFill>
+          <a:ln w="12700">
+            <a:solidFill>
+              <a:srgbClr val="17392E"/>
+            </a:solidFill>
+            <a:prstDash val="solid"/>
+          </a:ln>
+        </p:spPr>
+      </p:sp>
+      <p:sp>
+        <p:nvSpPr>
+          <p:cNvPr id="23" name="Shape 21"/>
+          <p:cNvSpPr/>
+          <p:nvPr/>
+        </p:nvSpPr>
+        <p:spPr>
+          <a:xfrm>
+            <a:off x="9235440" y="3840480"/>
+            <a:ext cx="384048" cy="384048"/>
+          </a:xfrm>
+          <a:prstGeom prst="ellipse">
+            <a:avLst/>
+          </a:prstGeom>
+          <a:solidFill>
+            <a:srgbClr val="D4A937"/>
+          </a:solidFill>
+          <a:ln/>
+        </p:spPr>
+      </p:sp>
+      <p:sp>
+        <p:nvSpPr>
+          <p:cNvPr id="24" name="Text 22"/>
+          <p:cNvSpPr/>
+          <p:nvPr/>
+        </p:nvSpPr>
+        <p:spPr>
+          <a:xfrm>
+            <a:off x="9235440" y="3840480"/>
+            <a:ext cx="384048" cy="384048"/>
+          </a:xfrm>
+          <a:prstGeom prst="rect">
+            <a:avLst/>
+          </a:prstGeom>
+          <a:noFill/>
+          <a:ln/>
+        </p:spPr>
+        <p:txBody>
+          <a:bodyPr wrap="square" lIns="0" tIns="0" rIns="0" bIns="0" rtlCol="0" anchor="ctr"/>
+          <a:lstStyle/>
+          <a:p>
+            <a:pPr algn="ctr" indent="0" marL="0">
+              <a:buNone/>
+            </a:pPr>
+            <a:r>
+              <a:rPr lang="en-US" sz="1400" b="1" dirty="0">
+                <a:solidFill>
+                  <a:srgbClr val="071310"/>
+                </a:solidFill>
+                <a:latin typeface="Calibri" pitchFamily="34" charset="0"/>
+                <a:ea typeface="Calibri" pitchFamily="34" charset="-122"/>
+                <a:cs typeface="Calibri" pitchFamily="34" charset="-120"/>
+              </a:rPr>
+              <a:t>4</a:t>
             </a:r>
             <a:endParaRPr lang="en-US" sz="1400" dirty="0"/>
+          </a:p>
+        </p:txBody>
+      </p:sp>
+      <p:sp>
+        <p:nvSpPr>
+          <p:cNvPr id="25" name="Text 23"/>
+          <p:cNvSpPr/>
+          <p:nvPr/>
+        </p:nvSpPr>
+        <p:spPr>
+          <a:xfrm>
+            <a:off x="9235440" y="4343400"/>
+            <a:ext cx="2148840" cy="320040"/>
+          </a:xfrm>
+          <a:prstGeom prst="rect">
+            <a:avLst/>
+          </a:prstGeom>
+          <a:noFill/>
+          <a:ln/>
+        </p:spPr>
+        <p:txBody>
+          <a:bodyPr wrap="square" lIns="0" tIns="0" rIns="0" bIns="0" rtlCol="0" anchor="ctr"/>
+          <a:lstStyle/>
+          <a:p>
+            <a:pPr indent="0" marL="0">
+              <a:buNone/>
+            </a:pPr>
+            <a:r>
+              <a:rPr lang="en-US" sz="1350" b="1" dirty="0">
+                <a:solidFill>
+                  <a:srgbClr val="F5F0E6"/>
+                </a:solidFill>
+                <a:latin typeface="Calibri" pitchFamily="34" charset="0"/>
+                <a:ea typeface="Calibri" pitchFamily="34" charset="-122"/>
+                <a:cs typeface="Calibri" pitchFamily="34" charset="-120"/>
+              </a:rPr>
+              <a:t>It tells you your table</a:t>
+            </a:r>
+            <a:endParaRPr lang="en-US" sz="1350" dirty="0"/>
+          </a:p>
+        </p:txBody>
+      </p:sp>
+      <p:sp>
+        <p:nvSpPr>
+          <p:cNvPr id="26" name="Text 24"/>
+          <p:cNvSpPr/>
+          <p:nvPr/>
+        </p:nvSpPr>
+        <p:spPr>
+          <a:xfrm>
+            <a:off x="9235440" y="4681728"/>
+            <a:ext cx="2148840" cy="502920"/>
+          </a:xfrm>
+          <a:prstGeom prst="rect">
+            <a:avLst/>
+          </a:prstGeom>
+          <a:noFill/>
+          <a:ln/>
+        </p:spPr>
+        <p:txBody>
+          <a:bodyPr wrap="square" lIns="0" tIns="0" rIns="0" bIns="0" rtlCol="0" anchor="ctr"/>
+          <a:lstStyle/>
+          <a:p>
+            <a:pPr indent="0" marL="0">
+              <a:buNone/>
+            </a:pPr>
+            <a:r>
+              <a:rPr lang="en-US" sz="1150" dirty="0">
+                <a:solidFill>
+                  <a:srgbClr val="97B0A2"/>
+                </a:solidFill>
+                <a:latin typeface="Calibri" pitchFamily="34" charset="0"/>
+                <a:ea typeface="Calibri" pitchFamily="34" charset="-122"/>
+                <a:cs typeface="Calibri" pitchFamily="34" charset="-120"/>
+              </a:rPr>
+              <a:t>Before you confirm, not after</a:t>
+            </a:r>
+            <a:endParaRPr lang="en-US" sz="1150" dirty="0"/>
+          </a:p>
+        </p:txBody>
+      </p:sp>
+      <p:sp>
+        <p:nvSpPr>
+          <p:cNvPr id="27" name="Shape 25"/>
+          <p:cNvSpPr/>
+          <p:nvPr/>
+        </p:nvSpPr>
+        <p:spPr>
+          <a:xfrm>
+            <a:off x="640080" y="5486400"/>
+            <a:ext cx="10881360" cy="1005840"/>
+          </a:xfrm>
+          <a:prstGeom prst="roundRect">
+            <a:avLst>
+              <a:gd name="adj" fmla="val 8182"/>
+            </a:avLst>
+          </a:prstGeom>
+          <a:solidFill>
+            <a:srgbClr val="102B23"/>
+          </a:solidFill>
+          <a:ln w="12700">
+            <a:solidFill>
+              <a:srgbClr val="17392E"/>
+            </a:solidFill>
+            <a:prstDash val="solid"/>
+          </a:ln>
+        </p:spPr>
+      </p:sp>
+      <p:sp>
+        <p:nvSpPr>
+          <p:cNvPr id="28" name="Text 26"/>
+          <p:cNvSpPr/>
+          <p:nvPr/>
+        </p:nvSpPr>
+        <p:spPr>
+          <a:xfrm>
+            <a:off x="960120" y="5623560"/>
+            <a:ext cx="3566160" cy="274320"/>
+          </a:xfrm>
+          <a:prstGeom prst="rect">
+            <a:avLst/>
+          </a:prstGeom>
+          <a:noFill/>
+          <a:ln/>
+        </p:spPr>
+        <p:txBody>
+          <a:bodyPr wrap="square" lIns="0" tIns="0" rIns="0" bIns="0" rtlCol="0" anchor="ctr"/>
+          <a:lstStyle/>
+          <a:p>
+            <a:pPr indent="0" marL="0">
+              <a:buNone/>
+            </a:pPr>
+            <a:r>
+              <a:rPr lang="en-US" sz="1300" b="1" dirty="0">
+                <a:solidFill>
+                  <a:srgbClr val="C2683A"/>
+                </a:solidFill>
+                <a:latin typeface="Calibri" pitchFamily="34" charset="0"/>
+                <a:ea typeface="Calibri" pitchFamily="34" charset="-122"/>
+                <a:cs typeface="Calibri" pitchFamily="34" charset="-120"/>
+              </a:rPr>
+              <a:t>The difference from a listings site</a:t>
+            </a:r>
+            <a:endParaRPr lang="en-US" sz="1300" dirty="0"/>
+          </a:p>
+        </p:txBody>
+      </p:sp>
+      <p:sp>
+        <p:nvSpPr>
+          <p:cNvPr id="29" name="Text 27"/>
+          <p:cNvSpPr/>
+          <p:nvPr/>
+        </p:nvSpPr>
+        <p:spPr>
+          <a:xfrm>
+            <a:off x="960120" y="5943600"/>
+            <a:ext cx="10241280" cy="457200"/>
+          </a:xfrm>
+          <a:prstGeom prst="rect">
+            <a:avLst/>
+          </a:prstGeom>
+          <a:noFill/>
+          <a:ln/>
+        </p:spPr>
+        <p:txBody>
+          <a:bodyPr wrap="square" lIns="0" tIns="0" rIns="0" bIns="0" rtlCol="0" anchor="ctr"/>
+          <a:lstStyle/>
+          <a:p>
+            <a:pPr indent="0" marL="0">
+              <a:buNone/>
+            </a:pPr>
+            <a:r>
+              <a:rPr lang="en-US" sz="1250" dirty="0">
+                <a:solidFill>
+                  <a:srgbClr val="F5F0E6"/>
+                </a:solidFill>
+                <a:latin typeface="Calibri" pitchFamily="34" charset="0"/>
+                <a:ea typeface="Calibri" pitchFamily="34" charset="-122"/>
+                <a:cs typeface="Calibri" pitchFamily="34" charset="-120"/>
+              </a:rPr>
+              <a:t>A listings site tells you a restaurant exists and gives you a phone number. Mesa tells you whether it can actually seat you at the time you want, and lets you take the table there and then.</a:t>
+            </a:r>
+            <a:endParaRPr lang="en-US" sz="1250" dirty="0"/>
           </a:p>
         </p:txBody>
       </p:sp>
@@ -4602,7 +6040,7 @@
                 <a:ea typeface="Cambria" pitchFamily="34" charset="-122"/>
                 <a:cs typeface="Cambria" pitchFamily="34" charset="-120"/>
               </a:rPr>
-              <a:t>How it is put together</a:t>
+              <a:t>What it does</a:t>
             </a:r>
             <a:endParaRPr lang="en-US" sz="3600" dirty="0"/>
           </a:p>
@@ -4641,7 +6079,7 @@
                 <a:ea typeface="Calibri" pitchFamily="34" charset="-122"/>
                 <a:cs typeface="Calibri" pitchFamily="34" charset="-120"/>
               </a:rPr>
-              <a:t>React talks to an Express API, which talks to the database through Prisma</a:t>
+              <a:t>Two kinds of user</a:t>
             </a:r>
             <a:endParaRPr lang="en-US" sz="1400" dirty="0"/>
           </a:p>
@@ -4656,11 +6094,11 @@
         <p:spPr>
           <a:xfrm>
             <a:off x="640080" y="1828800"/>
-            <a:ext cx="7498080" cy="694944"/>
+            <a:ext cx="5303520" cy="2194560"/>
           </a:xfrm>
           <a:prstGeom prst="roundRect">
             <a:avLst>
-              <a:gd name="adj" fmla="val 11842"/>
+              <a:gd name="adj" fmla="val 3750"/>
             </a:avLst>
           </a:prstGeom>
           <a:solidFill>
@@ -4682,24 +6120,63 @@
         </p:nvSpPr>
         <p:spPr>
           <a:xfrm>
-            <a:off x="914400" y="1892808"/>
-            <a:ext cx="6949440" cy="292608"/>
-          </a:xfrm>
-          <a:prstGeom prst="rect">
-            <a:avLst/>
-          </a:prstGeom>
-          <a:noFill/>
-          <a:ln/>
-        </p:spPr>
-        <p:txBody>
-          <a:bodyPr wrap="square" lIns="0" tIns="0" rIns="0" bIns="0" rtlCol="0" anchor="ctr"/>
-          <a:lstStyle/>
-          <a:p>
-            <a:pPr indent="0" marL="0">
-              <a:buNone/>
-            </a:pPr>
-            <a:r>
-              <a:rPr lang="en-US" sz="1500" b="1" dirty="0">
+            <a:off x="960120" y="2057400"/>
+            <a:ext cx="4663440" cy="365760"/>
+          </a:xfrm>
+          <a:prstGeom prst="rect">
+            <a:avLst/>
+          </a:prstGeom>
+          <a:noFill/>
+          <a:ln/>
+        </p:spPr>
+        <p:txBody>
+          <a:bodyPr wrap="square" lIns="0" tIns="0" rIns="0" bIns="0" rtlCol="0" anchor="ctr"/>
+          <a:lstStyle/>
+          <a:p>
+            <a:pPr indent="0" marL="0">
+              <a:buNone/>
+            </a:pPr>
+            <a:r>
+              <a:rPr lang="en-US" sz="2000" b="1" dirty="0">
+                <a:solidFill>
+                  <a:srgbClr val="D4A937"/>
+                </a:solidFill>
+                <a:latin typeface="Cambria" pitchFamily="34" charset="0"/>
+                <a:ea typeface="Cambria" pitchFamily="34" charset="-122"/>
+                <a:cs typeface="Cambria" pitchFamily="34" charset="-120"/>
+              </a:rPr>
+              <a:t>If you are booking</a:t>
+            </a:r>
+            <a:endParaRPr lang="en-US" sz="2000" dirty="0"/>
+          </a:p>
+        </p:txBody>
+      </p:sp>
+      <p:sp>
+        <p:nvSpPr>
+          <p:cNvPr id="6" name="Text 4"/>
+          <p:cNvSpPr/>
+          <p:nvPr/>
+        </p:nvSpPr>
+        <p:spPr>
+          <a:xfrm>
+            <a:off x="960120" y="2514600"/>
+            <a:ext cx="4663440" cy="1280160"/>
+          </a:xfrm>
+          <a:prstGeom prst="rect">
+            <a:avLst/>
+          </a:prstGeom>
+          <a:noFill/>
+          <a:ln/>
+        </p:spPr>
+        <p:txBody>
+          <a:bodyPr wrap="square" lIns="0" tIns="0" rIns="0" bIns="0" rtlCol="0" anchor="ctr"/>
+          <a:lstStyle/>
+          <a:p>
+            <a:pPr indent="0" marL="0">
+              <a:buNone/>
+            </a:pPr>
+            <a:r>
+              <a:rPr lang="en-US" sz="1400" dirty="0">
                 <a:solidFill>
                   <a:srgbClr val="F5F0E6"/>
                 </a:solidFill>
@@ -4707,48 +6184,9 @@
                 <a:ea typeface="Calibri" pitchFamily="34" charset="-122"/>
                 <a:cs typeface="Calibri" pitchFamily="34" charset="-120"/>
               </a:rPr>
-              <a:t>React front end</a:t>
-            </a:r>
-            <a:endParaRPr lang="en-US" sz="1500" dirty="0"/>
-          </a:p>
-        </p:txBody>
-      </p:sp>
-      <p:sp>
-        <p:nvSpPr>
-          <p:cNvPr id="6" name="Text 4"/>
-          <p:cNvSpPr/>
-          <p:nvPr/>
-        </p:nvSpPr>
-        <p:spPr>
-          <a:xfrm>
-            <a:off x="914400" y="2194560"/>
-            <a:ext cx="6949440" cy="256032"/>
-          </a:xfrm>
-          <a:prstGeom prst="rect">
-            <a:avLst/>
-          </a:prstGeom>
-          <a:noFill/>
-          <a:ln/>
-        </p:spPr>
-        <p:txBody>
-          <a:bodyPr wrap="square" lIns="0" tIns="0" rIns="0" bIns="0" rtlCol="0" anchor="ctr"/>
-          <a:lstStyle/>
-          <a:p>
-            <a:pPr indent="0" marL="0">
-              <a:buNone/>
-            </a:pPr>
-            <a:r>
-              <a:rPr lang="en-US" sz="1200" dirty="0">
-                <a:solidFill>
-                  <a:srgbClr val="97B0A2"/>
-                </a:solidFill>
-                <a:latin typeface="Calibri" pitchFamily="34" charset="0"/>
-                <a:ea typeface="Calibri" pitchFamily="34" charset="-122"/>
-                <a:cs typeface="Calibri" pitchFamily="34" charset="-120"/>
-              </a:rPr>
-              <a:t>Pages, components, Context for login state</a:t>
-            </a:r>
-            <a:endParaRPr lang="en-US" sz="1200" dirty="0"/>
+              <a:t>Search restaurants, filter by what is genuinely free at your time and party size, book a table, then see and cancel your own bookings.</a:t>
+            </a:r>
+            <a:endParaRPr lang="en-US" sz="1400" dirty="0"/>
           </a:p>
         </p:txBody>
       </p:sp>
@@ -4760,36 +6198,12 @@
         </p:nvSpPr>
         <p:spPr>
           <a:xfrm>
-            <a:off x="4389120" y="2523744"/>
-            <a:ext cx="0" cy="128016"/>
-          </a:xfrm>
-          <a:prstGeom prst="line">
-            <a:avLst/>
-          </a:prstGeom>
-          <a:noFill/>
-          <a:ln w="19050">
-            <a:solidFill>
-              <a:srgbClr val="D4A937"/>
-            </a:solidFill>
-            <a:prstDash val="solid"/>
-            <a:tailEnd type="triangle"/>
-          </a:ln>
-        </p:spPr>
-      </p:sp>
-      <p:sp>
-        <p:nvSpPr>
-          <p:cNvPr id="8" name="Shape 6"/>
-          <p:cNvSpPr/>
-          <p:nvPr/>
-        </p:nvSpPr>
-        <p:spPr>
-          <a:xfrm>
-            <a:off x="640080" y="2651760"/>
-            <a:ext cx="7498080" cy="694944"/>
+            <a:off x="6309360" y="1828800"/>
+            <a:ext cx="5212080" cy="2194560"/>
           </a:xfrm>
           <a:prstGeom prst="roundRect">
             <a:avLst>
-              <a:gd name="adj" fmla="val 11842"/>
+              <a:gd name="adj" fmla="val 3750"/>
             </a:avLst>
           </a:prstGeom>
           <a:solidFill>
@@ -4805,30 +6219,69 @@
       </p:sp>
       <p:sp>
         <p:nvSpPr>
+          <p:cNvPr id="8" name="Text 6"/>
+          <p:cNvSpPr/>
+          <p:nvPr/>
+        </p:nvSpPr>
+        <p:spPr>
+          <a:xfrm>
+            <a:off x="6629400" y="2057400"/>
+            <a:ext cx="4572000" cy="365760"/>
+          </a:xfrm>
+          <a:prstGeom prst="rect">
+            <a:avLst/>
+          </a:prstGeom>
+          <a:noFill/>
+          <a:ln/>
+        </p:spPr>
+        <p:txBody>
+          <a:bodyPr wrap="square" lIns="0" tIns="0" rIns="0" bIns="0" rtlCol="0" anchor="ctr"/>
+          <a:lstStyle/>
+          <a:p>
+            <a:pPr indent="0" marL="0">
+              <a:buNone/>
+            </a:pPr>
+            <a:r>
+              <a:rPr lang="en-US" sz="2000" b="1" dirty="0">
+                <a:solidFill>
+                  <a:srgbClr val="C2683A"/>
+                </a:solidFill>
+                <a:latin typeface="Cambria" pitchFamily="34" charset="0"/>
+                <a:ea typeface="Cambria" pitchFamily="34" charset="-122"/>
+                <a:cs typeface="Cambria" pitchFamily="34" charset="-120"/>
+              </a:rPr>
+              <a:t>If you run the place</a:t>
+            </a:r>
+            <a:endParaRPr lang="en-US" sz="2000" dirty="0"/>
+          </a:p>
+        </p:txBody>
+      </p:sp>
+      <p:sp>
+        <p:nvSpPr>
           <p:cNvPr id="9" name="Text 7"/>
           <p:cNvSpPr/>
           <p:nvPr/>
         </p:nvSpPr>
         <p:spPr>
           <a:xfrm>
-            <a:off x="914400" y="2715768"/>
-            <a:ext cx="6949440" cy="292608"/>
-          </a:xfrm>
-          <a:prstGeom prst="rect">
-            <a:avLst/>
-          </a:prstGeom>
-          <a:noFill/>
-          <a:ln/>
-        </p:spPr>
-        <p:txBody>
-          <a:bodyPr wrap="square" lIns="0" tIns="0" rIns="0" bIns="0" rtlCol="0" anchor="ctr"/>
-          <a:lstStyle/>
-          <a:p>
-            <a:pPr indent="0" marL="0">
-              <a:buNone/>
-            </a:pPr>
-            <a:r>
-              <a:rPr lang="en-US" sz="1500" b="1" dirty="0">
+            <a:off x="6629400" y="2514600"/>
+            <a:ext cx="4572000" cy="1280160"/>
+          </a:xfrm>
+          <a:prstGeom prst="rect">
+            <a:avLst/>
+          </a:prstGeom>
+          <a:noFill/>
+          <a:ln/>
+        </p:spPr>
+        <p:txBody>
+          <a:bodyPr wrap="square" lIns="0" tIns="0" rIns="0" bIns="0" rtlCol="0" anchor="ctr"/>
+          <a:lstStyle/>
+          <a:p>
+            <a:pPr indent="0" marL="0">
+              <a:buNone/>
+            </a:pPr>
+            <a:r>
+              <a:rPr lang="en-US" sz="1400" dirty="0">
                 <a:solidFill>
                   <a:srgbClr val="F5F0E6"/>
                 </a:solidFill>
@@ -4836,218 +6289,26 @@
                 <a:ea typeface="Calibri" pitchFamily="34" charset="-122"/>
                 <a:cs typeface="Calibri" pitchFamily="34" charset="-120"/>
               </a:rPr>
-              <a:t>Express — middleware</a:t>
-            </a:r>
-            <a:endParaRPr lang="en-US" sz="1500" dirty="0"/>
-          </a:p>
-        </p:txBody>
-      </p:sp>
-      <p:sp>
-        <p:nvSpPr>
-          <p:cNvPr id="10" name="Text 8"/>
-          <p:cNvSpPr/>
-          <p:nvPr/>
-        </p:nvSpPr>
-        <p:spPr>
-          <a:xfrm>
-            <a:off x="914400" y="3017520"/>
-            <a:ext cx="6949440" cy="256032"/>
-          </a:xfrm>
-          <a:prstGeom prst="rect">
-            <a:avLst/>
-          </a:prstGeom>
-          <a:noFill/>
-          <a:ln/>
-        </p:spPr>
-        <p:txBody>
-          <a:bodyPr wrap="square" lIns="0" tIns="0" rIns="0" bIns="0" rtlCol="0" anchor="ctr"/>
-          <a:lstStyle/>
-          <a:p>
-            <a:pPr indent="0" marL="0">
-              <a:buNone/>
-            </a:pPr>
-            <a:r>
-              <a:rPr lang="en-US" sz="1200" dirty="0">
-                <a:solidFill>
-                  <a:srgbClr val="97B0A2"/>
-                </a:solidFill>
-                <a:latin typeface="Calibri" pitchFamily="34" charset="0"/>
-                <a:ea typeface="Calibri" pitchFamily="34" charset="-122"/>
-                <a:cs typeface="Calibri" pitchFamily="34" charset="-120"/>
-              </a:rPr>
-              <a:t>Request id, security headers, rate limits, then check the token</a:t>
-            </a:r>
-            <a:endParaRPr lang="en-US" sz="1200" dirty="0"/>
-          </a:p>
-        </p:txBody>
-      </p:sp>
-      <p:sp>
-        <p:nvSpPr>
-          <p:cNvPr id="11" name="Shape 9"/>
-          <p:cNvSpPr/>
-          <p:nvPr/>
-        </p:nvSpPr>
-        <p:spPr>
-          <a:xfrm>
-            <a:off x="4389120" y="3346704"/>
-            <a:ext cx="0" cy="128016"/>
-          </a:xfrm>
-          <a:prstGeom prst="line">
-            <a:avLst/>
-          </a:prstGeom>
-          <a:noFill/>
-          <a:ln w="19050">
-            <a:solidFill>
-              <a:srgbClr val="D4A937"/>
-            </a:solidFill>
-            <a:prstDash val="solid"/>
-            <a:tailEnd type="triangle"/>
-          </a:ln>
-        </p:spPr>
-      </p:sp>
-      <p:sp>
-        <p:nvSpPr>
-          <p:cNvPr id="12" name="Shape 10"/>
-          <p:cNvSpPr/>
-          <p:nvPr/>
-        </p:nvSpPr>
-        <p:spPr>
-          <a:xfrm>
-            <a:off x="640080" y="3474720"/>
-            <a:ext cx="7498080" cy="694944"/>
+              <a:t>See tonight's bookings, mark people seated or as no-shows, and check covers, occupancy and no-show rate on a dashboard.</a:t>
+            </a:r>
+            <a:endParaRPr lang="en-US" sz="1400" dirty="0"/>
+          </a:p>
+        </p:txBody>
+      </p:sp>
+      <p:sp>
+        <p:nvSpPr>
+          <p:cNvPr id="10" name="Shape 8"/>
+          <p:cNvSpPr/>
+          <p:nvPr/>
+        </p:nvSpPr>
+        <p:spPr>
+          <a:xfrm>
+            <a:off x="640080" y="4297680"/>
+            <a:ext cx="10881360" cy="1828800"/>
           </a:xfrm>
           <a:prstGeom prst="roundRect">
             <a:avLst>
-              <a:gd name="adj" fmla="val 11842"/>
-            </a:avLst>
-          </a:prstGeom>
-          <a:solidFill>
-            <a:srgbClr val="102B23"/>
-          </a:solidFill>
-          <a:ln w="12700">
-            <a:solidFill>
-              <a:srgbClr val="17392E"/>
-            </a:solidFill>
-            <a:prstDash val="solid"/>
-          </a:ln>
-        </p:spPr>
-      </p:sp>
-      <p:sp>
-        <p:nvSpPr>
-          <p:cNvPr id="13" name="Text 11"/>
-          <p:cNvSpPr/>
-          <p:nvPr/>
-        </p:nvSpPr>
-        <p:spPr>
-          <a:xfrm>
-            <a:off x="914400" y="3538728"/>
-            <a:ext cx="6949440" cy="292608"/>
-          </a:xfrm>
-          <a:prstGeom prst="rect">
-            <a:avLst/>
-          </a:prstGeom>
-          <a:noFill/>
-          <a:ln/>
-        </p:spPr>
-        <p:txBody>
-          <a:bodyPr wrap="square" lIns="0" tIns="0" rIns="0" bIns="0" rtlCol="0" anchor="ctr"/>
-          <a:lstStyle/>
-          <a:p>
-            <a:pPr indent="0" marL="0">
-              <a:buNone/>
-            </a:pPr>
-            <a:r>
-              <a:rPr lang="en-US" sz="1500" b="1" dirty="0">
-                <a:solidFill>
-                  <a:srgbClr val="F5F0E6"/>
-                </a:solidFill>
-                <a:latin typeface="Calibri" pitchFamily="34" charset="0"/>
-                <a:ea typeface="Calibri" pitchFamily="34" charset="-122"/>
-                <a:cs typeface="Calibri" pitchFamily="34" charset="-120"/>
-              </a:rPr>
-              <a:t>Services</a:t>
-            </a:r>
-            <a:endParaRPr lang="en-US" sz="1500" dirty="0"/>
-          </a:p>
-        </p:txBody>
-      </p:sp>
-      <p:sp>
-        <p:nvSpPr>
-          <p:cNvPr id="14" name="Text 12"/>
-          <p:cNvSpPr/>
-          <p:nvPr/>
-        </p:nvSpPr>
-        <p:spPr>
-          <a:xfrm>
-            <a:off x="914400" y="3840480"/>
-            <a:ext cx="6949440" cy="256032"/>
-          </a:xfrm>
-          <a:prstGeom prst="rect">
-            <a:avLst/>
-          </a:prstGeom>
-          <a:noFill/>
-          <a:ln/>
-        </p:spPr>
-        <p:txBody>
-          <a:bodyPr wrap="square" lIns="0" tIns="0" rIns="0" bIns="0" rtlCol="0" anchor="ctr"/>
-          <a:lstStyle/>
-          <a:p>
-            <a:pPr indent="0" marL="0">
-              <a:buNone/>
-            </a:pPr>
-            <a:r>
-              <a:rPr lang="en-US" sz="1200" dirty="0">
-                <a:solidFill>
-                  <a:srgbClr val="97B0A2"/>
-                </a:solidFill>
-                <a:latin typeface="Calibri" pitchFamily="34" charset="0"/>
-                <a:ea typeface="Calibri" pitchFamily="34" charset="-122"/>
-                <a:cs typeface="Calibri" pitchFamily="34" charset="-120"/>
-              </a:rPr>
-              <a:t>Where the actual logic lives</a:t>
-            </a:r>
-            <a:endParaRPr lang="en-US" sz="1200" dirty="0"/>
-          </a:p>
-        </p:txBody>
-      </p:sp>
-      <p:sp>
-        <p:nvSpPr>
-          <p:cNvPr id="15" name="Shape 13"/>
-          <p:cNvSpPr/>
-          <p:nvPr/>
-        </p:nvSpPr>
-        <p:spPr>
-          <a:xfrm>
-            <a:off x="4389120" y="4169664"/>
-            <a:ext cx="0" cy="128016"/>
-          </a:xfrm>
-          <a:prstGeom prst="line">
-            <a:avLst/>
-          </a:prstGeom>
-          <a:noFill/>
-          <a:ln w="19050">
-            <a:solidFill>
-              <a:srgbClr val="D4A937"/>
-            </a:solidFill>
-            <a:prstDash val="solid"/>
-            <a:tailEnd type="triangle"/>
-          </a:ln>
-        </p:spPr>
-      </p:sp>
-      <p:sp>
-        <p:nvSpPr>
-          <p:cNvPr id="16" name="Shape 14"/>
-          <p:cNvSpPr/>
-          <p:nvPr/>
-        </p:nvSpPr>
-        <p:spPr>
-          <a:xfrm>
-            <a:off x="640080" y="4297680"/>
-            <a:ext cx="7498080" cy="694944"/>
-          </a:xfrm>
-          <a:prstGeom prst="roundRect">
-            <a:avLst>
-              <a:gd name="adj" fmla="val 11842"/>
+              <a:gd name="adj" fmla="val 4500"/>
             </a:avLst>
           </a:prstGeom>
           <a:solidFill>
@@ -5063,303 +6324,69 @@
       </p:sp>
       <p:sp>
         <p:nvSpPr>
-          <p:cNvPr id="17" name="Text 15"/>
-          <p:cNvSpPr/>
-          <p:nvPr/>
-        </p:nvSpPr>
-        <p:spPr>
-          <a:xfrm>
-            <a:off x="914400" y="4361688"/>
-            <a:ext cx="6949440" cy="292608"/>
-          </a:xfrm>
-          <a:prstGeom prst="rect">
-            <a:avLst/>
-          </a:prstGeom>
-          <a:noFill/>
-          <a:ln/>
-        </p:spPr>
-        <p:txBody>
-          <a:bodyPr wrap="square" lIns="0" tIns="0" rIns="0" bIns="0" rtlCol="0" anchor="ctr"/>
-          <a:lstStyle/>
-          <a:p>
-            <a:pPr indent="0" marL="0">
-              <a:buNone/>
-            </a:pPr>
-            <a:r>
-              <a:rPr lang="en-US" sz="1500" b="1" dirty="0">
+          <p:cNvPr id="11" name="Text 9"/>
+          <p:cNvSpPr/>
+          <p:nvPr/>
+        </p:nvSpPr>
+        <p:spPr>
+          <a:xfrm>
+            <a:off x="960120" y="4526280"/>
+            <a:ext cx="10241280" cy="365760"/>
+          </a:xfrm>
+          <a:prstGeom prst="rect">
+            <a:avLst/>
+          </a:prstGeom>
+          <a:noFill/>
+          <a:ln/>
+        </p:spPr>
+        <p:txBody>
+          <a:bodyPr wrap="square" lIns="0" tIns="0" rIns="0" bIns="0" rtlCol="0" anchor="ctr"/>
+          <a:lstStyle/>
+          <a:p>
+            <a:pPr indent="0" marL="0">
+              <a:buNone/>
+            </a:pPr>
+            <a:r>
+              <a:rPr lang="en-US" sz="2000" b="1" dirty="0">
                 <a:solidFill>
                   <a:srgbClr val="F5D77A"/>
-                </a:solidFill>
-                <a:latin typeface="Calibri" pitchFamily="34" charset="0"/>
-                <a:ea typeface="Calibri" pitchFamily="34" charset="-122"/>
-                <a:cs typeface="Calibri" pitchFamily="34" charset="-120"/>
-              </a:rPr>
-              <a:t>availability.js</a:t>
-            </a:r>
-            <a:endParaRPr lang="en-US" sz="1500" dirty="0"/>
-          </a:p>
-        </p:txBody>
-      </p:sp>
-      <p:sp>
-        <p:nvSpPr>
-          <p:cNvPr id="18" name="Text 16"/>
-          <p:cNvSpPr/>
-          <p:nvPr/>
-        </p:nvSpPr>
-        <p:spPr>
-          <a:xfrm>
-            <a:off x="914400" y="4663440"/>
-            <a:ext cx="6949440" cy="256032"/>
-          </a:xfrm>
-          <a:prstGeom prst="rect">
-            <a:avLst/>
-          </a:prstGeom>
-          <a:noFill/>
-          <a:ln/>
-        </p:spPr>
-        <p:txBody>
-          <a:bodyPr wrap="square" lIns="0" tIns="0" rIns="0" bIns="0" rtlCol="0" anchor="ctr"/>
-          <a:lstStyle/>
-          <a:p>
-            <a:pPr indent="0" marL="0">
-              <a:buNone/>
-            </a:pPr>
-            <a:r>
-              <a:rPr lang="en-US" sz="1200" dirty="0">
-                <a:solidFill>
-                  <a:srgbClr val="97B0A2"/>
-                </a:solidFill>
-                <a:latin typeface="Calibri" pitchFamily="34" charset="0"/>
-                <a:ea typeface="Calibri" pitchFamily="34" charset="-122"/>
-                <a:cs typeface="Calibri" pitchFamily="34" charset="-120"/>
-              </a:rPr>
-              <a:t>The booking rules. No database, no Express — just functions.</a:t>
-            </a:r>
-            <a:endParaRPr lang="en-US" sz="1200" dirty="0"/>
-          </a:p>
-        </p:txBody>
-      </p:sp>
-      <p:sp>
-        <p:nvSpPr>
-          <p:cNvPr id="19" name="Shape 17"/>
-          <p:cNvSpPr/>
-          <p:nvPr/>
-        </p:nvSpPr>
-        <p:spPr>
-          <a:xfrm>
-            <a:off x="4389120" y="4992624"/>
-            <a:ext cx="0" cy="128016"/>
-          </a:xfrm>
-          <a:prstGeom prst="line">
-            <a:avLst/>
-          </a:prstGeom>
-          <a:noFill/>
-          <a:ln w="19050">
-            <a:solidFill>
-              <a:srgbClr val="D4A937"/>
-            </a:solidFill>
-            <a:prstDash val="solid"/>
-            <a:tailEnd type="triangle"/>
-          </a:ln>
-        </p:spPr>
-      </p:sp>
-      <p:sp>
-        <p:nvSpPr>
-          <p:cNvPr id="20" name="Shape 18"/>
-          <p:cNvSpPr/>
-          <p:nvPr/>
-        </p:nvSpPr>
-        <p:spPr>
-          <a:xfrm>
-            <a:off x="640080" y="5120640"/>
-            <a:ext cx="7498080" cy="694944"/>
-          </a:xfrm>
-          <a:prstGeom prst="roundRect">
-            <a:avLst>
-              <a:gd name="adj" fmla="val 11842"/>
-            </a:avLst>
-          </a:prstGeom>
-          <a:solidFill>
-            <a:srgbClr val="102B23"/>
-          </a:solidFill>
-          <a:ln w="12700">
-            <a:solidFill>
-              <a:srgbClr val="17392E"/>
-            </a:solidFill>
-            <a:prstDash val="solid"/>
-          </a:ln>
-        </p:spPr>
-      </p:sp>
-      <p:sp>
-        <p:nvSpPr>
-          <p:cNvPr id="21" name="Text 19"/>
-          <p:cNvSpPr/>
-          <p:nvPr/>
-        </p:nvSpPr>
-        <p:spPr>
-          <a:xfrm>
-            <a:off x="914400" y="5184648"/>
-            <a:ext cx="6949440" cy="292608"/>
-          </a:xfrm>
-          <a:prstGeom prst="rect">
-            <a:avLst/>
-          </a:prstGeom>
-          <a:noFill/>
-          <a:ln/>
-        </p:spPr>
-        <p:txBody>
-          <a:bodyPr wrap="square" lIns="0" tIns="0" rIns="0" bIns="0" rtlCol="0" anchor="ctr"/>
-          <a:lstStyle/>
-          <a:p>
-            <a:pPr indent="0" marL="0">
-              <a:buNone/>
-            </a:pPr>
-            <a:r>
-              <a:rPr lang="en-US" sz="1500" b="1" dirty="0">
-                <a:solidFill>
-                  <a:srgbClr val="F5F0E6"/>
-                </a:solidFill>
-                <a:latin typeface="Calibri" pitchFamily="34" charset="0"/>
-                <a:ea typeface="Calibri" pitchFamily="34" charset="-122"/>
-                <a:cs typeface="Calibri" pitchFamily="34" charset="-120"/>
-              </a:rPr>
-              <a:t>Prisma → SQLite</a:t>
-            </a:r>
-            <a:endParaRPr lang="en-US" sz="1500" dirty="0"/>
-          </a:p>
-        </p:txBody>
-      </p:sp>
-      <p:sp>
-        <p:nvSpPr>
-          <p:cNvPr id="22" name="Text 20"/>
-          <p:cNvSpPr/>
-          <p:nvPr/>
-        </p:nvSpPr>
-        <p:spPr>
-          <a:xfrm>
-            <a:off x="914400" y="5486400"/>
-            <a:ext cx="6949440" cy="256032"/>
-          </a:xfrm>
-          <a:prstGeom prst="rect">
-            <a:avLst/>
-          </a:prstGeom>
-          <a:noFill/>
-          <a:ln/>
-        </p:spPr>
-        <p:txBody>
-          <a:bodyPr wrap="square" lIns="0" tIns="0" rIns="0" bIns="0" rtlCol="0" anchor="ctr"/>
-          <a:lstStyle/>
-          <a:p>
-            <a:pPr indent="0" marL="0">
-              <a:buNone/>
-            </a:pPr>
-            <a:r>
-              <a:rPr lang="en-US" sz="1200" dirty="0">
-                <a:solidFill>
-                  <a:srgbClr val="97B0A2"/>
-                </a:solidFill>
-                <a:latin typeface="Calibri" pitchFamily="34" charset="0"/>
-                <a:ea typeface="Calibri" pitchFamily="34" charset="-122"/>
-                <a:cs typeface="Calibri" pitchFamily="34" charset="-120"/>
-              </a:rPr>
-              <a:t>Would be PostgreSQL if I deployed it</a:t>
-            </a:r>
-            <a:endParaRPr lang="en-US" sz="1200" dirty="0"/>
-          </a:p>
-        </p:txBody>
-      </p:sp>
-      <p:sp>
-        <p:nvSpPr>
-          <p:cNvPr id="23" name="Shape 21"/>
-          <p:cNvSpPr/>
-          <p:nvPr/>
-        </p:nvSpPr>
-        <p:spPr>
-          <a:xfrm>
-            <a:off x="8503920" y="1828800"/>
-            <a:ext cx="3017520" cy="4114800"/>
-          </a:xfrm>
-          <a:prstGeom prst="roundRect">
-            <a:avLst>
-              <a:gd name="adj" fmla="val 2727"/>
-            </a:avLst>
-          </a:prstGeom>
-          <a:solidFill>
-            <a:srgbClr val="102B23"/>
-          </a:solidFill>
-          <a:ln w="12700">
-            <a:solidFill>
-              <a:srgbClr val="17392E"/>
-            </a:solidFill>
-            <a:prstDash val="solid"/>
-          </a:ln>
-        </p:spPr>
-      </p:sp>
-      <p:sp>
-        <p:nvSpPr>
-          <p:cNvPr id="24" name="Text 22"/>
-          <p:cNvSpPr/>
-          <p:nvPr/>
-        </p:nvSpPr>
-        <p:spPr>
-          <a:xfrm>
-            <a:off x="8778240" y="2057400"/>
-            <a:ext cx="2468880" cy="320040"/>
-          </a:xfrm>
-          <a:prstGeom prst="rect">
-            <a:avLst/>
-          </a:prstGeom>
-          <a:noFill/>
-          <a:ln/>
-        </p:spPr>
-        <p:txBody>
-          <a:bodyPr wrap="square" lIns="0" tIns="0" rIns="0" bIns="0" rtlCol="0" anchor="ctr"/>
-          <a:lstStyle/>
-          <a:p>
-            <a:pPr indent="0" marL="0">
-              <a:buNone/>
-            </a:pPr>
-            <a:r>
-              <a:rPr lang="en-US" sz="1700" b="1" dirty="0">
-                <a:solidFill>
-                  <a:srgbClr val="D4A937"/>
                 </a:solidFill>
                 <a:latin typeface="Cambria" pitchFamily="34" charset="0"/>
                 <a:ea typeface="Cambria" pitchFamily="34" charset="-122"/>
                 <a:cs typeface="Cambria" pitchFamily="34" charset="-120"/>
               </a:rPr>
-              <a:t>Why in layers</a:t>
-            </a:r>
-            <a:endParaRPr lang="en-US" sz="1700" dirty="0"/>
-          </a:p>
-        </p:txBody>
-      </p:sp>
-      <p:sp>
-        <p:nvSpPr>
-          <p:cNvPr id="25" name="Text 23"/>
-          <p:cNvSpPr/>
-          <p:nvPr/>
-        </p:nvSpPr>
-        <p:spPr>
-          <a:xfrm>
-            <a:off x="8778240" y="2514600"/>
-            <a:ext cx="2468880" cy="3200400"/>
-          </a:xfrm>
-          <a:prstGeom prst="rect">
-            <a:avLst/>
-          </a:prstGeom>
-          <a:noFill/>
-          <a:ln/>
-        </p:spPr>
-        <p:txBody>
-          <a:bodyPr wrap="square" lIns="0" tIns="0" rIns="0" bIns="0" rtlCol="0" anchor="ctr"/>
-          <a:lstStyle/>
-          <a:p>
-            <a:pPr indent="0" marL="0">
-              <a:buNone/>
-            </a:pPr>
-            <a:r>
-              <a:rPr lang="en-US" sz="1250" dirty="0">
+              <a:t>The rule I spent the most time on</a:t>
+            </a:r>
+            <a:endParaRPr lang="en-US" sz="2000" dirty="0"/>
+          </a:p>
+        </p:txBody>
+      </p:sp>
+      <p:sp>
+        <p:nvSpPr>
+          <p:cNvPr id="12" name="Text 10"/>
+          <p:cNvSpPr/>
+          <p:nvPr/>
+        </p:nvSpPr>
+        <p:spPr>
+          <a:xfrm>
+            <a:off x="960120" y="4983480"/>
+            <a:ext cx="10241280" cy="914400"/>
+          </a:xfrm>
+          <a:prstGeom prst="rect">
+            <a:avLst/>
+          </a:prstGeom>
+          <a:noFill/>
+          <a:ln/>
+        </p:spPr>
+        <p:txBody>
+          <a:bodyPr wrap="square" lIns="0" tIns="0" rIns="0" bIns="0" rtlCol="0" anchor="ctr"/>
+          <a:lstStyle/>
+          <a:p>
+            <a:pPr indent="0" marL="0">
+              <a:buNone/>
+            </a:pPr>
+            <a:r>
+              <a:rPr lang="en-US" sz="1400" dirty="0">
                 <a:solidFill>
                   <a:srgbClr val="F5F0E6"/>
                 </a:solidFill>
@@ -5367,32 +6394,9 @@
                 <a:ea typeface="Calibri" pitchFamily="34" charset="-122"/>
                 <a:cs typeface="Calibri" pitchFamily="34" charset="-120"/>
               </a:rPr>
-              <a:t>I kept the routes away from the database and the logic away from requests and responses.</a:t>
-            </a:r>
-            <a:endParaRPr lang="en-US" sz="1250" dirty="0"/>
-          </a:p>
-          <a:p>
-            <a:pPr indent="0" marL="0">
-              <a:buNone/>
-            </a:pPr>
-            <a:endParaRPr lang="en-US" sz="1250" dirty="0"/>
-          </a:p>
-          <a:p>
-            <a:pPr indent="0" marL="0">
-              <a:buNone/>
-            </a:pPr>
-            <a:r>
-              <a:rPr lang="en-US" sz="1250" dirty="0">
-                <a:solidFill>
-                  <a:srgbClr val="F5F0E6"/>
-                </a:solidFill>
-                <a:latin typeface="Calibri" pitchFamily="34" charset="0"/>
-                <a:ea typeface="Calibri" pitchFamily="34" charset="-122"/>
-                <a:cs typeface="Calibri" pitchFamily="34" charset="-120"/>
-              </a:rPr>
-              <a:t>The reason is the fourth box: because the booking rules do not touch anything, I can test them directly without starting a server.</a:t>
-            </a:r>
-            <a:endParaRPr lang="en-US" sz="1250" dirty="0"/>
+              <a:t>A manager can only touch their own restaurant. My first version just checked "are you a manager?" — which meant any manager could read every other restaurant's bookings. Checking the role is not the same as checking ownership, and that took me a while to see.</a:t>
+            </a:r>
+            <a:endParaRPr lang="en-US" sz="1400" dirty="0"/>
           </a:p>
         </p:txBody>
       </p:sp>
@@ -5461,7 +6465,7 @@
                 <a:ea typeface="Cambria" pitchFamily="34" charset="-122"/>
                 <a:cs typeface="Cambria" pitchFamily="34" charset="-120"/>
               </a:rPr>
-              <a:t>The bit that was actually difficult</a:t>
+              <a:t>How it is put together</a:t>
             </a:r>
             <a:endParaRPr lang="en-US" sz="3600" dirty="0"/>
           </a:p>
@@ -5500,7 +6504,7 @@
                 <a:ea typeface="Calibri" pitchFamily="34" charset="-122"/>
                 <a:cs typeface="Calibri" pitchFamily="34" charset="-120"/>
               </a:rPr>
-              <a:t>Deciding whether a table is free</a:t>
+              <a:t>React talks to an Express API, which talks to the database through Prisma</a:t>
             </a:r>
             <a:endParaRPr lang="en-US" sz="1400" dirty="0"/>
           </a:p>
@@ -5514,12 +6518,399 @@
         </p:nvSpPr>
         <p:spPr>
           <a:xfrm>
-            <a:off x="640080" y="1783080"/>
-            <a:ext cx="10881360" cy="1097280"/>
+            <a:off x="640080" y="1828800"/>
+            <a:ext cx="7498080" cy="694944"/>
           </a:xfrm>
           <a:prstGeom prst="roundRect">
             <a:avLst>
-              <a:gd name="adj" fmla="val 7500"/>
+              <a:gd name="adj" fmla="val 11842"/>
+            </a:avLst>
+          </a:prstGeom>
+          <a:solidFill>
+            <a:srgbClr val="102B23"/>
+          </a:solidFill>
+          <a:ln w="12700">
+            <a:solidFill>
+              <a:srgbClr val="17392E"/>
+            </a:solidFill>
+            <a:prstDash val="solid"/>
+          </a:ln>
+        </p:spPr>
+      </p:sp>
+      <p:sp>
+        <p:nvSpPr>
+          <p:cNvPr id="5" name="Text 3"/>
+          <p:cNvSpPr/>
+          <p:nvPr/>
+        </p:nvSpPr>
+        <p:spPr>
+          <a:xfrm>
+            <a:off x="914400" y="1892808"/>
+            <a:ext cx="6949440" cy="292608"/>
+          </a:xfrm>
+          <a:prstGeom prst="rect">
+            <a:avLst/>
+          </a:prstGeom>
+          <a:noFill/>
+          <a:ln/>
+        </p:spPr>
+        <p:txBody>
+          <a:bodyPr wrap="square" lIns="0" tIns="0" rIns="0" bIns="0" rtlCol="0" anchor="ctr"/>
+          <a:lstStyle/>
+          <a:p>
+            <a:pPr indent="0" marL="0">
+              <a:buNone/>
+            </a:pPr>
+            <a:r>
+              <a:rPr lang="en-US" sz="1500" b="1" dirty="0">
+                <a:solidFill>
+                  <a:srgbClr val="F5F0E6"/>
+                </a:solidFill>
+                <a:latin typeface="Calibri" pitchFamily="34" charset="0"/>
+                <a:ea typeface="Calibri" pitchFamily="34" charset="-122"/>
+                <a:cs typeface="Calibri" pitchFamily="34" charset="-120"/>
+              </a:rPr>
+              <a:t>React front end</a:t>
+            </a:r>
+            <a:endParaRPr lang="en-US" sz="1500" dirty="0"/>
+          </a:p>
+        </p:txBody>
+      </p:sp>
+      <p:sp>
+        <p:nvSpPr>
+          <p:cNvPr id="6" name="Text 4"/>
+          <p:cNvSpPr/>
+          <p:nvPr/>
+        </p:nvSpPr>
+        <p:spPr>
+          <a:xfrm>
+            <a:off x="914400" y="2194560"/>
+            <a:ext cx="6949440" cy="256032"/>
+          </a:xfrm>
+          <a:prstGeom prst="rect">
+            <a:avLst/>
+          </a:prstGeom>
+          <a:noFill/>
+          <a:ln/>
+        </p:spPr>
+        <p:txBody>
+          <a:bodyPr wrap="square" lIns="0" tIns="0" rIns="0" bIns="0" rtlCol="0" anchor="ctr"/>
+          <a:lstStyle/>
+          <a:p>
+            <a:pPr indent="0" marL="0">
+              <a:buNone/>
+            </a:pPr>
+            <a:r>
+              <a:rPr lang="en-US" sz="1200" dirty="0">
+                <a:solidFill>
+                  <a:srgbClr val="97B0A2"/>
+                </a:solidFill>
+                <a:latin typeface="Calibri" pitchFamily="34" charset="0"/>
+                <a:ea typeface="Calibri" pitchFamily="34" charset="-122"/>
+                <a:cs typeface="Calibri" pitchFamily="34" charset="-120"/>
+              </a:rPr>
+              <a:t>Pages, components, Context for login state</a:t>
+            </a:r>
+            <a:endParaRPr lang="en-US" sz="1200" dirty="0"/>
+          </a:p>
+        </p:txBody>
+      </p:sp>
+      <p:sp>
+        <p:nvSpPr>
+          <p:cNvPr id="7" name="Shape 5"/>
+          <p:cNvSpPr/>
+          <p:nvPr/>
+        </p:nvSpPr>
+        <p:spPr>
+          <a:xfrm>
+            <a:off x="4389120" y="2523744"/>
+            <a:ext cx="0" cy="128016"/>
+          </a:xfrm>
+          <a:prstGeom prst="line">
+            <a:avLst/>
+          </a:prstGeom>
+          <a:noFill/>
+          <a:ln w="19050">
+            <a:solidFill>
+              <a:srgbClr val="D4A937"/>
+            </a:solidFill>
+            <a:prstDash val="solid"/>
+            <a:tailEnd type="triangle"/>
+          </a:ln>
+        </p:spPr>
+      </p:sp>
+      <p:sp>
+        <p:nvSpPr>
+          <p:cNvPr id="8" name="Shape 6"/>
+          <p:cNvSpPr/>
+          <p:nvPr/>
+        </p:nvSpPr>
+        <p:spPr>
+          <a:xfrm>
+            <a:off x="640080" y="2651760"/>
+            <a:ext cx="7498080" cy="694944"/>
+          </a:xfrm>
+          <a:prstGeom prst="roundRect">
+            <a:avLst>
+              <a:gd name="adj" fmla="val 11842"/>
+            </a:avLst>
+          </a:prstGeom>
+          <a:solidFill>
+            <a:srgbClr val="102B23"/>
+          </a:solidFill>
+          <a:ln w="12700">
+            <a:solidFill>
+              <a:srgbClr val="17392E"/>
+            </a:solidFill>
+            <a:prstDash val="solid"/>
+          </a:ln>
+        </p:spPr>
+      </p:sp>
+      <p:sp>
+        <p:nvSpPr>
+          <p:cNvPr id="9" name="Text 7"/>
+          <p:cNvSpPr/>
+          <p:nvPr/>
+        </p:nvSpPr>
+        <p:spPr>
+          <a:xfrm>
+            <a:off x="914400" y="2715768"/>
+            <a:ext cx="6949440" cy="292608"/>
+          </a:xfrm>
+          <a:prstGeom prst="rect">
+            <a:avLst/>
+          </a:prstGeom>
+          <a:noFill/>
+          <a:ln/>
+        </p:spPr>
+        <p:txBody>
+          <a:bodyPr wrap="square" lIns="0" tIns="0" rIns="0" bIns="0" rtlCol="0" anchor="ctr"/>
+          <a:lstStyle/>
+          <a:p>
+            <a:pPr indent="0" marL="0">
+              <a:buNone/>
+            </a:pPr>
+            <a:r>
+              <a:rPr lang="en-US" sz="1500" b="1" dirty="0">
+                <a:solidFill>
+                  <a:srgbClr val="F5F0E6"/>
+                </a:solidFill>
+                <a:latin typeface="Calibri" pitchFamily="34" charset="0"/>
+                <a:ea typeface="Calibri" pitchFamily="34" charset="-122"/>
+                <a:cs typeface="Calibri" pitchFamily="34" charset="-120"/>
+              </a:rPr>
+              <a:t>Express — middleware</a:t>
+            </a:r>
+            <a:endParaRPr lang="en-US" sz="1500" dirty="0"/>
+          </a:p>
+        </p:txBody>
+      </p:sp>
+      <p:sp>
+        <p:nvSpPr>
+          <p:cNvPr id="10" name="Text 8"/>
+          <p:cNvSpPr/>
+          <p:nvPr/>
+        </p:nvSpPr>
+        <p:spPr>
+          <a:xfrm>
+            <a:off x="914400" y="3017520"/>
+            <a:ext cx="6949440" cy="256032"/>
+          </a:xfrm>
+          <a:prstGeom prst="rect">
+            <a:avLst/>
+          </a:prstGeom>
+          <a:noFill/>
+          <a:ln/>
+        </p:spPr>
+        <p:txBody>
+          <a:bodyPr wrap="square" lIns="0" tIns="0" rIns="0" bIns="0" rtlCol="0" anchor="ctr"/>
+          <a:lstStyle/>
+          <a:p>
+            <a:pPr indent="0" marL="0">
+              <a:buNone/>
+            </a:pPr>
+            <a:r>
+              <a:rPr lang="en-US" sz="1200" dirty="0">
+                <a:solidFill>
+                  <a:srgbClr val="97B0A2"/>
+                </a:solidFill>
+                <a:latin typeface="Calibri" pitchFamily="34" charset="0"/>
+                <a:ea typeface="Calibri" pitchFamily="34" charset="-122"/>
+                <a:cs typeface="Calibri" pitchFamily="34" charset="-120"/>
+              </a:rPr>
+              <a:t>Request id, security headers, rate limits, then check the token</a:t>
+            </a:r>
+            <a:endParaRPr lang="en-US" sz="1200" dirty="0"/>
+          </a:p>
+        </p:txBody>
+      </p:sp>
+      <p:sp>
+        <p:nvSpPr>
+          <p:cNvPr id="11" name="Shape 9"/>
+          <p:cNvSpPr/>
+          <p:nvPr/>
+        </p:nvSpPr>
+        <p:spPr>
+          <a:xfrm>
+            <a:off x="4389120" y="3346704"/>
+            <a:ext cx="0" cy="128016"/>
+          </a:xfrm>
+          <a:prstGeom prst="line">
+            <a:avLst/>
+          </a:prstGeom>
+          <a:noFill/>
+          <a:ln w="19050">
+            <a:solidFill>
+              <a:srgbClr val="D4A937"/>
+            </a:solidFill>
+            <a:prstDash val="solid"/>
+            <a:tailEnd type="triangle"/>
+          </a:ln>
+        </p:spPr>
+      </p:sp>
+      <p:sp>
+        <p:nvSpPr>
+          <p:cNvPr id="12" name="Shape 10"/>
+          <p:cNvSpPr/>
+          <p:nvPr/>
+        </p:nvSpPr>
+        <p:spPr>
+          <a:xfrm>
+            <a:off x="640080" y="3474720"/>
+            <a:ext cx="7498080" cy="694944"/>
+          </a:xfrm>
+          <a:prstGeom prst="roundRect">
+            <a:avLst>
+              <a:gd name="adj" fmla="val 11842"/>
+            </a:avLst>
+          </a:prstGeom>
+          <a:solidFill>
+            <a:srgbClr val="102B23"/>
+          </a:solidFill>
+          <a:ln w="12700">
+            <a:solidFill>
+              <a:srgbClr val="17392E"/>
+            </a:solidFill>
+            <a:prstDash val="solid"/>
+          </a:ln>
+        </p:spPr>
+      </p:sp>
+      <p:sp>
+        <p:nvSpPr>
+          <p:cNvPr id="13" name="Text 11"/>
+          <p:cNvSpPr/>
+          <p:nvPr/>
+        </p:nvSpPr>
+        <p:spPr>
+          <a:xfrm>
+            <a:off x="914400" y="3538728"/>
+            <a:ext cx="6949440" cy="292608"/>
+          </a:xfrm>
+          <a:prstGeom prst="rect">
+            <a:avLst/>
+          </a:prstGeom>
+          <a:noFill/>
+          <a:ln/>
+        </p:spPr>
+        <p:txBody>
+          <a:bodyPr wrap="square" lIns="0" tIns="0" rIns="0" bIns="0" rtlCol="0" anchor="ctr"/>
+          <a:lstStyle/>
+          <a:p>
+            <a:pPr indent="0" marL="0">
+              <a:buNone/>
+            </a:pPr>
+            <a:r>
+              <a:rPr lang="en-US" sz="1500" b="1" dirty="0">
+                <a:solidFill>
+                  <a:srgbClr val="F5F0E6"/>
+                </a:solidFill>
+                <a:latin typeface="Calibri" pitchFamily="34" charset="0"/>
+                <a:ea typeface="Calibri" pitchFamily="34" charset="-122"/>
+                <a:cs typeface="Calibri" pitchFamily="34" charset="-120"/>
+              </a:rPr>
+              <a:t>Services</a:t>
+            </a:r>
+            <a:endParaRPr lang="en-US" sz="1500" dirty="0"/>
+          </a:p>
+        </p:txBody>
+      </p:sp>
+      <p:sp>
+        <p:nvSpPr>
+          <p:cNvPr id="14" name="Text 12"/>
+          <p:cNvSpPr/>
+          <p:nvPr/>
+        </p:nvSpPr>
+        <p:spPr>
+          <a:xfrm>
+            <a:off x="914400" y="3840480"/>
+            <a:ext cx="6949440" cy="256032"/>
+          </a:xfrm>
+          <a:prstGeom prst="rect">
+            <a:avLst/>
+          </a:prstGeom>
+          <a:noFill/>
+          <a:ln/>
+        </p:spPr>
+        <p:txBody>
+          <a:bodyPr wrap="square" lIns="0" tIns="0" rIns="0" bIns="0" rtlCol="0" anchor="ctr"/>
+          <a:lstStyle/>
+          <a:p>
+            <a:pPr indent="0" marL="0">
+              <a:buNone/>
+            </a:pPr>
+            <a:r>
+              <a:rPr lang="en-US" sz="1200" dirty="0">
+                <a:solidFill>
+                  <a:srgbClr val="97B0A2"/>
+                </a:solidFill>
+                <a:latin typeface="Calibri" pitchFamily="34" charset="0"/>
+                <a:ea typeface="Calibri" pitchFamily="34" charset="-122"/>
+                <a:cs typeface="Calibri" pitchFamily="34" charset="-120"/>
+              </a:rPr>
+              <a:t>Where the actual logic lives</a:t>
+            </a:r>
+            <a:endParaRPr lang="en-US" sz="1200" dirty="0"/>
+          </a:p>
+        </p:txBody>
+      </p:sp>
+      <p:sp>
+        <p:nvSpPr>
+          <p:cNvPr id="15" name="Shape 13"/>
+          <p:cNvSpPr/>
+          <p:nvPr/>
+        </p:nvSpPr>
+        <p:spPr>
+          <a:xfrm>
+            <a:off x="4389120" y="4169664"/>
+            <a:ext cx="0" cy="128016"/>
+          </a:xfrm>
+          <a:prstGeom prst="line">
+            <a:avLst/>
+          </a:prstGeom>
+          <a:noFill/>
+          <a:ln w="19050">
+            <a:solidFill>
+              <a:srgbClr val="D4A937"/>
+            </a:solidFill>
+            <a:prstDash val="solid"/>
+            <a:tailEnd type="triangle"/>
+          </a:ln>
+        </p:spPr>
+      </p:sp>
+      <p:sp>
+        <p:nvSpPr>
+          <p:cNvPr id="16" name="Shape 14"/>
+          <p:cNvSpPr/>
+          <p:nvPr/>
+        </p:nvSpPr>
+        <p:spPr>
+          <a:xfrm>
+            <a:off x="640080" y="4297680"/>
+            <a:ext cx="7498080" cy="694944"/>
+          </a:xfrm>
+          <a:prstGeom prst="roundRect">
+            <a:avLst>
+              <a:gd name="adj" fmla="val 11842"/>
             </a:avLst>
           </a:prstGeom>
           <a:solidFill>
@@ -5535,69 +6926,69 @@
       </p:sp>
       <p:sp>
         <p:nvSpPr>
-          <p:cNvPr id="5" name="Text 3"/>
-          <p:cNvSpPr/>
-          <p:nvPr/>
-        </p:nvSpPr>
-        <p:spPr>
-          <a:xfrm>
-            <a:off x="960120" y="2057400"/>
-            <a:ext cx="10241280" cy="502920"/>
-          </a:xfrm>
-          <a:prstGeom prst="rect">
-            <a:avLst/>
-          </a:prstGeom>
-          <a:noFill/>
-          <a:ln/>
-        </p:spPr>
-        <p:txBody>
-          <a:bodyPr wrap="square" lIns="0" tIns="0" rIns="0" bIns="0" rtlCol="0" anchor="ctr"/>
-          <a:lstStyle/>
-          <a:p>
-            <a:pPr indent="0" marL="0">
-              <a:buNone/>
-            </a:pPr>
-            <a:r>
-              <a:rPr lang="en-US" sz="2100" b="1" dirty="0">
+          <p:cNvPr id="17" name="Text 15"/>
+          <p:cNvSpPr/>
+          <p:nvPr/>
+        </p:nvSpPr>
+        <p:spPr>
+          <a:xfrm>
+            <a:off x="914400" y="4361688"/>
+            <a:ext cx="6949440" cy="292608"/>
+          </a:xfrm>
+          <a:prstGeom prst="rect">
+            <a:avLst/>
+          </a:prstGeom>
+          <a:noFill/>
+          <a:ln/>
+        </p:spPr>
+        <p:txBody>
+          <a:bodyPr wrap="square" lIns="0" tIns="0" rIns="0" bIns="0" rtlCol="0" anchor="ctr"/>
+          <a:lstStyle/>
+          <a:p>
+            <a:pPr indent="0" marL="0">
+              <a:buNone/>
+            </a:pPr>
+            <a:r>
+              <a:rPr lang="en-US" sz="1500" b="1" dirty="0">
                 <a:solidFill>
                   <a:srgbClr val="F5D77A"/>
                 </a:solidFill>
-                <a:latin typeface="Courier New" pitchFamily="34" charset="0"/>
-                <a:ea typeface="Courier New" pitchFamily="34" charset="-122"/>
-                <a:cs typeface="Courier New" pitchFamily="34" charset="-120"/>
-              </a:rPr>
-              <a:t>a.startsAt &lt; b.endsAt  &amp;&amp;  a.endsAt &gt; b.startsAt</a:t>
-            </a:r>
-            <a:endParaRPr lang="en-US" sz="2100" dirty="0"/>
-          </a:p>
-        </p:txBody>
-      </p:sp>
-      <p:sp>
-        <p:nvSpPr>
-          <p:cNvPr id="6" name="Text 4"/>
-          <p:cNvSpPr/>
-          <p:nvPr/>
-        </p:nvSpPr>
-        <p:spPr>
-          <a:xfrm>
-            <a:off x="640080" y="3063240"/>
-            <a:ext cx="10881360" cy="320040"/>
-          </a:xfrm>
-          <a:prstGeom prst="rect">
-            <a:avLst/>
-          </a:prstGeom>
-          <a:noFill/>
-          <a:ln/>
-        </p:spPr>
-        <p:txBody>
-          <a:bodyPr wrap="square" lIns="0" tIns="0" rIns="0" bIns="0" rtlCol="0" anchor="ctr"/>
-          <a:lstStyle/>
-          <a:p>
-            <a:pPr indent="0" marL="0">
-              <a:buNone/>
-            </a:pPr>
-            <a:r>
-              <a:rPr lang="en-US" sz="1400" i="1" dirty="0">
+                <a:latin typeface="Calibri" pitchFamily="34" charset="0"/>
+                <a:ea typeface="Calibri" pitchFamily="34" charset="-122"/>
+                <a:cs typeface="Calibri" pitchFamily="34" charset="-120"/>
+              </a:rPr>
+              <a:t>availability.js</a:t>
+            </a:r>
+            <a:endParaRPr lang="en-US" sz="1500" dirty="0"/>
+          </a:p>
+        </p:txBody>
+      </p:sp>
+      <p:sp>
+        <p:nvSpPr>
+          <p:cNvPr id="18" name="Text 16"/>
+          <p:cNvSpPr/>
+          <p:nvPr/>
+        </p:nvSpPr>
+        <p:spPr>
+          <a:xfrm>
+            <a:off x="914400" y="4663440"/>
+            <a:ext cx="6949440" cy="256032"/>
+          </a:xfrm>
+          <a:prstGeom prst="rect">
+            <a:avLst/>
+          </a:prstGeom>
+          <a:noFill/>
+          <a:ln/>
+        </p:spPr>
+        <p:txBody>
+          <a:bodyPr wrap="square" lIns="0" tIns="0" rIns="0" bIns="0" rtlCol="0" anchor="ctr"/>
+          <a:lstStyle/>
+          <a:p>
+            <a:pPr indent="0" marL="0">
+              <a:buNone/>
+            </a:pPr>
+            <a:r>
+              <a:rPr lang="en-US" sz="1200" dirty="0">
                 <a:solidFill>
                   <a:srgbClr val="97B0A2"/>
                 </a:solidFill>
@@ -5605,81 +6996,73 @@
                 <a:ea typeface="Calibri" pitchFamily="34" charset="-122"/>
                 <a:cs typeface="Calibri" pitchFamily="34" charset="-120"/>
               </a:rPr>
-              <a:t>One line, but I got each part of it wrong at least once:</a:t>
-            </a:r>
-            <a:endParaRPr lang="en-US" sz="1400" dirty="0"/>
-          </a:p>
-        </p:txBody>
-      </p:sp>
-      <p:sp>
-        <p:nvSpPr>
-          <p:cNvPr id="7" name="Shape 5"/>
-          <p:cNvSpPr/>
-          <p:nvPr/>
-        </p:nvSpPr>
-        <p:spPr>
-          <a:xfrm>
-            <a:off x="640080" y="3520440"/>
-            <a:ext cx="420624" cy="420624"/>
-          </a:xfrm>
-          <a:prstGeom prst="ellipse">
-            <a:avLst/>
+              <a:t>The booking rules. No database, no Express — just functions.</a:t>
+            </a:r>
+            <a:endParaRPr lang="en-US" sz="1200" dirty="0"/>
+          </a:p>
+        </p:txBody>
+      </p:sp>
+      <p:sp>
+        <p:nvSpPr>
+          <p:cNvPr id="19" name="Shape 17"/>
+          <p:cNvSpPr/>
+          <p:nvPr/>
+        </p:nvSpPr>
+        <p:spPr>
+          <a:xfrm>
+            <a:off x="4389120" y="4992624"/>
+            <a:ext cx="0" cy="128016"/>
+          </a:xfrm>
+          <a:prstGeom prst="line">
+            <a:avLst/>
+          </a:prstGeom>
+          <a:noFill/>
+          <a:ln w="19050">
+            <a:solidFill>
+              <a:srgbClr val="D4A937"/>
+            </a:solidFill>
+            <a:prstDash val="solid"/>
+            <a:tailEnd type="triangle"/>
+          </a:ln>
+        </p:spPr>
+      </p:sp>
+      <p:sp>
+        <p:nvSpPr>
+          <p:cNvPr id="20" name="Shape 18"/>
+          <p:cNvSpPr/>
+          <p:nvPr/>
+        </p:nvSpPr>
+        <p:spPr>
+          <a:xfrm>
+            <a:off x="640080" y="5120640"/>
+            <a:ext cx="7498080" cy="694944"/>
+          </a:xfrm>
+          <a:prstGeom prst="roundRect">
+            <a:avLst>
+              <a:gd name="adj" fmla="val 11842"/>
+            </a:avLst>
           </a:prstGeom>
           <a:solidFill>
-            <a:srgbClr val="D4A937"/>
+            <a:srgbClr val="102B23"/>
           </a:solidFill>
-          <a:ln/>
-        </p:spPr>
-      </p:sp>
-      <p:sp>
-        <p:nvSpPr>
-          <p:cNvPr id="8" name="Text 6"/>
-          <p:cNvSpPr/>
-          <p:nvPr/>
-        </p:nvSpPr>
-        <p:spPr>
-          <a:xfrm>
-            <a:off x="640080" y="3520440"/>
-            <a:ext cx="420624" cy="420624"/>
-          </a:xfrm>
-          <a:prstGeom prst="rect">
-            <a:avLst/>
-          </a:prstGeom>
-          <a:noFill/>
-          <a:ln/>
-        </p:spPr>
-        <p:txBody>
-          <a:bodyPr wrap="square" lIns="0" tIns="0" rIns="0" bIns="0" rtlCol="0" anchor="ctr"/>
-          <a:lstStyle/>
-          <a:p>
-            <a:pPr algn="ctr" indent="0" marL="0">
-              <a:buNone/>
-            </a:pPr>
-            <a:r>
-              <a:rPr lang="en-US" sz="1400" b="1" dirty="0">
-                <a:solidFill>
-                  <a:srgbClr val="071310"/>
-                </a:solidFill>
-                <a:latin typeface="Calibri" pitchFamily="34" charset="0"/>
-                <a:ea typeface="Calibri" pitchFamily="34" charset="-122"/>
-                <a:cs typeface="Calibri" pitchFamily="34" charset="-120"/>
-              </a:rPr>
-              <a:t>1</a:t>
-            </a:r>
-            <a:endParaRPr lang="en-US" sz="1400" dirty="0"/>
-          </a:p>
-        </p:txBody>
-      </p:sp>
-      <p:sp>
-        <p:nvSpPr>
-          <p:cNvPr id="9" name="Text 7"/>
-          <p:cNvSpPr/>
-          <p:nvPr/>
-        </p:nvSpPr>
-        <p:spPr>
-          <a:xfrm>
-            <a:off x="1188720" y="3483864"/>
-            <a:ext cx="10241280" cy="310896"/>
+          <a:ln w="12700">
+            <a:solidFill>
+              <a:srgbClr val="17392E"/>
+            </a:solidFill>
+            <a:prstDash val="solid"/>
+          </a:ln>
+        </p:spPr>
+      </p:sp>
+      <p:sp>
+        <p:nvSpPr>
+          <p:cNvPr id="21" name="Text 19"/>
+          <p:cNvSpPr/>
+          <p:nvPr/>
+        </p:nvSpPr>
+        <p:spPr>
+          <a:xfrm>
+            <a:off x="914400" y="5184648"/>
+            <a:ext cx="6949440" cy="292608"/>
           </a:xfrm>
           <a:prstGeom prst="rect">
             <a:avLst/>
@@ -5703,7 +7086,7 @@
                 <a:ea typeface="Calibri" pitchFamily="34" charset="-122"/>
                 <a:cs typeface="Calibri" pitchFamily="34" charset="-120"/>
               </a:rPr>
-              <a:t>Should 20:00 to 20:00 count as a clash?</a:t>
+              <a:t>Prisma → SQLite</a:t>
             </a:r>
             <a:endParaRPr lang="en-US" sz="1500" dirty="0"/>
           </a:p>
@@ -5711,14 +7094,119 @@
       </p:sp>
       <p:sp>
         <p:nvSpPr>
-          <p:cNvPr id="10" name="Text 8"/>
-          <p:cNvSpPr/>
-          <p:nvPr/>
-        </p:nvSpPr>
-        <p:spPr>
-          <a:xfrm>
-            <a:off x="1188720" y="3794760"/>
-            <a:ext cx="10058400" cy="548640"/>
+          <p:cNvPr id="22" name="Text 20"/>
+          <p:cNvSpPr/>
+          <p:nvPr/>
+        </p:nvSpPr>
+        <p:spPr>
+          <a:xfrm>
+            <a:off x="914400" y="5486400"/>
+            <a:ext cx="6949440" cy="256032"/>
+          </a:xfrm>
+          <a:prstGeom prst="rect">
+            <a:avLst/>
+          </a:prstGeom>
+          <a:noFill/>
+          <a:ln/>
+        </p:spPr>
+        <p:txBody>
+          <a:bodyPr wrap="square" lIns="0" tIns="0" rIns="0" bIns="0" rtlCol="0" anchor="ctr"/>
+          <a:lstStyle/>
+          <a:p>
+            <a:pPr indent="0" marL="0">
+              <a:buNone/>
+            </a:pPr>
+            <a:r>
+              <a:rPr lang="en-US" sz="1200" dirty="0">
+                <a:solidFill>
+                  <a:srgbClr val="97B0A2"/>
+                </a:solidFill>
+                <a:latin typeface="Calibri" pitchFamily="34" charset="0"/>
+                <a:ea typeface="Calibri" pitchFamily="34" charset="-122"/>
+                <a:cs typeface="Calibri" pitchFamily="34" charset="-120"/>
+              </a:rPr>
+              <a:t>Would be PostgreSQL if I deployed it</a:t>
+            </a:r>
+            <a:endParaRPr lang="en-US" sz="1200" dirty="0"/>
+          </a:p>
+        </p:txBody>
+      </p:sp>
+      <p:sp>
+        <p:nvSpPr>
+          <p:cNvPr id="23" name="Shape 21"/>
+          <p:cNvSpPr/>
+          <p:nvPr/>
+        </p:nvSpPr>
+        <p:spPr>
+          <a:xfrm>
+            <a:off x="8503920" y="1828800"/>
+            <a:ext cx="3017520" cy="4114800"/>
+          </a:xfrm>
+          <a:prstGeom prst="roundRect">
+            <a:avLst>
+              <a:gd name="adj" fmla="val 2727"/>
+            </a:avLst>
+          </a:prstGeom>
+          <a:solidFill>
+            <a:srgbClr val="102B23"/>
+          </a:solidFill>
+          <a:ln w="12700">
+            <a:solidFill>
+              <a:srgbClr val="17392E"/>
+            </a:solidFill>
+            <a:prstDash val="solid"/>
+          </a:ln>
+        </p:spPr>
+      </p:sp>
+      <p:sp>
+        <p:nvSpPr>
+          <p:cNvPr id="24" name="Text 22"/>
+          <p:cNvSpPr/>
+          <p:nvPr/>
+        </p:nvSpPr>
+        <p:spPr>
+          <a:xfrm>
+            <a:off x="8778240" y="2057400"/>
+            <a:ext cx="2468880" cy="320040"/>
+          </a:xfrm>
+          <a:prstGeom prst="rect">
+            <a:avLst/>
+          </a:prstGeom>
+          <a:noFill/>
+          <a:ln/>
+        </p:spPr>
+        <p:txBody>
+          <a:bodyPr wrap="square" lIns="0" tIns="0" rIns="0" bIns="0" rtlCol="0" anchor="ctr"/>
+          <a:lstStyle/>
+          <a:p>
+            <a:pPr indent="0" marL="0">
+              <a:buNone/>
+            </a:pPr>
+            <a:r>
+              <a:rPr lang="en-US" sz="1700" b="1" dirty="0">
+                <a:solidFill>
+                  <a:srgbClr val="D4A937"/>
+                </a:solidFill>
+                <a:latin typeface="Cambria" pitchFamily="34" charset="0"/>
+                <a:ea typeface="Cambria" pitchFamily="34" charset="-122"/>
+                <a:cs typeface="Cambria" pitchFamily="34" charset="-120"/>
+              </a:rPr>
+              <a:t>Why in layers</a:t>
+            </a:r>
+            <a:endParaRPr lang="en-US" sz="1700" dirty="0"/>
+          </a:p>
+        </p:txBody>
+      </p:sp>
+      <p:sp>
+        <p:nvSpPr>
+          <p:cNvPr id="25" name="Text 23"/>
+          <p:cNvSpPr/>
+          <p:nvPr/>
+        </p:nvSpPr>
+        <p:spPr>
+          <a:xfrm>
+            <a:off x="8778240" y="2514600"/>
+            <a:ext cx="2468880" cy="3200400"/>
           </a:xfrm>
           <a:prstGeom prst="rect">
             <a:avLst/>
@@ -5736,103 +7224,28 @@
             <a:r>
               <a:rPr lang="en-US" sz="1250" dirty="0">
                 <a:solidFill>
-                  <a:srgbClr val="97B0A2"/>
-                </a:solidFill>
-                <a:latin typeface="Calibri" pitchFamily="34" charset="0"/>
-                <a:ea typeface="Calibri" pitchFamily="34" charset="-122"/>
-                <a:cs typeface="Calibri" pitchFamily="34" charset="-120"/>
-              </a:rPr>
-              <a:t>No. If a table is free at 20:00 the restaurant will seat you at 20:00. I used &lt; and &gt; rather than &lt;= and &gt;=, which sounds trivial and is not.</a:t>
+                  <a:srgbClr val="F5F0E6"/>
+                </a:solidFill>
+                <a:latin typeface="Calibri" pitchFamily="34" charset="0"/>
+                <a:ea typeface="Calibri" pitchFamily="34" charset="-122"/>
+                <a:cs typeface="Calibri" pitchFamily="34" charset="-120"/>
+              </a:rPr>
+              <a:t>I kept the routes away from the database and the logic away from requests and responses.</a:t>
             </a:r>
             <a:endParaRPr lang="en-US" sz="1250" dirty="0"/>
           </a:p>
-        </p:txBody>
-      </p:sp>
-      <p:sp>
-        <p:nvSpPr>
-          <p:cNvPr id="11" name="Shape 9"/>
-          <p:cNvSpPr/>
-          <p:nvPr/>
-        </p:nvSpPr>
-        <p:spPr>
-          <a:xfrm>
-            <a:off x="640080" y="4480560"/>
-            <a:ext cx="420624" cy="420624"/>
-          </a:xfrm>
-          <a:prstGeom prst="ellipse">
-            <a:avLst/>
-          </a:prstGeom>
-          <a:solidFill>
-            <a:srgbClr val="D4A937"/>
-          </a:solidFill>
-          <a:ln/>
-        </p:spPr>
-      </p:sp>
-      <p:sp>
-        <p:nvSpPr>
-          <p:cNvPr id="12" name="Text 10"/>
-          <p:cNvSpPr/>
-          <p:nvPr/>
-        </p:nvSpPr>
-        <p:spPr>
-          <a:xfrm>
-            <a:off x="640080" y="4480560"/>
-            <a:ext cx="420624" cy="420624"/>
-          </a:xfrm>
-          <a:prstGeom prst="rect">
-            <a:avLst/>
-          </a:prstGeom>
-          <a:noFill/>
-          <a:ln/>
-        </p:spPr>
-        <p:txBody>
-          <a:bodyPr wrap="square" lIns="0" tIns="0" rIns="0" bIns="0" rtlCol="0" anchor="ctr"/>
-          <a:lstStyle/>
-          <a:p>
-            <a:pPr algn="ctr" indent="0" marL="0">
-              <a:buNone/>
-            </a:pPr>
-            <a:r>
-              <a:rPr lang="en-US" sz="1400" b="1" dirty="0">
-                <a:solidFill>
-                  <a:srgbClr val="071310"/>
-                </a:solidFill>
-                <a:latin typeface="Calibri" pitchFamily="34" charset="0"/>
-                <a:ea typeface="Calibri" pitchFamily="34" charset="-122"/>
-                <a:cs typeface="Calibri" pitchFamily="34" charset="-120"/>
-              </a:rPr>
-              <a:t>2</a:t>
-            </a:r>
-            <a:endParaRPr lang="en-US" sz="1400" dirty="0"/>
-          </a:p>
-        </p:txBody>
-      </p:sp>
-      <p:sp>
-        <p:nvSpPr>
-          <p:cNvPr id="13" name="Text 11"/>
-          <p:cNvSpPr/>
-          <p:nvPr/>
-        </p:nvSpPr>
-        <p:spPr>
-          <a:xfrm>
-            <a:off x="1188720" y="4443984"/>
-            <a:ext cx="10241280" cy="310896"/>
-          </a:xfrm>
-          <a:prstGeom prst="rect">
-            <a:avLst/>
-          </a:prstGeom>
-          <a:noFill/>
-          <a:ln/>
-        </p:spPr>
-        <p:txBody>
-          <a:bodyPr wrap="square" lIns="0" tIns="0" rIns="0" bIns="0" rtlCol="0" anchor="ctr"/>
-          <a:lstStyle/>
-          <a:p>
-            <a:pPr indent="0" marL="0">
-              <a:buNone/>
-            </a:pPr>
-            <a:r>
-              <a:rPr lang="en-US" sz="1500" b="1" dirty="0">
+          <a:p>
+            <a:pPr indent="0" marL="0">
+              <a:buNone/>
+            </a:pPr>
+            <a:endParaRPr lang="en-US" sz="1250" dirty="0"/>
+          </a:p>
+          <a:p>
+            <a:pPr indent="0" marL="0">
+              <a:buNone/>
+            </a:pPr>
+            <a:r>
+              <a:rPr lang="en-US" sz="1250" dirty="0">
                 <a:solidFill>
                   <a:srgbClr val="F5F0E6"/>
                 </a:solidFill>
@@ -5840,183 +7253,7 @@
                 <a:ea typeface="Calibri" pitchFamily="34" charset="-122"/>
                 <a:cs typeface="Calibri" pitchFamily="34" charset="-120"/>
               </a:rPr>
-              <a:t>Which table should a couple get?</a:t>
-            </a:r>
-            <a:endParaRPr lang="en-US" sz="1500" dirty="0"/>
-          </a:p>
-        </p:txBody>
-      </p:sp>
-      <p:sp>
-        <p:nvSpPr>
-          <p:cNvPr id="14" name="Text 12"/>
-          <p:cNvSpPr/>
-          <p:nvPr/>
-        </p:nvSpPr>
-        <p:spPr>
-          <a:xfrm>
-            <a:off x="1188720" y="4754880"/>
-            <a:ext cx="10058400" cy="548640"/>
-          </a:xfrm>
-          <a:prstGeom prst="rect">
-            <a:avLst/>
-          </a:prstGeom>
-          <a:noFill/>
-          <a:ln/>
-        </p:spPr>
-        <p:txBody>
-          <a:bodyPr wrap="square" lIns="0" tIns="0" rIns="0" bIns="0" rtlCol="0" anchor="ctr"/>
-          <a:lstStyle/>
-          <a:p>
-            <a:pPr indent="0" marL="0">
-              <a:buNone/>
-            </a:pPr>
-            <a:r>
-              <a:rPr lang="en-US" sz="1250" dirty="0">
-                <a:solidFill>
-                  <a:srgbClr val="97B0A2"/>
-                </a:solidFill>
-                <a:latin typeface="Calibri" pitchFamily="34" charset="0"/>
-                <a:ea typeface="Calibri" pitchFamily="34" charset="-122"/>
-                <a:cs typeface="Calibri" pitchFamily="34" charset="-120"/>
-              </a:rPr>
-              <a:t>The smallest one that fits. My first version gave them whatever was free first, which meant a six-top could get used up by two people.</a:t>
-            </a:r>
-            <a:endParaRPr lang="en-US" sz="1250" dirty="0"/>
-          </a:p>
-        </p:txBody>
-      </p:sp>
-      <p:sp>
-        <p:nvSpPr>
-          <p:cNvPr id="15" name="Shape 13"/>
-          <p:cNvSpPr/>
-          <p:nvPr/>
-        </p:nvSpPr>
-        <p:spPr>
-          <a:xfrm>
-            <a:off x="640080" y="5440680"/>
-            <a:ext cx="420624" cy="420624"/>
-          </a:xfrm>
-          <a:prstGeom prst="ellipse">
-            <a:avLst/>
-          </a:prstGeom>
-          <a:solidFill>
-            <a:srgbClr val="D4A937"/>
-          </a:solidFill>
-          <a:ln/>
-        </p:spPr>
-      </p:sp>
-      <p:sp>
-        <p:nvSpPr>
-          <p:cNvPr id="16" name="Text 14"/>
-          <p:cNvSpPr/>
-          <p:nvPr/>
-        </p:nvSpPr>
-        <p:spPr>
-          <a:xfrm>
-            <a:off x="640080" y="5440680"/>
-            <a:ext cx="420624" cy="420624"/>
-          </a:xfrm>
-          <a:prstGeom prst="rect">
-            <a:avLst/>
-          </a:prstGeom>
-          <a:noFill/>
-          <a:ln/>
-        </p:spPr>
-        <p:txBody>
-          <a:bodyPr wrap="square" lIns="0" tIns="0" rIns="0" bIns="0" rtlCol="0" anchor="ctr"/>
-          <a:lstStyle/>
-          <a:p>
-            <a:pPr algn="ctr" indent="0" marL="0">
-              <a:buNone/>
-            </a:pPr>
-            <a:r>
-              <a:rPr lang="en-US" sz="1400" b="1" dirty="0">
-                <a:solidFill>
-                  <a:srgbClr val="071310"/>
-                </a:solidFill>
-                <a:latin typeface="Calibri" pitchFamily="34" charset="0"/>
-                <a:ea typeface="Calibri" pitchFamily="34" charset="-122"/>
-                <a:cs typeface="Calibri" pitchFamily="34" charset="-120"/>
-              </a:rPr>
-              <a:t>3</a:t>
-            </a:r>
-            <a:endParaRPr lang="en-US" sz="1400" dirty="0"/>
-          </a:p>
-        </p:txBody>
-      </p:sp>
-      <p:sp>
-        <p:nvSpPr>
-          <p:cNvPr id="17" name="Text 15"/>
-          <p:cNvSpPr/>
-          <p:nvPr/>
-        </p:nvSpPr>
-        <p:spPr>
-          <a:xfrm>
-            <a:off x="1188720" y="5404104"/>
-            <a:ext cx="10241280" cy="310896"/>
-          </a:xfrm>
-          <a:prstGeom prst="rect">
-            <a:avLst/>
-          </a:prstGeom>
-          <a:noFill/>
-          <a:ln/>
-        </p:spPr>
-        <p:txBody>
-          <a:bodyPr wrap="square" lIns="0" tIns="0" rIns="0" bIns="0" rtlCol="0" anchor="ctr"/>
-          <a:lstStyle/>
-          <a:p>
-            <a:pPr indent="0" marL="0">
-              <a:buNone/>
-            </a:pPr>
-            <a:r>
-              <a:rPr lang="en-US" sz="1500" b="1" dirty="0">
-                <a:solidFill>
-                  <a:srgbClr val="F5F0E6"/>
-                </a:solidFill>
-                <a:latin typeface="Calibri" pitchFamily="34" charset="0"/>
-                <a:ea typeface="Calibri" pitchFamily="34" charset="-122"/>
-                <a:cs typeface="Calibri" pitchFamily="34" charset="-120"/>
-              </a:rPr>
-              <a:t>What if two people book at the same moment?</a:t>
-            </a:r>
-            <a:endParaRPr lang="en-US" sz="1500" dirty="0"/>
-          </a:p>
-        </p:txBody>
-      </p:sp>
-      <p:sp>
-        <p:nvSpPr>
-          <p:cNvPr id="18" name="Text 16"/>
-          <p:cNvSpPr/>
-          <p:nvPr/>
-        </p:nvSpPr>
-        <p:spPr>
-          <a:xfrm>
-            <a:off x="1188720" y="5715000"/>
-            <a:ext cx="10058400" cy="548640"/>
-          </a:xfrm>
-          <a:prstGeom prst="rect">
-            <a:avLst/>
-          </a:prstGeom>
-          <a:noFill/>
-          <a:ln/>
-        </p:spPr>
-        <p:txBody>
-          <a:bodyPr wrap="square" lIns="0" tIns="0" rIns="0" bIns="0" rtlCol="0" anchor="ctr"/>
-          <a:lstStyle/>
-          <a:p>
-            <a:pPr indent="0" marL="0">
-              <a:buNone/>
-            </a:pPr>
-            <a:r>
-              <a:rPr lang="en-US" sz="1250" dirty="0">
-                <a:solidFill>
-                  <a:srgbClr val="97B0A2"/>
-                </a:solidFill>
-                <a:latin typeface="Calibri" pitchFamily="34" charset="0"/>
-                <a:ea typeface="Calibri" pitchFamily="34" charset="-122"/>
-                <a:cs typeface="Calibri" pitchFamily="34" charset="-120"/>
-              </a:rPr>
-              <a:t>Checking and then inserting leaves a gap where both see the table free. I had to re-check inside a database transaction.</a:t>
+              <a:t>The reason is the fourth box: because the booking rules do not touch anything, I can test them directly without starting a server.</a:t>
             </a:r>
             <a:endParaRPr lang="en-US" sz="1250" dirty="0"/>
           </a:p>
@@ -6087,7 +7324,7 @@
                 <a:ea typeface="Cambria" pitchFamily="34" charset="-122"/>
                 <a:cs typeface="Cambria" pitchFamily="34" charset="-120"/>
               </a:rPr>
-              <a:t>Keeping it secure</a:t>
+              <a:t>The bit that was actually difficult</a:t>
             </a:r>
             <a:endParaRPr lang="en-US" sz="3600" dirty="0"/>
           </a:p>
@@ -6126,7 +7363,7 @@
                 <a:ea typeface="Calibri" pitchFamily="34" charset="-122"/>
                 <a:cs typeface="Calibri" pitchFamily="34" charset="-120"/>
               </a:rPr>
-              <a:t>What I did, and what I learned doing it</a:t>
+              <a:t>Deciding whether a table is free</a:t>
             </a:r>
             <a:endParaRPr lang="en-US" sz="1400" dirty="0"/>
           </a:p>
@@ -6140,537 +7377,12 @@
         </p:nvSpPr>
         <p:spPr>
           <a:xfrm>
-            <a:off x="640080" y="1828800"/>
-            <a:ext cx="8046720" cy="713232"/>
+            <a:off x="640080" y="1783080"/>
+            <a:ext cx="10881360" cy="1097280"/>
           </a:xfrm>
           <a:prstGeom prst="roundRect">
             <a:avLst>
-              <a:gd name="adj" fmla="val 11538"/>
-            </a:avLst>
-          </a:prstGeom>
-          <a:solidFill>
-            <a:srgbClr val="102B23"/>
-          </a:solidFill>
-          <a:ln w="12700">
-            <a:solidFill>
-              <a:srgbClr val="17392E"/>
-            </a:solidFill>
-            <a:prstDash val="solid"/>
-          </a:ln>
-        </p:spPr>
-      </p:sp>
-      <p:sp>
-        <p:nvSpPr>
-          <p:cNvPr id="5" name="Text 3"/>
-          <p:cNvSpPr/>
-          <p:nvPr/>
-        </p:nvSpPr>
-        <p:spPr>
-          <a:xfrm>
-            <a:off x="914400" y="1901952"/>
-            <a:ext cx="2194560" cy="274320"/>
-          </a:xfrm>
-          <a:prstGeom prst="rect">
-            <a:avLst/>
-          </a:prstGeom>
-          <a:noFill/>
-          <a:ln/>
-        </p:spPr>
-        <p:txBody>
-          <a:bodyPr wrap="square" lIns="0" tIns="0" rIns="0" bIns="0" rtlCol="0" anchor="ctr"/>
-          <a:lstStyle/>
-          <a:p>
-            <a:pPr indent="0" marL="0">
-              <a:buNone/>
-            </a:pPr>
-            <a:r>
-              <a:rPr lang="en-US" sz="1350" b="1" dirty="0">
-                <a:solidFill>
-                  <a:srgbClr val="D4A937"/>
-                </a:solidFill>
-                <a:latin typeface="Calibri" pitchFamily="34" charset="0"/>
-                <a:ea typeface="Calibri" pitchFamily="34" charset="-122"/>
-                <a:cs typeface="Calibri" pitchFamily="34" charset="-120"/>
-              </a:rPr>
-              <a:t>Passwords</a:t>
-            </a:r>
-            <a:endParaRPr lang="en-US" sz="1350" dirty="0"/>
-          </a:p>
-        </p:txBody>
-      </p:sp>
-      <p:sp>
-        <p:nvSpPr>
-          <p:cNvPr id="6" name="Text 4"/>
-          <p:cNvSpPr/>
-          <p:nvPr/>
-        </p:nvSpPr>
-        <p:spPr>
-          <a:xfrm>
-            <a:off x="3200400" y="1874520"/>
-            <a:ext cx="5303520" cy="621792"/>
-          </a:xfrm>
-          <a:prstGeom prst="rect">
-            <a:avLst/>
-          </a:prstGeom>
-          <a:noFill/>
-          <a:ln/>
-        </p:spPr>
-        <p:txBody>
-          <a:bodyPr wrap="square" lIns="0" tIns="0" rIns="0" bIns="0" rtlCol="0" anchor="ctr"/>
-          <a:lstStyle/>
-          <a:p>
-            <a:pPr indent="0" marL="0">
-              <a:buNone/>
-            </a:pPr>
-            <a:r>
-              <a:rPr lang="en-US" sz="1150" dirty="0">
-                <a:solidFill>
-                  <a:srgbClr val="F5F0E6"/>
-                </a:solidFill>
-                <a:latin typeface="Calibri" pitchFamily="34" charset="0"/>
-                <a:ea typeface="Calibri" pitchFamily="34" charset="-122"/>
-                <a:cs typeface="Calibri" pitchFamily="34" charset="-120"/>
-              </a:rPr>
-              <a:t>Hashed with bcrypt. The lab code we did in week 7 stored them as plain text, which I did not want to copy.</a:t>
-            </a:r>
-            <a:endParaRPr lang="en-US" sz="1150" dirty="0"/>
-          </a:p>
-        </p:txBody>
-      </p:sp>
-      <p:sp>
-        <p:nvSpPr>
-          <p:cNvPr id="7" name="Shape 5"/>
-          <p:cNvSpPr/>
-          <p:nvPr/>
-        </p:nvSpPr>
-        <p:spPr>
-          <a:xfrm>
-            <a:off x="640080" y="2651760"/>
-            <a:ext cx="8046720" cy="713232"/>
-          </a:xfrm>
-          <a:prstGeom prst="roundRect">
-            <a:avLst>
-              <a:gd name="adj" fmla="val 11538"/>
-            </a:avLst>
-          </a:prstGeom>
-          <a:solidFill>
-            <a:srgbClr val="102B23"/>
-          </a:solidFill>
-          <a:ln w="12700">
-            <a:solidFill>
-              <a:srgbClr val="17392E"/>
-            </a:solidFill>
-            <a:prstDash val="solid"/>
-          </a:ln>
-        </p:spPr>
-      </p:sp>
-      <p:sp>
-        <p:nvSpPr>
-          <p:cNvPr id="8" name="Text 6"/>
-          <p:cNvSpPr/>
-          <p:nvPr/>
-        </p:nvSpPr>
-        <p:spPr>
-          <a:xfrm>
-            <a:off x="914400" y="2724912"/>
-            <a:ext cx="2194560" cy="274320"/>
-          </a:xfrm>
-          <a:prstGeom prst="rect">
-            <a:avLst/>
-          </a:prstGeom>
-          <a:noFill/>
-          <a:ln/>
-        </p:spPr>
-        <p:txBody>
-          <a:bodyPr wrap="square" lIns="0" tIns="0" rIns="0" bIns="0" rtlCol="0" anchor="ctr"/>
-          <a:lstStyle/>
-          <a:p>
-            <a:pPr indent="0" marL="0">
-              <a:buNone/>
-            </a:pPr>
-            <a:r>
-              <a:rPr lang="en-US" sz="1350" b="1" dirty="0">
-                <a:solidFill>
-                  <a:srgbClr val="D4A937"/>
-                </a:solidFill>
-                <a:latin typeface="Calibri" pitchFamily="34" charset="0"/>
-                <a:ea typeface="Calibri" pitchFamily="34" charset="-122"/>
-                <a:cs typeface="Calibri" pitchFamily="34" charset="-120"/>
-              </a:rPr>
-              <a:t>Logging in</a:t>
-            </a:r>
-            <a:endParaRPr lang="en-US" sz="1350" dirty="0"/>
-          </a:p>
-        </p:txBody>
-      </p:sp>
-      <p:sp>
-        <p:nvSpPr>
-          <p:cNvPr id="9" name="Text 7"/>
-          <p:cNvSpPr/>
-          <p:nvPr/>
-        </p:nvSpPr>
-        <p:spPr>
-          <a:xfrm>
-            <a:off x="3200400" y="2697480"/>
-            <a:ext cx="5303520" cy="621792"/>
-          </a:xfrm>
-          <a:prstGeom prst="rect">
-            <a:avLst/>
-          </a:prstGeom>
-          <a:noFill/>
-          <a:ln/>
-        </p:spPr>
-        <p:txBody>
-          <a:bodyPr wrap="square" lIns="0" tIns="0" rIns="0" bIns="0" rtlCol="0" anchor="ctr"/>
-          <a:lstStyle/>
-          <a:p>
-            <a:pPr indent="0" marL="0">
-              <a:buNone/>
-            </a:pPr>
-            <a:r>
-              <a:rPr lang="en-US" sz="1150" dirty="0">
-                <a:solidFill>
-                  <a:srgbClr val="F5F0E6"/>
-                </a:solidFill>
-                <a:latin typeface="Calibri" pitchFamily="34" charset="0"/>
-                <a:ea typeface="Calibri" pitchFamily="34" charset="-122"/>
-                <a:cs typeface="Calibri" pitchFamily="34" charset="-120"/>
-              </a:rPr>
-              <a:t>You get a JWT. It is signed, not encrypted — anyone can read what is in it, but they cannot change it without my secret key.</a:t>
-            </a:r>
-            <a:endParaRPr lang="en-US" sz="1150" dirty="0"/>
-          </a:p>
-        </p:txBody>
-      </p:sp>
-      <p:sp>
-        <p:nvSpPr>
-          <p:cNvPr id="10" name="Shape 8"/>
-          <p:cNvSpPr/>
-          <p:nvPr/>
-        </p:nvSpPr>
-        <p:spPr>
-          <a:xfrm>
-            <a:off x="640080" y="3474720"/>
-            <a:ext cx="8046720" cy="713232"/>
-          </a:xfrm>
-          <a:prstGeom prst="roundRect">
-            <a:avLst>
-              <a:gd name="adj" fmla="val 11538"/>
-            </a:avLst>
-          </a:prstGeom>
-          <a:solidFill>
-            <a:srgbClr val="102B23"/>
-          </a:solidFill>
-          <a:ln w="12700">
-            <a:solidFill>
-              <a:srgbClr val="17392E"/>
-            </a:solidFill>
-            <a:prstDash val="solid"/>
-          </a:ln>
-        </p:spPr>
-      </p:sp>
-      <p:sp>
-        <p:nvSpPr>
-          <p:cNvPr id="11" name="Text 9"/>
-          <p:cNvSpPr/>
-          <p:nvPr/>
-        </p:nvSpPr>
-        <p:spPr>
-          <a:xfrm>
-            <a:off x="914400" y="3547872"/>
-            <a:ext cx="2194560" cy="274320"/>
-          </a:xfrm>
-          <a:prstGeom prst="rect">
-            <a:avLst/>
-          </a:prstGeom>
-          <a:noFill/>
-          <a:ln/>
-        </p:spPr>
-        <p:txBody>
-          <a:bodyPr wrap="square" lIns="0" tIns="0" rIns="0" bIns="0" rtlCol="0" anchor="ctr"/>
-          <a:lstStyle/>
-          <a:p>
-            <a:pPr indent="0" marL="0">
-              <a:buNone/>
-            </a:pPr>
-            <a:r>
-              <a:rPr lang="en-US" sz="1350" b="1" dirty="0">
-                <a:solidFill>
-                  <a:srgbClr val="D4A937"/>
-                </a:solidFill>
-                <a:latin typeface="Calibri" pitchFamily="34" charset="0"/>
-                <a:ea typeface="Calibri" pitchFamily="34" charset="-122"/>
-                <a:cs typeface="Calibri" pitchFamily="34" charset="-120"/>
-              </a:rPr>
-              <a:t>Checking the token</a:t>
-            </a:r>
-            <a:endParaRPr lang="en-US" sz="1350" dirty="0"/>
-          </a:p>
-        </p:txBody>
-      </p:sp>
-      <p:sp>
-        <p:nvSpPr>
-          <p:cNvPr id="12" name="Text 10"/>
-          <p:cNvSpPr/>
-          <p:nvPr/>
-        </p:nvSpPr>
-        <p:spPr>
-          <a:xfrm>
-            <a:off x="3200400" y="3520440"/>
-            <a:ext cx="5303520" cy="621792"/>
-          </a:xfrm>
-          <a:prstGeom prst="rect">
-            <a:avLst/>
-          </a:prstGeom>
-          <a:noFill/>
-          <a:ln/>
-        </p:spPr>
-        <p:txBody>
-          <a:bodyPr wrap="square" lIns="0" tIns="0" rIns="0" bIns="0" rtlCol="0" anchor="ctr"/>
-          <a:lstStyle/>
-          <a:p>
-            <a:pPr indent="0" marL="0">
-              <a:buNone/>
-            </a:pPr>
-            <a:r>
-              <a:rPr lang="en-US" sz="1150" dirty="0">
-                <a:solidFill>
-                  <a:srgbClr val="F5F0E6"/>
-                </a:solidFill>
-                <a:latin typeface="Calibri" pitchFamily="34" charset="0"/>
-                <a:ea typeface="Calibri" pitchFamily="34" charset="-122"/>
-                <a:cs typeface="Calibri" pitchFamily="34" charset="-120"/>
-              </a:rPr>
-              <a:t>I look the user up in the database every request rather than trusting what the token says. A token lasts 7 days; an account might not.</a:t>
-            </a:r>
-            <a:endParaRPr lang="en-US" sz="1150" dirty="0"/>
-          </a:p>
-        </p:txBody>
-      </p:sp>
-      <p:sp>
-        <p:nvSpPr>
-          <p:cNvPr id="13" name="Shape 11"/>
-          <p:cNvSpPr/>
-          <p:nvPr/>
-        </p:nvSpPr>
-        <p:spPr>
-          <a:xfrm>
-            <a:off x="640080" y="4297680"/>
-            <a:ext cx="8046720" cy="713232"/>
-          </a:xfrm>
-          <a:prstGeom prst="roundRect">
-            <a:avLst>
-              <a:gd name="adj" fmla="val 11538"/>
-            </a:avLst>
-          </a:prstGeom>
-          <a:solidFill>
-            <a:srgbClr val="102B23"/>
-          </a:solidFill>
-          <a:ln w="12700">
-            <a:solidFill>
-              <a:srgbClr val="17392E"/>
-            </a:solidFill>
-            <a:prstDash val="solid"/>
-          </a:ln>
-        </p:spPr>
-      </p:sp>
-      <p:sp>
-        <p:nvSpPr>
-          <p:cNvPr id="14" name="Text 12"/>
-          <p:cNvSpPr/>
-          <p:nvPr/>
-        </p:nvSpPr>
-        <p:spPr>
-          <a:xfrm>
-            <a:off x="914400" y="4370832"/>
-            <a:ext cx="2194560" cy="274320"/>
-          </a:xfrm>
-          <a:prstGeom prst="rect">
-            <a:avLst/>
-          </a:prstGeom>
-          <a:noFill/>
-          <a:ln/>
-        </p:spPr>
-        <p:txBody>
-          <a:bodyPr wrap="square" lIns="0" tIns="0" rIns="0" bIns="0" rtlCol="0" anchor="ctr"/>
-          <a:lstStyle/>
-          <a:p>
-            <a:pPr indent="0" marL="0">
-              <a:buNone/>
-            </a:pPr>
-            <a:r>
-              <a:rPr lang="en-US" sz="1350" b="1" dirty="0">
-                <a:solidFill>
-                  <a:srgbClr val="D4A937"/>
-                </a:solidFill>
-                <a:latin typeface="Calibri" pitchFamily="34" charset="0"/>
-                <a:ea typeface="Calibri" pitchFamily="34" charset="-122"/>
-                <a:cs typeface="Calibri" pitchFamily="34" charset="-120"/>
-              </a:rPr>
-              <a:t>Wrong password vs unknown email</a:t>
-            </a:r>
-            <a:endParaRPr lang="en-US" sz="1350" dirty="0"/>
-          </a:p>
-        </p:txBody>
-      </p:sp>
-      <p:sp>
-        <p:nvSpPr>
-          <p:cNvPr id="15" name="Text 13"/>
-          <p:cNvSpPr/>
-          <p:nvPr/>
-        </p:nvSpPr>
-        <p:spPr>
-          <a:xfrm>
-            <a:off x="3200400" y="4343400"/>
-            <a:ext cx="5303520" cy="621792"/>
-          </a:xfrm>
-          <a:prstGeom prst="rect">
-            <a:avLst/>
-          </a:prstGeom>
-          <a:noFill/>
-          <a:ln/>
-        </p:spPr>
-        <p:txBody>
-          <a:bodyPr wrap="square" lIns="0" tIns="0" rIns="0" bIns="0" rtlCol="0" anchor="ctr"/>
-          <a:lstStyle/>
-          <a:p>
-            <a:pPr indent="0" marL="0">
-              <a:buNone/>
-            </a:pPr>
-            <a:r>
-              <a:rPr lang="en-US" sz="1150" dirty="0">
-                <a:solidFill>
-                  <a:srgbClr val="F5F0E6"/>
-                </a:solidFill>
-                <a:latin typeface="Calibri" pitchFamily="34" charset="0"/>
-                <a:ea typeface="Calibri" pitchFamily="34" charset="-122"/>
-                <a:cs typeface="Calibri" pitchFamily="34" charset="-120"/>
-              </a:rPr>
-              <a:t>Both give exactly the same error. Otherwise you could use the login form to find out which emails are registered.</a:t>
-            </a:r>
-            <a:endParaRPr lang="en-US" sz="1150" dirty="0"/>
-          </a:p>
-        </p:txBody>
-      </p:sp>
-      <p:sp>
-        <p:nvSpPr>
-          <p:cNvPr id="16" name="Shape 14"/>
-          <p:cNvSpPr/>
-          <p:nvPr/>
-        </p:nvSpPr>
-        <p:spPr>
-          <a:xfrm>
-            <a:off x="640080" y="5120640"/>
-            <a:ext cx="8046720" cy="713232"/>
-          </a:xfrm>
-          <a:prstGeom prst="roundRect">
-            <a:avLst>
-              <a:gd name="adj" fmla="val 11538"/>
-            </a:avLst>
-          </a:prstGeom>
-          <a:solidFill>
-            <a:srgbClr val="102B23"/>
-          </a:solidFill>
-          <a:ln w="12700">
-            <a:solidFill>
-              <a:srgbClr val="17392E"/>
-            </a:solidFill>
-            <a:prstDash val="solid"/>
-          </a:ln>
-        </p:spPr>
-      </p:sp>
-      <p:sp>
-        <p:nvSpPr>
-          <p:cNvPr id="17" name="Text 15"/>
-          <p:cNvSpPr/>
-          <p:nvPr/>
-        </p:nvSpPr>
-        <p:spPr>
-          <a:xfrm>
-            <a:off x="914400" y="5193792"/>
-            <a:ext cx="2194560" cy="274320"/>
-          </a:xfrm>
-          <a:prstGeom prst="rect">
-            <a:avLst/>
-          </a:prstGeom>
-          <a:noFill/>
-          <a:ln/>
-        </p:spPr>
-        <p:txBody>
-          <a:bodyPr wrap="square" lIns="0" tIns="0" rIns="0" bIns="0" rtlCol="0" anchor="ctr"/>
-          <a:lstStyle/>
-          <a:p>
-            <a:pPr indent="0" marL="0">
-              <a:buNone/>
-            </a:pPr>
-            <a:r>
-              <a:rPr lang="en-US" sz="1350" b="1" dirty="0">
-                <a:solidFill>
-                  <a:srgbClr val="D4A937"/>
-                </a:solidFill>
-                <a:latin typeface="Calibri" pitchFamily="34" charset="0"/>
-                <a:ea typeface="Calibri" pitchFamily="34" charset="-122"/>
-                <a:cs typeface="Calibri" pitchFamily="34" charset="-120"/>
-              </a:rPr>
-              <a:t>Other restaurants</a:t>
-            </a:r>
-            <a:endParaRPr lang="en-US" sz="1350" dirty="0"/>
-          </a:p>
-        </p:txBody>
-      </p:sp>
-      <p:sp>
-        <p:nvSpPr>
-          <p:cNvPr id="18" name="Text 16"/>
-          <p:cNvSpPr/>
-          <p:nvPr/>
-        </p:nvSpPr>
-        <p:spPr>
-          <a:xfrm>
-            <a:off x="3200400" y="5166360"/>
-            <a:ext cx="5303520" cy="621792"/>
-          </a:xfrm>
-          <a:prstGeom prst="rect">
-            <a:avLst/>
-          </a:prstGeom>
-          <a:noFill/>
-          <a:ln/>
-        </p:spPr>
-        <p:txBody>
-          <a:bodyPr wrap="square" lIns="0" tIns="0" rIns="0" bIns="0" rtlCol="0" anchor="ctr"/>
-          <a:lstStyle/>
-          <a:p>
-            <a:pPr indent="0" marL="0">
-              <a:buNone/>
-            </a:pPr>
-            <a:r>
-              <a:rPr lang="en-US" sz="1150" dirty="0">
-                <a:solidFill>
-                  <a:srgbClr val="F5F0E6"/>
-                </a:solidFill>
-                <a:latin typeface="Calibri" pitchFamily="34" charset="0"/>
-                <a:ea typeface="Calibri" pitchFamily="34" charset="-122"/>
-                <a:cs typeface="Calibri" pitchFamily="34" charset="-120"/>
-              </a:rPr>
-              <a:t>You get a 404, not a 403. A 403 would tell you the booking exists, which is already more than you should know.</a:t>
-            </a:r>
-            <a:endParaRPr lang="en-US" sz="1150" dirty="0"/>
-          </a:p>
-        </p:txBody>
-      </p:sp>
-      <p:sp>
-        <p:nvSpPr>
-          <p:cNvPr id="19" name="Shape 17"/>
-          <p:cNvSpPr/>
-          <p:nvPr/>
-        </p:nvSpPr>
-        <p:spPr>
-          <a:xfrm>
-            <a:off x="8961120" y="1828800"/>
-            <a:ext cx="2560320" cy="4023360"/>
-          </a:xfrm>
-          <a:prstGeom prst="roundRect">
-            <a:avLst>
-              <a:gd name="adj" fmla="val 3214"/>
+              <a:gd name="adj" fmla="val 7500"/>
             </a:avLst>
           </a:prstGeom>
           <a:solidFill>
@@ -6686,69 +7398,167 @@
       </p:sp>
       <p:sp>
         <p:nvSpPr>
-          <p:cNvPr id="20" name="Text 18"/>
-          <p:cNvSpPr/>
-          <p:nvPr/>
-        </p:nvSpPr>
-        <p:spPr>
-          <a:xfrm>
-            <a:off x="9189720" y="2103120"/>
-            <a:ext cx="2103120" cy="731520"/>
-          </a:xfrm>
-          <a:prstGeom prst="rect">
-            <a:avLst/>
-          </a:prstGeom>
-          <a:noFill/>
-          <a:ln/>
-        </p:spPr>
-        <p:txBody>
-          <a:bodyPr wrap="square" lIns="0" tIns="0" rIns="0" bIns="0" rtlCol="0" anchor="ctr"/>
-          <a:lstStyle/>
-          <a:p>
-            <a:pPr indent="0" marL="0">
-              <a:buNone/>
-            </a:pPr>
-            <a:r>
-              <a:rPr lang="en-US" sz="1600" b="1" dirty="0">
-                <a:solidFill>
-                  <a:srgbClr val="A3364F"/>
-                </a:solidFill>
-                <a:latin typeface="Cambria" pitchFamily="34" charset="0"/>
-                <a:ea typeface="Cambria" pitchFamily="34" charset="-122"/>
-                <a:cs typeface="Cambria" pitchFamily="34" charset="-120"/>
-              </a:rPr>
-              <a:t>One thing I got wrong first</a:t>
-            </a:r>
-            <a:endParaRPr lang="en-US" sz="1600" dirty="0"/>
-          </a:p>
-        </p:txBody>
-      </p:sp>
-      <p:sp>
-        <p:nvSpPr>
-          <p:cNvPr id="21" name="Text 19"/>
-          <p:cNvSpPr/>
-          <p:nvPr/>
-        </p:nvSpPr>
-        <p:spPr>
-          <a:xfrm>
-            <a:off x="9189720" y="2926080"/>
-            <a:ext cx="2103120" cy="2377440"/>
-          </a:xfrm>
-          <a:prstGeom prst="rect">
-            <a:avLst/>
-          </a:prstGeom>
-          <a:noFill/>
-          <a:ln/>
-        </p:spPr>
-        <p:txBody>
-          <a:bodyPr wrap="square" lIns="0" tIns="0" rIns="0" bIns="0" rtlCol="0" anchor="ctr"/>
-          <a:lstStyle/>
-          <a:p>
-            <a:pPr indent="0" marL="0">
-              <a:buNone/>
-            </a:pPr>
-            <a:r>
-              <a:rPr lang="en-US" sz="1200" dirty="0">
+          <p:cNvPr id="5" name="Text 3"/>
+          <p:cNvSpPr/>
+          <p:nvPr/>
+        </p:nvSpPr>
+        <p:spPr>
+          <a:xfrm>
+            <a:off x="960120" y="2057400"/>
+            <a:ext cx="10241280" cy="502920"/>
+          </a:xfrm>
+          <a:prstGeom prst="rect">
+            <a:avLst/>
+          </a:prstGeom>
+          <a:noFill/>
+          <a:ln/>
+        </p:spPr>
+        <p:txBody>
+          <a:bodyPr wrap="square" lIns="0" tIns="0" rIns="0" bIns="0" rtlCol="0" anchor="ctr"/>
+          <a:lstStyle/>
+          <a:p>
+            <a:pPr indent="0" marL="0">
+              <a:buNone/>
+            </a:pPr>
+            <a:r>
+              <a:rPr lang="en-US" sz="2100" b="1" dirty="0">
+                <a:solidFill>
+                  <a:srgbClr val="F5D77A"/>
+                </a:solidFill>
+                <a:latin typeface="Courier New" pitchFamily="34" charset="0"/>
+                <a:ea typeface="Courier New" pitchFamily="34" charset="-122"/>
+                <a:cs typeface="Courier New" pitchFamily="34" charset="-120"/>
+              </a:rPr>
+              <a:t>a.startsAt &lt; b.endsAt  &amp;&amp;  a.endsAt &gt; b.startsAt</a:t>
+            </a:r>
+            <a:endParaRPr lang="en-US" sz="2100" dirty="0"/>
+          </a:p>
+        </p:txBody>
+      </p:sp>
+      <p:sp>
+        <p:nvSpPr>
+          <p:cNvPr id="6" name="Text 4"/>
+          <p:cNvSpPr/>
+          <p:nvPr/>
+        </p:nvSpPr>
+        <p:spPr>
+          <a:xfrm>
+            <a:off x="640080" y="3063240"/>
+            <a:ext cx="10881360" cy="320040"/>
+          </a:xfrm>
+          <a:prstGeom prst="rect">
+            <a:avLst/>
+          </a:prstGeom>
+          <a:noFill/>
+          <a:ln/>
+        </p:spPr>
+        <p:txBody>
+          <a:bodyPr wrap="square" lIns="0" tIns="0" rIns="0" bIns="0" rtlCol="0" anchor="ctr"/>
+          <a:lstStyle/>
+          <a:p>
+            <a:pPr indent="0" marL="0">
+              <a:buNone/>
+            </a:pPr>
+            <a:r>
+              <a:rPr lang="en-US" sz="1400" i="1" dirty="0">
+                <a:solidFill>
+                  <a:srgbClr val="97B0A2"/>
+                </a:solidFill>
+                <a:latin typeface="Calibri" pitchFamily="34" charset="0"/>
+                <a:ea typeface="Calibri" pitchFamily="34" charset="-122"/>
+                <a:cs typeface="Calibri" pitchFamily="34" charset="-120"/>
+              </a:rPr>
+              <a:t>One line, but I got each part of it wrong at least once:</a:t>
+            </a:r>
+            <a:endParaRPr lang="en-US" sz="1400" dirty="0"/>
+          </a:p>
+        </p:txBody>
+      </p:sp>
+      <p:sp>
+        <p:nvSpPr>
+          <p:cNvPr id="7" name="Shape 5"/>
+          <p:cNvSpPr/>
+          <p:nvPr/>
+        </p:nvSpPr>
+        <p:spPr>
+          <a:xfrm>
+            <a:off x="640080" y="3520440"/>
+            <a:ext cx="420624" cy="420624"/>
+          </a:xfrm>
+          <a:prstGeom prst="ellipse">
+            <a:avLst/>
+          </a:prstGeom>
+          <a:solidFill>
+            <a:srgbClr val="D4A937"/>
+          </a:solidFill>
+          <a:ln/>
+        </p:spPr>
+      </p:sp>
+      <p:sp>
+        <p:nvSpPr>
+          <p:cNvPr id="8" name="Text 6"/>
+          <p:cNvSpPr/>
+          <p:nvPr/>
+        </p:nvSpPr>
+        <p:spPr>
+          <a:xfrm>
+            <a:off x="640080" y="3520440"/>
+            <a:ext cx="420624" cy="420624"/>
+          </a:xfrm>
+          <a:prstGeom prst="rect">
+            <a:avLst/>
+          </a:prstGeom>
+          <a:noFill/>
+          <a:ln/>
+        </p:spPr>
+        <p:txBody>
+          <a:bodyPr wrap="square" lIns="0" tIns="0" rIns="0" bIns="0" rtlCol="0" anchor="ctr"/>
+          <a:lstStyle/>
+          <a:p>
+            <a:pPr algn="ctr" indent="0" marL="0">
+              <a:buNone/>
+            </a:pPr>
+            <a:r>
+              <a:rPr lang="en-US" sz="1400" b="1" dirty="0">
+                <a:solidFill>
+                  <a:srgbClr val="071310"/>
+                </a:solidFill>
+                <a:latin typeface="Calibri" pitchFamily="34" charset="0"/>
+                <a:ea typeface="Calibri" pitchFamily="34" charset="-122"/>
+                <a:cs typeface="Calibri" pitchFamily="34" charset="-120"/>
+              </a:rPr>
+              <a:t>1</a:t>
+            </a:r>
+            <a:endParaRPr lang="en-US" sz="1400" dirty="0"/>
+          </a:p>
+        </p:txBody>
+      </p:sp>
+      <p:sp>
+        <p:nvSpPr>
+          <p:cNvPr id="9" name="Text 7"/>
+          <p:cNvSpPr/>
+          <p:nvPr/>
+        </p:nvSpPr>
+        <p:spPr>
+          <a:xfrm>
+            <a:off x="1188720" y="3483864"/>
+            <a:ext cx="10241280" cy="310896"/>
+          </a:xfrm>
+          <a:prstGeom prst="rect">
+            <a:avLst/>
+          </a:prstGeom>
+          <a:noFill/>
+          <a:ln/>
+        </p:spPr>
+        <p:txBody>
+          <a:bodyPr wrap="square" lIns="0" tIns="0" rIns="0" bIns="0" rtlCol="0" anchor="ctr"/>
+          <a:lstStyle/>
+          <a:p>
+            <a:pPr indent="0" marL="0">
+              <a:buNone/>
+            </a:pPr>
+            <a:r>
+              <a:rPr lang="en-US" sz="1500" b="1" dirty="0">
                 <a:solidFill>
                   <a:srgbClr val="F5F0E6"/>
                 </a:solidFill>
@@ -6756,9 +7566,322 @@
                 <a:ea typeface="Calibri" pitchFamily="34" charset="-122"/>
                 <a:cs typeface="Calibri" pitchFamily="34" charset="-120"/>
               </a:rPr>
-              <a:t>I originally relied on hiding pages in React. But anyone can call the API directly with curl — the front end is not a security boundary. All the real checks are on the server.</a:t>
-            </a:r>
-            <a:endParaRPr lang="en-US" sz="1200" dirty="0"/>
+              <a:t>Should 20:00 to 20:00 count as a clash?</a:t>
+            </a:r>
+            <a:endParaRPr lang="en-US" sz="1500" dirty="0"/>
+          </a:p>
+        </p:txBody>
+      </p:sp>
+      <p:sp>
+        <p:nvSpPr>
+          <p:cNvPr id="10" name="Text 8"/>
+          <p:cNvSpPr/>
+          <p:nvPr/>
+        </p:nvSpPr>
+        <p:spPr>
+          <a:xfrm>
+            <a:off x="1188720" y="3794760"/>
+            <a:ext cx="10058400" cy="548640"/>
+          </a:xfrm>
+          <a:prstGeom prst="rect">
+            <a:avLst/>
+          </a:prstGeom>
+          <a:noFill/>
+          <a:ln/>
+        </p:spPr>
+        <p:txBody>
+          <a:bodyPr wrap="square" lIns="0" tIns="0" rIns="0" bIns="0" rtlCol="0" anchor="ctr"/>
+          <a:lstStyle/>
+          <a:p>
+            <a:pPr indent="0" marL="0">
+              <a:buNone/>
+            </a:pPr>
+            <a:r>
+              <a:rPr lang="en-US" sz="1250" dirty="0">
+                <a:solidFill>
+                  <a:srgbClr val="97B0A2"/>
+                </a:solidFill>
+                <a:latin typeface="Calibri" pitchFamily="34" charset="0"/>
+                <a:ea typeface="Calibri" pitchFamily="34" charset="-122"/>
+                <a:cs typeface="Calibri" pitchFamily="34" charset="-120"/>
+              </a:rPr>
+              <a:t>No. If a table is free at 20:00 the restaurant will seat you at 20:00. I used &lt; and &gt; rather than &lt;= and &gt;=, which sounds trivial and is not.</a:t>
+            </a:r>
+            <a:endParaRPr lang="en-US" sz="1250" dirty="0"/>
+          </a:p>
+        </p:txBody>
+      </p:sp>
+      <p:sp>
+        <p:nvSpPr>
+          <p:cNvPr id="11" name="Shape 9"/>
+          <p:cNvSpPr/>
+          <p:nvPr/>
+        </p:nvSpPr>
+        <p:spPr>
+          <a:xfrm>
+            <a:off x="640080" y="4480560"/>
+            <a:ext cx="420624" cy="420624"/>
+          </a:xfrm>
+          <a:prstGeom prst="ellipse">
+            <a:avLst/>
+          </a:prstGeom>
+          <a:solidFill>
+            <a:srgbClr val="D4A937"/>
+          </a:solidFill>
+          <a:ln/>
+        </p:spPr>
+      </p:sp>
+      <p:sp>
+        <p:nvSpPr>
+          <p:cNvPr id="12" name="Text 10"/>
+          <p:cNvSpPr/>
+          <p:nvPr/>
+        </p:nvSpPr>
+        <p:spPr>
+          <a:xfrm>
+            <a:off x="640080" y="4480560"/>
+            <a:ext cx="420624" cy="420624"/>
+          </a:xfrm>
+          <a:prstGeom prst="rect">
+            <a:avLst/>
+          </a:prstGeom>
+          <a:noFill/>
+          <a:ln/>
+        </p:spPr>
+        <p:txBody>
+          <a:bodyPr wrap="square" lIns="0" tIns="0" rIns="0" bIns="0" rtlCol="0" anchor="ctr"/>
+          <a:lstStyle/>
+          <a:p>
+            <a:pPr algn="ctr" indent="0" marL="0">
+              <a:buNone/>
+            </a:pPr>
+            <a:r>
+              <a:rPr lang="en-US" sz="1400" b="1" dirty="0">
+                <a:solidFill>
+                  <a:srgbClr val="071310"/>
+                </a:solidFill>
+                <a:latin typeface="Calibri" pitchFamily="34" charset="0"/>
+                <a:ea typeface="Calibri" pitchFamily="34" charset="-122"/>
+                <a:cs typeface="Calibri" pitchFamily="34" charset="-120"/>
+              </a:rPr>
+              <a:t>2</a:t>
+            </a:r>
+            <a:endParaRPr lang="en-US" sz="1400" dirty="0"/>
+          </a:p>
+        </p:txBody>
+      </p:sp>
+      <p:sp>
+        <p:nvSpPr>
+          <p:cNvPr id="13" name="Text 11"/>
+          <p:cNvSpPr/>
+          <p:nvPr/>
+        </p:nvSpPr>
+        <p:spPr>
+          <a:xfrm>
+            <a:off x="1188720" y="4443984"/>
+            <a:ext cx="10241280" cy="310896"/>
+          </a:xfrm>
+          <a:prstGeom prst="rect">
+            <a:avLst/>
+          </a:prstGeom>
+          <a:noFill/>
+          <a:ln/>
+        </p:spPr>
+        <p:txBody>
+          <a:bodyPr wrap="square" lIns="0" tIns="0" rIns="0" bIns="0" rtlCol="0" anchor="ctr"/>
+          <a:lstStyle/>
+          <a:p>
+            <a:pPr indent="0" marL="0">
+              <a:buNone/>
+            </a:pPr>
+            <a:r>
+              <a:rPr lang="en-US" sz="1500" b="1" dirty="0">
+                <a:solidFill>
+                  <a:srgbClr val="F5F0E6"/>
+                </a:solidFill>
+                <a:latin typeface="Calibri" pitchFamily="34" charset="0"/>
+                <a:ea typeface="Calibri" pitchFamily="34" charset="-122"/>
+                <a:cs typeface="Calibri" pitchFamily="34" charset="-120"/>
+              </a:rPr>
+              <a:t>Which table should a couple get?</a:t>
+            </a:r>
+            <a:endParaRPr lang="en-US" sz="1500" dirty="0"/>
+          </a:p>
+        </p:txBody>
+      </p:sp>
+      <p:sp>
+        <p:nvSpPr>
+          <p:cNvPr id="14" name="Text 12"/>
+          <p:cNvSpPr/>
+          <p:nvPr/>
+        </p:nvSpPr>
+        <p:spPr>
+          <a:xfrm>
+            <a:off x="1188720" y="4754880"/>
+            <a:ext cx="10058400" cy="548640"/>
+          </a:xfrm>
+          <a:prstGeom prst="rect">
+            <a:avLst/>
+          </a:prstGeom>
+          <a:noFill/>
+          <a:ln/>
+        </p:spPr>
+        <p:txBody>
+          <a:bodyPr wrap="square" lIns="0" tIns="0" rIns="0" bIns="0" rtlCol="0" anchor="ctr"/>
+          <a:lstStyle/>
+          <a:p>
+            <a:pPr indent="0" marL="0">
+              <a:buNone/>
+            </a:pPr>
+            <a:r>
+              <a:rPr lang="en-US" sz="1250" dirty="0">
+                <a:solidFill>
+                  <a:srgbClr val="97B0A2"/>
+                </a:solidFill>
+                <a:latin typeface="Calibri" pitchFamily="34" charset="0"/>
+                <a:ea typeface="Calibri" pitchFamily="34" charset="-122"/>
+                <a:cs typeface="Calibri" pitchFamily="34" charset="-120"/>
+              </a:rPr>
+              <a:t>The smallest one that fits. My first version gave them whatever was free first, which meant a six-top could get used up by two people.</a:t>
+            </a:r>
+            <a:endParaRPr lang="en-US" sz="1250" dirty="0"/>
+          </a:p>
+        </p:txBody>
+      </p:sp>
+      <p:sp>
+        <p:nvSpPr>
+          <p:cNvPr id="15" name="Shape 13"/>
+          <p:cNvSpPr/>
+          <p:nvPr/>
+        </p:nvSpPr>
+        <p:spPr>
+          <a:xfrm>
+            <a:off x="640080" y="5440680"/>
+            <a:ext cx="420624" cy="420624"/>
+          </a:xfrm>
+          <a:prstGeom prst="ellipse">
+            <a:avLst/>
+          </a:prstGeom>
+          <a:solidFill>
+            <a:srgbClr val="D4A937"/>
+          </a:solidFill>
+          <a:ln/>
+        </p:spPr>
+      </p:sp>
+      <p:sp>
+        <p:nvSpPr>
+          <p:cNvPr id="16" name="Text 14"/>
+          <p:cNvSpPr/>
+          <p:nvPr/>
+        </p:nvSpPr>
+        <p:spPr>
+          <a:xfrm>
+            <a:off x="640080" y="5440680"/>
+            <a:ext cx="420624" cy="420624"/>
+          </a:xfrm>
+          <a:prstGeom prst="rect">
+            <a:avLst/>
+          </a:prstGeom>
+          <a:noFill/>
+          <a:ln/>
+        </p:spPr>
+        <p:txBody>
+          <a:bodyPr wrap="square" lIns="0" tIns="0" rIns="0" bIns="0" rtlCol="0" anchor="ctr"/>
+          <a:lstStyle/>
+          <a:p>
+            <a:pPr algn="ctr" indent="0" marL="0">
+              <a:buNone/>
+            </a:pPr>
+            <a:r>
+              <a:rPr lang="en-US" sz="1400" b="1" dirty="0">
+                <a:solidFill>
+                  <a:srgbClr val="071310"/>
+                </a:solidFill>
+                <a:latin typeface="Calibri" pitchFamily="34" charset="0"/>
+                <a:ea typeface="Calibri" pitchFamily="34" charset="-122"/>
+                <a:cs typeface="Calibri" pitchFamily="34" charset="-120"/>
+              </a:rPr>
+              <a:t>3</a:t>
+            </a:r>
+            <a:endParaRPr lang="en-US" sz="1400" dirty="0"/>
+          </a:p>
+        </p:txBody>
+      </p:sp>
+      <p:sp>
+        <p:nvSpPr>
+          <p:cNvPr id="17" name="Text 15"/>
+          <p:cNvSpPr/>
+          <p:nvPr/>
+        </p:nvSpPr>
+        <p:spPr>
+          <a:xfrm>
+            <a:off x="1188720" y="5404104"/>
+            <a:ext cx="10241280" cy="310896"/>
+          </a:xfrm>
+          <a:prstGeom prst="rect">
+            <a:avLst/>
+          </a:prstGeom>
+          <a:noFill/>
+          <a:ln/>
+        </p:spPr>
+        <p:txBody>
+          <a:bodyPr wrap="square" lIns="0" tIns="0" rIns="0" bIns="0" rtlCol="0" anchor="ctr"/>
+          <a:lstStyle/>
+          <a:p>
+            <a:pPr indent="0" marL="0">
+              <a:buNone/>
+            </a:pPr>
+            <a:r>
+              <a:rPr lang="en-US" sz="1500" b="1" dirty="0">
+                <a:solidFill>
+                  <a:srgbClr val="F5F0E6"/>
+                </a:solidFill>
+                <a:latin typeface="Calibri" pitchFamily="34" charset="0"/>
+                <a:ea typeface="Calibri" pitchFamily="34" charset="-122"/>
+                <a:cs typeface="Calibri" pitchFamily="34" charset="-120"/>
+              </a:rPr>
+              <a:t>What if two people book at the same moment?</a:t>
+            </a:r>
+            <a:endParaRPr lang="en-US" sz="1500" dirty="0"/>
+          </a:p>
+        </p:txBody>
+      </p:sp>
+      <p:sp>
+        <p:nvSpPr>
+          <p:cNvPr id="18" name="Text 16"/>
+          <p:cNvSpPr/>
+          <p:nvPr/>
+        </p:nvSpPr>
+        <p:spPr>
+          <a:xfrm>
+            <a:off x="1188720" y="5715000"/>
+            <a:ext cx="10058400" cy="548640"/>
+          </a:xfrm>
+          <a:prstGeom prst="rect">
+            <a:avLst/>
+          </a:prstGeom>
+          <a:noFill/>
+          <a:ln/>
+        </p:spPr>
+        <p:txBody>
+          <a:bodyPr wrap="square" lIns="0" tIns="0" rIns="0" bIns="0" rtlCol="0" anchor="ctr"/>
+          <a:lstStyle/>
+          <a:p>
+            <a:pPr indent="0" marL="0">
+              <a:buNone/>
+            </a:pPr>
+            <a:r>
+              <a:rPr lang="en-US" sz="1250" dirty="0">
+                <a:solidFill>
+                  <a:srgbClr val="97B0A2"/>
+                </a:solidFill>
+                <a:latin typeface="Calibri" pitchFamily="34" charset="0"/>
+                <a:ea typeface="Calibri" pitchFamily="34" charset="-122"/>
+                <a:cs typeface="Calibri" pitchFamily="34" charset="-120"/>
+              </a:rPr>
+              <a:t>Checking and then inserting leaves a gap where both see the table free. I had to re-check inside a database transaction.</a:t>
+            </a:r>
+            <a:endParaRPr lang="en-US" sz="1250" dirty="0"/>
           </a:p>
         </p:txBody>
       </p:sp>
@@ -6827,7 +7950,7 @@
                 <a:ea typeface="Cambria" pitchFamily="34" charset="-122"/>
                 <a:cs typeface="Cambria" pitchFamily="34" charset="-120"/>
               </a:rPr>
-              <a:t>Choices I had to make</a:t>
+              <a:t>Keeping it secure</a:t>
             </a:r>
             <a:endParaRPr lang="en-US" sz="3600" dirty="0"/>
           </a:p>
@@ -6866,7 +7989,7 @@
                 <a:ea typeface="Calibri" pitchFamily="34" charset="-122"/>
                 <a:cs typeface="Calibri" pitchFamily="34" charset="-120"/>
               </a:rPr>
-              <a:t>And the one place I disagreed with the brief</a:t>
+              <a:t>What I did, and what I learned doing it</a:t>
             </a:r>
             <a:endParaRPr lang="en-US" sz="1400" dirty="0"/>
           </a:p>
@@ -6874,330 +7997,543 @@
       </p:sp>
       <p:sp>
         <p:nvSpPr>
-          <p:cNvPr id="4" name="Text 2"/>
+          <p:cNvPr id="4" name="Shape 2"/>
           <p:cNvSpPr/>
           <p:nvPr/>
         </p:nvSpPr>
         <p:spPr>
           <a:xfrm>
             <a:off x="640080" y="1828800"/>
-            <a:ext cx="3566160" cy="731520"/>
-          </a:xfrm>
-          <a:prstGeom prst="rect">
-            <a:avLst/>
-          </a:prstGeom>
-          <a:noFill/>
-          <a:ln/>
-        </p:spPr>
-        <p:txBody>
-          <a:bodyPr wrap="square" lIns="0" tIns="0" rIns="0" bIns="0" rtlCol="0" anchor="ctr"/>
-          <a:lstStyle/>
-          <a:p>
-            <a:pPr indent="0" marL="0">
-              <a:buNone/>
-            </a:pPr>
-            <a:r>
-              <a:rPr lang="en-US" sz="1450" b="1" dirty="0">
-                <a:solidFill>
-                  <a:srgbClr val="D4A937"/>
-                </a:solidFill>
-                <a:latin typeface="Calibri" pitchFamily="34" charset="0"/>
-                <a:ea typeface="Calibri" pitchFamily="34" charset="-122"/>
-                <a:cs typeface="Calibri" pitchFamily="34" charset="-120"/>
-              </a:rPr>
-              <a:t>SQLite, not MySQL or Postgres</a:t>
-            </a:r>
-            <a:endParaRPr lang="en-US" sz="1450" dirty="0"/>
-          </a:p>
-        </p:txBody>
-      </p:sp>
-      <p:sp>
-        <p:nvSpPr>
-          <p:cNvPr id="5" name="Text 3"/>
-          <p:cNvSpPr/>
-          <p:nvPr/>
-        </p:nvSpPr>
-        <p:spPr>
-          <a:xfrm>
-            <a:off x="4389120" y="1828800"/>
-            <a:ext cx="7132320" cy="731520"/>
-          </a:xfrm>
-          <a:prstGeom prst="rect">
-            <a:avLst/>
-          </a:prstGeom>
-          <a:noFill/>
-          <a:ln/>
-        </p:spPr>
-        <p:txBody>
-          <a:bodyPr wrap="square" lIns="0" tIns="0" rIns="0" bIns="0" rtlCol="0" anchor="ctr"/>
-          <a:lstStyle/>
-          <a:p>
-            <a:pPr indent="0" marL="0">
-              <a:buNone/>
-            </a:pPr>
-            <a:r>
-              <a:rPr lang="en-US" sz="1250" dirty="0">
-                <a:solidFill>
-                  <a:srgbClr val="F5F0E6"/>
-                </a:solidFill>
-                <a:latin typeface="Calibri" pitchFamily="34" charset="0"/>
-                <a:ea typeface="Calibri" pitchFamily="34" charset="-122"/>
-                <a:cs typeface="Calibri" pitchFamily="34" charset="-120"/>
-              </a:rPr>
-              <a:t>It is a file, so this runs on any machine with no database server to install. The schema moves to PostgreSQL unchanged if it were deployed.</a:t>
-            </a:r>
-            <a:endParaRPr lang="en-US" sz="1250" dirty="0"/>
-          </a:p>
-        </p:txBody>
-      </p:sp>
-      <p:sp>
-        <p:nvSpPr>
-          <p:cNvPr id="6" name="Text 4"/>
-          <p:cNvSpPr/>
-          <p:nvPr/>
-        </p:nvSpPr>
-        <p:spPr>
-          <a:xfrm>
-            <a:off x="640080" y="2670048"/>
-            <a:ext cx="3566160" cy="731520"/>
-          </a:xfrm>
-          <a:prstGeom prst="rect">
-            <a:avLst/>
-          </a:prstGeom>
-          <a:noFill/>
-          <a:ln/>
-        </p:spPr>
-        <p:txBody>
-          <a:bodyPr wrap="square" lIns="0" tIns="0" rIns="0" bIns="0" rtlCol="0" anchor="ctr"/>
-          <a:lstStyle/>
-          <a:p>
-            <a:pPr indent="0" marL="0">
-              <a:buNone/>
-            </a:pPr>
-            <a:r>
-              <a:rPr lang="en-US" sz="1450" b="1" dirty="0">
-                <a:solidFill>
-                  <a:srgbClr val="D4A937"/>
-                </a:solidFill>
-                <a:latin typeface="Calibri" pitchFamily="34" charset="0"/>
-                <a:ea typeface="Calibri" pitchFamily="34" charset="-122"/>
-                <a:cs typeface="Calibri" pitchFamily="34" charset="-120"/>
-              </a:rPr>
-              <a:t>Prisma, not raw SQL</a:t>
-            </a:r>
-            <a:endParaRPr lang="en-US" sz="1450" dirty="0"/>
-          </a:p>
-        </p:txBody>
-      </p:sp>
-      <p:sp>
-        <p:nvSpPr>
-          <p:cNvPr id="7" name="Text 5"/>
-          <p:cNvSpPr/>
-          <p:nvPr/>
-        </p:nvSpPr>
-        <p:spPr>
-          <a:xfrm>
-            <a:off x="4389120" y="2670048"/>
-            <a:ext cx="7132320" cy="731520"/>
-          </a:xfrm>
-          <a:prstGeom prst="rect">
-            <a:avLst/>
-          </a:prstGeom>
-          <a:noFill/>
-          <a:ln/>
-        </p:spPr>
-        <p:txBody>
-          <a:bodyPr wrap="square" lIns="0" tIns="0" rIns="0" bIns="0" rtlCol="0" anchor="ctr"/>
-          <a:lstStyle/>
-          <a:p>
-            <a:pPr indent="0" marL="0">
-              <a:buNone/>
-            </a:pPr>
-            <a:r>
-              <a:rPr lang="en-US" sz="1250" dirty="0">
-                <a:solidFill>
-                  <a:srgbClr val="F5F0E6"/>
-                </a:solidFill>
-                <a:latin typeface="Calibri" pitchFamily="34" charset="0"/>
-                <a:ea typeface="Calibri" pitchFamily="34" charset="-122"/>
-                <a:cs typeface="Calibri" pitchFamily="34" charset="-120"/>
-              </a:rPr>
-              <a:t>The lab code built SQL by joining strings together. Prisma gave me a schema file in version control and stopped me writing that.</a:t>
-            </a:r>
-            <a:endParaRPr lang="en-US" sz="1250" dirty="0"/>
-          </a:p>
-        </p:txBody>
-      </p:sp>
-      <p:sp>
-        <p:nvSpPr>
-          <p:cNvPr id="8" name="Text 6"/>
-          <p:cNvSpPr/>
-          <p:nvPr/>
-        </p:nvSpPr>
-        <p:spPr>
-          <a:xfrm>
-            <a:off x="640080" y="3511296"/>
-            <a:ext cx="3566160" cy="731520"/>
-          </a:xfrm>
-          <a:prstGeom prst="rect">
-            <a:avLst/>
-          </a:prstGeom>
-          <a:noFill/>
-          <a:ln/>
-        </p:spPr>
-        <p:txBody>
-          <a:bodyPr wrap="square" lIns="0" tIns="0" rIns="0" bIns="0" rtlCol="0" anchor="ctr"/>
-          <a:lstStyle/>
-          <a:p>
-            <a:pPr indent="0" marL="0">
-              <a:buNone/>
-            </a:pPr>
-            <a:r>
-              <a:rPr lang="en-US" sz="1450" b="1" dirty="0">
-                <a:solidFill>
-                  <a:srgbClr val="D4A937"/>
-                </a:solidFill>
-                <a:latin typeface="Calibri" pitchFamily="34" charset="0"/>
-                <a:ea typeface="Calibri" pitchFamily="34" charset="-122"/>
-                <a:cs typeface="Calibri" pitchFamily="34" charset="-120"/>
-              </a:rPr>
-              <a:t>Context, not Redux</a:t>
-            </a:r>
-            <a:endParaRPr lang="en-US" sz="1450" dirty="0"/>
-          </a:p>
-        </p:txBody>
-      </p:sp>
-      <p:sp>
-        <p:nvSpPr>
-          <p:cNvPr id="9" name="Text 7"/>
-          <p:cNvSpPr/>
-          <p:nvPr/>
-        </p:nvSpPr>
-        <p:spPr>
-          <a:xfrm>
-            <a:off x="4389120" y="3511296"/>
-            <a:ext cx="7132320" cy="731520"/>
-          </a:xfrm>
-          <a:prstGeom prst="rect">
-            <a:avLst/>
-          </a:prstGeom>
-          <a:noFill/>
-          <a:ln/>
-        </p:spPr>
-        <p:txBody>
-          <a:bodyPr wrap="square" lIns="0" tIns="0" rIns="0" bIns="0" rtlCol="0" anchor="ctr"/>
-          <a:lstStyle/>
-          <a:p>
-            <a:pPr indent="0" marL="0">
-              <a:buNone/>
-            </a:pPr>
-            <a:r>
-              <a:rPr lang="en-US" sz="1250" dirty="0">
-                <a:solidFill>
-                  <a:srgbClr val="F5F0E6"/>
-                </a:solidFill>
-                <a:latin typeface="Calibri" pitchFamily="34" charset="0"/>
-                <a:ea typeface="Calibri" pitchFamily="34" charset="-122"/>
-                <a:cs typeface="Calibri" pitchFamily="34" charset="-120"/>
-              </a:rPr>
-              <a:t>The only things that are truly global are who is logged in and the toast messages. Redux for two values felt like overkill.</a:t>
-            </a:r>
-            <a:endParaRPr lang="en-US" sz="1250" dirty="0"/>
-          </a:p>
-        </p:txBody>
-      </p:sp>
-      <p:sp>
-        <p:nvSpPr>
-          <p:cNvPr id="10" name="Text 8"/>
-          <p:cNvSpPr/>
-          <p:nvPr/>
-        </p:nvSpPr>
-        <p:spPr>
-          <a:xfrm>
-            <a:off x="640080" y="4352544"/>
-            <a:ext cx="3566160" cy="731520"/>
-          </a:xfrm>
-          <a:prstGeom prst="rect">
-            <a:avLst/>
-          </a:prstGeom>
-          <a:noFill/>
-          <a:ln/>
-        </p:spPr>
-        <p:txBody>
-          <a:bodyPr wrap="square" lIns="0" tIns="0" rIns="0" bIns="0" rtlCol="0" anchor="ctr"/>
-          <a:lstStyle/>
-          <a:p>
-            <a:pPr indent="0" marL="0">
-              <a:buNone/>
-            </a:pPr>
-            <a:r>
-              <a:rPr lang="en-US" sz="1450" b="1" dirty="0">
-                <a:solidFill>
-                  <a:srgbClr val="D4A937"/>
-                </a:solidFill>
-                <a:latin typeface="Calibri" pitchFamily="34" charset="0"/>
-                <a:ea typeface="Calibri" pitchFamily="34" charset="-122"/>
-                <a:cs typeface="Calibri" pitchFamily="34" charset="-120"/>
-              </a:rPr>
-              <a:t>Vite, not Create React App</a:t>
-            </a:r>
-            <a:endParaRPr lang="en-US" sz="1450" dirty="0"/>
-          </a:p>
-        </p:txBody>
-      </p:sp>
-      <p:sp>
-        <p:nvSpPr>
-          <p:cNvPr id="11" name="Text 9"/>
-          <p:cNvSpPr/>
-          <p:nvPr/>
-        </p:nvSpPr>
-        <p:spPr>
-          <a:xfrm>
-            <a:off x="4389120" y="4352544"/>
-            <a:ext cx="7132320" cy="731520"/>
-          </a:xfrm>
-          <a:prstGeom prst="rect">
-            <a:avLst/>
-          </a:prstGeom>
-          <a:noFill/>
-          <a:ln/>
-        </p:spPr>
-        <p:txBody>
-          <a:bodyPr wrap="square" lIns="0" tIns="0" rIns="0" bIns="0" rtlCol="0" anchor="ctr"/>
-          <a:lstStyle/>
-          <a:p>
-            <a:pPr indent="0" marL="0">
-              <a:buNone/>
-            </a:pPr>
-            <a:r>
-              <a:rPr lang="en-US" sz="1250" dirty="0">
-                <a:solidFill>
-                  <a:srgbClr val="F5F0E6"/>
-                </a:solidFill>
-                <a:latin typeface="Calibri" pitchFamily="34" charset="0"/>
-                <a:ea typeface="Calibri" pitchFamily="34" charset="-122"/>
-                <a:cs typeface="Calibri" pitchFamily="34" charset="-120"/>
-              </a:rPr>
-              <a:t>CRA is deprecated now and noticeably slower to start.</a:t>
-            </a:r>
-            <a:endParaRPr lang="en-US" sz="1250" dirty="0"/>
-          </a:p>
-        </p:txBody>
-      </p:sp>
-      <p:sp>
-        <p:nvSpPr>
-          <p:cNvPr id="12" name="Shape 10"/>
-          <p:cNvSpPr/>
-          <p:nvPr/>
-        </p:nvSpPr>
-        <p:spPr>
-          <a:xfrm>
-            <a:off x="640080" y="5394960"/>
-            <a:ext cx="10881360" cy="1143000"/>
+            <a:ext cx="8046720" cy="713232"/>
           </a:xfrm>
           <a:prstGeom prst="roundRect">
             <a:avLst>
-              <a:gd name="adj" fmla="val 7200"/>
+              <a:gd name="adj" fmla="val 11538"/>
+            </a:avLst>
+          </a:prstGeom>
+          <a:solidFill>
+            <a:srgbClr val="102B23"/>
+          </a:solidFill>
+          <a:ln w="12700">
+            <a:solidFill>
+              <a:srgbClr val="17392E"/>
+            </a:solidFill>
+            <a:prstDash val="solid"/>
+          </a:ln>
+        </p:spPr>
+      </p:sp>
+      <p:sp>
+        <p:nvSpPr>
+          <p:cNvPr id="5" name="Text 3"/>
+          <p:cNvSpPr/>
+          <p:nvPr/>
+        </p:nvSpPr>
+        <p:spPr>
+          <a:xfrm>
+            <a:off x="914400" y="1901952"/>
+            <a:ext cx="2194560" cy="274320"/>
+          </a:xfrm>
+          <a:prstGeom prst="rect">
+            <a:avLst/>
+          </a:prstGeom>
+          <a:noFill/>
+          <a:ln/>
+        </p:spPr>
+        <p:txBody>
+          <a:bodyPr wrap="square" lIns="0" tIns="0" rIns="0" bIns="0" rtlCol="0" anchor="ctr"/>
+          <a:lstStyle/>
+          <a:p>
+            <a:pPr indent="0" marL="0">
+              <a:buNone/>
+            </a:pPr>
+            <a:r>
+              <a:rPr lang="en-US" sz="1350" b="1" dirty="0">
+                <a:solidFill>
+                  <a:srgbClr val="D4A937"/>
+                </a:solidFill>
+                <a:latin typeface="Calibri" pitchFamily="34" charset="0"/>
+                <a:ea typeface="Calibri" pitchFamily="34" charset="-122"/>
+                <a:cs typeface="Calibri" pitchFamily="34" charset="-120"/>
+              </a:rPr>
+              <a:t>Passwords</a:t>
+            </a:r>
+            <a:endParaRPr lang="en-US" sz="1350" dirty="0"/>
+          </a:p>
+        </p:txBody>
+      </p:sp>
+      <p:sp>
+        <p:nvSpPr>
+          <p:cNvPr id="6" name="Text 4"/>
+          <p:cNvSpPr/>
+          <p:nvPr/>
+        </p:nvSpPr>
+        <p:spPr>
+          <a:xfrm>
+            <a:off x="3200400" y="1874520"/>
+            <a:ext cx="5303520" cy="621792"/>
+          </a:xfrm>
+          <a:prstGeom prst="rect">
+            <a:avLst/>
+          </a:prstGeom>
+          <a:noFill/>
+          <a:ln/>
+        </p:spPr>
+        <p:txBody>
+          <a:bodyPr wrap="square" lIns="0" tIns="0" rIns="0" bIns="0" rtlCol="0" anchor="ctr"/>
+          <a:lstStyle/>
+          <a:p>
+            <a:pPr indent="0" marL="0">
+              <a:buNone/>
+            </a:pPr>
+            <a:r>
+              <a:rPr lang="en-US" sz="1150" dirty="0">
+                <a:solidFill>
+                  <a:srgbClr val="F5F0E6"/>
+                </a:solidFill>
+                <a:latin typeface="Calibri" pitchFamily="34" charset="0"/>
+                <a:ea typeface="Calibri" pitchFamily="34" charset="-122"/>
+                <a:cs typeface="Calibri" pitchFamily="34" charset="-120"/>
+              </a:rPr>
+              <a:t>Hashed with bcrypt. The lab code we did in week 7 stored them as plain text, which I did not want to copy.</a:t>
+            </a:r>
+            <a:endParaRPr lang="en-US" sz="1150" dirty="0"/>
+          </a:p>
+        </p:txBody>
+      </p:sp>
+      <p:sp>
+        <p:nvSpPr>
+          <p:cNvPr id="7" name="Shape 5"/>
+          <p:cNvSpPr/>
+          <p:nvPr/>
+        </p:nvSpPr>
+        <p:spPr>
+          <a:xfrm>
+            <a:off x="640080" y="2651760"/>
+            <a:ext cx="8046720" cy="713232"/>
+          </a:xfrm>
+          <a:prstGeom prst="roundRect">
+            <a:avLst>
+              <a:gd name="adj" fmla="val 11538"/>
+            </a:avLst>
+          </a:prstGeom>
+          <a:solidFill>
+            <a:srgbClr val="102B23"/>
+          </a:solidFill>
+          <a:ln w="12700">
+            <a:solidFill>
+              <a:srgbClr val="17392E"/>
+            </a:solidFill>
+            <a:prstDash val="solid"/>
+          </a:ln>
+        </p:spPr>
+      </p:sp>
+      <p:sp>
+        <p:nvSpPr>
+          <p:cNvPr id="8" name="Text 6"/>
+          <p:cNvSpPr/>
+          <p:nvPr/>
+        </p:nvSpPr>
+        <p:spPr>
+          <a:xfrm>
+            <a:off x="914400" y="2724912"/>
+            <a:ext cx="2194560" cy="274320"/>
+          </a:xfrm>
+          <a:prstGeom prst="rect">
+            <a:avLst/>
+          </a:prstGeom>
+          <a:noFill/>
+          <a:ln/>
+        </p:spPr>
+        <p:txBody>
+          <a:bodyPr wrap="square" lIns="0" tIns="0" rIns="0" bIns="0" rtlCol="0" anchor="ctr"/>
+          <a:lstStyle/>
+          <a:p>
+            <a:pPr indent="0" marL="0">
+              <a:buNone/>
+            </a:pPr>
+            <a:r>
+              <a:rPr lang="en-US" sz="1350" b="1" dirty="0">
+                <a:solidFill>
+                  <a:srgbClr val="D4A937"/>
+                </a:solidFill>
+                <a:latin typeface="Calibri" pitchFamily="34" charset="0"/>
+                <a:ea typeface="Calibri" pitchFamily="34" charset="-122"/>
+                <a:cs typeface="Calibri" pitchFamily="34" charset="-120"/>
+              </a:rPr>
+              <a:t>Logging in</a:t>
+            </a:r>
+            <a:endParaRPr lang="en-US" sz="1350" dirty="0"/>
+          </a:p>
+        </p:txBody>
+      </p:sp>
+      <p:sp>
+        <p:nvSpPr>
+          <p:cNvPr id="9" name="Text 7"/>
+          <p:cNvSpPr/>
+          <p:nvPr/>
+        </p:nvSpPr>
+        <p:spPr>
+          <a:xfrm>
+            <a:off x="3200400" y="2697480"/>
+            <a:ext cx="5303520" cy="621792"/>
+          </a:xfrm>
+          <a:prstGeom prst="rect">
+            <a:avLst/>
+          </a:prstGeom>
+          <a:noFill/>
+          <a:ln/>
+        </p:spPr>
+        <p:txBody>
+          <a:bodyPr wrap="square" lIns="0" tIns="0" rIns="0" bIns="0" rtlCol="0" anchor="ctr"/>
+          <a:lstStyle/>
+          <a:p>
+            <a:pPr indent="0" marL="0">
+              <a:buNone/>
+            </a:pPr>
+            <a:r>
+              <a:rPr lang="en-US" sz="1150" dirty="0">
+                <a:solidFill>
+                  <a:srgbClr val="F5F0E6"/>
+                </a:solidFill>
+                <a:latin typeface="Calibri" pitchFamily="34" charset="0"/>
+                <a:ea typeface="Calibri" pitchFamily="34" charset="-122"/>
+                <a:cs typeface="Calibri" pitchFamily="34" charset="-120"/>
+              </a:rPr>
+              <a:t>You get a JWT. It is signed, not encrypted — anyone can read what is in it, but they cannot change it without my secret key.</a:t>
+            </a:r>
+            <a:endParaRPr lang="en-US" sz="1150" dirty="0"/>
+          </a:p>
+        </p:txBody>
+      </p:sp>
+      <p:sp>
+        <p:nvSpPr>
+          <p:cNvPr id="10" name="Shape 8"/>
+          <p:cNvSpPr/>
+          <p:nvPr/>
+        </p:nvSpPr>
+        <p:spPr>
+          <a:xfrm>
+            <a:off x="640080" y="3474720"/>
+            <a:ext cx="8046720" cy="713232"/>
+          </a:xfrm>
+          <a:prstGeom prst="roundRect">
+            <a:avLst>
+              <a:gd name="adj" fmla="val 11538"/>
+            </a:avLst>
+          </a:prstGeom>
+          <a:solidFill>
+            <a:srgbClr val="102B23"/>
+          </a:solidFill>
+          <a:ln w="12700">
+            <a:solidFill>
+              <a:srgbClr val="17392E"/>
+            </a:solidFill>
+            <a:prstDash val="solid"/>
+          </a:ln>
+        </p:spPr>
+      </p:sp>
+      <p:sp>
+        <p:nvSpPr>
+          <p:cNvPr id="11" name="Text 9"/>
+          <p:cNvSpPr/>
+          <p:nvPr/>
+        </p:nvSpPr>
+        <p:spPr>
+          <a:xfrm>
+            <a:off x="914400" y="3547872"/>
+            <a:ext cx="2194560" cy="274320"/>
+          </a:xfrm>
+          <a:prstGeom prst="rect">
+            <a:avLst/>
+          </a:prstGeom>
+          <a:noFill/>
+          <a:ln/>
+        </p:spPr>
+        <p:txBody>
+          <a:bodyPr wrap="square" lIns="0" tIns="0" rIns="0" bIns="0" rtlCol="0" anchor="ctr"/>
+          <a:lstStyle/>
+          <a:p>
+            <a:pPr indent="0" marL="0">
+              <a:buNone/>
+            </a:pPr>
+            <a:r>
+              <a:rPr lang="en-US" sz="1350" b="1" dirty="0">
+                <a:solidFill>
+                  <a:srgbClr val="D4A937"/>
+                </a:solidFill>
+                <a:latin typeface="Calibri" pitchFamily="34" charset="0"/>
+                <a:ea typeface="Calibri" pitchFamily="34" charset="-122"/>
+                <a:cs typeface="Calibri" pitchFamily="34" charset="-120"/>
+              </a:rPr>
+              <a:t>Checking the token</a:t>
+            </a:r>
+            <a:endParaRPr lang="en-US" sz="1350" dirty="0"/>
+          </a:p>
+        </p:txBody>
+      </p:sp>
+      <p:sp>
+        <p:nvSpPr>
+          <p:cNvPr id="12" name="Text 10"/>
+          <p:cNvSpPr/>
+          <p:nvPr/>
+        </p:nvSpPr>
+        <p:spPr>
+          <a:xfrm>
+            <a:off x="3200400" y="3520440"/>
+            <a:ext cx="5303520" cy="621792"/>
+          </a:xfrm>
+          <a:prstGeom prst="rect">
+            <a:avLst/>
+          </a:prstGeom>
+          <a:noFill/>
+          <a:ln/>
+        </p:spPr>
+        <p:txBody>
+          <a:bodyPr wrap="square" lIns="0" tIns="0" rIns="0" bIns="0" rtlCol="0" anchor="ctr"/>
+          <a:lstStyle/>
+          <a:p>
+            <a:pPr indent="0" marL="0">
+              <a:buNone/>
+            </a:pPr>
+            <a:r>
+              <a:rPr lang="en-US" sz="1150" dirty="0">
+                <a:solidFill>
+                  <a:srgbClr val="F5F0E6"/>
+                </a:solidFill>
+                <a:latin typeface="Calibri" pitchFamily="34" charset="0"/>
+                <a:ea typeface="Calibri" pitchFamily="34" charset="-122"/>
+                <a:cs typeface="Calibri" pitchFamily="34" charset="-120"/>
+              </a:rPr>
+              <a:t>I look the user up in the database every request rather than trusting what the token says. A token lasts 7 days; an account might not.</a:t>
+            </a:r>
+            <a:endParaRPr lang="en-US" sz="1150" dirty="0"/>
+          </a:p>
+        </p:txBody>
+      </p:sp>
+      <p:sp>
+        <p:nvSpPr>
+          <p:cNvPr id="13" name="Shape 11"/>
+          <p:cNvSpPr/>
+          <p:nvPr/>
+        </p:nvSpPr>
+        <p:spPr>
+          <a:xfrm>
+            <a:off x="640080" y="4297680"/>
+            <a:ext cx="8046720" cy="713232"/>
+          </a:xfrm>
+          <a:prstGeom prst="roundRect">
+            <a:avLst>
+              <a:gd name="adj" fmla="val 11538"/>
+            </a:avLst>
+          </a:prstGeom>
+          <a:solidFill>
+            <a:srgbClr val="102B23"/>
+          </a:solidFill>
+          <a:ln w="12700">
+            <a:solidFill>
+              <a:srgbClr val="17392E"/>
+            </a:solidFill>
+            <a:prstDash val="solid"/>
+          </a:ln>
+        </p:spPr>
+      </p:sp>
+      <p:sp>
+        <p:nvSpPr>
+          <p:cNvPr id="14" name="Text 12"/>
+          <p:cNvSpPr/>
+          <p:nvPr/>
+        </p:nvSpPr>
+        <p:spPr>
+          <a:xfrm>
+            <a:off x="914400" y="4370832"/>
+            <a:ext cx="2194560" cy="274320"/>
+          </a:xfrm>
+          <a:prstGeom prst="rect">
+            <a:avLst/>
+          </a:prstGeom>
+          <a:noFill/>
+          <a:ln/>
+        </p:spPr>
+        <p:txBody>
+          <a:bodyPr wrap="square" lIns="0" tIns="0" rIns="0" bIns="0" rtlCol="0" anchor="ctr"/>
+          <a:lstStyle/>
+          <a:p>
+            <a:pPr indent="0" marL="0">
+              <a:buNone/>
+            </a:pPr>
+            <a:r>
+              <a:rPr lang="en-US" sz="1350" b="1" dirty="0">
+                <a:solidFill>
+                  <a:srgbClr val="D4A937"/>
+                </a:solidFill>
+                <a:latin typeface="Calibri" pitchFamily="34" charset="0"/>
+                <a:ea typeface="Calibri" pitchFamily="34" charset="-122"/>
+                <a:cs typeface="Calibri" pitchFamily="34" charset="-120"/>
+              </a:rPr>
+              <a:t>Wrong password vs unknown email</a:t>
+            </a:r>
+            <a:endParaRPr lang="en-US" sz="1350" dirty="0"/>
+          </a:p>
+        </p:txBody>
+      </p:sp>
+      <p:sp>
+        <p:nvSpPr>
+          <p:cNvPr id="15" name="Text 13"/>
+          <p:cNvSpPr/>
+          <p:nvPr/>
+        </p:nvSpPr>
+        <p:spPr>
+          <a:xfrm>
+            <a:off x="3200400" y="4343400"/>
+            <a:ext cx="5303520" cy="621792"/>
+          </a:xfrm>
+          <a:prstGeom prst="rect">
+            <a:avLst/>
+          </a:prstGeom>
+          <a:noFill/>
+          <a:ln/>
+        </p:spPr>
+        <p:txBody>
+          <a:bodyPr wrap="square" lIns="0" tIns="0" rIns="0" bIns="0" rtlCol="0" anchor="ctr"/>
+          <a:lstStyle/>
+          <a:p>
+            <a:pPr indent="0" marL="0">
+              <a:buNone/>
+            </a:pPr>
+            <a:r>
+              <a:rPr lang="en-US" sz="1150" dirty="0">
+                <a:solidFill>
+                  <a:srgbClr val="F5F0E6"/>
+                </a:solidFill>
+                <a:latin typeface="Calibri" pitchFamily="34" charset="0"/>
+                <a:ea typeface="Calibri" pitchFamily="34" charset="-122"/>
+                <a:cs typeface="Calibri" pitchFamily="34" charset="-120"/>
+              </a:rPr>
+              <a:t>Both give exactly the same error. Otherwise you could use the login form to find out which emails are registered.</a:t>
+            </a:r>
+            <a:endParaRPr lang="en-US" sz="1150" dirty="0"/>
+          </a:p>
+        </p:txBody>
+      </p:sp>
+      <p:sp>
+        <p:nvSpPr>
+          <p:cNvPr id="16" name="Shape 14"/>
+          <p:cNvSpPr/>
+          <p:nvPr/>
+        </p:nvSpPr>
+        <p:spPr>
+          <a:xfrm>
+            <a:off x="640080" y="5120640"/>
+            <a:ext cx="8046720" cy="713232"/>
+          </a:xfrm>
+          <a:prstGeom prst="roundRect">
+            <a:avLst>
+              <a:gd name="adj" fmla="val 11538"/>
+            </a:avLst>
+          </a:prstGeom>
+          <a:solidFill>
+            <a:srgbClr val="102B23"/>
+          </a:solidFill>
+          <a:ln w="12700">
+            <a:solidFill>
+              <a:srgbClr val="17392E"/>
+            </a:solidFill>
+            <a:prstDash val="solid"/>
+          </a:ln>
+        </p:spPr>
+      </p:sp>
+      <p:sp>
+        <p:nvSpPr>
+          <p:cNvPr id="17" name="Text 15"/>
+          <p:cNvSpPr/>
+          <p:nvPr/>
+        </p:nvSpPr>
+        <p:spPr>
+          <a:xfrm>
+            <a:off x="914400" y="5193792"/>
+            <a:ext cx="2194560" cy="274320"/>
+          </a:xfrm>
+          <a:prstGeom prst="rect">
+            <a:avLst/>
+          </a:prstGeom>
+          <a:noFill/>
+          <a:ln/>
+        </p:spPr>
+        <p:txBody>
+          <a:bodyPr wrap="square" lIns="0" tIns="0" rIns="0" bIns="0" rtlCol="0" anchor="ctr"/>
+          <a:lstStyle/>
+          <a:p>
+            <a:pPr indent="0" marL="0">
+              <a:buNone/>
+            </a:pPr>
+            <a:r>
+              <a:rPr lang="en-US" sz="1350" b="1" dirty="0">
+                <a:solidFill>
+                  <a:srgbClr val="D4A937"/>
+                </a:solidFill>
+                <a:latin typeface="Calibri" pitchFamily="34" charset="0"/>
+                <a:ea typeface="Calibri" pitchFamily="34" charset="-122"/>
+                <a:cs typeface="Calibri" pitchFamily="34" charset="-120"/>
+              </a:rPr>
+              <a:t>Other restaurants</a:t>
+            </a:r>
+            <a:endParaRPr lang="en-US" sz="1350" dirty="0"/>
+          </a:p>
+        </p:txBody>
+      </p:sp>
+      <p:sp>
+        <p:nvSpPr>
+          <p:cNvPr id="18" name="Text 16"/>
+          <p:cNvSpPr/>
+          <p:nvPr/>
+        </p:nvSpPr>
+        <p:spPr>
+          <a:xfrm>
+            <a:off x="3200400" y="5166360"/>
+            <a:ext cx="5303520" cy="621792"/>
+          </a:xfrm>
+          <a:prstGeom prst="rect">
+            <a:avLst/>
+          </a:prstGeom>
+          <a:noFill/>
+          <a:ln/>
+        </p:spPr>
+        <p:txBody>
+          <a:bodyPr wrap="square" lIns="0" tIns="0" rIns="0" bIns="0" rtlCol="0" anchor="ctr"/>
+          <a:lstStyle/>
+          <a:p>
+            <a:pPr indent="0" marL="0">
+              <a:buNone/>
+            </a:pPr>
+            <a:r>
+              <a:rPr lang="en-US" sz="1150" dirty="0">
+                <a:solidFill>
+                  <a:srgbClr val="F5F0E6"/>
+                </a:solidFill>
+                <a:latin typeface="Calibri" pitchFamily="34" charset="0"/>
+                <a:ea typeface="Calibri" pitchFamily="34" charset="-122"/>
+                <a:cs typeface="Calibri" pitchFamily="34" charset="-120"/>
+              </a:rPr>
+              <a:t>You get a 404, not a 403. A 403 would tell you the booking exists, which is already more than you should know.</a:t>
+            </a:r>
+            <a:endParaRPr lang="en-US" sz="1150" dirty="0"/>
+          </a:p>
+        </p:txBody>
+      </p:sp>
+      <p:sp>
+        <p:nvSpPr>
+          <p:cNvPr id="19" name="Shape 17"/>
+          <p:cNvSpPr/>
+          <p:nvPr/>
+        </p:nvSpPr>
+        <p:spPr>
+          <a:xfrm>
+            <a:off x="8961120" y="1828800"/>
+            <a:ext cx="2560320" cy="4023360"/>
+          </a:xfrm>
+          <a:prstGeom prst="roundRect">
+            <a:avLst>
+              <a:gd name="adj" fmla="val 3214"/>
             </a:avLst>
           </a:prstGeom>
           <a:solidFill>
@@ -7213,69 +8549,69 @@
       </p:sp>
       <p:sp>
         <p:nvSpPr>
-          <p:cNvPr id="13" name="Text 11"/>
-          <p:cNvSpPr/>
-          <p:nvPr/>
-        </p:nvSpPr>
-        <p:spPr>
-          <a:xfrm>
-            <a:off x="960120" y="5532120"/>
-            <a:ext cx="10241280" cy="320040"/>
-          </a:xfrm>
-          <a:prstGeom prst="rect">
-            <a:avLst/>
-          </a:prstGeom>
-          <a:noFill/>
-          <a:ln/>
-        </p:spPr>
-        <p:txBody>
-          <a:bodyPr wrap="square" lIns="0" tIns="0" rIns="0" bIns="0" rtlCol="0" anchor="ctr"/>
-          <a:lstStyle/>
-          <a:p>
-            <a:pPr indent="0" marL="0">
-              <a:buNone/>
-            </a:pPr>
-            <a:r>
-              <a:rPr lang="en-US" sz="1400" b="1" dirty="0">
-                <a:solidFill>
-                  <a:srgbClr val="F5D77A"/>
-                </a:solidFill>
-                <a:latin typeface="Calibri" pitchFamily="34" charset="0"/>
-                <a:ea typeface="Calibri" pitchFamily="34" charset="-122"/>
-                <a:cs typeface="Calibri" pitchFamily="34" charset="-120"/>
-              </a:rPr>
-              <a:t>The brief asks for a Django ORM</a:t>
-            </a:r>
-            <a:endParaRPr lang="en-US" sz="1400" dirty="0"/>
-          </a:p>
-        </p:txBody>
-      </p:sp>
-      <p:sp>
-        <p:nvSpPr>
-          <p:cNvPr id="14" name="Text 12"/>
-          <p:cNvSpPr/>
-          <p:nvPr/>
-        </p:nvSpPr>
-        <p:spPr>
-          <a:xfrm>
-            <a:off x="960120" y="5897880"/>
-            <a:ext cx="10241280" cy="548640"/>
-          </a:xfrm>
-          <a:prstGeom prst="rect">
-            <a:avLst/>
-          </a:prstGeom>
-          <a:noFill/>
-          <a:ln/>
-        </p:spPr>
-        <p:txBody>
-          <a:bodyPr wrap="square" lIns="0" tIns="0" rIns="0" bIns="0" rtlCol="0" anchor="ctr"/>
-          <a:lstStyle/>
-          <a:p>
-            <a:pPr indent="0" marL="0">
-              <a:buNone/>
-            </a:pPr>
-            <a:r>
-              <a:rPr lang="en-US" sz="1250" dirty="0">
+          <p:cNvPr id="20" name="Text 18"/>
+          <p:cNvSpPr/>
+          <p:nvPr/>
+        </p:nvSpPr>
+        <p:spPr>
+          <a:xfrm>
+            <a:off x="9189720" y="2103120"/>
+            <a:ext cx="2103120" cy="731520"/>
+          </a:xfrm>
+          <a:prstGeom prst="rect">
+            <a:avLst/>
+          </a:prstGeom>
+          <a:noFill/>
+          <a:ln/>
+        </p:spPr>
+        <p:txBody>
+          <a:bodyPr wrap="square" lIns="0" tIns="0" rIns="0" bIns="0" rtlCol="0" anchor="ctr"/>
+          <a:lstStyle/>
+          <a:p>
+            <a:pPr indent="0" marL="0">
+              <a:buNone/>
+            </a:pPr>
+            <a:r>
+              <a:rPr lang="en-US" sz="1600" b="1" dirty="0">
+                <a:solidFill>
+                  <a:srgbClr val="A3364F"/>
+                </a:solidFill>
+                <a:latin typeface="Cambria" pitchFamily="34" charset="0"/>
+                <a:ea typeface="Cambria" pitchFamily="34" charset="-122"/>
+                <a:cs typeface="Cambria" pitchFamily="34" charset="-120"/>
+              </a:rPr>
+              <a:t>One thing I got wrong first</a:t>
+            </a:r>
+            <a:endParaRPr lang="en-US" sz="1600" dirty="0"/>
+          </a:p>
+        </p:txBody>
+      </p:sp>
+      <p:sp>
+        <p:nvSpPr>
+          <p:cNvPr id="21" name="Text 19"/>
+          <p:cNvSpPr/>
+          <p:nvPr/>
+        </p:nvSpPr>
+        <p:spPr>
+          <a:xfrm>
+            <a:off x="9189720" y="2926080"/>
+            <a:ext cx="2103120" cy="2377440"/>
+          </a:xfrm>
+          <a:prstGeom prst="rect">
+            <a:avLst/>
+          </a:prstGeom>
+          <a:noFill/>
+          <a:ln/>
+        </p:spPr>
+        <p:txBody>
+          <a:bodyPr wrap="square" lIns="0" tIns="0" rIns="0" bIns="0" rtlCol="0" anchor="ctr"/>
+          <a:lstStyle/>
+          <a:p>
+            <a:pPr indent="0" marL="0">
+              <a:buNone/>
+            </a:pPr>
+            <a:r>
+              <a:rPr lang="en-US" sz="1200" dirty="0">
                 <a:solidFill>
                   <a:srgbClr val="F5F0E6"/>
                 </a:solidFill>
@@ -7283,9 +8619,9 @@
                 <a:ea typeface="Calibri" pitchFamily="34" charset="-122"/>
                 <a:cs typeface="Calibri" pitchFamily="34" charset="-120"/>
               </a:rPr>
-              <a:t>Django is Python, so it cannot run on a Node back end. I took the requirement to mean "use an ORM rather than writing SQL by hand" and used Prisma. I have written this down in the report rather than quietly ignoring it.</a:t>
-            </a:r>
-            <a:endParaRPr lang="en-US" sz="1250" dirty="0"/>
+              <a:t>I originally relied on hiding pages in React. But anyone can call the API directly with curl — the front end is not a security boundary. All the real checks are on the server.</a:t>
+            </a:r>
+            <a:endParaRPr lang="en-US" sz="1200" dirty="0"/>
           </a:p>
         </p:txBody>
       </p:sp>
@@ -7300,6 +8636,533 @@
 <file path=ppt/slides/slide8.xml><?xml version="1.0" encoding="utf-8"?>
 <p:sld xmlns:a="http://schemas.openxmlformats.org/drawingml/2006/main" xmlns:r="http://schemas.openxmlformats.org/officeDocument/2006/relationships" xmlns:p="http://schemas.openxmlformats.org/presentationml/2006/main">
   <p:cSld name="Slide 8">
+    <p:bg>
+      <p:bgPr>
+        <a:solidFill>
+          <a:srgbClr val="071310"/>
+        </a:solidFill>
+      </p:bgPr>
+    </p:bg>
+    <p:spTree>
+      <p:nvGrpSpPr>
+        <p:cNvPr id="1" name=""/>
+        <p:cNvGrpSpPr/>
+        <p:nvPr/>
+      </p:nvGrpSpPr>
+      <p:grpSpPr>
+        <a:xfrm>
+          <a:off x="0" y="0"/>
+          <a:ext cx="0" cy="0"/>
+          <a:chOff x="0" y="0"/>
+          <a:chExt cx="0" cy="0"/>
+        </a:xfrm>
+      </p:grpSpPr>
+      <p:sp>
+        <p:nvSpPr>
+          <p:cNvPr id="2" name="Text 0"/>
+          <p:cNvSpPr/>
+          <p:nvPr/>
+        </p:nvSpPr>
+        <p:spPr>
+          <a:xfrm>
+            <a:off x="640080" y="457200"/>
+            <a:ext cx="10881360" cy="731520"/>
+          </a:xfrm>
+          <a:prstGeom prst="rect">
+            <a:avLst/>
+          </a:prstGeom>
+          <a:noFill/>
+          <a:ln/>
+        </p:spPr>
+        <p:txBody>
+          <a:bodyPr wrap="square" lIns="0" tIns="0" rIns="0" bIns="0" rtlCol="0" anchor="ctr"/>
+          <a:lstStyle/>
+          <a:p>
+            <a:pPr indent="0" marL="0">
+              <a:buNone/>
+            </a:pPr>
+            <a:r>
+              <a:rPr lang="en-US" sz="3600" b="1" dirty="0">
+                <a:solidFill>
+                  <a:srgbClr val="F5F0E6"/>
+                </a:solidFill>
+                <a:latin typeface="Cambria" pitchFamily="34" charset="0"/>
+                <a:ea typeface="Cambria" pitchFamily="34" charset="-122"/>
+                <a:cs typeface="Cambria" pitchFamily="34" charset="-120"/>
+              </a:rPr>
+              <a:t>Choices I had to make</a:t>
+            </a:r>
+            <a:endParaRPr lang="en-US" sz="3600" dirty="0"/>
+          </a:p>
+        </p:txBody>
+      </p:sp>
+      <p:sp>
+        <p:nvSpPr>
+          <p:cNvPr id="3" name="Text 1"/>
+          <p:cNvSpPr/>
+          <p:nvPr/>
+        </p:nvSpPr>
+        <p:spPr>
+          <a:xfrm>
+            <a:off x="640080" y="1188720"/>
+            <a:ext cx="10881360" cy="365760"/>
+          </a:xfrm>
+          <a:prstGeom prst="rect">
+            <a:avLst/>
+          </a:prstGeom>
+          <a:noFill/>
+          <a:ln/>
+        </p:spPr>
+        <p:txBody>
+          <a:bodyPr wrap="square" lIns="0" tIns="0" rIns="0" bIns="0" rtlCol="0" anchor="ctr"/>
+          <a:lstStyle/>
+          <a:p>
+            <a:pPr indent="0" marL="0">
+              <a:buNone/>
+            </a:pPr>
+            <a:r>
+              <a:rPr lang="en-US" sz="1400" dirty="0">
+                <a:solidFill>
+                  <a:srgbClr val="97B0A2"/>
+                </a:solidFill>
+                <a:latin typeface="Calibri" pitchFamily="34" charset="0"/>
+                <a:ea typeface="Calibri" pitchFamily="34" charset="-122"/>
+                <a:cs typeface="Calibri" pitchFamily="34" charset="-120"/>
+              </a:rPr>
+              <a:t>And the one place I disagreed with the brief</a:t>
+            </a:r>
+            <a:endParaRPr lang="en-US" sz="1400" dirty="0"/>
+          </a:p>
+        </p:txBody>
+      </p:sp>
+      <p:sp>
+        <p:nvSpPr>
+          <p:cNvPr id="4" name="Text 2"/>
+          <p:cNvSpPr/>
+          <p:nvPr/>
+        </p:nvSpPr>
+        <p:spPr>
+          <a:xfrm>
+            <a:off x="640080" y="1828800"/>
+            <a:ext cx="3566160" cy="731520"/>
+          </a:xfrm>
+          <a:prstGeom prst="rect">
+            <a:avLst/>
+          </a:prstGeom>
+          <a:noFill/>
+          <a:ln/>
+        </p:spPr>
+        <p:txBody>
+          <a:bodyPr wrap="square" lIns="0" tIns="0" rIns="0" bIns="0" rtlCol="0" anchor="ctr"/>
+          <a:lstStyle/>
+          <a:p>
+            <a:pPr indent="0" marL="0">
+              <a:buNone/>
+            </a:pPr>
+            <a:r>
+              <a:rPr lang="en-US" sz="1450" b="1" dirty="0">
+                <a:solidFill>
+                  <a:srgbClr val="D4A937"/>
+                </a:solidFill>
+                <a:latin typeface="Calibri" pitchFamily="34" charset="0"/>
+                <a:ea typeface="Calibri" pitchFamily="34" charset="-122"/>
+                <a:cs typeface="Calibri" pitchFamily="34" charset="-120"/>
+              </a:rPr>
+              <a:t>SQLite, not MySQL or Postgres</a:t>
+            </a:r>
+            <a:endParaRPr lang="en-US" sz="1450" dirty="0"/>
+          </a:p>
+        </p:txBody>
+      </p:sp>
+      <p:sp>
+        <p:nvSpPr>
+          <p:cNvPr id="5" name="Text 3"/>
+          <p:cNvSpPr/>
+          <p:nvPr/>
+        </p:nvSpPr>
+        <p:spPr>
+          <a:xfrm>
+            <a:off x="4389120" y="1828800"/>
+            <a:ext cx="7132320" cy="731520"/>
+          </a:xfrm>
+          <a:prstGeom prst="rect">
+            <a:avLst/>
+          </a:prstGeom>
+          <a:noFill/>
+          <a:ln/>
+        </p:spPr>
+        <p:txBody>
+          <a:bodyPr wrap="square" lIns="0" tIns="0" rIns="0" bIns="0" rtlCol="0" anchor="ctr"/>
+          <a:lstStyle/>
+          <a:p>
+            <a:pPr indent="0" marL="0">
+              <a:buNone/>
+            </a:pPr>
+            <a:r>
+              <a:rPr lang="en-US" sz="1250" dirty="0">
+                <a:solidFill>
+                  <a:srgbClr val="F5F0E6"/>
+                </a:solidFill>
+                <a:latin typeface="Calibri" pitchFamily="34" charset="0"/>
+                <a:ea typeface="Calibri" pitchFamily="34" charset="-122"/>
+                <a:cs typeface="Calibri" pitchFamily="34" charset="-120"/>
+              </a:rPr>
+              <a:t>It is a file, so this runs on any machine with no database server to install. The schema moves to PostgreSQL unchanged if it were deployed.</a:t>
+            </a:r>
+            <a:endParaRPr lang="en-US" sz="1250" dirty="0"/>
+          </a:p>
+        </p:txBody>
+      </p:sp>
+      <p:sp>
+        <p:nvSpPr>
+          <p:cNvPr id="6" name="Text 4"/>
+          <p:cNvSpPr/>
+          <p:nvPr/>
+        </p:nvSpPr>
+        <p:spPr>
+          <a:xfrm>
+            <a:off x="640080" y="2670048"/>
+            <a:ext cx="3566160" cy="731520"/>
+          </a:xfrm>
+          <a:prstGeom prst="rect">
+            <a:avLst/>
+          </a:prstGeom>
+          <a:noFill/>
+          <a:ln/>
+        </p:spPr>
+        <p:txBody>
+          <a:bodyPr wrap="square" lIns="0" tIns="0" rIns="0" bIns="0" rtlCol="0" anchor="ctr"/>
+          <a:lstStyle/>
+          <a:p>
+            <a:pPr indent="0" marL="0">
+              <a:buNone/>
+            </a:pPr>
+            <a:r>
+              <a:rPr lang="en-US" sz="1450" b="1" dirty="0">
+                <a:solidFill>
+                  <a:srgbClr val="D4A937"/>
+                </a:solidFill>
+                <a:latin typeface="Calibri" pitchFamily="34" charset="0"/>
+                <a:ea typeface="Calibri" pitchFamily="34" charset="-122"/>
+                <a:cs typeface="Calibri" pitchFamily="34" charset="-120"/>
+              </a:rPr>
+              <a:t>Prisma, not raw SQL</a:t>
+            </a:r>
+            <a:endParaRPr lang="en-US" sz="1450" dirty="0"/>
+          </a:p>
+        </p:txBody>
+      </p:sp>
+      <p:sp>
+        <p:nvSpPr>
+          <p:cNvPr id="7" name="Text 5"/>
+          <p:cNvSpPr/>
+          <p:nvPr/>
+        </p:nvSpPr>
+        <p:spPr>
+          <a:xfrm>
+            <a:off x="4389120" y="2670048"/>
+            <a:ext cx="7132320" cy="731520"/>
+          </a:xfrm>
+          <a:prstGeom prst="rect">
+            <a:avLst/>
+          </a:prstGeom>
+          <a:noFill/>
+          <a:ln/>
+        </p:spPr>
+        <p:txBody>
+          <a:bodyPr wrap="square" lIns="0" tIns="0" rIns="0" bIns="0" rtlCol="0" anchor="ctr"/>
+          <a:lstStyle/>
+          <a:p>
+            <a:pPr indent="0" marL="0">
+              <a:buNone/>
+            </a:pPr>
+            <a:r>
+              <a:rPr lang="en-US" sz="1250" dirty="0">
+                <a:solidFill>
+                  <a:srgbClr val="F5F0E6"/>
+                </a:solidFill>
+                <a:latin typeface="Calibri" pitchFamily="34" charset="0"/>
+                <a:ea typeface="Calibri" pitchFamily="34" charset="-122"/>
+                <a:cs typeface="Calibri" pitchFamily="34" charset="-120"/>
+              </a:rPr>
+              <a:t>The lab code built SQL by joining strings together. Prisma gave me a schema file in version control and stopped me writing that.</a:t>
+            </a:r>
+            <a:endParaRPr lang="en-US" sz="1250" dirty="0"/>
+          </a:p>
+        </p:txBody>
+      </p:sp>
+      <p:sp>
+        <p:nvSpPr>
+          <p:cNvPr id="8" name="Text 6"/>
+          <p:cNvSpPr/>
+          <p:nvPr/>
+        </p:nvSpPr>
+        <p:spPr>
+          <a:xfrm>
+            <a:off x="640080" y="3511296"/>
+            <a:ext cx="3566160" cy="731520"/>
+          </a:xfrm>
+          <a:prstGeom prst="rect">
+            <a:avLst/>
+          </a:prstGeom>
+          <a:noFill/>
+          <a:ln/>
+        </p:spPr>
+        <p:txBody>
+          <a:bodyPr wrap="square" lIns="0" tIns="0" rIns="0" bIns="0" rtlCol="0" anchor="ctr"/>
+          <a:lstStyle/>
+          <a:p>
+            <a:pPr indent="0" marL="0">
+              <a:buNone/>
+            </a:pPr>
+            <a:r>
+              <a:rPr lang="en-US" sz="1450" b="1" dirty="0">
+                <a:solidFill>
+                  <a:srgbClr val="D4A937"/>
+                </a:solidFill>
+                <a:latin typeface="Calibri" pitchFamily="34" charset="0"/>
+                <a:ea typeface="Calibri" pitchFamily="34" charset="-122"/>
+                <a:cs typeface="Calibri" pitchFamily="34" charset="-120"/>
+              </a:rPr>
+              <a:t>Context, not Redux</a:t>
+            </a:r>
+            <a:endParaRPr lang="en-US" sz="1450" dirty="0"/>
+          </a:p>
+        </p:txBody>
+      </p:sp>
+      <p:sp>
+        <p:nvSpPr>
+          <p:cNvPr id="9" name="Text 7"/>
+          <p:cNvSpPr/>
+          <p:nvPr/>
+        </p:nvSpPr>
+        <p:spPr>
+          <a:xfrm>
+            <a:off x="4389120" y="3511296"/>
+            <a:ext cx="7132320" cy="731520"/>
+          </a:xfrm>
+          <a:prstGeom prst="rect">
+            <a:avLst/>
+          </a:prstGeom>
+          <a:noFill/>
+          <a:ln/>
+        </p:spPr>
+        <p:txBody>
+          <a:bodyPr wrap="square" lIns="0" tIns="0" rIns="0" bIns="0" rtlCol="0" anchor="ctr"/>
+          <a:lstStyle/>
+          <a:p>
+            <a:pPr indent="0" marL="0">
+              <a:buNone/>
+            </a:pPr>
+            <a:r>
+              <a:rPr lang="en-US" sz="1250" dirty="0">
+                <a:solidFill>
+                  <a:srgbClr val="F5F0E6"/>
+                </a:solidFill>
+                <a:latin typeface="Calibri" pitchFamily="34" charset="0"/>
+                <a:ea typeface="Calibri" pitchFamily="34" charset="-122"/>
+                <a:cs typeface="Calibri" pitchFamily="34" charset="-120"/>
+              </a:rPr>
+              <a:t>The only things that are truly global are who is logged in and the toast messages. Redux for two values felt like overkill.</a:t>
+            </a:r>
+            <a:endParaRPr lang="en-US" sz="1250" dirty="0"/>
+          </a:p>
+        </p:txBody>
+      </p:sp>
+      <p:sp>
+        <p:nvSpPr>
+          <p:cNvPr id="10" name="Text 8"/>
+          <p:cNvSpPr/>
+          <p:nvPr/>
+        </p:nvSpPr>
+        <p:spPr>
+          <a:xfrm>
+            <a:off x="640080" y="4352544"/>
+            <a:ext cx="3566160" cy="731520"/>
+          </a:xfrm>
+          <a:prstGeom prst="rect">
+            <a:avLst/>
+          </a:prstGeom>
+          <a:noFill/>
+          <a:ln/>
+        </p:spPr>
+        <p:txBody>
+          <a:bodyPr wrap="square" lIns="0" tIns="0" rIns="0" bIns="0" rtlCol="0" anchor="ctr"/>
+          <a:lstStyle/>
+          <a:p>
+            <a:pPr indent="0" marL="0">
+              <a:buNone/>
+            </a:pPr>
+            <a:r>
+              <a:rPr lang="en-US" sz="1450" b="1" dirty="0">
+                <a:solidFill>
+                  <a:srgbClr val="D4A937"/>
+                </a:solidFill>
+                <a:latin typeface="Calibri" pitchFamily="34" charset="0"/>
+                <a:ea typeface="Calibri" pitchFamily="34" charset="-122"/>
+                <a:cs typeface="Calibri" pitchFamily="34" charset="-120"/>
+              </a:rPr>
+              <a:t>Vite, not Create React App</a:t>
+            </a:r>
+            <a:endParaRPr lang="en-US" sz="1450" dirty="0"/>
+          </a:p>
+        </p:txBody>
+      </p:sp>
+      <p:sp>
+        <p:nvSpPr>
+          <p:cNvPr id="11" name="Text 9"/>
+          <p:cNvSpPr/>
+          <p:nvPr/>
+        </p:nvSpPr>
+        <p:spPr>
+          <a:xfrm>
+            <a:off x="4389120" y="4352544"/>
+            <a:ext cx="7132320" cy="731520"/>
+          </a:xfrm>
+          <a:prstGeom prst="rect">
+            <a:avLst/>
+          </a:prstGeom>
+          <a:noFill/>
+          <a:ln/>
+        </p:spPr>
+        <p:txBody>
+          <a:bodyPr wrap="square" lIns="0" tIns="0" rIns="0" bIns="0" rtlCol="0" anchor="ctr"/>
+          <a:lstStyle/>
+          <a:p>
+            <a:pPr indent="0" marL="0">
+              <a:buNone/>
+            </a:pPr>
+            <a:r>
+              <a:rPr lang="en-US" sz="1250" dirty="0">
+                <a:solidFill>
+                  <a:srgbClr val="F5F0E6"/>
+                </a:solidFill>
+                <a:latin typeface="Calibri" pitchFamily="34" charset="0"/>
+                <a:ea typeface="Calibri" pitchFamily="34" charset="-122"/>
+                <a:cs typeface="Calibri" pitchFamily="34" charset="-120"/>
+              </a:rPr>
+              <a:t>CRA is deprecated now and noticeably slower to start.</a:t>
+            </a:r>
+            <a:endParaRPr lang="en-US" sz="1250" dirty="0"/>
+          </a:p>
+        </p:txBody>
+      </p:sp>
+      <p:sp>
+        <p:nvSpPr>
+          <p:cNvPr id="12" name="Shape 10"/>
+          <p:cNvSpPr/>
+          <p:nvPr/>
+        </p:nvSpPr>
+        <p:spPr>
+          <a:xfrm>
+            <a:off x="640080" y="5394960"/>
+            <a:ext cx="10881360" cy="1143000"/>
+          </a:xfrm>
+          <a:prstGeom prst="roundRect">
+            <a:avLst>
+              <a:gd name="adj" fmla="val 7200"/>
+            </a:avLst>
+          </a:prstGeom>
+          <a:solidFill>
+            <a:srgbClr val="17392E"/>
+          </a:solidFill>
+          <a:ln w="12700">
+            <a:solidFill>
+              <a:srgbClr val="17392E"/>
+            </a:solidFill>
+            <a:prstDash val="solid"/>
+          </a:ln>
+        </p:spPr>
+      </p:sp>
+      <p:sp>
+        <p:nvSpPr>
+          <p:cNvPr id="13" name="Text 11"/>
+          <p:cNvSpPr/>
+          <p:nvPr/>
+        </p:nvSpPr>
+        <p:spPr>
+          <a:xfrm>
+            <a:off x="960120" y="5532120"/>
+            <a:ext cx="10241280" cy="320040"/>
+          </a:xfrm>
+          <a:prstGeom prst="rect">
+            <a:avLst/>
+          </a:prstGeom>
+          <a:noFill/>
+          <a:ln/>
+        </p:spPr>
+        <p:txBody>
+          <a:bodyPr wrap="square" lIns="0" tIns="0" rIns="0" bIns="0" rtlCol="0" anchor="ctr"/>
+          <a:lstStyle/>
+          <a:p>
+            <a:pPr indent="0" marL="0">
+              <a:buNone/>
+            </a:pPr>
+            <a:r>
+              <a:rPr lang="en-US" sz="1400" b="1" dirty="0">
+                <a:solidFill>
+                  <a:srgbClr val="F5D77A"/>
+                </a:solidFill>
+                <a:latin typeface="Calibri" pitchFamily="34" charset="0"/>
+                <a:ea typeface="Calibri" pitchFamily="34" charset="-122"/>
+                <a:cs typeface="Calibri" pitchFamily="34" charset="-120"/>
+              </a:rPr>
+              <a:t>The brief asks for a Django ORM</a:t>
+            </a:r>
+            <a:endParaRPr lang="en-US" sz="1400" dirty="0"/>
+          </a:p>
+        </p:txBody>
+      </p:sp>
+      <p:sp>
+        <p:nvSpPr>
+          <p:cNvPr id="14" name="Text 12"/>
+          <p:cNvSpPr/>
+          <p:nvPr/>
+        </p:nvSpPr>
+        <p:spPr>
+          <a:xfrm>
+            <a:off x="960120" y="5897880"/>
+            <a:ext cx="10241280" cy="548640"/>
+          </a:xfrm>
+          <a:prstGeom prst="rect">
+            <a:avLst/>
+          </a:prstGeom>
+          <a:noFill/>
+          <a:ln/>
+        </p:spPr>
+        <p:txBody>
+          <a:bodyPr wrap="square" lIns="0" tIns="0" rIns="0" bIns="0" rtlCol="0" anchor="ctr"/>
+          <a:lstStyle/>
+          <a:p>
+            <a:pPr indent="0" marL="0">
+              <a:buNone/>
+            </a:pPr>
+            <a:r>
+              <a:rPr lang="en-US" sz="1250" dirty="0">
+                <a:solidFill>
+                  <a:srgbClr val="F5F0E6"/>
+                </a:solidFill>
+                <a:latin typeface="Calibri" pitchFamily="34" charset="0"/>
+                <a:ea typeface="Calibri" pitchFamily="34" charset="-122"/>
+                <a:cs typeface="Calibri" pitchFamily="34" charset="-120"/>
+              </a:rPr>
+              <a:t>Django is Python, so it cannot run on a Node back end. I took the requirement to mean "use an ORM rather than writing SQL by hand" and used Prisma. I have written this down in the report rather than quietly ignoring it.</a:t>
+            </a:r>
+            <a:endParaRPr lang="en-US" sz="1250" dirty="0"/>
+          </a:p>
+        </p:txBody>
+      </p:sp>
+    </p:spTree>
+  </p:cSld>
+  <p:clrMapOvr>
+    <a:masterClrMapping/>
+  </p:clrMapOvr>
+</p:sld>
+</file>
+
+<file path=ppt/slides/slide9.xml><?xml version="1.0" encoding="utf-8"?>
+<p:sld xmlns:a="http://schemas.openxmlformats.org/drawingml/2006/main" xmlns:r="http://schemas.openxmlformats.org/officeDocument/2006/relationships" xmlns:p="http://schemas.openxmlformats.org/presentationml/2006/main">
+  <p:cSld name="Slide 9">
     <p:bg>
       <p:bgPr>
         <a:solidFill>
@@ -8021,801 +9884,6 @@
                 <a:cs typeface="Calibri" pitchFamily="34" charset="-120"/>
               </a:rPr>
               <a:t>This is most of my time — around twelve minutes.</a:t>
-            </a:r>
-            <a:endParaRPr lang="en-US" sz="1300" dirty="0"/>
-          </a:p>
-        </p:txBody>
-      </p:sp>
-    </p:spTree>
-  </p:cSld>
-  <p:clrMapOvr>
-    <a:masterClrMapping/>
-  </p:clrMapOvr>
-</p:sld>
-</file>
-
-<file path=ppt/slides/slide9.xml><?xml version="1.0" encoding="utf-8"?>
-<p:sld xmlns:a="http://schemas.openxmlformats.org/drawingml/2006/main" xmlns:r="http://schemas.openxmlformats.org/officeDocument/2006/relationships" xmlns:p="http://schemas.openxmlformats.org/presentationml/2006/main">
-  <p:cSld name="Slide 9">
-    <p:bg>
-      <p:bgPr>
-        <a:solidFill>
-          <a:srgbClr val="071310"/>
-        </a:solidFill>
-      </p:bgPr>
-    </p:bg>
-    <p:spTree>
-      <p:nvGrpSpPr>
-        <p:cNvPr id="1" name=""/>
-        <p:cNvGrpSpPr/>
-        <p:nvPr/>
-      </p:nvGrpSpPr>
-      <p:grpSpPr>
-        <a:xfrm>
-          <a:off x="0" y="0"/>
-          <a:ext cx="0" cy="0"/>
-          <a:chOff x="0" y="0"/>
-          <a:chExt cx="0" cy="0"/>
-        </a:xfrm>
-      </p:grpSpPr>
-      <p:sp>
-        <p:nvSpPr>
-          <p:cNvPr id="2" name="Text 0"/>
-          <p:cNvSpPr/>
-          <p:nvPr/>
-        </p:nvSpPr>
-        <p:spPr>
-          <a:xfrm>
-            <a:off x="640080" y="457200"/>
-            <a:ext cx="10881360" cy="731520"/>
-          </a:xfrm>
-          <a:prstGeom prst="rect">
-            <a:avLst/>
-          </a:prstGeom>
-          <a:noFill/>
-          <a:ln/>
-        </p:spPr>
-        <p:txBody>
-          <a:bodyPr wrap="square" lIns="0" tIns="0" rIns="0" bIns="0" rtlCol="0" anchor="ctr"/>
-          <a:lstStyle/>
-          <a:p>
-            <a:pPr indent="0" marL="0">
-              <a:buNone/>
-            </a:pPr>
-            <a:r>
-              <a:rPr lang="en-US" sz="3600" b="1" dirty="0">
-                <a:solidFill>
-                  <a:srgbClr val="F5F0E6"/>
-                </a:solidFill>
-                <a:latin typeface="Cambria" pitchFamily="34" charset="0"/>
-                <a:ea typeface="Cambria" pitchFamily="34" charset="-122"/>
-                <a:cs typeface="Cambria" pitchFamily="34" charset="-120"/>
-              </a:rPr>
-              <a:t>Testing</a:t>
-            </a:r>
-            <a:endParaRPr lang="en-US" sz="3600" dirty="0"/>
-          </a:p>
-        </p:txBody>
-      </p:sp>
-      <p:sp>
-        <p:nvSpPr>
-          <p:cNvPr id="3" name="Text 1"/>
-          <p:cNvSpPr/>
-          <p:nvPr/>
-        </p:nvSpPr>
-        <p:spPr>
-          <a:xfrm>
-            <a:off x="640080" y="1188720"/>
-            <a:ext cx="10881360" cy="365760"/>
-          </a:xfrm>
-          <a:prstGeom prst="rect">
-            <a:avLst/>
-          </a:prstGeom>
-          <a:noFill/>
-          <a:ln/>
-        </p:spPr>
-        <p:txBody>
-          <a:bodyPr wrap="square" lIns="0" tIns="0" rIns="0" bIns="0" rtlCol="0" anchor="ctr"/>
-          <a:lstStyle/>
-          <a:p>
-            <a:pPr indent="0" marL="0">
-              <a:buNone/>
-            </a:pPr>
-            <a:r>
-              <a:rPr lang="en-US" sz="1400" dirty="0">
-                <a:solidFill>
-                  <a:srgbClr val="97B0A2"/>
-                </a:solidFill>
-                <a:latin typeface="Calibri" pitchFamily="34" charset="0"/>
-                <a:ea typeface="Calibri" pitchFamily="34" charset="-122"/>
-                <a:cs typeface="Calibri" pitchFamily="34" charset="-120"/>
-              </a:rPr>
-              <a:t>I focused on the things that would look fine in a demo but be wrong in real life</a:t>
-            </a:r>
-            <a:endParaRPr lang="en-US" sz="1400" dirty="0"/>
-          </a:p>
-        </p:txBody>
-      </p:sp>
-      <p:graphicFrame>
-        <p:nvGraphicFramePr>
-          <p:cNvPr id="4" name="Chart 0" descr=""/>
-          <p:cNvGraphicFramePr/>
-          <p:nvPr/>
-        </p:nvGraphicFramePr>
-        <p:xfrm>
-          <a:off x="640080" y="1920240"/>
-          <a:ext cx="4023360" cy="3657600"/>
-        </p:xfrm>
-        <a:graphic xmlns:a="http://schemas.openxmlformats.org/drawingml/2006/main">
-          <a:graphicData uri="http://schemas.openxmlformats.org/drawingml/2006/chart">
-            <c:chart xmlns:c="http://schemas.openxmlformats.org/drawingml/2006/chart" r:id="rId1"/>
-          </a:graphicData>
-        </a:graphic>
-      </p:graphicFrame>
-      <p:sp>
-        <p:nvSpPr>
-          <p:cNvPr id="5" name="Shape 2"/>
-          <p:cNvSpPr/>
-          <p:nvPr/>
-        </p:nvSpPr>
-        <p:spPr>
-          <a:xfrm>
-            <a:off x="5029200" y="1920240"/>
-            <a:ext cx="6492240" cy="548640"/>
-          </a:xfrm>
-          <a:prstGeom prst="roundRect">
-            <a:avLst>
-              <a:gd name="adj" fmla="val 15000"/>
-            </a:avLst>
-          </a:prstGeom>
-          <a:solidFill>
-            <a:srgbClr val="102B23"/>
-          </a:solidFill>
-          <a:ln w="12700">
-            <a:solidFill>
-              <a:srgbClr val="17392E"/>
-            </a:solidFill>
-            <a:prstDash val="solid"/>
-          </a:ln>
-        </p:spPr>
-      </p:sp>
-      <p:sp>
-        <p:nvSpPr>
-          <p:cNvPr id="6" name="Text 3"/>
-          <p:cNvSpPr/>
-          <p:nvPr/>
-        </p:nvSpPr>
-        <p:spPr>
-          <a:xfrm>
-            <a:off x="5257800" y="1956816"/>
-            <a:ext cx="2377440" cy="475488"/>
-          </a:xfrm>
-          <a:prstGeom prst="rect">
-            <a:avLst/>
-          </a:prstGeom>
-          <a:noFill/>
-          <a:ln/>
-        </p:spPr>
-        <p:txBody>
-          <a:bodyPr wrap="square" lIns="0" tIns="0" rIns="0" bIns="0" rtlCol="0" anchor="ctr"/>
-          <a:lstStyle/>
-          <a:p>
-            <a:pPr indent="0" marL="0">
-              <a:buNone/>
-            </a:pPr>
-            <a:r>
-              <a:rPr lang="en-US" sz="1250" b="1" dirty="0">
-                <a:solidFill>
-                  <a:srgbClr val="D4A937"/>
-                </a:solidFill>
-                <a:latin typeface="Calibri" pitchFamily="34" charset="0"/>
-                <a:ea typeface="Calibri" pitchFamily="34" charset="-122"/>
-                <a:cs typeface="Calibri" pitchFamily="34" charset="-120"/>
-              </a:rPr>
-              <a:t>Back-to-back bookings</a:t>
-            </a:r>
-            <a:endParaRPr lang="en-US" sz="1250" dirty="0"/>
-          </a:p>
-        </p:txBody>
-      </p:sp>
-      <p:sp>
-        <p:nvSpPr>
-          <p:cNvPr id="7" name="Text 4"/>
-          <p:cNvSpPr/>
-          <p:nvPr/>
-        </p:nvSpPr>
-        <p:spPr>
-          <a:xfrm>
-            <a:off x="7726680" y="1956816"/>
-            <a:ext cx="3566160" cy="475488"/>
-          </a:xfrm>
-          <a:prstGeom prst="rect">
-            <a:avLst/>
-          </a:prstGeom>
-          <a:noFill/>
-          <a:ln/>
-        </p:spPr>
-        <p:txBody>
-          <a:bodyPr wrap="square" lIns="0" tIns="0" rIns="0" bIns="0" rtlCol="0" anchor="ctr"/>
-          <a:lstStyle/>
-          <a:p>
-            <a:pPr indent="0" marL="0">
-              <a:buNone/>
-            </a:pPr>
-            <a:r>
-              <a:rPr lang="en-US" sz="1150" dirty="0">
-                <a:solidFill>
-                  <a:srgbClr val="F5F0E6"/>
-                </a:solidFill>
-                <a:latin typeface="Calibri" pitchFamily="34" charset="0"/>
-                <a:ea typeface="Calibri" pitchFamily="34" charset="-122"/>
-                <a:cs typeface="Calibri" pitchFamily="34" charset="-120"/>
-              </a:rPr>
-              <a:t>One ends at 20:00, the next starts at 20:00</a:t>
-            </a:r>
-            <a:endParaRPr lang="en-US" sz="1150" dirty="0"/>
-          </a:p>
-        </p:txBody>
-      </p:sp>
-      <p:sp>
-        <p:nvSpPr>
-          <p:cNvPr id="8" name="Shape 5"/>
-          <p:cNvSpPr/>
-          <p:nvPr/>
-        </p:nvSpPr>
-        <p:spPr>
-          <a:xfrm>
-            <a:off x="5029200" y="2560320"/>
-            <a:ext cx="6492240" cy="548640"/>
-          </a:xfrm>
-          <a:prstGeom prst="roundRect">
-            <a:avLst>
-              <a:gd name="adj" fmla="val 15000"/>
-            </a:avLst>
-          </a:prstGeom>
-          <a:solidFill>
-            <a:srgbClr val="102B23"/>
-          </a:solidFill>
-          <a:ln w="12700">
-            <a:solidFill>
-              <a:srgbClr val="17392E"/>
-            </a:solidFill>
-            <a:prstDash val="solid"/>
-          </a:ln>
-        </p:spPr>
-      </p:sp>
-      <p:sp>
-        <p:nvSpPr>
-          <p:cNvPr id="9" name="Text 6"/>
-          <p:cNvSpPr/>
-          <p:nvPr/>
-        </p:nvSpPr>
-        <p:spPr>
-          <a:xfrm>
-            <a:off x="5257800" y="2596896"/>
-            <a:ext cx="2377440" cy="475488"/>
-          </a:xfrm>
-          <a:prstGeom prst="rect">
-            <a:avLst/>
-          </a:prstGeom>
-          <a:noFill/>
-          <a:ln/>
-        </p:spPr>
-        <p:txBody>
-          <a:bodyPr wrap="square" lIns="0" tIns="0" rIns="0" bIns="0" rtlCol="0" anchor="ctr"/>
-          <a:lstStyle/>
-          <a:p>
-            <a:pPr indent="0" marL="0">
-              <a:buNone/>
-            </a:pPr>
-            <a:r>
-              <a:rPr lang="en-US" sz="1250" b="1" dirty="0">
-                <a:solidFill>
-                  <a:srgbClr val="D4A937"/>
-                </a:solidFill>
-                <a:latin typeface="Calibri" pitchFamily="34" charset="0"/>
-                <a:ea typeface="Calibri" pitchFamily="34" charset="-122"/>
-                <a:cs typeface="Calibri" pitchFamily="34" charset="-120"/>
-              </a:rPr>
-              <a:t>Cancelling</a:t>
-            </a:r>
-            <a:endParaRPr lang="en-US" sz="1250" dirty="0"/>
-          </a:p>
-        </p:txBody>
-      </p:sp>
-      <p:sp>
-        <p:nvSpPr>
-          <p:cNvPr id="10" name="Text 7"/>
-          <p:cNvSpPr/>
-          <p:nvPr/>
-        </p:nvSpPr>
-        <p:spPr>
-          <a:xfrm>
-            <a:off x="7726680" y="2596896"/>
-            <a:ext cx="3566160" cy="475488"/>
-          </a:xfrm>
-          <a:prstGeom prst="rect">
-            <a:avLst/>
-          </a:prstGeom>
-          <a:noFill/>
-          <a:ln/>
-        </p:spPr>
-        <p:txBody>
-          <a:bodyPr wrap="square" lIns="0" tIns="0" rIns="0" bIns="0" rtlCol="0" anchor="ctr"/>
-          <a:lstStyle/>
-          <a:p>
-            <a:pPr indent="0" marL="0">
-              <a:buNone/>
-            </a:pPr>
-            <a:r>
-              <a:rPr lang="en-US" sz="1150" dirty="0">
-                <a:solidFill>
-                  <a:srgbClr val="F5F0E6"/>
-                </a:solidFill>
-                <a:latin typeface="Calibri" pitchFamily="34" charset="0"/>
-                <a:ea typeface="Calibri" pitchFamily="34" charset="-122"/>
-                <a:cs typeface="Calibri" pitchFamily="34" charset="-120"/>
-              </a:rPr>
-              <a:t>Does the table actually become free again?</a:t>
-            </a:r>
-            <a:endParaRPr lang="en-US" sz="1150" dirty="0"/>
-          </a:p>
-        </p:txBody>
-      </p:sp>
-      <p:sp>
-        <p:nvSpPr>
-          <p:cNvPr id="11" name="Shape 8"/>
-          <p:cNvSpPr/>
-          <p:nvPr/>
-        </p:nvSpPr>
-        <p:spPr>
-          <a:xfrm>
-            <a:off x="5029200" y="3200400"/>
-            <a:ext cx="6492240" cy="548640"/>
-          </a:xfrm>
-          <a:prstGeom prst="roundRect">
-            <a:avLst>
-              <a:gd name="adj" fmla="val 15000"/>
-            </a:avLst>
-          </a:prstGeom>
-          <a:solidFill>
-            <a:srgbClr val="102B23"/>
-          </a:solidFill>
-          <a:ln w="12700">
-            <a:solidFill>
-              <a:srgbClr val="17392E"/>
-            </a:solidFill>
-            <a:prstDash val="solid"/>
-          </a:ln>
-        </p:spPr>
-      </p:sp>
-      <p:sp>
-        <p:nvSpPr>
-          <p:cNvPr id="12" name="Text 9"/>
-          <p:cNvSpPr/>
-          <p:nvPr/>
-        </p:nvSpPr>
-        <p:spPr>
-          <a:xfrm>
-            <a:off x="5257800" y="3236976"/>
-            <a:ext cx="2377440" cy="475488"/>
-          </a:xfrm>
-          <a:prstGeom prst="rect">
-            <a:avLst/>
-          </a:prstGeom>
-          <a:noFill/>
-          <a:ln/>
-        </p:spPr>
-        <p:txBody>
-          <a:bodyPr wrap="square" lIns="0" tIns="0" rIns="0" bIns="0" rtlCol="0" anchor="ctr"/>
-          <a:lstStyle/>
-          <a:p>
-            <a:pPr indent="0" marL="0">
-              <a:buNone/>
-            </a:pPr>
-            <a:r>
-              <a:rPr lang="en-US" sz="1250" b="1" dirty="0">
-                <a:solidFill>
-                  <a:srgbClr val="D4A937"/>
-                </a:solidFill>
-                <a:latin typeface="Calibri" pitchFamily="34" charset="0"/>
-                <a:ea typeface="Calibri" pitchFamily="34" charset="-122"/>
-                <a:cs typeface="Calibri" pitchFamily="34" charset="-120"/>
-              </a:rPr>
-              <a:t>Restaurants open past midnight</a:t>
-            </a:r>
-            <a:endParaRPr lang="en-US" sz="1250" dirty="0"/>
-          </a:p>
-        </p:txBody>
-      </p:sp>
-      <p:sp>
-        <p:nvSpPr>
-          <p:cNvPr id="13" name="Text 10"/>
-          <p:cNvSpPr/>
-          <p:nvPr/>
-        </p:nvSpPr>
-        <p:spPr>
-          <a:xfrm>
-            <a:off x="7726680" y="3236976"/>
-            <a:ext cx="3566160" cy="475488"/>
-          </a:xfrm>
-          <a:prstGeom prst="rect">
-            <a:avLst/>
-          </a:prstGeom>
-          <a:noFill/>
-          <a:ln/>
-        </p:spPr>
-        <p:txBody>
-          <a:bodyPr wrap="square" lIns="0" tIns="0" rIns="0" bIns="0" rtlCol="0" anchor="ctr"/>
-          <a:lstStyle/>
-          <a:p>
-            <a:pPr indent="0" marL="0">
-              <a:buNone/>
-            </a:pPr>
-            <a:r>
-              <a:rPr lang="en-US" sz="1150" dirty="0">
-                <a:solidFill>
-                  <a:srgbClr val="F5F0E6"/>
-                </a:solidFill>
-                <a:latin typeface="Calibri" pitchFamily="34" charset="0"/>
-                <a:ea typeface="Calibri" pitchFamily="34" charset="-122"/>
-                <a:cs typeface="Calibri" pitchFamily="34" charset="-120"/>
-              </a:rPr>
-              <a:t>18:00 to 01:00 breaks a naive comparison</a:t>
-            </a:r>
-            <a:endParaRPr lang="en-US" sz="1150" dirty="0"/>
-          </a:p>
-        </p:txBody>
-      </p:sp>
-      <p:sp>
-        <p:nvSpPr>
-          <p:cNvPr id="14" name="Shape 11"/>
-          <p:cNvSpPr/>
-          <p:nvPr/>
-        </p:nvSpPr>
-        <p:spPr>
-          <a:xfrm>
-            <a:off x="5029200" y="3840480"/>
-            <a:ext cx="6492240" cy="548640"/>
-          </a:xfrm>
-          <a:prstGeom prst="roundRect">
-            <a:avLst>
-              <a:gd name="adj" fmla="val 15000"/>
-            </a:avLst>
-          </a:prstGeom>
-          <a:solidFill>
-            <a:srgbClr val="102B23"/>
-          </a:solidFill>
-          <a:ln w="12700">
-            <a:solidFill>
-              <a:srgbClr val="17392E"/>
-            </a:solidFill>
-            <a:prstDash val="solid"/>
-          </a:ln>
-        </p:spPr>
-      </p:sp>
-      <p:sp>
-        <p:nvSpPr>
-          <p:cNvPr id="15" name="Text 12"/>
-          <p:cNvSpPr/>
-          <p:nvPr/>
-        </p:nvSpPr>
-        <p:spPr>
-          <a:xfrm>
-            <a:off x="5257800" y="3877056"/>
-            <a:ext cx="2377440" cy="475488"/>
-          </a:xfrm>
-          <a:prstGeom prst="rect">
-            <a:avLst/>
-          </a:prstGeom>
-          <a:noFill/>
-          <a:ln/>
-        </p:spPr>
-        <p:txBody>
-          <a:bodyPr wrap="square" lIns="0" tIns="0" rIns="0" bIns="0" rtlCol="0" anchor="ctr"/>
-          <a:lstStyle/>
-          <a:p>
-            <a:pPr indent="0" marL="0">
-              <a:buNone/>
-            </a:pPr>
-            <a:r>
-              <a:rPr lang="en-US" sz="1250" b="1" dirty="0">
-                <a:solidFill>
-                  <a:srgbClr val="D4A937"/>
-                </a:solidFill>
-                <a:latin typeface="Calibri" pitchFamily="34" charset="0"/>
-                <a:ea typeface="Calibri" pitchFamily="34" charset="-122"/>
-                <a:cs typeface="Calibri" pitchFamily="34" charset="-120"/>
-              </a:rPr>
-              <a:t>Two bookings at once</a:t>
-            </a:r>
-            <a:endParaRPr lang="en-US" sz="1250" dirty="0"/>
-          </a:p>
-        </p:txBody>
-      </p:sp>
-      <p:sp>
-        <p:nvSpPr>
-          <p:cNvPr id="16" name="Text 13"/>
-          <p:cNvSpPr/>
-          <p:nvPr/>
-        </p:nvSpPr>
-        <p:spPr>
-          <a:xfrm>
-            <a:off x="7726680" y="3877056"/>
-            <a:ext cx="3566160" cy="475488"/>
-          </a:xfrm>
-          <a:prstGeom prst="rect">
-            <a:avLst/>
-          </a:prstGeom>
-          <a:noFill/>
-          <a:ln/>
-        </p:spPr>
-        <p:txBody>
-          <a:bodyPr wrap="square" lIns="0" tIns="0" rIns="0" bIns="0" rtlCol="0" anchor="ctr"/>
-          <a:lstStyle/>
-          <a:p>
-            <a:pPr indent="0" marL="0">
-              <a:buNone/>
-            </a:pPr>
-            <a:r>
-              <a:rPr lang="en-US" sz="1150" dirty="0">
-                <a:solidFill>
-                  <a:srgbClr val="F5F0E6"/>
-                </a:solidFill>
-                <a:latin typeface="Calibri" pitchFamily="34" charset="0"/>
-                <a:ea typeface="Calibri" pitchFamily="34" charset="-122"/>
-                <a:cs typeface="Calibri" pitchFamily="34" charset="-120"/>
-              </a:rPr>
-              <a:t>Only one can win — this is the important one</a:t>
-            </a:r>
-            <a:endParaRPr lang="en-US" sz="1150" dirty="0"/>
-          </a:p>
-        </p:txBody>
-      </p:sp>
-      <p:sp>
-        <p:nvSpPr>
-          <p:cNvPr id="17" name="Shape 14"/>
-          <p:cNvSpPr/>
-          <p:nvPr/>
-        </p:nvSpPr>
-        <p:spPr>
-          <a:xfrm>
-            <a:off x="5029200" y="4480560"/>
-            <a:ext cx="6492240" cy="548640"/>
-          </a:xfrm>
-          <a:prstGeom prst="roundRect">
-            <a:avLst>
-              <a:gd name="adj" fmla="val 15000"/>
-            </a:avLst>
-          </a:prstGeom>
-          <a:solidFill>
-            <a:srgbClr val="102B23"/>
-          </a:solidFill>
-          <a:ln w="12700">
-            <a:solidFill>
-              <a:srgbClr val="17392E"/>
-            </a:solidFill>
-            <a:prstDash val="solid"/>
-          </a:ln>
-        </p:spPr>
-      </p:sp>
-      <p:sp>
-        <p:nvSpPr>
-          <p:cNvPr id="18" name="Text 15"/>
-          <p:cNvSpPr/>
-          <p:nvPr/>
-        </p:nvSpPr>
-        <p:spPr>
-          <a:xfrm>
-            <a:off x="5257800" y="4517136"/>
-            <a:ext cx="2377440" cy="475488"/>
-          </a:xfrm>
-          <a:prstGeom prst="rect">
-            <a:avLst/>
-          </a:prstGeom>
-          <a:noFill/>
-          <a:ln/>
-        </p:spPr>
-        <p:txBody>
-          <a:bodyPr wrap="square" lIns="0" tIns="0" rIns="0" bIns="0" rtlCol="0" anchor="ctr"/>
-          <a:lstStyle/>
-          <a:p>
-            <a:pPr indent="0" marL="0">
-              <a:buNone/>
-            </a:pPr>
-            <a:r>
-              <a:rPr lang="en-US" sz="1250" b="1" dirty="0">
-                <a:solidFill>
-                  <a:srgbClr val="D4A937"/>
-                </a:solidFill>
-                <a:latin typeface="Calibri" pitchFamily="34" charset="0"/>
-                <a:ea typeface="Calibri" pitchFamily="34" charset="-122"/>
-                <a:cs typeface="Calibri" pitchFamily="34" charset="-120"/>
-              </a:rPr>
-              <a:t>Another manager</a:t>
-            </a:r>
-            <a:endParaRPr lang="en-US" sz="1250" dirty="0"/>
-          </a:p>
-        </p:txBody>
-      </p:sp>
-      <p:sp>
-        <p:nvSpPr>
-          <p:cNvPr id="19" name="Text 16"/>
-          <p:cNvSpPr/>
-          <p:nvPr/>
-        </p:nvSpPr>
-        <p:spPr>
-          <a:xfrm>
-            <a:off x="7726680" y="4517136"/>
-            <a:ext cx="3566160" cy="475488"/>
-          </a:xfrm>
-          <a:prstGeom prst="rect">
-            <a:avLst/>
-          </a:prstGeom>
-          <a:noFill/>
-          <a:ln/>
-        </p:spPr>
-        <p:txBody>
-          <a:bodyPr wrap="square" lIns="0" tIns="0" rIns="0" bIns="0" rtlCol="0" anchor="ctr"/>
-          <a:lstStyle/>
-          <a:p>
-            <a:pPr indent="0" marL="0">
-              <a:buNone/>
-            </a:pPr>
-            <a:r>
-              <a:rPr lang="en-US" sz="1150" dirty="0">
-                <a:solidFill>
-                  <a:srgbClr val="F5F0E6"/>
-                </a:solidFill>
-                <a:latin typeface="Calibri" pitchFamily="34" charset="0"/>
-                <a:ea typeface="Calibri" pitchFamily="34" charset="-122"/>
-                <a:cs typeface="Calibri" pitchFamily="34" charset="-120"/>
-              </a:rPr>
-              <a:t>Gets a 404, and the booking really is unchanged</a:t>
-            </a:r>
-            <a:endParaRPr lang="en-US" sz="1150" dirty="0"/>
-          </a:p>
-        </p:txBody>
-      </p:sp>
-      <p:sp>
-        <p:nvSpPr>
-          <p:cNvPr id="20" name="Shape 17"/>
-          <p:cNvSpPr/>
-          <p:nvPr/>
-        </p:nvSpPr>
-        <p:spPr>
-          <a:xfrm>
-            <a:off x="5029200" y="5120640"/>
-            <a:ext cx="6492240" cy="548640"/>
-          </a:xfrm>
-          <a:prstGeom prst="roundRect">
-            <a:avLst>
-              <a:gd name="adj" fmla="val 15000"/>
-            </a:avLst>
-          </a:prstGeom>
-          <a:solidFill>
-            <a:srgbClr val="102B23"/>
-          </a:solidFill>
-          <a:ln w="12700">
-            <a:solidFill>
-              <a:srgbClr val="17392E"/>
-            </a:solidFill>
-            <a:prstDash val="solid"/>
-          </a:ln>
-        </p:spPr>
-      </p:sp>
-      <p:sp>
-        <p:nvSpPr>
-          <p:cNvPr id="21" name="Text 18"/>
-          <p:cNvSpPr/>
-          <p:nvPr/>
-        </p:nvSpPr>
-        <p:spPr>
-          <a:xfrm>
-            <a:off x="5257800" y="5157216"/>
-            <a:ext cx="2377440" cy="475488"/>
-          </a:xfrm>
-          <a:prstGeom prst="rect">
-            <a:avLst/>
-          </a:prstGeom>
-          <a:noFill/>
-          <a:ln/>
-        </p:spPr>
-        <p:txBody>
-          <a:bodyPr wrap="square" lIns="0" tIns="0" rIns="0" bIns="0" rtlCol="0" anchor="ctr"/>
-          <a:lstStyle/>
-          <a:p>
-            <a:pPr indent="0" marL="0">
-              <a:buNone/>
-            </a:pPr>
-            <a:r>
-              <a:rPr lang="en-US" sz="1250" b="1" dirty="0">
-                <a:solidFill>
-                  <a:srgbClr val="D4A937"/>
-                </a:solidFill>
-                <a:latin typeface="Calibri" pitchFamily="34" charset="0"/>
-                <a:ea typeface="Calibri" pitchFamily="34" charset="-122"/>
-                <a:cs typeface="Calibri" pitchFamily="34" charset="-120"/>
-              </a:rPr>
-              <a:t>The login form</a:t>
-            </a:r>
-            <a:endParaRPr lang="en-US" sz="1250" dirty="0"/>
-          </a:p>
-        </p:txBody>
-      </p:sp>
-      <p:sp>
-        <p:nvSpPr>
-          <p:cNvPr id="22" name="Text 19"/>
-          <p:cNvSpPr/>
-          <p:nvPr/>
-        </p:nvSpPr>
-        <p:spPr>
-          <a:xfrm>
-            <a:off x="7726680" y="5157216"/>
-            <a:ext cx="3566160" cy="475488"/>
-          </a:xfrm>
-          <a:prstGeom prst="rect">
-            <a:avLst/>
-          </a:prstGeom>
-          <a:noFill/>
-          <a:ln/>
-        </p:spPr>
-        <p:txBody>
-          <a:bodyPr wrap="square" lIns="0" tIns="0" rIns="0" bIns="0" rtlCol="0" anchor="ctr"/>
-          <a:lstStyle/>
-          <a:p>
-            <a:pPr indent="0" marL="0">
-              <a:buNone/>
-            </a:pPr>
-            <a:r>
-              <a:rPr lang="en-US" sz="1150" dirty="0">
-                <a:solidFill>
-                  <a:srgbClr val="F5F0E6"/>
-                </a:solidFill>
-                <a:latin typeface="Calibri" pitchFamily="34" charset="0"/>
-                <a:ea typeface="Calibri" pitchFamily="34" charset="-122"/>
-                <a:cs typeface="Calibri" pitchFamily="34" charset="-120"/>
-              </a:rPr>
-              <a:t>Wrong password and unknown email look identical</a:t>
-            </a:r>
-            <a:endParaRPr lang="en-US" sz="1150" dirty="0"/>
-          </a:p>
-        </p:txBody>
-      </p:sp>
-      <p:sp>
-        <p:nvSpPr>
-          <p:cNvPr id="23" name="Text 20"/>
-          <p:cNvSpPr/>
-          <p:nvPr/>
-        </p:nvSpPr>
-        <p:spPr>
-          <a:xfrm>
-            <a:off x="640080" y="5943600"/>
-            <a:ext cx="10881360" cy="365760"/>
-          </a:xfrm>
-          <a:prstGeom prst="rect">
-            <a:avLst/>
-          </a:prstGeom>
-          <a:noFill/>
-          <a:ln/>
-        </p:spPr>
-        <p:txBody>
-          <a:bodyPr wrap="square" lIns="0" tIns="0" rIns="0" bIns="0" rtlCol="0" anchor="ctr"/>
-          <a:lstStyle/>
-          <a:p>
-            <a:pPr indent="0" marL="0">
-              <a:buNone/>
-            </a:pPr>
-            <a:r>
-              <a:rPr lang="en-US" sz="1300" i="1" dirty="0">
-                <a:solidFill>
-                  <a:srgbClr val="97B0A2"/>
-                </a:solidFill>
-                <a:latin typeface="Calibri" pitchFamily="34" charset="0"/>
-                <a:ea typeface="Calibri" pitchFamily="34" charset="-122"/>
-                <a:cs typeface="Calibri" pitchFamily="34" charset="-120"/>
-              </a:rPr>
-              <a:t>65 tests. They run in about a second, so I ran them constantly.</a:t>
             </a:r>
             <a:endParaRPr lang="en-US" sz="1300" dirty="0"/>
           </a:p>

--- a/docs/presentation.pptx
+++ b/docs/presentation.pptx
@@ -991,7 +991,6 @@
             <a:r>
               <a:rPr lang="en-US" dirty="0"/>
               <a:t>ABOUT 90 SECONDS, then questions.
-PUT YOUR REAL GITHUB LINK ON THIS SLIDE BEFORE YOU PRESENT.
 Questions you should expect:
   - Why SQLite? (runs anywhere, no server to install, schema moves to Postgres unchanged)
   - Why not Django? (Django is Python, the brief also says Node — they conflict)
@@ -1630,7 +1629,7 @@
               <a:t>ABOUT 2 MINUTES.
 Be straightforward about the Django point. Do not be smug about it — just explain the reasoning and that you documented it.
 If they say you should have used Python: fair, but the same brief also says Node.js, so the two requirements conflict.
-Mentioning the week 7 lab code twice on this deck is deliberate — it shows what you learned since.</a:t>
+If asked what you would improve: the JWT sits in localStorage, which is readable by any script on the page. An httpOnly cookie would be safer. I knew that and ran out of time.</a:t>
             </a:r>
             <a:endParaRPr lang="en-US" dirty="0"/>
           </a:p>
@@ -3421,7 +3420,7 @@
                 <a:ea typeface="Calibri" pitchFamily="34" charset="-122"/>
                 <a:cs typeface="Calibri" pitchFamily="34" charset="-120"/>
               </a:rPr>
-              <a:t>The brief lists deployment as optional and I ran out of time. Configuration is all environment variables, so it is ready to go, but "ready to deploy" is not the same as deployed.</a:t>
+              <a:t>It runs locally, not on the internet. Everything is configured through environment variables so it is ready to go, but ready to deploy is not the same as deployed.</a:t>
             </a:r>
             <a:endParaRPr lang="en-US" sz="1250" dirty="0"/>
           </a:p>
@@ -3631,7 +3630,7 @@
                 <a:ea typeface="Calibri" pitchFamily="34" charset="-122"/>
                 <a:cs typeface="Calibri" pitchFamily="34" charset="-120"/>
               </a:rPr>
-              <a:t>Also optional in the brief. Same reason.</a:t>
+              <a:t>It would make it run identically on any machine. I prioritised getting the booking logic right.</a:t>
             </a:r>
             <a:endParaRPr lang="en-US" sz="1250" dirty="0"/>
           </a:p>
@@ -4363,11 +4362,11 @@
                 <a:solidFill>
                   <a:srgbClr val="97B0A2"/>
                 </a:solidFill>
-                <a:latin typeface="Courier New" pitchFamily="34" charset="0"/>
-                <a:ea typeface="Courier New" pitchFamily="34" charset="-122"/>
-                <a:cs typeface="Courier New" pitchFamily="34" charset="-120"/>
-              </a:rPr>
-              <a:t>Code: github.com/YOUR-USERNAME/mesa</a:t>
+                <a:latin typeface="Calibri" pitchFamily="34" charset="0"/>
+                <a:ea typeface="Calibri" pitchFamily="34" charset="-122"/>
+                <a:cs typeface="Calibri" pitchFamily="34" charset="-120"/>
+              </a:rPr>
+              <a:t>Source code, tests and documentation are in the repository submitted with this presentation.</a:t>
             </a:r>
             <a:endParaRPr lang="en-US" sz="1300" dirty="0"/>
           </a:p>
@@ -4477,7 +4476,7 @@
                 <a:ea typeface="Calibri" pitchFamily="34" charset="-122"/>
                 <a:cs typeface="Calibri" pitchFamily="34" charset="-120"/>
               </a:rPr>
-              <a:t>The brief let us pick any real-world problem</a:t>
+              <a:t>Independent restaurants are still running on paper</a:t>
             </a:r>
             <a:endParaRPr lang="en-US" sz="1400" dirty="0"/>
           </a:p>
@@ -4817,7 +4816,7 @@
                 <a:ea typeface="Calibri" pitchFamily="34" charset="-122"/>
                 <a:cs typeface="Calibri" pitchFamily="34" charset="-120"/>
               </a:rPr>
-              <a:t>It needs all three advanced features naturally</a:t>
+              <a:t>The features fit naturally</a:t>
             </a:r>
             <a:endParaRPr lang="en-US" sz="1400" dirty="0"/>
           </a:p>
@@ -4856,7 +4855,7 @@
                 <a:ea typeface="Calibri" pitchFamily="34" charset="-122"/>
                 <a:cs typeface="Calibri" pitchFamily="34" charset="-120"/>
               </a:rPr>
-              <a:t>Roles, search and a dashboard all fall out of the problem rather than being bolted on to satisfy the brief.</a:t>
+              <a:t>Logins, search and a dashboard all fall out of the problem itself rather than being bolted on afterwards.</a:t>
             </a:r>
             <a:endParaRPr lang="en-US" sz="1250" dirty="0"/>
           </a:p>
@@ -8094,7 +8093,7 @@
                 <a:ea typeface="Calibri" pitchFamily="34" charset="-122"/>
                 <a:cs typeface="Calibri" pitchFamily="34" charset="-120"/>
               </a:rPr>
-              <a:t>Hashed with bcrypt. The lab code we did in week 7 stored them as plain text, which I did not want to copy.</a:t>
+              <a:t>Hashed with bcrypt, so I cannot read them either. If the database leaked, it would not hand over anyone's account.</a:t>
             </a:r>
             <a:endParaRPr lang="en-US" sz="1150" dirty="0"/>
           </a:p>
@@ -8729,7 +8728,7 @@
                 <a:ea typeface="Calibri" pitchFamily="34" charset="-122"/>
                 <a:cs typeface="Calibri" pitchFamily="34" charset="-120"/>
               </a:rPr>
-              <a:t>And the one place I disagreed with the brief</a:t>
+              <a:t>And why, in each case</a:t>
             </a:r>
             <a:endParaRPr lang="en-US" sz="1400" dirty="0"/>
           </a:p>
@@ -8885,7 +8884,7 @@
                 <a:ea typeface="Calibri" pitchFamily="34" charset="-122"/>
                 <a:cs typeface="Calibri" pitchFamily="34" charset="-120"/>
               </a:rPr>
-              <a:t>The lab code built SQL by joining strings together. Prisma gave me a schema file in version control and stopped me writing that.</a:t>
+              <a:t>Building queries by joining strings together is where injection bugs come from. Prisma also gave me the schema as a file in version control.</a:t>
             </a:r>
             <a:endParaRPr lang="en-US" sz="1250" dirty="0"/>
           </a:p>
@@ -9107,7 +9106,7 @@
                 <a:ea typeface="Calibri" pitchFamily="34" charset="-122"/>
                 <a:cs typeface="Calibri" pitchFamily="34" charset="-120"/>
               </a:rPr>
-              <a:t>The brief asks for a Django ORM</a:t>
+              <a:t>One requirement I could not follow literally</a:t>
             </a:r>
             <a:endParaRPr lang="en-US" sz="1400" dirty="0"/>
           </a:p>
@@ -9146,7 +9145,7 @@
                 <a:ea typeface="Calibri" pitchFamily="34" charset="-122"/>
                 <a:cs typeface="Calibri" pitchFamily="34" charset="-120"/>
               </a:rPr>
-              <a:t>Django is Python, so it cannot run on a Node back end. I took the requirement to mean "use an ORM rather than writing SQL by hand" and used Prisma. I have written this down in the report rather than quietly ignoring it.</a:t>
+              <a:t>Django's ORM is a Python library, so it cannot run on a Node back end. I read the requirement as "use an ORM rather than writing SQL by hand", and used Prisma. I have documented that reading in the report rather than passing over it silently.</a:t>
             </a:r>
             <a:endParaRPr lang="en-US" sz="1250" dirty="0"/>
           </a:p>
